--- a/SpOC3-Dekompozime-Torso-AlbShkenca2026-SQ.pptx
+++ b/SpOC3-Dekompozime-Torso-AlbShkenca2026-SQ.pptx
@@ -127,7 +127,7 @@
   <p:extLst>
     <p:ext uri="{521415D9-36F7-43E2-AB2F-B90AF26B5E84}">
       <p14:sectionLst xmlns:p14="http://schemas.microsoft.com/office/powerpoint/2010/main">
-        <p14:section name="Kumtesa" id="{ac2b8cbd-e406-8768-e982-e0af831f9b05}">
+        <p14:section name="Kumtesa" id="{1029733d-8089-38b1-7154-46a661a39ddc}">
           <p14:sldIdLst>
             <p14:sldId id="256"/>
             <p14:sldId id="257"/>
@@ -146,7 +146,7 @@
             <p14:sldId id="270"/>
           </p14:sldIdLst>
         </p14:section>
-        <p14:section name="Shtojcë" id="{5f0e003f-e096-7503-cc6c-837ce33b97c3}">
+        <p14:section name="Shtojcë" id="{12897e26-91c0-d4ae-9b9f-1a215a7c38dd}">
           <p14:sldIdLst>
             <p14:sldId id="271"/>
             <p14:sldId id="272"/>
@@ -1616,7 +1616,7 @@
           <a:p>
             <a:r>
               <a:rPr lang="en-US" dirty="0"/>
-              <a:t>Shtojcë, për pyetje rreth operatorëve të kërkimit. Burimet: harness/delta_check.log për saktësinë, harness/speed.log për përshpejtimin (rimatur më 14 tetor: mesatare gjeometrike 1.76×; një ekzekutim i mëparshëm me 1.81× nuk i ruajti rreshtat, prandaj thuaj 1.8×).</a:t>
+              <a:t>Shtojcë, për pyetje rreth operatorëve të kërkimit. Burimet: harness/delta_check.log për saktësinë, harness/speed.log për përshpejtimin (matja e autorit: 1.70× të rrallat, 1.88× të mesmet, 1.89× të dendurat; një rimatje e pavarur në një makinë tjetër dha 1.76×).</a:t>
             </a:r>
             <a:endParaRPr lang="en-US" dirty="0"/>
           </a:p>
@@ -3018,9 +3018,33 @@
           <a:chExt cx="0" cy="0"/>
         </a:xfrm>
       </p:grpSpPr>
-      <p:sp>
-        <p:nvSpPr>
-          <p:cNvPr id="2" name="Text 0"/>
+      <p:pic>
+        <p:nvPicPr>
+          <p:cNvPr id="2" name="Image 0" descr="Universiteti i Prishtinës">    </p:cNvPr>
+          <p:cNvPicPr>
+            <a:picLocks noChangeAspect="1"/>
+          </p:cNvPicPr>
+          <p:nvPr/>
+        </p:nvPicPr>
+        <p:blipFill>
+          <a:blip r:embed="rId1"/>
+          <a:stretch>
+            <a:fillRect/>
+          </a:stretch>
+        </p:blipFill>
+        <p:spPr>
+          <a:xfrm>
+            <a:off x="640080" y="566928"/>
+            <a:ext cx="914400" cy="914400"/>
+          </a:xfrm>
+          <a:prstGeom prst="rect">
+            <a:avLst/>
+          </a:prstGeom>
+        </p:spPr>
+      </p:pic>
+      <p:sp>
+        <p:nvSpPr>
+          <p:cNvPr id="3" name="Text 0"/>
           <p:cNvSpPr txBox="1"/>
           <p:nvPr/>
         </p:nvSpPr>
@@ -3059,7 +3083,7 @@
       </p:sp>
       <p:sp>
         <p:nvSpPr>
-          <p:cNvPr id="3" name="Text 1"/>
+          <p:cNvPr id="4" name="Text 1"/>
           <p:cNvSpPr txBox="1"/>
           <p:nvPr/>
         </p:nvSpPr>
@@ -3141,7 +3165,7 @@
       </p:sp>
       <p:sp>
         <p:nvSpPr>
-          <p:cNvPr id="4" name="Text 2"/>
+          <p:cNvPr id="5" name="Text 2"/>
           <p:cNvSpPr txBox="1"/>
           <p:nvPr/>
         </p:nvSpPr>
@@ -3180,7 +3204,7 @@
       </p:sp>
       <p:sp>
         <p:nvSpPr>
-          <p:cNvPr id="5" name="Text 3"/>
+          <p:cNvPr id="6" name="Text 3"/>
           <p:cNvSpPr txBox="1"/>
           <p:nvPr/>
         </p:nvSpPr>
@@ -3219,7 +3243,7 @@
       </p:sp>
       <p:sp>
         <p:nvSpPr>
-          <p:cNvPr id="6" name="Text 4"/>
+          <p:cNvPr id="7" name="Text 4"/>
           <p:cNvSpPr txBox="1"/>
           <p:nvPr/>
         </p:nvSpPr>
@@ -3258,7 +3282,7 @@
       </p:sp>
       <p:sp>
         <p:nvSpPr>
-          <p:cNvPr id="7" name="Text 5"/>
+          <p:cNvPr id="8" name="Text 5"/>
           <p:cNvSpPr txBox="1"/>
           <p:nvPr/>
         </p:nvSpPr>
@@ -3839,7 +3863,7 @@
                           <a:ea typeface="Calibri" pitchFamily="34" charset="-122"/>
                           <a:cs typeface="Calibri" pitchFamily="34" charset="-120"/>
                         </a:rPr>
-                        <a:t>−9 960</a:t>
+                        <a:t>−9,960</a:t>
                       </a:r>
                       <a:endParaRPr lang="en-US" sz="1250" dirty="0">
                         <a:latin typeface="Calibri" charset="0"/>
@@ -4253,7 +4277,7 @@
                           <a:ea typeface="Calibri" pitchFamily="34" charset="-122"/>
                           <a:cs typeface="Calibri" pitchFamily="34" charset="-120"/>
                         </a:rPr>
-                        <a:t>−2 515</a:t>
+                        <a:t>−2,515</a:t>
                       </a:r>
                       <a:endParaRPr lang="en-US" sz="1250" dirty="0">
                         <a:latin typeface="Calibri" charset="0"/>
@@ -4697,7 +4721,7 @@
                           <a:ea typeface="Calibri" pitchFamily="34" charset="-122"/>
                           <a:cs typeface="Calibri" pitchFamily="34" charset="-120"/>
                         </a:rPr>
-                        <a:t>−61 095</a:t>
+                        <a:t>−61,095</a:t>
                       </a:r>
                       <a:endParaRPr lang="en-US" sz="1250" dirty="0">
                         <a:latin typeface="Calibri" charset="0"/>
@@ -4904,7 +4928,7 @@
                           <a:ea typeface="Calibri" pitchFamily="34" charset="-122"/>
                           <a:cs typeface="Calibri" pitchFamily="34" charset="-120"/>
                         </a:rPr>
-                        <a:t>+2 128</a:t>
+                        <a:t>+2,128</a:t>
                       </a:r>
                       <a:endParaRPr lang="en-US" sz="1250" dirty="0">
                         <a:latin typeface="Calibri" charset="0"/>
@@ -5129,7 +5153,7 @@
                           <a:ea typeface="Calibri" pitchFamily="34" charset="-122"/>
                           <a:cs typeface="Calibri" pitchFamily="34" charset="-120"/>
                         </a:rPr>
-                        <a:t>−31 077</a:t>
+                        <a:t>−31,077</a:t>
                       </a:r>
                       <a:endParaRPr lang="en-US" sz="1250" dirty="0">
                         <a:latin typeface="Calibri" charset="0"/>
@@ -5348,7 +5372,7 @@
                           <a:ea typeface="Calibri" pitchFamily="34" charset="-122"/>
                           <a:cs typeface="Calibri" pitchFamily="34" charset="-120"/>
                         </a:rPr>
-                        <a:t>+425 344</a:t>
+                        <a:t>+425,344</a:t>
                       </a:r>
                       <a:endParaRPr lang="en-US" sz="1250" dirty="0">
                         <a:latin typeface="Calibri" charset="0"/>
@@ -5555,7 +5579,7 @@
                           <a:ea typeface="Calibri" pitchFamily="34" charset="-122"/>
                           <a:cs typeface="Calibri" pitchFamily="34" charset="-120"/>
                         </a:rPr>
-                        <a:t>+233 811</a:t>
+                        <a:t>+233,811</a:t>
                       </a:r>
                       <a:endParaRPr lang="en-US" sz="1250" dirty="0">
                         <a:latin typeface="Calibri" charset="0"/>
@@ -5780,7 +5804,7 @@
                           <a:ea typeface="Calibri" pitchFamily="34" charset="-122"/>
                           <a:cs typeface="Calibri" pitchFamily="34" charset="-120"/>
                         </a:rPr>
-                        <a:t>+121 598</a:t>
+                        <a:t>+121,598</a:t>
                       </a:r>
                       <a:endParaRPr lang="en-US" sz="1250" dirty="0">
                         <a:latin typeface="Calibri" charset="0"/>
@@ -5895,7 +5919,7 @@
                 <a:ea typeface="Calibri" pitchFamily="34" charset="-122"/>
                 <a:cs typeface="Calibri" pitchFamily="34" charset="-120"/>
               </a:rPr>
-              <a:t>Hendeku = seed-i më i dobët i fituesit minus seed-i më i mirë i të dytit. I vendosur = hendek pozitiv dhe i njëjti fitues sipas medianës: çdo seed i fituesit mposht çdo seed të çdo rivali (test i saktë rangjesh, p = 0,05 me tre seed-a). * synth-3: 71 HV mbi pikën e vet të nisjes.</a:t>
+              <a:t>Hendeku = seed-i më i dobët i fituesit minus seed-i më i mirë i të dytit. I vendosur = hendek pozitiv dhe i njëjti fitues sipas medianës: çdo seed i fituesit mposht çdo seed të çdo rivali (test i saktë rangjesh, p = 0.05 me tre seed-a). * synth-3: 71 HV mbi pikën e vet të nisjes.</a:t>
             </a:r>
             <a:endParaRPr lang="en-US" sz="1050" dirty="0"/>
           </a:p>
@@ -6638,7 +6662,7 @@
                 <a:ea typeface="Calibri" pitchFamily="34" charset="-122"/>
                 <a:cs typeface="Calibri" pitchFamily="34" charset="-120"/>
               </a:rPr>
-              <a:t>1 810</a:t>
+              <a:t>1,810</a:t>
             </a:r>
             <a:endParaRPr lang="en-US" sz="1000" dirty="0"/>
           </a:p>
@@ -6677,7 +6701,7 @@
                 <a:ea typeface="Calibri" pitchFamily="34" charset="-122"/>
                 <a:cs typeface="Calibri" pitchFamily="34" charset="-120"/>
               </a:rPr>
-              <a:t>1 815</a:t>
+              <a:t>1,815</a:t>
             </a:r>
             <a:endParaRPr lang="en-US" sz="1000" dirty="0"/>
           </a:p>
@@ -6716,7 +6740,7 @@
                 <a:ea typeface="Calibri" pitchFamily="34" charset="-122"/>
                 <a:cs typeface="Calibri" pitchFamily="34" charset="-120"/>
               </a:rPr>
-              <a:t>1 820</a:t>
+              <a:t>1,820</a:t>
             </a:r>
             <a:endParaRPr lang="en-US" sz="1000" dirty="0"/>
           </a:p>
@@ -6755,7 +6779,7 @@
                 <a:ea typeface="Calibri" pitchFamily="34" charset="-122"/>
                 <a:cs typeface="Calibri" pitchFamily="34" charset="-120"/>
               </a:rPr>
-              <a:t>1 825</a:t>
+              <a:t>1,825</a:t>
             </a:r>
             <a:endParaRPr lang="en-US" sz="1000" dirty="0"/>
           </a:p>
@@ -6794,7 +6818,7 @@
                 <a:ea typeface="Calibri" pitchFamily="34" charset="-122"/>
                 <a:cs typeface="Calibri" pitchFamily="34" charset="-120"/>
               </a:rPr>
-              <a:t>hipervolumi ×1 000</a:t>
+              <a:t>hipervolumi ×1,000</a:t>
             </a:r>
             <a:endParaRPr lang="en-US" sz="1000" dirty="0"/>
           </a:p>
@@ -7274,7 +7298,7 @@
                 <a:ea typeface="Calibri" pitchFamily="34" charset="-122"/>
                 <a:cs typeface="Calibri" pitchFamily="34" charset="-120"/>
               </a:rPr>
-              <a:t>kontrolli i rimostruar: ±21 519 HV</a:t>
+              <a:t>kontrolli i rimostruar: ±21,519 HV</a:t>
             </a:r>
             <a:endParaRPr lang="en-US" sz="1050" dirty="0"/>
           </a:p>
@@ -7614,7 +7638,7 @@
                 <a:ea typeface="Calibri" pitchFamily="34" charset="-122"/>
                 <a:cs typeface="Calibri" pitchFamily="34" charset="-120"/>
               </a:rPr>
-              <a:t>+9 562  ·  0,4×</a:t>
+              <a:t>+9,562  ·  0.4×</a:t>
             </a:r>
             <a:endParaRPr lang="en-US" sz="1200" dirty="0"/>
           </a:p>
@@ -7775,7 +7799,7 @@
                 <a:ea typeface="Calibri" pitchFamily="34" charset="-122"/>
                 <a:cs typeface="Calibri" pitchFamily="34" charset="-120"/>
               </a:rPr>
-              <a:t>+19 623  ·  0,9×</a:t>
+              <a:t>+19,623  ·  0.9×</a:t>
             </a:r>
             <a:endParaRPr lang="en-US" sz="1200" dirty="0"/>
           </a:p>
@@ -7936,7 +7960,7 @@
                 <a:ea typeface="Calibri" pitchFamily="34" charset="-122"/>
                 <a:cs typeface="Calibri" pitchFamily="34" charset="-120"/>
               </a:rPr>
-              <a:t>+42 468  ·  2,0×</a:t>
+              <a:t>+42,468  ·  2.0×</a:t>
             </a:r>
             <a:endParaRPr lang="en-US" sz="1200" dirty="0"/>
           </a:p>
@@ -8095,7 +8119,7 @@
                 <a:ea typeface="Calibri" pitchFamily="34" charset="-122"/>
                 <a:cs typeface="Calibri" pitchFamily="34" charset="-120"/>
               </a:rPr>
-              <a:t>+341 263  ·  15,9×</a:t>
+              <a:t>+341,263  ·  15.9×</a:t>
             </a:r>
             <a:endParaRPr lang="en-US" sz="1200" dirty="0"/>
           </a:p>
@@ -8293,7 +8317,7 @@
                 <a:ea typeface="Century Schoolbook" pitchFamily="34" charset="-122"/>
                 <a:cs typeface="Century Schoolbook" pitchFamily="34" charset="-120"/>
               </a:rPr>
-              <a:t>+343 623 HV</a:t>
+              <a:t>+343,623 HV</a:t>
             </a:r>
             <a:endParaRPr lang="en-US" sz="2500" dirty="0"/>
           </a:p>
@@ -8371,7 +8395,7 @@
                 <a:ea typeface="Century Schoolbook" pitchFamily="34" charset="-122"/>
                 <a:cs typeface="Century Schoolbook" pitchFamily="34" charset="-120"/>
               </a:rPr>
-              <a:t>−2 360 HV</a:t>
+              <a:t>−2,360 HV</a:t>
             </a:r>
             <a:endParaRPr lang="en-US" sz="2500" dirty="0"/>
           </a:p>
@@ -8750,7 +8774,7 @@
                 <a:ea typeface="Calibri" pitchFamily="34" charset="-122"/>
                 <a:cs typeface="Calibri" pitchFamily="34" charset="-120"/>
               </a:rPr>
-              <a:t>kontrolli i rimostruar  ±21 519 HV</a:t>
+              <a:t>kontrolli i rimostruar  ±21,519 HV</a:t>
             </a:r>
             <a:endParaRPr lang="en-US" sz="1050" dirty="0"/>
           </a:p>
@@ -10544,7 +10568,7 @@
                 <a:ea typeface="Century Schoolbook" pitchFamily="34" charset="-122"/>
                 <a:cs typeface="Century Schoolbook" pitchFamily="34" charset="-120"/>
               </a:rPr>
-              <a:t>0,23%</a:t>
+              <a:t>0.23%</a:t>
             </a:r>
             <a:endParaRPr lang="en-US" sz="5400" dirty="0"/>
           </a:p>
@@ -10839,7 +10863,7 @@
                 <a:ea typeface="Calibri" pitchFamily="34" charset="-122"/>
                 <a:cs typeface="Calibri" pitchFamily="34" charset="-120"/>
               </a:rPr>
-              <a:t>26,4M</a:t>
+              <a:t>26.4M</a:t>
             </a:r>
             <a:endParaRPr lang="en-US" sz="1000" dirty="0"/>
           </a:p>
@@ -10901,7 +10925,7 @@
                 <a:ea typeface="Calibri" pitchFamily="34" charset="-122"/>
                 <a:cs typeface="Calibri" pitchFamily="34" charset="-120"/>
               </a:rPr>
-              <a:t>26,5M</a:t>
+              <a:t>26.5M</a:t>
             </a:r>
             <a:endParaRPr lang="en-US" sz="1000" dirty="0"/>
           </a:p>
@@ -10963,7 +10987,7 @@
                 <a:ea typeface="Calibri" pitchFamily="34" charset="-122"/>
                 <a:cs typeface="Calibri" pitchFamily="34" charset="-120"/>
               </a:rPr>
-              <a:t>26,6M</a:t>
+              <a:t>26.6M</a:t>
             </a:r>
             <a:endParaRPr lang="en-US" sz="1000" dirty="0"/>
           </a:p>
@@ -11025,7 +11049,7 @@
                 <a:ea typeface="Calibri" pitchFamily="34" charset="-122"/>
                 <a:cs typeface="Calibri" pitchFamily="34" charset="-120"/>
               </a:rPr>
-              <a:t>26,7M</a:t>
+              <a:t>26.7M</a:t>
             </a:r>
             <a:endParaRPr lang="en-US" sz="1000" dirty="0"/>
           </a:p>
@@ -11087,7 +11111,7 @@
                 <a:ea typeface="Calibri" pitchFamily="34" charset="-122"/>
                 <a:cs typeface="Calibri" pitchFamily="34" charset="-120"/>
               </a:rPr>
-              <a:t>26,8M</a:t>
+              <a:t>26.8M</a:t>
             </a:r>
             <a:endParaRPr lang="en-US" sz="1000" dirty="0"/>
           </a:p>
@@ -11165,7 +11189,7 @@
                 <a:ea typeface="Calibri" pitchFamily="34" charset="-122"/>
                 <a:cs typeface="Calibri" pitchFamily="34" charset="-120"/>
               </a:rPr>
-              <a:t>1 200 s</a:t>
+              <a:t>1,200 s</a:t>
             </a:r>
             <a:endParaRPr lang="en-US" sz="1050" dirty="0"/>
           </a:p>
@@ -11204,7 +11228,7 @@
                 <a:ea typeface="Calibri" pitchFamily="34" charset="-122"/>
                 <a:cs typeface="Calibri" pitchFamily="34" charset="-120"/>
               </a:rPr>
-              <a:t>3 600 s</a:t>
+              <a:t>3,600 s</a:t>
             </a:r>
             <a:endParaRPr lang="en-US" sz="1050" dirty="0"/>
           </a:p>
@@ -11243,7 +11267,7 @@
                 <a:ea typeface="Calibri" pitchFamily="34" charset="-122"/>
                 <a:cs typeface="Calibri" pitchFamily="34" charset="-120"/>
               </a:rPr>
-              <a:t>12 000 s</a:t>
+              <a:t>12,000 s</a:t>
             </a:r>
             <a:endParaRPr lang="en-US" sz="1050" dirty="0"/>
           </a:p>
@@ -11887,7 +11911,7 @@
                 <a:ea typeface="Calibri" pitchFamily="34" charset="-122"/>
                 <a:cs typeface="Calibri" pitchFamily="34" charset="-120"/>
               </a:rPr>
-              <a:t>epërsia ≥ 269 607 HV</a:t>
+              <a:t>epërsia ≥ 269,607 HV</a:t>
             </a:r>
             <a:endParaRPr lang="en-US" sz="1200" dirty="0"/>
           </a:p>
@@ -11943,7 +11967,7 @@
                 <a:ea typeface="Calibri" pitchFamily="34" charset="-122"/>
                 <a:cs typeface="Calibri" pitchFamily="34" charset="-120"/>
               </a:rPr>
-              <a:t>+33 043 HV mbi 10×</a:t>
+              <a:t>+33,043 HV mbi 10×</a:t>
             </a:r>
             <a:endParaRPr lang="en-US" sz="1150" dirty="0"/>
           </a:p>
@@ -11960,7 +11984,7 @@
                 <a:ea typeface="Calibri" pitchFamily="34" charset="-122"/>
                 <a:cs typeface="Calibri" pitchFamily="34" charset="-120"/>
               </a:rPr>
-              <a:t>≈ 1,5× rimostrimi i kontrollit</a:t>
+              <a:t>≈ 1.5× rimostrimi i kontrollit</a:t>
             </a:r>
             <a:endParaRPr lang="en-US" sz="1150" dirty="0"/>
           </a:p>
@@ -12700,7 +12724,7 @@
                 <a:ea typeface="Calibri" pitchFamily="34" charset="-122"/>
                 <a:cs typeface="Calibri" pitchFamily="34" charset="-120"/>
               </a:rPr>
-              <a:t>Dy sesione, jo dy seed-a. Totali ynë i dhjetë instancave lëvizi 21 519 HV.</a:t>
+              <a:t>Dy sesione, jo dy seed-a. Totali ynë i dhjetë instancave lëvizi 21,519 HV.</a:t>
             </a:r>
             <a:endParaRPr lang="en-US" sz="1400" dirty="0"/>
           </a:p>
@@ -13072,9 +13096,33 @@
           <a:chExt cx="0" cy="0"/>
         </a:xfrm>
       </p:grpSpPr>
-      <p:sp>
-        <p:nvSpPr>
-          <p:cNvPr id="2" name="Text 0"/>
+      <p:pic>
+        <p:nvPicPr>
+          <p:cNvPr id="2" name="Image 0" descr="Universiteti i Prishtinës">    </p:cNvPr>
+          <p:cNvPicPr>
+            <a:picLocks noChangeAspect="1"/>
+          </p:cNvPicPr>
+          <p:nvPr/>
+        </p:nvPicPr>
+        <p:blipFill>
+          <a:blip r:embed="rId1"/>
+          <a:stretch>
+            <a:fillRect/>
+          </a:stretch>
+        </p:blipFill>
+        <p:spPr>
+          <a:xfrm>
+            <a:off x="640080" y="274320"/>
+            <a:ext cx="713232" cy="713232"/>
+          </a:xfrm>
+          <a:prstGeom prst="rect">
+            <a:avLst/>
+          </a:prstGeom>
+        </p:spPr>
+      </p:pic>
+      <p:sp>
+        <p:nvSpPr>
+          <p:cNvPr id="3" name="Text 0"/>
           <p:cNvSpPr txBox="1"/>
           <p:nvPr/>
         </p:nvSpPr>
@@ -13113,7 +13161,7 @@
       </p:sp>
       <p:sp>
         <p:nvSpPr>
-          <p:cNvPr id="3" name="Text 1"/>
+          <p:cNvPr id="4" name="Text 1"/>
           <p:cNvSpPr txBox="1"/>
           <p:nvPr/>
         </p:nvSpPr>
@@ -13152,7 +13200,7 @@
       </p:sp>
       <p:sp>
         <p:nvSpPr>
-          <p:cNvPr id="4" name="Text 2"/>
+          <p:cNvPr id="5" name="Text 2"/>
           <p:cNvSpPr txBox="1"/>
           <p:nvPr/>
         </p:nvSpPr>
@@ -13191,7 +13239,7 @@
       </p:sp>
       <p:sp>
         <p:nvSpPr>
-          <p:cNvPr id="5" name="Text 3"/>
+          <p:cNvPr id="6" name="Text 3"/>
           <p:cNvSpPr txBox="1"/>
           <p:nvPr/>
         </p:nvSpPr>
@@ -13230,7 +13278,7 @@
       </p:sp>
       <p:sp>
         <p:nvSpPr>
-          <p:cNvPr id="6" name="Text 4"/>
+          <p:cNvPr id="7" name="Text 4"/>
           <p:cNvSpPr txBox="1"/>
           <p:nvPr/>
         </p:nvSpPr>
@@ -13269,7 +13317,7 @@
       </p:sp>
       <p:sp>
         <p:nvSpPr>
-          <p:cNvPr id="7" name="Text 5"/>
+          <p:cNvPr id="8" name="Text 5"/>
           <p:cNvSpPr txBox="1"/>
           <p:nvPr/>
         </p:nvSpPr>
@@ -13300,7 +13348,7 @@
                 <a:ea typeface="Century Schoolbook" pitchFamily="34" charset="-122"/>
                 <a:cs typeface="Century Schoolbook" pitchFamily="34" charset="-120"/>
               </a:rPr>
-              <a:t>15,9×</a:t>
+              <a:t>15.9×</a:t>
             </a:r>
             <a:endParaRPr lang="en-US" sz="1900" dirty="0"/>
           </a:p>
@@ -13308,7 +13356,7 @@
       </p:sp>
       <p:sp>
         <p:nvSpPr>
-          <p:cNvPr id="8" name="Text 6"/>
+          <p:cNvPr id="9" name="Text 6"/>
           <p:cNvSpPr txBox="1"/>
           <p:nvPr/>
         </p:nvSpPr>
@@ -13339,7 +13387,7 @@
                 <a:ea typeface="Calibri" pitchFamily="34" charset="-122"/>
                 <a:cs typeface="Calibri" pitchFamily="34" charset="-120"/>
               </a:rPr>
-              <a:t>ndërtimi kundër rimostrimit të kontrollit; variantet e kërkimit 0,4–2,0×</a:t>
+              <a:t>ndërtimi kundër rimostrimit të kontrollit; variantet e kërkimit 0.4–2.0×</a:t>
             </a:r>
             <a:endParaRPr lang="en-US" sz="1050" dirty="0"/>
           </a:p>
@@ -13347,7 +13395,7 @@
       </p:sp>
       <p:sp>
         <p:nvSpPr>
-          <p:cNvPr id="9" name="Text 7"/>
+          <p:cNvPr id="10" name="Text 7"/>
           <p:cNvSpPr txBox="1"/>
           <p:nvPr/>
         </p:nvSpPr>
@@ -13378,7 +13426,7 @@
                 <a:ea typeface="Century Schoolbook" pitchFamily="34" charset="-122"/>
                 <a:cs typeface="Century Schoolbook" pitchFamily="34" charset="-120"/>
               </a:rPr>
-              <a:t>21 519 HV</a:t>
+              <a:t>21,519 HV</a:t>
             </a:r>
             <a:endParaRPr lang="en-US" sz="1900" dirty="0"/>
           </a:p>
@@ -13386,7 +13434,7 @@
       </p:sp>
       <p:sp>
         <p:nvSpPr>
-          <p:cNvPr id="10" name="Text 8"/>
+          <p:cNvPr id="11" name="Text 8"/>
           <p:cNvSpPr txBox="1"/>
           <p:nvPr/>
         </p:nvSpPr>
@@ -13417,7 +13465,7 @@
                 <a:ea typeface="Calibri" pitchFamily="34" charset="-122"/>
                 <a:cs typeface="Calibri" pitchFamily="34" charset="-120"/>
               </a:rPr>
-              <a:t>zhvendosja mes sesioneve e totalit të dhjetë instancave (p ≈ 0,05)</a:t>
+              <a:t>zhvendosja mes sesioneve e totalit të dhjetë instancave (p ≈ 0.05)</a:t>
             </a:r>
             <a:endParaRPr lang="en-US" sz="1050" dirty="0"/>
           </a:p>
@@ -13425,7 +13473,7 @@
       </p:sp>
       <p:sp>
         <p:nvSpPr>
-          <p:cNvPr id="11" name="Text 9"/>
+          <p:cNvPr id="12" name="Text 9"/>
           <p:cNvSpPr txBox="1"/>
           <p:nvPr/>
         </p:nvSpPr>
@@ -13456,7 +13504,7 @@
                 <a:ea typeface="Century Schoolbook" pitchFamily="34" charset="-122"/>
                 <a:cs typeface="Century Schoolbook" pitchFamily="34" charset="-120"/>
               </a:rPr>
-              <a:t>0,23%</a:t>
+              <a:t>0.23%</a:t>
             </a:r>
             <a:endParaRPr lang="en-US" sz="1900" dirty="0"/>
           </a:p>
@@ -13464,7 +13512,7 @@
       </p:sp>
       <p:sp>
         <p:nvSpPr>
-          <p:cNvPr id="12" name="Text 10"/>
+          <p:cNvPr id="13" name="Text 10"/>
           <p:cNvSpPr txBox="1"/>
           <p:nvPr/>
         </p:nvSpPr>
@@ -13503,7 +13551,7 @@
       </p:sp>
       <p:sp>
         <p:nvSpPr>
-          <p:cNvPr id="13" name="Text 11"/>
+          <p:cNvPr id="14" name="Text 11"/>
           <p:cNvSpPr txBox="1"/>
           <p:nvPr/>
         </p:nvSpPr>
@@ -13534,7 +13582,7 @@
                 <a:ea typeface="Century Schoolbook" pitchFamily="34" charset="-122"/>
                 <a:cs typeface="Century Schoolbook" pitchFamily="34" charset="-120"/>
               </a:rPr>
-              <a:t>+33 043 HV</a:t>
+              <a:t>+33,043 HV</a:t>
             </a:r>
             <a:endParaRPr lang="en-US" sz="1900" dirty="0"/>
           </a:p>
@@ -13542,7 +13590,7 @@
       </p:sp>
       <p:sp>
         <p:nvSpPr>
-          <p:cNvPr id="14" name="Text 12"/>
+          <p:cNvPr id="15" name="Text 12"/>
           <p:cNvSpPr txBox="1"/>
           <p:nvPr/>
         </p:nvSpPr>
@@ -13573,7 +13621,7 @@
                 <a:ea typeface="Calibri" pitchFamily="34" charset="-122"/>
                 <a:cs typeface="Calibri" pitchFamily="34" charset="-120"/>
               </a:rPr>
-              <a:t>çfarë i blen kërkimit dhjetëfishi i buxhetit, kundër një epërsie ≥ 269 607</a:t>
+              <a:t>çfarë i blen kërkimit dhjetëfishi i buxhetit, kundër një epërsie ≥ 269,607</a:t>
             </a:r>
             <a:endParaRPr lang="en-US" sz="1050" dirty="0"/>
           </a:p>
@@ -13581,7 +13629,7 @@
       </p:sp>
       <p:sp>
         <p:nvSpPr>
-          <p:cNvPr id="15" name="Text 13"/>
+          <p:cNvPr id="16" name="Text 13"/>
           <p:cNvSpPr txBox="1"/>
           <p:nvPr/>
         </p:nvSpPr>
@@ -13612,7 +13660,7 @@
                 <a:ea typeface="Century Schoolbook" pitchFamily="34" charset="-122"/>
                 <a:cs typeface="Century Schoolbook" pitchFamily="34" charset="-120"/>
               </a:rPr>
-              <a:t>0,63%</a:t>
+              <a:t>0.63%</a:t>
             </a:r>
             <a:endParaRPr lang="en-US" sz="1900" dirty="0"/>
           </a:p>
@@ -13620,7 +13668,7 @@
       </p:sp>
       <p:sp>
         <p:nvSpPr>
-          <p:cNvPr id="16" name="Text 14"/>
+          <p:cNvPr id="17" name="Text 14"/>
           <p:cNvSpPr txBox="1"/>
           <p:nvPr/>
         </p:nvSpPr>
@@ -13659,7 +13707,7 @@
       </p:sp>
       <p:sp>
         <p:nvSpPr>
-          <p:cNvPr id="17" name="Text 15"/>
+          <p:cNvPr id="18" name="Text 15"/>
           <p:cNvSpPr txBox="1"/>
           <p:nvPr/>
         </p:nvSpPr>
@@ -13698,7 +13746,7 @@
       </p:sp>
       <p:sp>
         <p:nvSpPr>
-          <p:cNvPr id="18" name="Text 16"/>
+          <p:cNvPr id="19" name="Text 16"/>
           <p:cNvSpPr txBox="1"/>
           <p:nvPr/>
         </p:nvSpPr>
@@ -13953,7 +14001,7 @@
                 <a:ea typeface="Calibri" pitchFamily="34" charset="-122"/>
                 <a:cs typeface="Calibri" pitchFamily="34" charset="-120"/>
               </a:rPr>
-              <a:t>hill_climbing.py i zgjidhte gjerësitë e synuara me një sondë min-degree pavarësisht nisjes së kërkuar, prandaj --start random merrte fshehtas një zgjidhje min-degree: 1 607 522 HV në medium-graph për një ekzekutim pa asnjë lëvizje të pranuar.</a:t>
+              <a:t>hill_climbing.py i zgjidhte gjerësitë e synuara me një sondë min-degree pavarësisht nisjes së kërkuar, prandaj --start random merrte fshehtas një zgjidhje min-degree: 1,607,522 HV në medium-graph për një ekzekutim pa asnjë lëvizje të pranuar.</a:t>
             </a:r>
             <a:endParaRPr lang="en-US" sz="1150" dirty="0"/>
           </a:p>
@@ -14328,7 +14376,7 @@
                 <a:ea typeface="Calibri" pitchFamily="34" charset="-122"/>
                 <a:cs typeface="Calibri" pitchFamily="34" charset="-120"/>
               </a:rPr>
-              <a:t>Vlerësuesi CUDA i përfshirë indeksonte një varg B×N×N me një zhvendosje int, që mbështillet pas 2³¹ në n = 2 426, fija 365 nga 1 024.</a:t>
+              <a:t>Vlerësuesi CUDA i përfshirë indeksonte një varg B×N×N me një zhvendosje int, që mbështillet pas 2³¹ në n = 2,426, fija 365 nga 1,024.</a:t>
             </a:r>
             <a:endParaRPr lang="en-US" sz="1150" dirty="0"/>
           </a:p>
@@ -14367,7 +14415,7 @@
                 <a:ea typeface="Calibri" pitchFamily="34" charset="-122"/>
                 <a:cs typeface="Calibri" pitchFamily="34" charset="-120"/>
               </a:rPr>
-              <a:t>U kap sepse çdo ekzekutim me n = 2 426 dështonte herët me një qasje të paligjshme në memorie; një ndryshim tipi e rregulloi.</a:t>
+              <a:t>U kap sepse çdo ekzekutim me n = 2,426 dështonte herët me një qasje të paligjshme në memorie; një ndryshim tipi e rregulloi.</a:t>
             </a:r>
             <a:endParaRPr lang="en-US" sz="1150" dirty="0"/>
           </a:p>
@@ -14507,7 +14555,7 @@
                 <a:ea typeface="Calibri" pitchFamily="34" charset="-122"/>
                 <a:cs typeface="Calibri" pitchFamily="34" charset="-120"/>
               </a:rPr>
-              <a:t>Një prag prej 7 881 HV, i marrë nga instanca më e keqe e Hill Climbing, gjykoi rreshtat e çdo metode, ndërsa seed-at e vetë Team HRI në medium-graph shpërndahen 80 376 HV.</a:t>
+              <a:t>Një prag prej 7,881 HV, i marrë nga instanca më e keqe e Hill Climbing, gjykoi rreshtat e çdo metode, ndërsa seed-at e vetë Team HRI në medium-graph shpërndahen 80,376 HV.</a:t>
             </a:r>
             <a:endParaRPr lang="en-US" sz="1150" dirty="0"/>
           </a:p>
@@ -14818,7 +14866,7 @@
                 <a:ea typeface="Calibri" pitchFamily="34" charset="-122"/>
                 <a:cs typeface="Calibri" pitchFamily="34" charset="-120"/>
               </a:rPr>
-              <a:t>1 200 s kohë reale për ekzekutim, tre seed-a, dhjetë instanca. Katër ekzekutime ranë jashtë 1 150–1 400 s pas ngecjeve të makinës; asnjë prej tyre nuk e jep vlerën më të mirë nga tre.</a:t>
+              <a:t>1,200 s kohë reale për ekzekutim, tre seed-a, dhjetë instanca. Katër ekzekutime ranë jashtë 1,150–1,400 s pas ngecjeve të makinës; asnjë prej tyre nuk e jep vlerën më të mirë nga tre.</a:t>
             </a:r>
             <a:endParaRPr lang="en-US" sz="1300" dirty="0"/>
           </a:p>
@@ -14919,7 +14967,7 @@
                 <a:ea typeface="Calibri" pitchFamily="34" charset="-122"/>
                 <a:cs typeface="Calibri" pitchFamily="34" charset="-120"/>
               </a:rPr>
-              <a:t>fcmaes, Team HRI dhe Hill Climbing në një bërthamë CPU të fiksuar secili. Spacekangaroos me kodin e vet CUDA në një Kaggle T4, batch 1 024 (512 në n = 2 426).</a:t>
+              <a:t>fcmaes, Team HRI dhe Hill Climbing në një bërthamë CPU të fiksuar secili. Spacekangaroos me kodin e vet CUDA në një Kaggle T4, batch 1,024 (512 në n = 2,426).</a:t>
             </a:r>
             <a:endParaRPr lang="en-US" sz="1300" dirty="0"/>
           </a:p>
@@ -15222,7 +15270,7 @@
                 <a:ea typeface="Calibri" pitchFamily="34" charset="-122"/>
                 <a:cs typeface="Calibri" pitchFamily="34" charset="-120"/>
               </a:rPr>
-              <a:t>Çdo përgjigje rivlerësohet me esa_eval.py. Kodi i vlerësimit i ESA-s, i ekzekutuar pranë tij, përputhet në të dhjetë instancat: 220 renditje, 2 000 hipervolume, kolona min-degree ×8. ESA e vlerëson me gjerësi 501 një vektor mbi kufi; ne e hedhim dorëzimin.</a:t>
+              <a:t>Çdo përgjigje rivlerësohet me esa_eval.py. Kodi i vlerësimit i ESA-s, i ekzekutuar pranë tij, përputhet në të dhjetë instancat: 220 renditje, 2,000 hipervolume, kolona min-degree ×8. ESA e vlerëson me gjerësi 501 një vektor mbi kufi; ne e hedhim dorëzimin.</a:t>
             </a:r>
             <a:endParaRPr lang="en-US" sz="1300" dirty="0"/>
           </a:p>
@@ -16516,7 +16564,7 @@
                           <a:ea typeface="Calibri" pitchFamily="34" charset="-122"/>
                           <a:cs typeface="Calibri" pitchFamily="34" charset="-120"/>
                         </a:rPr>
-                        <a:t>1 807,7</a:t>
+                        <a:t>1,807.7</a:t>
                       </a:r>
                       <a:endParaRPr lang="en-US" sz="1050" dirty="0">
                         <a:latin typeface="Calibri" charset="0"/>
@@ -16557,7 +16605,7 @@
                           <a:ea typeface="Calibri" pitchFamily="34" charset="-122"/>
                           <a:cs typeface="Calibri" pitchFamily="34" charset="-120"/>
                         </a:rPr>
-                        <a:t>1 808,0</a:t>
+                        <a:t>1,808.0</a:t>
                       </a:r>
                       <a:endParaRPr lang="en-US" sz="1050" dirty="0">
                         <a:latin typeface="Calibri" charset="0"/>
@@ -16598,7 +16646,7 @@
                           <a:ea typeface="Calibri" pitchFamily="34" charset="-122"/>
                           <a:cs typeface="Calibri" pitchFamily="34" charset="-120"/>
                         </a:rPr>
-                        <a:t>1 807,1</a:t>
+                        <a:t>1,807.1</a:t>
                       </a:r>
                       <a:endParaRPr lang="en-US" sz="1050" dirty="0">
                         <a:latin typeface="Calibri" charset="0"/>
@@ -16639,7 +16687,7 @@
                           <a:ea typeface="Calibri" pitchFamily="34" charset="-122"/>
                           <a:cs typeface="Calibri" pitchFamily="34" charset="-120"/>
                         </a:rPr>
-                        <a:t>1 820,9</a:t>
+                        <a:t>1,820.9</a:t>
                       </a:r>
                       <a:endParaRPr lang="en-US" sz="1050" dirty="0">
                         <a:latin typeface="Calibri" charset="0"/>
@@ -16680,7 +16728,7 @@
                           <a:ea typeface="Calibri" pitchFamily="34" charset="-122"/>
                           <a:cs typeface="Calibri" pitchFamily="34" charset="-120"/>
                         </a:rPr>
-                        <a:t>1 819,5</a:t>
+                        <a:t>1,819.5</a:t>
                       </a:r>
                       <a:endParaRPr lang="en-US" sz="1050" dirty="0">
                         <a:latin typeface="Calibri" charset="0"/>
@@ -16721,7 +16769,7 @@
                           <a:ea typeface="Calibri" pitchFamily="34" charset="-122"/>
                           <a:cs typeface="Calibri" pitchFamily="34" charset="-120"/>
                         </a:rPr>
-                        <a:t>1 818,9</a:t>
+                        <a:t>1,818.9</a:t>
                       </a:r>
                       <a:endParaRPr lang="en-US" sz="1050" dirty="0">
                         <a:latin typeface="Calibri" charset="0"/>
@@ -16762,7 +16810,7 @@
                           <a:ea typeface="Calibri" pitchFamily="34" charset="-122"/>
                           <a:cs typeface="Calibri" pitchFamily="34" charset="-120"/>
                         </a:rPr>
-                        <a:t>1 827,5</a:t>
+                        <a:t>1,827.5</a:t>
                       </a:r>
                       <a:endParaRPr lang="en-US" sz="1050" dirty="0">
                         <a:latin typeface="Calibri" charset="0"/>
@@ -16803,7 +16851,7 @@
                           <a:ea typeface="Calibri" pitchFamily="34" charset="-122"/>
                           <a:cs typeface="Calibri" pitchFamily="34" charset="-120"/>
                         </a:rPr>
-                        <a:t>1 812,2</a:t>
+                        <a:t>1,812.2</a:t>
                       </a:r>
                       <a:endParaRPr lang="en-US" sz="1050" dirty="0">
                         <a:latin typeface="Calibri" charset="0"/>
@@ -16844,7 +16892,7 @@
                           <a:ea typeface="Calibri" pitchFamily="34" charset="-122"/>
                           <a:cs typeface="Calibri" pitchFamily="34" charset="-120"/>
                         </a:rPr>
-                        <a:t>1 810,9</a:t>
+                        <a:t>1,810.9</a:t>
                       </a:r>
                       <a:endParaRPr lang="en-US" sz="1050" dirty="0">
                         <a:latin typeface="Calibri" charset="0"/>
@@ -16885,7 +16933,7 @@
                           <a:ea typeface="Calibri" pitchFamily="34" charset="-122"/>
                           <a:cs typeface="Calibri" pitchFamily="34" charset="-120"/>
                         </a:rPr>
-                        <a:t>1 814,5</a:t>
+                        <a:t>1,814.5</a:t>
                       </a:r>
                       <a:endParaRPr lang="en-US" sz="1050" dirty="0">
                         <a:latin typeface="Calibri" charset="0"/>
@@ -16926,7 +16974,7 @@
                           <a:ea typeface="Calibri" pitchFamily="34" charset="-122"/>
                           <a:cs typeface="Calibri" pitchFamily="34" charset="-120"/>
                         </a:rPr>
-                        <a:t>1 815,4</a:t>
+                        <a:t>1,815.4</a:t>
                       </a:r>
                       <a:endParaRPr lang="en-US" sz="1050" dirty="0">
                         <a:latin typeface="Calibri" charset="0"/>
@@ -16967,7 +17015,7 @@
                           <a:ea typeface="Calibri" pitchFamily="34" charset="-122"/>
                           <a:cs typeface="Calibri" pitchFamily="34" charset="-120"/>
                         </a:rPr>
-                        <a:t>1 814,5</a:t>
+                        <a:t>1,814.5</a:t>
                       </a:r>
                       <a:endParaRPr lang="en-US" sz="1050" dirty="0">
                         <a:latin typeface="Calibri" charset="0"/>
@@ -17008,7 +17056,7 @@
                           <a:ea typeface="Calibri" pitchFamily="34" charset="-122"/>
                           <a:cs typeface="Calibri" pitchFamily="34" charset="-120"/>
                         </a:rPr>
-                        <a:t>1 814,5</a:t>
+                        <a:t>1,814.5</a:t>
                       </a:r>
                       <a:endParaRPr lang="en-US" sz="1050" dirty="0">
                         <a:latin typeface="Calibri" charset="0"/>
@@ -17092,7 +17140,7 @@
                           <a:ea typeface="Calibri" pitchFamily="34" charset="-122"/>
                           <a:cs typeface="Calibri" pitchFamily="34" charset="-120"/>
                         </a:rPr>
-                        <a:t>1 804,2</a:t>
+                        <a:t>1,804.2</a:t>
                       </a:r>
                       <a:endParaRPr lang="en-US" sz="1050" dirty="0">
                         <a:latin typeface="Calibri" charset="0"/>
@@ -17133,7 +17181,7 @@
                           <a:ea typeface="Calibri" pitchFamily="34" charset="-122"/>
                           <a:cs typeface="Calibri" pitchFamily="34" charset="-120"/>
                         </a:rPr>
-                        <a:t>1 803,4</a:t>
+                        <a:t>1,803.4</a:t>
                       </a:r>
                       <a:endParaRPr lang="en-US" sz="1050" dirty="0">
                         <a:latin typeface="Calibri" charset="0"/>
@@ -17174,7 +17222,7 @@
                           <a:ea typeface="Calibri" pitchFamily="34" charset="-122"/>
                           <a:cs typeface="Calibri" pitchFamily="34" charset="-120"/>
                         </a:rPr>
-                        <a:t>1 804,5</a:t>
+                        <a:t>1,804.5</a:t>
                       </a:r>
                       <a:endParaRPr lang="en-US" sz="1050" dirty="0">
                         <a:latin typeface="Calibri" charset="0"/>
@@ -17215,7 +17263,7 @@
                           <a:ea typeface="Calibri" pitchFamily="34" charset="-122"/>
                           <a:cs typeface="Calibri" pitchFamily="34" charset="-120"/>
                         </a:rPr>
-                        <a:t>1 818,7</a:t>
+                        <a:t>1,818.7</a:t>
                       </a:r>
                       <a:endParaRPr lang="en-US" sz="1050" dirty="0">
                         <a:latin typeface="Calibri" charset="0"/>
@@ -17256,7 +17304,7 @@
                           <a:ea typeface="Calibri" pitchFamily="34" charset="-122"/>
                           <a:cs typeface="Calibri" pitchFamily="34" charset="-120"/>
                         </a:rPr>
-                        <a:t>1 814,8</a:t>
+                        <a:t>1,814.8</a:t>
                       </a:r>
                       <a:endParaRPr lang="en-US" sz="1050" dirty="0">
                         <a:latin typeface="Calibri" charset="0"/>
@@ -17297,7 +17345,7 @@
                           <a:ea typeface="Calibri" pitchFamily="34" charset="-122"/>
                           <a:cs typeface="Calibri" pitchFamily="34" charset="-120"/>
                         </a:rPr>
-                        <a:t>1 818,1</a:t>
+                        <a:t>1,818.1</a:t>
                       </a:r>
                       <a:endParaRPr lang="en-US" sz="1050" dirty="0">
                         <a:latin typeface="Calibri" charset="0"/>
@@ -17338,7 +17386,7 @@
                           <a:ea typeface="Calibri" pitchFamily="34" charset="-122"/>
                           <a:cs typeface="Calibri" pitchFamily="34" charset="-120"/>
                         </a:rPr>
-                        <a:t>1 816,9</a:t>
+                        <a:t>1,816.9</a:t>
                       </a:r>
                       <a:endParaRPr lang="en-US" sz="1050" dirty="0">
                         <a:latin typeface="Calibri" charset="0"/>
@@ -17379,7 +17427,7 @@
                           <a:ea typeface="Calibri" pitchFamily="34" charset="-122"/>
                           <a:cs typeface="Calibri" pitchFamily="34" charset="-120"/>
                         </a:rPr>
-                        <a:t>1 815,6</a:t>
+                        <a:t>1,815.6</a:t>
                       </a:r>
                       <a:endParaRPr lang="en-US" sz="1050" dirty="0">
                         <a:latin typeface="Calibri" charset="0"/>
@@ -17420,7 +17468,7 @@
                           <a:ea typeface="Calibri" pitchFamily="34" charset="-122"/>
                           <a:cs typeface="Calibri" pitchFamily="34" charset="-120"/>
                         </a:rPr>
-                        <a:t>1 815,7</a:t>
+                        <a:t>1,815.7</a:t>
                       </a:r>
                       <a:endParaRPr lang="en-US" sz="1050" dirty="0">
                         <a:latin typeface="Calibri" charset="0"/>
@@ -17461,7 +17509,7 @@
                           <a:ea typeface="Calibri" pitchFamily="34" charset="-122"/>
                           <a:cs typeface="Calibri" pitchFamily="34" charset="-120"/>
                         </a:rPr>
-                        <a:t>1 819,9</a:t>
+                        <a:t>1,819.9</a:t>
                       </a:r>
                       <a:endParaRPr lang="en-US" sz="1050" dirty="0">
                         <a:latin typeface="Calibri" charset="0"/>
@@ -17502,7 +17550,7 @@
                           <a:ea typeface="Calibri" pitchFamily="34" charset="-122"/>
                           <a:cs typeface="Calibri" pitchFamily="34" charset="-120"/>
                         </a:rPr>
-                        <a:t>1 818,6</a:t>
+                        <a:t>1,818.6</a:t>
                       </a:r>
                       <a:endParaRPr lang="en-US" sz="1050" dirty="0">
                         <a:latin typeface="Calibri" charset="0"/>
@@ -17543,7 +17591,7 @@
                           <a:ea typeface="Calibri" pitchFamily="34" charset="-122"/>
                           <a:cs typeface="Calibri" pitchFamily="34" charset="-120"/>
                         </a:rPr>
-                        <a:t>1 818,7</a:t>
+                        <a:t>1,818.7</a:t>
                       </a:r>
                       <a:endParaRPr lang="en-US" sz="1050" dirty="0">
                         <a:latin typeface="Calibri" charset="0"/>
@@ -17584,7 +17632,7 @@
                           <a:ea typeface="Calibri" pitchFamily="34" charset="-122"/>
                           <a:cs typeface="Calibri" pitchFamily="34" charset="-120"/>
                         </a:rPr>
-                        <a:t>1 818,5</a:t>
+                        <a:t>1,818.5</a:t>
                       </a:r>
                       <a:endParaRPr lang="en-US" sz="1050" dirty="0">
                         <a:latin typeface="Calibri" charset="0"/>
@@ -17668,7 +17716,7 @@
                           <a:ea typeface="Calibri" pitchFamily="34" charset="-122"/>
                           <a:cs typeface="Calibri" pitchFamily="34" charset="-120"/>
                         </a:rPr>
-                        <a:t>1 803,8</a:t>
+                        <a:t>1,803.8</a:t>
                       </a:r>
                       <a:endParaRPr lang="en-US" sz="1050" dirty="0">
                         <a:latin typeface="Calibri" charset="0"/>
@@ -17709,7 +17757,7 @@
                           <a:ea typeface="Calibri" pitchFamily="34" charset="-122"/>
                           <a:cs typeface="Calibri" pitchFamily="34" charset="-120"/>
                         </a:rPr>
-                        <a:t>1 802,8</a:t>
+                        <a:t>1,802.8</a:t>
                       </a:r>
                       <a:endParaRPr lang="en-US" sz="1050" dirty="0">
                         <a:latin typeface="Calibri" charset="0"/>
@@ -17750,7 +17798,7 @@
                           <a:ea typeface="Calibri" pitchFamily="34" charset="-122"/>
                           <a:cs typeface="Calibri" pitchFamily="34" charset="-120"/>
                         </a:rPr>
-                        <a:t>1 803,6</a:t>
+                        <a:t>1,803.6</a:t>
                       </a:r>
                       <a:endParaRPr lang="en-US" sz="1050" dirty="0">
                         <a:latin typeface="Calibri" charset="0"/>
@@ -17791,7 +17839,7 @@
                           <a:ea typeface="Calibri" pitchFamily="34" charset="-122"/>
                           <a:cs typeface="Calibri" pitchFamily="34" charset="-120"/>
                         </a:rPr>
-                        <a:t>1 817,4</a:t>
+                        <a:t>1,817.4</a:t>
                       </a:r>
                       <a:endParaRPr lang="en-US" sz="1050" dirty="0">
                         <a:latin typeface="Calibri" charset="0"/>
@@ -17832,7 +17880,7 @@
                           <a:ea typeface="Calibri" pitchFamily="34" charset="-122"/>
                           <a:cs typeface="Calibri" pitchFamily="34" charset="-120"/>
                         </a:rPr>
-                        <a:t>1 820,2</a:t>
+                        <a:t>1,820.2</a:t>
                       </a:r>
                       <a:endParaRPr lang="en-US" sz="1050" dirty="0">
                         <a:latin typeface="Calibri" charset="0"/>
@@ -17873,7 +17921,7 @@
                           <a:ea typeface="Calibri" pitchFamily="34" charset="-122"/>
                           <a:cs typeface="Calibri" pitchFamily="34" charset="-120"/>
                         </a:rPr>
-                        <a:t>1 817,6</a:t>
+                        <a:t>1,817.6</a:t>
                       </a:r>
                       <a:endParaRPr lang="en-US" sz="1050" dirty="0">
                         <a:latin typeface="Calibri" charset="0"/>
@@ -17914,7 +17962,7 @@
                           <a:ea typeface="Calibri" pitchFamily="34" charset="-122"/>
                           <a:cs typeface="Calibri" pitchFamily="34" charset="-120"/>
                         </a:rPr>
-                        <a:t>1 817,5</a:t>
+                        <a:t>1,817.5</a:t>
                       </a:r>
                       <a:endParaRPr lang="en-US" sz="1050" dirty="0">
                         <a:latin typeface="Calibri" charset="0"/>
@@ -17955,7 +18003,7 @@
                           <a:ea typeface="Calibri" pitchFamily="34" charset="-122"/>
                           <a:cs typeface="Calibri" pitchFamily="34" charset="-120"/>
                         </a:rPr>
-                        <a:t>1 815,4</a:t>
+                        <a:t>1,815.4</a:t>
                       </a:r>
                       <a:endParaRPr lang="en-US" sz="1050" dirty="0">
                         <a:latin typeface="Calibri" charset="0"/>
@@ -17996,7 +18044,7 @@
                           <a:ea typeface="Calibri" pitchFamily="34" charset="-122"/>
                           <a:cs typeface="Calibri" pitchFamily="34" charset="-120"/>
                         </a:rPr>
-                        <a:t>1 815,8</a:t>
+                        <a:t>1,815.8</a:t>
                       </a:r>
                       <a:endParaRPr lang="en-US" sz="1050" dirty="0">
                         <a:latin typeface="Calibri" charset="0"/>
@@ -18037,7 +18085,7 @@
                           <a:ea typeface="Calibri" pitchFamily="34" charset="-122"/>
                           <a:cs typeface="Calibri" pitchFamily="34" charset="-120"/>
                         </a:rPr>
-                        <a:t>1 819,9</a:t>
+                        <a:t>1,819.9</a:t>
                       </a:r>
                       <a:endParaRPr lang="en-US" sz="1050" dirty="0">
                         <a:latin typeface="Calibri" charset="0"/>
@@ -18078,7 +18126,7 @@
                           <a:ea typeface="Calibri" pitchFamily="34" charset="-122"/>
                           <a:cs typeface="Calibri" pitchFamily="34" charset="-120"/>
                         </a:rPr>
-                        <a:t>1 820,0</a:t>
+                        <a:t>1,820.0</a:t>
                       </a:r>
                       <a:endParaRPr lang="en-US" sz="1050" dirty="0">
                         <a:latin typeface="Calibri" charset="0"/>
@@ -18119,7 +18167,7 @@
                           <a:ea typeface="Calibri" pitchFamily="34" charset="-122"/>
                           <a:cs typeface="Calibri" pitchFamily="34" charset="-120"/>
                         </a:rPr>
-                        <a:t>1 819,9</a:t>
+                        <a:t>1,819.9</a:t>
                       </a:r>
                       <a:endParaRPr lang="en-US" sz="1050" dirty="0">
                         <a:latin typeface="Calibri" charset="0"/>
@@ -18160,7 +18208,7 @@
                           <a:ea typeface="Calibri" pitchFamily="34" charset="-122"/>
                           <a:cs typeface="Calibri" pitchFamily="34" charset="-120"/>
                         </a:rPr>
-                        <a:t>1 819,9</a:t>
+                        <a:t>1,819.9</a:t>
                       </a:r>
                       <a:endParaRPr lang="en-US" sz="1050" dirty="0">
                         <a:latin typeface="Calibri" charset="0"/>
@@ -18250,7 +18298,7 @@
                           <a:ea typeface="Calibri" pitchFamily="34" charset="-122"/>
                           <a:cs typeface="Calibri" pitchFamily="34" charset="-120"/>
                         </a:rPr>
-                        <a:t>1 803,2</a:t>
+                        <a:t>1,803.2</a:t>
                       </a:r>
                       <a:endParaRPr lang="en-US" sz="1050" dirty="0">
                         <a:latin typeface="Calibri" charset="0"/>
@@ -18297,7 +18345,7 @@
                           <a:ea typeface="Calibri" pitchFamily="34" charset="-122"/>
                           <a:cs typeface="Calibri" pitchFamily="34" charset="-120"/>
                         </a:rPr>
-                        <a:t>1 804,3</a:t>
+                        <a:t>1,804.3</a:t>
                       </a:r>
                       <a:endParaRPr lang="en-US" sz="1050" dirty="0">
                         <a:latin typeface="Calibri" charset="0"/>
@@ -18344,7 +18392,7 @@
                           <a:ea typeface="Calibri" pitchFamily="34" charset="-122"/>
                           <a:cs typeface="Calibri" pitchFamily="34" charset="-120"/>
                         </a:rPr>
-                        <a:t>1 804,4</a:t>
+                        <a:t>1,804.4</a:t>
                       </a:r>
                       <a:endParaRPr lang="en-US" sz="1050" dirty="0">
                         <a:latin typeface="Calibri" charset="0"/>
@@ -18391,7 +18439,7 @@
                           <a:ea typeface="Calibri" pitchFamily="34" charset="-122"/>
                           <a:cs typeface="Calibri" pitchFamily="34" charset="-120"/>
                         </a:rPr>
-                        <a:t>1 817,6</a:t>
+                        <a:t>1,817.6</a:t>
                       </a:r>
                       <a:endParaRPr lang="en-US" sz="1050" dirty="0">
                         <a:latin typeface="Calibri" charset="0"/>
@@ -18438,7 +18486,7 @@
                           <a:ea typeface="Calibri" pitchFamily="34" charset="-122"/>
                           <a:cs typeface="Calibri" pitchFamily="34" charset="-120"/>
                         </a:rPr>
-                        <a:t>1 816,3</a:t>
+                        <a:t>1,816.3</a:t>
                       </a:r>
                       <a:endParaRPr lang="en-US" sz="1050" dirty="0">
                         <a:latin typeface="Calibri" charset="0"/>
@@ -18485,7 +18533,7 @@
                           <a:ea typeface="Calibri" pitchFamily="34" charset="-122"/>
                           <a:cs typeface="Calibri" pitchFamily="34" charset="-120"/>
                         </a:rPr>
-                        <a:t>1 816,8</a:t>
+                        <a:t>1,816.8</a:t>
                       </a:r>
                       <a:endParaRPr lang="en-US" sz="1050" dirty="0">
                         <a:latin typeface="Calibri" charset="0"/>
@@ -18532,7 +18580,7 @@
                           <a:ea typeface="Calibri" pitchFamily="34" charset="-122"/>
                           <a:cs typeface="Calibri" pitchFamily="34" charset="-120"/>
                         </a:rPr>
-                        <a:t>1 816,5</a:t>
+                        <a:t>1,816.5</a:t>
                       </a:r>
                       <a:endParaRPr lang="en-US" sz="1050" dirty="0">
                         <a:latin typeface="Calibri" charset="0"/>
@@ -18579,7 +18627,7 @@
                           <a:ea typeface="Calibri" pitchFamily="34" charset="-122"/>
                           <a:cs typeface="Calibri" pitchFamily="34" charset="-120"/>
                         </a:rPr>
-                        <a:t>1 814,9</a:t>
+                        <a:t>1,814.9</a:t>
                       </a:r>
                       <a:endParaRPr lang="en-US" sz="1050" dirty="0">
                         <a:latin typeface="Calibri" charset="0"/>
@@ -18626,7 +18674,7 @@
                           <a:ea typeface="Calibri" pitchFamily="34" charset="-122"/>
                           <a:cs typeface="Calibri" pitchFamily="34" charset="-120"/>
                         </a:rPr>
-                        <a:t>1 815,9</a:t>
+                        <a:t>1,815.9</a:t>
                       </a:r>
                       <a:endParaRPr lang="en-US" sz="1050" dirty="0">
                         <a:latin typeface="Calibri" charset="0"/>
@@ -18673,7 +18721,7 @@
                           <a:ea typeface="Calibri" pitchFamily="34" charset="-122"/>
                           <a:cs typeface="Calibri" pitchFamily="34" charset="-120"/>
                         </a:rPr>
-                        <a:t>1 819,9</a:t>
+                        <a:t>1,819.9</a:t>
                       </a:r>
                       <a:endParaRPr lang="en-US" sz="1050" dirty="0">
                         <a:latin typeface="Calibri" charset="0"/>
@@ -18720,7 +18768,7 @@
                           <a:ea typeface="Calibri" pitchFamily="34" charset="-122"/>
                           <a:cs typeface="Calibri" pitchFamily="34" charset="-120"/>
                         </a:rPr>
-                        <a:t>1 819,9</a:t>
+                        <a:t>1,819.9</a:t>
                       </a:r>
                       <a:endParaRPr lang="en-US" sz="1050" dirty="0">
                         <a:latin typeface="Calibri" charset="0"/>
@@ -18767,7 +18815,7 @@
                           <a:ea typeface="Calibri" pitchFamily="34" charset="-122"/>
                           <a:cs typeface="Calibri" pitchFamily="34" charset="-120"/>
                         </a:rPr>
-                        <a:t>1 819,9</a:t>
+                        <a:t>1,819.9</a:t>
                       </a:r>
                       <a:endParaRPr lang="en-US" sz="1050" dirty="0">
                         <a:latin typeface="Calibri" charset="0"/>
@@ -18814,7 +18862,7 @@
                           <a:ea typeface="Calibri" pitchFamily="34" charset="-122"/>
                           <a:cs typeface="Calibri" pitchFamily="34" charset="-120"/>
                         </a:rPr>
-                        <a:t>1 819,9</a:t>
+                        <a:t>1,819.9</a:t>
                       </a:r>
                       <a:endParaRPr lang="en-US" sz="1050" dirty="0">
                         <a:latin typeface="Calibri" charset="0"/>
@@ -18904,7 +18952,7 @@
                           <a:ea typeface="Calibri" pitchFamily="34" charset="-122"/>
                           <a:cs typeface="Calibri" pitchFamily="34" charset="-120"/>
                         </a:rPr>
-                        <a:t>1 659,2</a:t>
+                        <a:t>1,659.2</a:t>
                       </a:r>
                       <a:endParaRPr lang="en-US" sz="1050" dirty="0">
                         <a:latin typeface="Calibri" charset="0"/>
@@ -18945,7 +18993,7 @@
                           <a:ea typeface="Calibri" pitchFamily="34" charset="-122"/>
                           <a:cs typeface="Calibri" pitchFamily="34" charset="-120"/>
                         </a:rPr>
-                        <a:t>1 663,1</a:t>
+                        <a:t>1,663.1</a:t>
                       </a:r>
                       <a:endParaRPr lang="en-US" sz="1050" dirty="0">
                         <a:latin typeface="Calibri" charset="0"/>
@@ -18986,7 +19034,7 @@
                           <a:ea typeface="Calibri" pitchFamily="34" charset="-122"/>
                           <a:cs typeface="Calibri" pitchFamily="34" charset="-120"/>
                         </a:rPr>
-                        <a:t>1 658,2</a:t>
+                        <a:t>1,658.2</a:t>
                       </a:r>
                       <a:endParaRPr lang="en-US" sz="1050" dirty="0">
                         <a:latin typeface="Calibri" charset="0"/>
@@ -19027,7 +19075,7 @@
                           <a:ea typeface="Calibri" pitchFamily="34" charset="-122"/>
                           <a:cs typeface="Calibri" pitchFamily="34" charset="-120"/>
                         </a:rPr>
-                        <a:t>1 674,3</a:t>
+                        <a:t>1,674.3</a:t>
                       </a:r>
                       <a:endParaRPr lang="en-US" sz="1050" dirty="0">
                         <a:latin typeface="Calibri" charset="0"/>
@@ -19068,7 +19116,7 @@
                           <a:ea typeface="Calibri" pitchFamily="34" charset="-122"/>
                           <a:cs typeface="Calibri" pitchFamily="34" charset="-120"/>
                         </a:rPr>
-                        <a:t>1 682,4</a:t>
+                        <a:t>1,682.4</a:t>
                       </a:r>
                       <a:endParaRPr lang="en-US" sz="1050" dirty="0">
                         <a:latin typeface="Calibri" charset="0"/>
@@ -19109,7 +19157,7 @@
                           <a:ea typeface="Calibri" pitchFamily="34" charset="-122"/>
                           <a:cs typeface="Calibri" pitchFamily="34" charset="-120"/>
                         </a:rPr>
-                        <a:t>1 602,1</a:t>
+                        <a:t>1,602.1</a:t>
                       </a:r>
                       <a:endParaRPr lang="en-US" sz="1050" dirty="0">
                         <a:latin typeface="Calibri" charset="0"/>
@@ -19150,7 +19198,7 @@
                           <a:ea typeface="Calibri" pitchFamily="34" charset="-122"/>
                           <a:cs typeface="Calibri" pitchFamily="34" charset="-120"/>
                         </a:rPr>
-                        <a:t>1 566,5</a:t>
+                        <a:t>1,566.5</a:t>
                       </a:r>
                       <a:endParaRPr lang="en-US" sz="1050" dirty="0">
                         <a:latin typeface="Calibri" charset="0"/>
@@ -19191,7 +19239,7 @@
                           <a:ea typeface="Calibri" pitchFamily="34" charset="-122"/>
                           <a:cs typeface="Calibri" pitchFamily="34" charset="-120"/>
                         </a:rPr>
-                        <a:t>1 544,8</a:t>
+                        <a:t>1,544.8</a:t>
                       </a:r>
                       <a:endParaRPr lang="en-US" sz="1050" dirty="0">
                         <a:latin typeface="Calibri" charset="0"/>
@@ -19232,7 +19280,7 @@
                           <a:ea typeface="Calibri" pitchFamily="34" charset="-122"/>
                           <a:cs typeface="Calibri" pitchFamily="34" charset="-120"/>
                         </a:rPr>
-                        <a:t>1 547,0</a:t>
+                        <a:t>1,547.0</a:t>
                       </a:r>
                       <a:endParaRPr lang="en-US" sz="1050" dirty="0">
                         <a:latin typeface="Calibri" charset="0"/>
@@ -19273,7 +19321,7 @@
                           <a:ea typeface="Calibri" pitchFamily="34" charset="-122"/>
                           <a:cs typeface="Calibri" pitchFamily="34" charset="-120"/>
                         </a:rPr>
-                        <a:t>1 615,2</a:t>
+                        <a:t>1,615.2</a:t>
                       </a:r>
                       <a:endParaRPr lang="en-US" sz="1050" dirty="0">
                         <a:latin typeface="Calibri" charset="0"/>
@@ -19314,7 +19362,7 @@
                           <a:ea typeface="Calibri" pitchFamily="34" charset="-122"/>
                           <a:cs typeface="Calibri" pitchFamily="34" charset="-120"/>
                         </a:rPr>
-                        <a:t>1 612,5</a:t>
+                        <a:t>1,612.5</a:t>
                       </a:r>
                       <a:endParaRPr lang="en-US" sz="1050" dirty="0">
                         <a:latin typeface="Calibri" charset="0"/>
@@ -19355,7 +19403,7 @@
                           <a:ea typeface="Calibri" pitchFamily="34" charset="-122"/>
                           <a:cs typeface="Calibri" pitchFamily="34" charset="-120"/>
                         </a:rPr>
-                        <a:t>1 608,5</a:t>
+                        <a:t>1,608.5</a:t>
                       </a:r>
                       <a:endParaRPr lang="en-US" sz="1050" dirty="0">
                         <a:latin typeface="Calibri" charset="0"/>
@@ -19396,7 +19444,7 @@
                           <a:ea typeface="Calibri" pitchFamily="34" charset="-122"/>
                           <a:cs typeface="Calibri" pitchFamily="34" charset="-120"/>
                         </a:rPr>
-                        <a:t>1 606,4</a:t>
+                        <a:t>1,606.4</a:t>
                       </a:r>
                       <a:endParaRPr lang="en-US" sz="1050" dirty="0">
                         <a:latin typeface="Calibri" charset="0"/>
@@ -19480,7 +19528,7 @@
                           <a:ea typeface="Calibri" pitchFamily="34" charset="-122"/>
                           <a:cs typeface="Calibri" pitchFamily="34" charset="-120"/>
                         </a:rPr>
-                        <a:t>1 585,5</a:t>
+                        <a:t>1,585.5</a:t>
                       </a:r>
                       <a:endParaRPr lang="en-US" sz="1050" dirty="0">
                         <a:latin typeface="Calibri" charset="0"/>
@@ -19521,7 +19569,7 @@
                           <a:ea typeface="Calibri" pitchFamily="34" charset="-122"/>
                           <a:cs typeface="Calibri" pitchFamily="34" charset="-120"/>
                         </a:rPr>
-                        <a:t>1 586,3</a:t>
+                        <a:t>1,586.3</a:t>
                       </a:r>
                       <a:endParaRPr lang="en-US" sz="1050" dirty="0">
                         <a:latin typeface="Calibri" charset="0"/>
@@ -19562,7 +19610,7 @@
                           <a:ea typeface="Calibri" pitchFamily="34" charset="-122"/>
                           <a:cs typeface="Calibri" pitchFamily="34" charset="-120"/>
                         </a:rPr>
-                        <a:t>1 584,1</a:t>
+                        <a:t>1,584.1</a:t>
                       </a:r>
                       <a:endParaRPr lang="en-US" sz="1050" dirty="0">
                         <a:latin typeface="Calibri" charset="0"/>
@@ -19603,7 +19651,7 @@
                           <a:ea typeface="Calibri" pitchFamily="34" charset="-122"/>
                           <a:cs typeface="Calibri" pitchFamily="34" charset="-120"/>
                         </a:rPr>
-                        <a:t>1 592,3</a:t>
+                        <a:t>1,592.3</a:t>
                       </a:r>
                       <a:endParaRPr lang="en-US" sz="1050" dirty="0">
                         <a:latin typeface="Calibri" charset="0"/>
@@ -19644,7 +19692,7 @@
                           <a:ea typeface="Calibri" pitchFamily="34" charset="-122"/>
                           <a:cs typeface="Calibri" pitchFamily="34" charset="-120"/>
                         </a:rPr>
-                        <a:t>1 588,4</a:t>
+                        <a:t>1,588.4</a:t>
                       </a:r>
                       <a:endParaRPr lang="en-US" sz="1050" dirty="0">
                         <a:latin typeface="Calibri" charset="0"/>
@@ -19685,7 +19733,7 @@
                           <a:ea typeface="Calibri" pitchFamily="34" charset="-122"/>
                           <a:cs typeface="Calibri" pitchFamily="34" charset="-120"/>
                         </a:rPr>
-                        <a:t>1 592,3</a:t>
+                        <a:t>1,592.3</a:t>
                       </a:r>
                       <a:endParaRPr lang="en-US" sz="1050" dirty="0">
                         <a:latin typeface="Calibri" charset="0"/>
@@ -19726,7 +19774,7 @@
                           <a:ea typeface="Calibri" pitchFamily="34" charset="-122"/>
                           <a:cs typeface="Calibri" pitchFamily="34" charset="-120"/>
                         </a:rPr>
-                        <a:t>1 470,1</a:t>
+                        <a:t>1,470.1</a:t>
                       </a:r>
                       <a:endParaRPr lang="en-US" sz="1050" dirty="0">
                         <a:latin typeface="Calibri" charset="0"/>
@@ -19767,7 +19815,7 @@
                           <a:ea typeface="Calibri" pitchFamily="34" charset="-122"/>
                           <a:cs typeface="Calibri" pitchFamily="34" charset="-120"/>
                         </a:rPr>
-                        <a:t>1 484,0</a:t>
+                        <a:t>1,484.0</a:t>
                       </a:r>
                       <a:endParaRPr lang="en-US" sz="1050" dirty="0">
                         <a:latin typeface="Calibri" charset="0"/>
@@ -19808,7 +19856,7 @@
                           <a:ea typeface="Calibri" pitchFamily="34" charset="-122"/>
                           <a:cs typeface="Calibri" pitchFamily="34" charset="-120"/>
                         </a:rPr>
-                        <a:t>1 482,6</a:t>
+                        <a:t>1,482.6</a:t>
                       </a:r>
                       <a:endParaRPr lang="en-US" sz="1050" dirty="0">
                         <a:latin typeface="Calibri" charset="0"/>
@@ -19849,7 +19897,7 @@
                           <a:ea typeface="Calibri" pitchFamily="34" charset="-122"/>
                           <a:cs typeface="Calibri" pitchFamily="34" charset="-120"/>
                         </a:rPr>
-                        <a:t>1 551,8</a:t>
+                        <a:t>1,551.8</a:t>
                       </a:r>
                       <a:endParaRPr lang="en-US" sz="1050" dirty="0">
                         <a:latin typeface="Calibri" charset="0"/>
@@ -19890,7 +19938,7 @@
                           <a:ea typeface="Calibri" pitchFamily="34" charset="-122"/>
                           <a:cs typeface="Calibri" pitchFamily="34" charset="-120"/>
                         </a:rPr>
-                        <a:t>1 550,8</a:t>
+                        <a:t>1,550.8</a:t>
                       </a:r>
                       <a:endParaRPr lang="en-US" sz="1050" dirty="0">
                         <a:latin typeface="Calibri" charset="0"/>
@@ -19931,7 +19979,7 @@
                           <a:ea typeface="Calibri" pitchFamily="34" charset="-122"/>
                           <a:cs typeface="Calibri" pitchFamily="34" charset="-120"/>
                         </a:rPr>
-                        <a:t>1 564,0</a:t>
+                        <a:t>1,564.0</a:t>
                       </a:r>
                       <a:endParaRPr lang="en-US" sz="1050" dirty="0">
                         <a:latin typeface="Calibri" charset="0"/>
@@ -19972,7 +20020,7 @@
                           <a:ea typeface="Calibri" pitchFamily="34" charset="-122"/>
                           <a:cs typeface="Calibri" pitchFamily="34" charset="-120"/>
                         </a:rPr>
-                        <a:t>1 554,1</a:t>
+                        <a:t>1,554.1</a:t>
                       </a:r>
                       <a:endParaRPr lang="en-US" sz="1050" dirty="0">
                         <a:latin typeface="Calibri" charset="0"/>
@@ -20062,7 +20110,7 @@
                           <a:ea typeface="Calibri" pitchFamily="34" charset="-122"/>
                           <a:cs typeface="Calibri" pitchFamily="34" charset="-120"/>
                         </a:rPr>
-                        <a:t>1 578,8</a:t>
+                        <a:t>1,578.8</a:t>
                       </a:r>
                       <a:endParaRPr lang="en-US" sz="1050" dirty="0">
                         <a:latin typeface="Calibri" charset="0"/>
@@ -20109,7 +20157,7 @@
                           <a:ea typeface="Calibri" pitchFamily="34" charset="-122"/>
                           <a:cs typeface="Calibri" pitchFamily="34" charset="-120"/>
                         </a:rPr>
-                        <a:t>1 581,8</a:t>
+                        <a:t>1,581.8</a:t>
                       </a:r>
                       <a:endParaRPr lang="en-US" sz="1050" dirty="0">
                         <a:latin typeface="Calibri" charset="0"/>
@@ -20156,7 +20204,7 @@
                           <a:ea typeface="Calibri" pitchFamily="34" charset="-122"/>
                           <a:cs typeface="Calibri" pitchFamily="34" charset="-120"/>
                         </a:rPr>
-                        <a:t>1 582,9</a:t>
+                        <a:t>1,582.9</a:t>
                       </a:r>
                       <a:endParaRPr lang="en-US" sz="1050" dirty="0">
                         <a:latin typeface="Calibri" charset="0"/>
@@ -20203,7 +20251,7 @@
                           <a:ea typeface="Calibri" pitchFamily="34" charset="-122"/>
                           <a:cs typeface="Calibri" pitchFamily="34" charset="-120"/>
                         </a:rPr>
-                        <a:t>1 554,9</a:t>
+                        <a:t>1,554.9</a:t>
                       </a:r>
                       <a:endParaRPr lang="en-US" sz="1050" dirty="0">
                         <a:latin typeface="Calibri" charset="0"/>
@@ -20250,7 +20298,7 @@
                           <a:ea typeface="Calibri" pitchFamily="34" charset="-122"/>
                           <a:cs typeface="Calibri" pitchFamily="34" charset="-120"/>
                         </a:rPr>
-                        <a:t>1 551,9</a:t>
+                        <a:t>1,551.9</a:t>
                       </a:r>
                       <a:endParaRPr lang="en-US" sz="1050" dirty="0">
                         <a:latin typeface="Calibri" charset="0"/>
@@ -20297,7 +20345,7 @@
                           <a:ea typeface="Calibri" pitchFamily="34" charset="-122"/>
                           <a:cs typeface="Calibri" pitchFamily="34" charset="-120"/>
                         </a:rPr>
-                        <a:t>1 597,5</a:t>
+                        <a:t>1,597.5</a:t>
                       </a:r>
                       <a:endParaRPr lang="en-US" sz="1050" dirty="0">
                         <a:latin typeface="Calibri" charset="0"/>
@@ -20344,7 +20392,7 @@
                           <a:ea typeface="Calibri" pitchFamily="34" charset="-122"/>
                           <a:cs typeface="Calibri" pitchFamily="34" charset="-120"/>
                         </a:rPr>
-                        <a:t>1 465,3</a:t>
+                        <a:t>1,465.3</a:t>
                       </a:r>
                       <a:endParaRPr lang="en-US" sz="1050" dirty="0">
                         <a:latin typeface="Calibri" charset="0"/>
@@ -20391,7 +20439,7 @@
                           <a:ea typeface="Calibri" pitchFamily="34" charset="-122"/>
                           <a:cs typeface="Calibri" pitchFamily="34" charset="-120"/>
                         </a:rPr>
-                        <a:t>1 473,4</a:t>
+                        <a:t>1,473.4</a:t>
                       </a:r>
                       <a:endParaRPr lang="en-US" sz="1050" dirty="0">
                         <a:latin typeface="Calibri" charset="0"/>
@@ -20438,7 +20486,7 @@
                           <a:ea typeface="Calibri" pitchFamily="34" charset="-122"/>
                           <a:cs typeface="Calibri" pitchFamily="34" charset="-120"/>
                         </a:rPr>
-                        <a:t>1 462,2</a:t>
+                        <a:t>1,462.2</a:t>
                       </a:r>
                       <a:endParaRPr lang="en-US" sz="1050" dirty="0">
                         <a:latin typeface="Calibri" charset="0"/>
@@ -20485,7 +20533,7 @@
                           <a:ea typeface="Calibri" pitchFamily="34" charset="-122"/>
                           <a:cs typeface="Calibri" pitchFamily="34" charset="-120"/>
                         </a:rPr>
-                        <a:t>1 562,1</a:t>
+                        <a:t>1,562.1</a:t>
                       </a:r>
                       <a:endParaRPr lang="en-US" sz="1050" dirty="0">
                         <a:latin typeface="Calibri" charset="0"/>
@@ -20532,7 +20580,7 @@
                           <a:ea typeface="Calibri" pitchFamily="34" charset="-122"/>
                           <a:cs typeface="Calibri" pitchFamily="34" charset="-120"/>
                         </a:rPr>
-                        <a:t>1 554,2</a:t>
+                        <a:t>1,554.2</a:t>
                       </a:r>
                       <a:endParaRPr lang="en-US" sz="1050" dirty="0">
                         <a:latin typeface="Calibri" charset="0"/>
@@ -20579,7 +20627,7 @@
                           <a:ea typeface="Calibri" pitchFamily="34" charset="-122"/>
                           <a:cs typeface="Calibri" pitchFamily="34" charset="-120"/>
                         </a:rPr>
-                        <a:t>1 551,6</a:t>
+                        <a:t>1,551.6</a:t>
                       </a:r>
                       <a:endParaRPr lang="en-US" sz="1050" dirty="0">
                         <a:latin typeface="Calibri" charset="0"/>
@@ -20626,7 +20674,7 @@
                           <a:ea typeface="Calibri" pitchFamily="34" charset="-122"/>
                           <a:cs typeface="Calibri" pitchFamily="34" charset="-120"/>
                         </a:rPr>
-                        <a:t>1 558,5</a:t>
+                        <a:t>1,558.5</a:t>
                       </a:r>
                       <a:endParaRPr lang="en-US" sz="1050" dirty="0">
                         <a:latin typeface="Calibri" charset="0"/>
@@ -20716,7 +20764,7 @@
                           <a:ea typeface="Calibri" pitchFamily="34" charset="-122"/>
                           <a:cs typeface="Calibri" pitchFamily="34" charset="-120"/>
                         </a:rPr>
-                        <a:t>5 329,4</a:t>
+                        <a:t>5,329.4</a:t>
                       </a:r>
                       <a:endParaRPr lang="en-US" sz="1050" dirty="0">
                         <a:latin typeface="Calibri" charset="0"/>
@@ -20757,7 +20805,7 @@
                           <a:ea typeface="Calibri" pitchFamily="34" charset="-122"/>
                           <a:cs typeface="Calibri" pitchFamily="34" charset="-120"/>
                         </a:rPr>
-                        <a:t>5 290,1</a:t>
+                        <a:t>5,290.1</a:t>
                       </a:r>
                       <a:endParaRPr lang="en-US" sz="1050" dirty="0">
                         <a:latin typeface="Calibri" charset="0"/>
@@ -20798,7 +20846,7 @@
                           <a:ea typeface="Calibri" pitchFamily="34" charset="-122"/>
                           <a:cs typeface="Calibri" pitchFamily="34" charset="-120"/>
                         </a:rPr>
-                        <a:t>5 262,1</a:t>
+                        <a:t>5,262.1</a:t>
                       </a:r>
                       <a:endParaRPr lang="en-US" sz="1050" dirty="0">
                         <a:latin typeface="Calibri" charset="0"/>
@@ -20839,7 +20887,7 @@
                           <a:ea typeface="Calibri" pitchFamily="34" charset="-122"/>
                           <a:cs typeface="Calibri" pitchFamily="34" charset="-120"/>
                         </a:rPr>
-                        <a:t>4 829,5</a:t>
+                        <a:t>4,829.5</a:t>
                       </a:r>
                       <a:endParaRPr lang="en-US" sz="1050" dirty="0">
                         <a:latin typeface="Calibri" charset="0"/>
@@ -20880,7 +20928,7 @@
                           <a:ea typeface="Calibri" pitchFamily="34" charset="-122"/>
                           <a:cs typeface="Calibri" pitchFamily="34" charset="-120"/>
                         </a:rPr>
-                        <a:t>4 836,8</a:t>
+                        <a:t>4,836.8</a:t>
                       </a:r>
                       <a:endParaRPr lang="en-US" sz="1050" dirty="0">
                         <a:latin typeface="Calibri" charset="0"/>
@@ -20921,7 +20969,7 @@
                           <a:ea typeface="Calibri" pitchFamily="34" charset="-122"/>
                           <a:cs typeface="Calibri" pitchFamily="34" charset="-120"/>
                         </a:rPr>
-                        <a:t>4 834,2</a:t>
+                        <a:t>4,834.2</a:t>
                       </a:r>
                       <a:endParaRPr lang="en-US" sz="1050" dirty="0">
                         <a:latin typeface="Calibri" charset="0"/>
@@ -21085,7 +21133,7 @@
                           <a:ea typeface="Calibri" pitchFamily="34" charset="-122"/>
                           <a:cs typeface="Calibri" pitchFamily="34" charset="-120"/>
                         </a:rPr>
-                        <a:t>4 796,8</a:t>
+                        <a:t>4,796.8</a:t>
                       </a:r>
                       <a:endParaRPr lang="en-US" sz="1050" dirty="0">
                         <a:latin typeface="Calibri" charset="0"/>
@@ -21126,7 +21174,7 @@
                           <a:ea typeface="Calibri" pitchFamily="34" charset="-122"/>
                           <a:cs typeface="Calibri" pitchFamily="34" charset="-120"/>
                         </a:rPr>
-                        <a:t>4 800,4</a:t>
+                        <a:t>4,800.4</a:t>
                       </a:r>
                       <a:endParaRPr lang="en-US" sz="1050" dirty="0">
                         <a:latin typeface="Calibri" charset="0"/>
@@ -21167,7 +21215,7 @@
                           <a:ea typeface="Calibri" pitchFamily="34" charset="-122"/>
                           <a:cs typeface="Calibri" pitchFamily="34" charset="-120"/>
                         </a:rPr>
-                        <a:t>4 804,4</a:t>
+                        <a:t>4,804.4</a:t>
                       </a:r>
                       <a:endParaRPr lang="en-US" sz="1050" dirty="0">
                         <a:latin typeface="Calibri" charset="0"/>
@@ -21208,7 +21256,7 @@
                           <a:ea typeface="Calibri" pitchFamily="34" charset="-122"/>
                           <a:cs typeface="Calibri" pitchFamily="34" charset="-120"/>
                         </a:rPr>
-                        <a:t>4 793,7</a:t>
+                        <a:t>4,793.7</a:t>
                       </a:r>
                       <a:endParaRPr lang="en-US" sz="1050" dirty="0">
                         <a:latin typeface="Calibri" charset="0"/>
@@ -21292,7 +21340,7 @@
                           <a:ea typeface="Calibri" pitchFamily="34" charset="-122"/>
                           <a:cs typeface="Calibri" pitchFamily="34" charset="-120"/>
                         </a:rPr>
-                        <a:t>5 167,2</a:t>
+                        <a:t>5,167.2</a:t>
                       </a:r>
                       <a:endParaRPr lang="en-US" sz="1050" dirty="0">
                         <a:latin typeface="Calibri" charset="0"/>
@@ -21333,7 +21381,7 @@
                           <a:ea typeface="Calibri" pitchFamily="34" charset="-122"/>
                           <a:cs typeface="Calibri" pitchFamily="34" charset="-120"/>
                         </a:rPr>
-                        <a:t>5 056,0</a:t>
+                        <a:t>5,056.0</a:t>
                       </a:r>
                       <a:endParaRPr lang="en-US" sz="1050" dirty="0">
                         <a:latin typeface="Calibri" charset="0"/>
@@ -21374,7 +21422,7 @@
                           <a:ea typeface="Calibri" pitchFamily="34" charset="-122"/>
                           <a:cs typeface="Calibri" pitchFamily="34" charset="-120"/>
                         </a:rPr>
-                        <a:t>5 031,7</a:t>
+                        <a:t>5,031.7</a:t>
                       </a:r>
                       <a:endParaRPr lang="en-US" sz="1050" dirty="0">
                         <a:latin typeface="Calibri" charset="0"/>
@@ -21415,7 +21463,7 @@
                           <a:ea typeface="Calibri" pitchFamily="34" charset="-122"/>
                           <a:cs typeface="Calibri" pitchFamily="34" charset="-120"/>
                         </a:rPr>
-                        <a:t>4 795,8</a:t>
+                        <a:t>4,795.8</a:t>
                       </a:r>
                       <a:endParaRPr lang="en-US" sz="1050" dirty="0">
                         <a:latin typeface="Calibri" charset="0"/>
@@ -21456,7 +21504,7 @@
                           <a:ea typeface="Calibri" pitchFamily="34" charset="-122"/>
                           <a:cs typeface="Calibri" pitchFamily="34" charset="-120"/>
                         </a:rPr>
-                        <a:t>4 796,2</a:t>
+                        <a:t>4,796.2</a:t>
                       </a:r>
                       <a:endParaRPr lang="en-US" sz="1050" dirty="0">
                         <a:latin typeface="Calibri" charset="0"/>
@@ -21497,7 +21545,7 @@
                           <a:ea typeface="Calibri" pitchFamily="34" charset="-122"/>
                           <a:cs typeface="Calibri" pitchFamily="34" charset="-120"/>
                         </a:rPr>
-                        <a:t>4 797,9</a:t>
+                        <a:t>4,797.9</a:t>
                       </a:r>
                       <a:endParaRPr lang="en-US" sz="1050" dirty="0">
                         <a:latin typeface="Calibri" charset="0"/>
@@ -21661,7 +21709,7 @@
                           <a:ea typeface="Calibri" pitchFamily="34" charset="-122"/>
                           <a:cs typeface="Calibri" pitchFamily="34" charset="-120"/>
                         </a:rPr>
-                        <a:t>4 795,5</a:t>
+                        <a:t>4,795.5</a:t>
                       </a:r>
                       <a:endParaRPr lang="en-US" sz="1050" dirty="0">
                         <a:latin typeface="Calibri" charset="0"/>
@@ -21702,7 +21750,7 @@
                           <a:ea typeface="Calibri" pitchFamily="34" charset="-122"/>
                           <a:cs typeface="Calibri" pitchFamily="34" charset="-120"/>
                         </a:rPr>
-                        <a:t>4 795,4</a:t>
+                        <a:t>4,795.4</a:t>
                       </a:r>
                       <a:endParaRPr lang="en-US" sz="1050" dirty="0">
                         <a:latin typeface="Calibri" charset="0"/>
@@ -21743,7 +21791,7 @@
                           <a:ea typeface="Calibri" pitchFamily="34" charset="-122"/>
                           <a:cs typeface="Calibri" pitchFamily="34" charset="-120"/>
                         </a:rPr>
-                        <a:t>4 795,6</a:t>
+                        <a:t>4,795.6</a:t>
                       </a:r>
                       <a:endParaRPr lang="en-US" sz="1050" dirty="0">
                         <a:latin typeface="Calibri" charset="0"/>
@@ -21784,7 +21832,7 @@
                           <a:ea typeface="Calibri" pitchFamily="34" charset="-122"/>
                           <a:cs typeface="Calibri" pitchFamily="34" charset="-120"/>
                         </a:rPr>
-                        <a:t>4 793,7</a:t>
+                        <a:t>4,793.7</a:t>
                       </a:r>
                       <a:endParaRPr lang="en-US" sz="1050" dirty="0">
                         <a:latin typeface="Calibri" charset="0"/>
@@ -21874,7 +21922,7 @@
                           <a:ea typeface="Calibri" pitchFamily="34" charset="-122"/>
                           <a:cs typeface="Calibri" pitchFamily="34" charset="-120"/>
                         </a:rPr>
-                        <a:t>4 930,1</a:t>
+                        <a:t>4,930.1</a:t>
                       </a:r>
                       <a:endParaRPr lang="en-US" sz="1050" dirty="0">
                         <a:latin typeface="Calibri" charset="0"/>
@@ -21921,7 +21969,7 @@
                           <a:ea typeface="Calibri" pitchFamily="34" charset="-122"/>
                           <a:cs typeface="Calibri" pitchFamily="34" charset="-120"/>
                         </a:rPr>
-                        <a:t>4 921,6</a:t>
+                        <a:t>4,921.6</a:t>
                       </a:r>
                       <a:endParaRPr lang="en-US" sz="1050" dirty="0">
                         <a:latin typeface="Calibri" charset="0"/>
@@ -21968,7 +22016,7 @@
                           <a:ea typeface="Calibri" pitchFamily="34" charset="-122"/>
                           <a:cs typeface="Calibri" pitchFamily="34" charset="-120"/>
                         </a:rPr>
-                        <a:t>5 203,6</a:t>
+                        <a:t>5,203.6</a:t>
                       </a:r>
                       <a:endParaRPr lang="en-US" sz="1050" dirty="0">
                         <a:latin typeface="Calibri" charset="0"/>
@@ -22015,7 +22063,7 @@
                           <a:ea typeface="Calibri" pitchFamily="34" charset="-122"/>
                           <a:cs typeface="Calibri" pitchFamily="34" charset="-120"/>
                         </a:rPr>
-                        <a:t>4 794,4</a:t>
+                        <a:t>4,794.4</a:t>
                       </a:r>
                       <a:endParaRPr lang="en-US" sz="1050" dirty="0">
                         <a:latin typeface="Calibri" charset="0"/>
@@ -22062,7 +22110,7 @@
                           <a:ea typeface="Calibri" pitchFamily="34" charset="-122"/>
                           <a:cs typeface="Calibri" pitchFamily="34" charset="-120"/>
                         </a:rPr>
-                        <a:t>4 795,6</a:t>
+                        <a:t>4,795.6</a:t>
                       </a:r>
                       <a:endParaRPr lang="en-US" sz="1050" dirty="0">
                         <a:latin typeface="Calibri" charset="0"/>
@@ -22109,7 +22157,7 @@
                           <a:ea typeface="Calibri" pitchFamily="34" charset="-122"/>
                           <a:cs typeface="Calibri" pitchFamily="34" charset="-120"/>
                         </a:rPr>
-                        <a:t>4 800,0</a:t>
+                        <a:t>4,800.0</a:t>
                       </a:r>
                       <a:endParaRPr lang="en-US" sz="1050" dirty="0">
                         <a:latin typeface="Calibri" charset="0"/>
@@ -22297,7 +22345,7 @@
                           <a:ea typeface="Calibri" pitchFamily="34" charset="-122"/>
                           <a:cs typeface="Calibri" pitchFamily="34" charset="-120"/>
                         </a:rPr>
-                        <a:t>4 795,4</a:t>
+                        <a:t>4,795.4</a:t>
                       </a:r>
                       <a:endParaRPr lang="en-US" sz="1050" dirty="0">
                         <a:latin typeface="Calibri" charset="0"/>
@@ -22344,7 +22392,7 @@
                           <a:ea typeface="Calibri" pitchFamily="34" charset="-122"/>
                           <a:cs typeface="Calibri" pitchFamily="34" charset="-120"/>
                         </a:rPr>
-                        <a:t>4 795,3</a:t>
+                        <a:t>4,795.3</a:t>
                       </a:r>
                       <a:endParaRPr lang="en-US" sz="1050" dirty="0">
                         <a:latin typeface="Calibri" charset="0"/>
@@ -22391,7 +22439,7 @@
                           <a:ea typeface="Calibri" pitchFamily="34" charset="-122"/>
                           <a:cs typeface="Calibri" pitchFamily="34" charset="-120"/>
                         </a:rPr>
-                        <a:t>4 795,3</a:t>
+                        <a:t>4,795.3</a:t>
                       </a:r>
                       <a:endParaRPr lang="en-US" sz="1050" dirty="0">
                         <a:latin typeface="Calibri" charset="0"/>
@@ -22438,7 +22486,7 @@
                           <a:ea typeface="Calibri" pitchFamily="34" charset="-122"/>
                           <a:cs typeface="Calibri" pitchFamily="34" charset="-120"/>
                         </a:rPr>
-                        <a:t>4 793,7</a:t>
+                        <a:t>4,793.7</a:t>
                       </a:r>
                       <a:endParaRPr lang="en-US" sz="1050" dirty="0">
                         <a:latin typeface="Calibri" charset="0"/>
@@ -22506,7 +22554,7 @@
                 <a:ea typeface="Calibri" pitchFamily="34" charset="-122"/>
                 <a:cs typeface="Calibri" pitchFamily="34" charset="-120"/>
               </a:rPr>
-              <a:t>Hipervolum ×1 000, çdo ekzekutim. Me të trasha: vlera më e mirë nga 3 që shfaqet në tabelë. — asnjë pikë e lejuar. Burimi: harness/benchmark-*.csv.</a:t>
+              <a:t>Hipervolum ×1,000, çdo ekzekutim. Me të trasha: vlera më e mirë nga 3 që shfaqet në tabelë. — asnjë pikë e lejuar. Burimi: harness/benchmark-*.csv.</a:t>
             </a:r>
             <a:endParaRPr lang="en-US" sz="1050" dirty="0"/>
           </a:p>
@@ -22896,7 +22944,7 @@
                 <a:ea typeface="Calibri" pitchFamily="34" charset="-122"/>
                 <a:cs typeface="Calibri" pitchFamily="34" charset="-120"/>
               </a:rPr>
-              <a:t> = 0 e ndërtimit, me gjerësi 20, mbart 99,99% të rezultatit të tij; në medium-graph, me gjerësi 277, mbart 97,7%.</a:t>
+              <a:t> = 0 e ndërtimit, me gjerësi 20, mbart 99.99% të rezultatit të tij; në medium-graph, me gjerësi 277, mbart 97.7%.</a:t>
             </a:r>
             <a:endParaRPr lang="en-US" sz="1400" dirty="0"/>
           </a:p>
@@ -22991,7 +23039,7 @@
                 <a:ea typeface="Calibri" pitchFamily="34" charset="-122"/>
                 <a:cs typeface="Calibri" pitchFamily="34" charset="-120"/>
               </a:rPr>
-              <a:t>, 79,4% të katrorit, ndërsa më i miri i njohur arrin 93,3%: vetëm në familjen e dendur shkallarja e meriton vendin e vet.</a:t>
+              <a:t>, 79.4% të katrorit, ndërsa më i miri i njohur arrin 93.3%: vetëm në familjen e dendur shkallarja e meriton vendin e vet.</a:t>
             </a:r>
             <a:endParaRPr lang="en-US" sz="1400" dirty="0"/>
           </a:p>
@@ -23086,7 +23134,7 @@
                 <a:ea typeface="Calibri" pitchFamily="34" charset="-122"/>
                 <a:cs typeface="Calibri" pitchFamily="34" charset="-120"/>
               </a:rPr>
-              <a:t> = 1 357, </a:t>
+              <a:t> = 1,357, </a:t>
             </a:r>
             <a:pPr indent="0" marL="0">
               <a:buNone/>
@@ -23236,7 +23284,7 @@
                 <a:ea typeface="Century Schoolbook" pitchFamily="34" charset="-122"/>
                 <a:cs typeface="Century Schoolbook" pitchFamily="34" charset="-120"/>
               </a:rPr>
-              <a:t>98,5%</a:t>
+              <a:t>98.5%</a:t>
             </a:r>
             <a:endParaRPr lang="en-US" sz="2400" dirty="0"/>
           </a:p>
@@ -23275,7 +23323,7 @@
                 <a:ea typeface="Calibri" pitchFamily="34" charset="-122"/>
                 <a:cs typeface="Calibri" pitchFamily="34" charset="-120"/>
               </a:rPr>
-              <a:t>w = 20 nga n = 1 357 · 99,99% e rezultatit</a:t>
+              <a:t>w = 20 nga n = 1,357 · 99.99% e rezultatit</a:t>
             </a:r>
             <a:endParaRPr lang="en-US" sz="1050" dirty="0"/>
           </a:p>
@@ -23397,7 +23445,7 @@
                 <a:ea typeface="Century Schoolbook" pitchFamily="34" charset="-122"/>
                 <a:cs typeface="Century Schoolbook" pitchFamily="34" charset="-120"/>
               </a:rPr>
-              <a:t>79,4%</a:t>
+              <a:t>79.4%</a:t>
             </a:r>
             <a:endParaRPr lang="en-US" sz="2400" dirty="0"/>
           </a:p>
@@ -23436,7 +23484,7 @@
                 <a:ea typeface="Calibri" pitchFamily="34" charset="-122"/>
                 <a:cs typeface="Calibri" pitchFamily="34" charset="-120"/>
               </a:rPr>
-              <a:t>w ≥ 499 nga n = 2 426 · më i miri i njohur 93,3%</a:t>
+              <a:t>w ≥ 499 nga n = 2,426 · më i miri i njohur 93.3%</a:t>
             </a:r>
             <a:endParaRPr lang="en-US" sz="1050" dirty="0"/>
           </a:p>
@@ -25257,7 +25305,7 @@
                 <a:ea typeface="Century Schoolbook" pitchFamily="34" charset="-122"/>
                 <a:cs typeface="Century Schoolbook" pitchFamily="34" charset="-120"/>
               </a:rPr>
-              <a:t>1,8×</a:t>
+              <a:t>1.81×</a:t>
             </a:r>
             <a:endParaRPr lang="en-US" sz="2600" dirty="0"/>
           </a:p>
@@ -25296,7 +25344,7 @@
                 <a:ea typeface="Calibri" pitchFamily="34" charset="-122"/>
                 <a:cs typeface="Calibri" pitchFamily="34" charset="-120"/>
               </a:rPr>
-              <a:t>më shumë kandidatë në të njëjtën kohë reale, mesatare gjeometrike mbi dhjetë instanca (nga 1,6× te të rrallat deri në 1,9× te të dendurat)</a:t>
+              <a:t>më shumë kandidatë në të njëjtën kohë reale, mesatare gjeometrike mbi dhjetë instanca (nga 1.7× te të rrallat deri në 1.9× te të dendurat)</a:t>
             </a:r>
             <a:endParaRPr lang="en-US" sz="1150" dirty="0"/>
           </a:p>
@@ -25355,7 +25403,7 @@
                 <a:ea typeface="Calibri" pitchFamily="34" charset="-122"/>
                 <a:cs typeface="Calibri" pitchFamily="34" charset="-120"/>
               </a:rPr>
-              <a:t>Pse lëvizjet e pranuara thuajse nuk kanë rëndësi: çdo kandidat i vlerësuar dhuron tërë shkallaren e vet në një front të përbashkët. Në synth-7 të katër operatorët origjinalë nuk pranuan asgjë fare, dhe rezultatet e tyre prapë ndryshojnë me 1 841 HV.</a:t>
+              <a:t>Pse lëvizjet e pranuara thuajse nuk kanë rëndësi: çdo kandidat i vlerësuar dhuron tërë shkallaren e vet në një front të përbashkët. Në synth-7 të katër operatorët origjinalë nuk pranuan asgjë fare, dhe rezultatet e tyre prapë ndryshojnë me 1,841 HV.</a:t>
             </a:r>
             <a:endParaRPr lang="en-US" sz="1300" dirty="0"/>
           </a:p>
@@ -25617,7 +25665,7 @@
                           <a:ea typeface="Calibri" pitchFamily="34" charset="-122"/>
                           <a:cs typeface="Calibri" pitchFamily="34" charset="-120"/>
                         </a:rPr>
-                        <a:t>1 200 s</a:t>
+                        <a:t>1,200 s</a:t>
                       </a:r>
                       <a:endParaRPr lang="en-US" sz="1100" dirty="0">
                         <a:latin typeface="Calibri" charset="0"/>
@@ -25670,7 +25718,7 @@
                           <a:ea typeface="Calibri" pitchFamily="34" charset="-122"/>
                           <a:cs typeface="Calibri" pitchFamily="34" charset="-120"/>
                         </a:rPr>
-                        <a:t>3 600 s</a:t>
+                        <a:t>3,600 s</a:t>
                       </a:r>
                       <a:endParaRPr lang="en-US" sz="1100" dirty="0">
                         <a:latin typeface="Calibri" charset="0"/>
@@ -25723,7 +25771,7 @@
                           <a:ea typeface="Calibri" pitchFamily="34" charset="-122"/>
                           <a:cs typeface="Calibri" pitchFamily="34" charset="-120"/>
                         </a:rPr>
-                        <a:t>12 000 s</a:t>
+                        <a:t>12,000 s</a:t>
                       </a:r>
                       <a:endParaRPr lang="en-US" sz="1100" dirty="0">
                         <a:latin typeface="Calibri" charset="0"/>
@@ -25925,7 +25973,7 @@
                           <a:ea typeface="Calibri" pitchFamily="34" charset="-122"/>
                           <a:cs typeface="Calibri" pitchFamily="34" charset="-120"/>
                         </a:rPr>
-                        <a:t>26 781 700</a:t>
+                        <a:t>26,781,700</a:t>
                       </a:r>
                       <a:endParaRPr lang="en-US" sz="1300" dirty="0">
                         <a:latin typeface="Calibri" charset="0"/>
@@ -25966,7 +26014,7 @@
                           <a:ea typeface="Calibri" pitchFamily="34" charset="-122"/>
                           <a:cs typeface="Calibri" pitchFamily="34" charset="-120"/>
                         </a:rPr>
-                        <a:t>26 762 079</a:t>
+                        <a:t>26,762,079</a:t>
                       </a:r>
                       <a:endParaRPr lang="en-US" sz="1300" dirty="0">
                         <a:latin typeface="Calibri" charset="0"/>
@@ -26007,7 +26055,7 @@
                           <a:ea typeface="Calibri" pitchFamily="34" charset="-122"/>
                           <a:cs typeface="Calibri" pitchFamily="34" charset="-120"/>
                         </a:rPr>
-                        <a:t>26 692 166</a:t>
+                        <a:t>26,692,166</a:t>
                       </a:r>
                       <a:endParaRPr lang="en-US" sz="1300" dirty="0">
                         <a:latin typeface="Calibri" charset="0"/>
@@ -26048,7 +26096,7 @@
                           <a:ea typeface="Calibri" pitchFamily="34" charset="-122"/>
                           <a:cs typeface="Calibri" pitchFamily="34" charset="-120"/>
                         </a:rPr>
-                        <a:t>−89 534</a:t>
+                        <a:t>−89,534</a:t>
                       </a:r>
                       <a:endParaRPr lang="en-US" sz="1300" dirty="0">
                         <a:latin typeface="Calibri" charset="0"/>
@@ -26173,7 +26221,7 @@
                           <a:ea typeface="Calibri" pitchFamily="34" charset="-122"/>
                           <a:cs typeface="Calibri" pitchFamily="34" charset="-120"/>
                         </a:rPr>
-                        <a:t>26 389 516</a:t>
+                        <a:t>26,389,516</a:t>
                       </a:r>
                       <a:endParaRPr lang="en-US" sz="1300" dirty="0">
                         <a:latin typeface="Calibri" charset="0"/>
@@ -26214,7 +26262,7 @@
                           <a:ea typeface="Calibri" pitchFamily="34" charset="-122"/>
                           <a:cs typeface="Calibri" pitchFamily="34" charset="-120"/>
                         </a:rPr>
-                        <a:t>26 404 696</a:t>
+                        <a:t>26,404,696</a:t>
                       </a:r>
                       <a:endParaRPr lang="en-US" sz="1300" dirty="0">
                         <a:latin typeface="Calibri" charset="0"/>
@@ -26255,7 +26303,7 @@
                           <a:ea typeface="Calibri" pitchFamily="34" charset="-122"/>
                           <a:cs typeface="Calibri" pitchFamily="34" charset="-120"/>
                         </a:rPr>
-                        <a:t>26 422 559</a:t>
+                        <a:t>26,422,559</a:t>
                       </a:r>
                       <a:endParaRPr lang="en-US" sz="1300" dirty="0">
                         <a:latin typeface="Calibri" charset="0"/>
@@ -26296,7 +26344,7 @@
                           <a:ea typeface="Calibri" pitchFamily="34" charset="-122"/>
                           <a:cs typeface="Calibri" pitchFamily="34" charset="-120"/>
                         </a:rPr>
-                        <a:t>+33 043</a:t>
+                        <a:t>+33,043</a:t>
                       </a:r>
                       <a:endParaRPr lang="en-US" sz="1300" dirty="0">
                         <a:latin typeface="Calibri" charset="0"/>
@@ -26421,7 +26469,7 @@
                           <a:ea typeface="Calibri" pitchFamily="34" charset="-122"/>
                           <a:cs typeface="Calibri" pitchFamily="34" charset="-120"/>
                         </a:rPr>
-                        <a:t>26 391 399</a:t>
+                        <a:t>26,391,399</a:t>
                       </a:r>
                       <a:endParaRPr lang="en-US" sz="1300" dirty="0">
                         <a:latin typeface="Calibri" charset="0"/>
@@ -26462,7 +26510,7 @@
                           <a:ea typeface="Calibri" pitchFamily="34" charset="-122"/>
                           <a:cs typeface="Calibri" pitchFamily="34" charset="-120"/>
                         </a:rPr>
-                        <a:t>26 393 577</a:t>
+                        <a:t>26,393,577</a:t>
                       </a:r>
                       <a:endParaRPr lang="en-US" sz="1300" dirty="0">
                         <a:latin typeface="Calibri" charset="0"/>
@@ -26503,7 +26551,7 @@
                           <a:ea typeface="Calibri" pitchFamily="34" charset="-122"/>
                           <a:cs typeface="Calibri" pitchFamily="34" charset="-120"/>
                         </a:rPr>
-                        <a:t>26 396 957</a:t>
+                        <a:t>26,396,957</a:t>
                       </a:r>
                       <a:endParaRPr lang="en-US" sz="1300" dirty="0">
                         <a:latin typeface="Calibri" charset="0"/>
@@ -26544,7 +26592,7 @@
                           <a:ea typeface="Calibri" pitchFamily="34" charset="-122"/>
                           <a:cs typeface="Calibri" pitchFamily="34" charset="-120"/>
                         </a:rPr>
-                        <a:t>+5 558</a:t>
+                        <a:t>+5,558</a:t>
                       </a:r>
                       <a:endParaRPr lang="en-US" sz="1300" dirty="0">
                         <a:latin typeface="Calibri" charset="0"/>
@@ -26675,7 +26723,7 @@
                           <a:ea typeface="Calibri" pitchFamily="34" charset="-122"/>
                           <a:cs typeface="Calibri" pitchFamily="34" charset="-120"/>
                         </a:rPr>
-                        <a:t>26 392 654</a:t>
+                        <a:t>26,392,654</a:t>
                       </a:r>
                       <a:endParaRPr lang="en-US" sz="1300" dirty="0">
                         <a:latin typeface="Calibri" charset="0"/>
@@ -26722,7 +26770,7 @@
                           <a:ea typeface="Calibri" pitchFamily="34" charset="-122"/>
                           <a:cs typeface="Calibri" pitchFamily="34" charset="-120"/>
                         </a:rPr>
-                        <a:t>26 388 897</a:t>
+                        <a:t>26,388,897</a:t>
                       </a:r>
                       <a:endParaRPr lang="en-US" sz="1300" dirty="0">
                         <a:latin typeface="Calibri" charset="0"/>
@@ -26769,7 +26817,7 @@
                           <a:ea typeface="Calibri" pitchFamily="34" charset="-122"/>
                           <a:cs typeface="Calibri" pitchFamily="34" charset="-120"/>
                         </a:rPr>
-                        <a:t>26 401 668</a:t>
+                        <a:t>26,401,668</a:t>
                       </a:r>
                       <a:endParaRPr lang="en-US" sz="1300" dirty="0">
                         <a:latin typeface="Calibri" charset="0"/>
@@ -26816,7 +26864,7 @@
                           <a:ea typeface="Calibri" pitchFamily="34" charset="-122"/>
                           <a:cs typeface="Calibri" pitchFamily="34" charset="-120"/>
                         </a:rPr>
-                        <a:t>+9 014</a:t>
+                        <a:t>+9,014</a:t>
                       </a:r>
                       <a:endParaRPr lang="en-US" sz="1300" dirty="0">
                         <a:latin typeface="Calibri" charset="0"/>
@@ -26970,7 +27018,7 @@
                 <a:ea typeface="Calibri" pitchFamily="34" charset="-122"/>
                 <a:cs typeface="Calibri" pitchFamily="34" charset="-120"/>
               </a:rPr>
-              <a:t>Varianti i ndërtimit merr një mostër tjetër ndërtimesh në çdo buxhet, prandaj totali i tij lëviz me 89 534 HV, dhe me një mostër për buxhet kjo lëvizje nuk mund të lexohet si prirje. Një lexim i mëhershëm e numëroi këtë lëvizje si kërkim që mbyll hendekun („31% e mbyllur”, një kryqëzim „rreth tridhjetë herë buxheti, rreth dhjetë orë”) dhe tërhiqet: 89 534 nga 122 577 HV që i quante mbyllje ishin mostra e ndërtimit.</a:t>
+              <a:t>Varianti i ndërtimit merr një mostër tjetër ndërtimesh në çdo buxhet, prandaj totali i tij lëviz me 89,534 HV, dhe me një mostër për buxhet kjo lëvizje nuk mund të lexohet si prirje. Një lexim i mëhershëm e numëroi këtë lëvizje si kërkim që mbyll hendekun („31% e mbyllur”, një kryqëzim „rreth tridhjetë herë buxheti, rreth dhjetë orë”) dhe tërhiqet: 89,534 nga 122,577 HV që i quante mbyllje ishin mostra e ndërtimit.</a:t>
             </a:r>
             <a:endParaRPr lang="en-US" sz="1350" dirty="0"/>
           </a:p>
@@ -32468,7 +32516,7 @@
                           <a:ea typeface="Calibri" pitchFamily="34" charset="-122"/>
                           <a:cs typeface="Calibri" pitchFamily="34" charset="-120"/>
                         </a:rPr>
-                        <a:t>1 357</a:t>
+                        <a:t>1,357</a:t>
                       </a:r>
                       <a:endParaRPr lang="en-US" sz="1300" dirty="0">
                         <a:latin typeface="Calibri" charset="0"/>
@@ -32562,7 +32610,7 @@
                           <a:ea typeface="Calibri" pitchFamily="34" charset="-122"/>
                           <a:cs typeface="Calibri" pitchFamily="34" charset="-120"/>
                         </a:rPr>
-                        <a:t>1 841 434</a:t>
+                        <a:t>1,841,434</a:t>
                       </a:r>
                       <a:endParaRPr lang="en-US" sz="1300" dirty="0">
                         <a:latin typeface="Calibri" charset="0"/>
@@ -32609,7 +32657,7 @@
                           <a:ea typeface="Calibri" pitchFamily="34" charset="-122"/>
                           <a:cs typeface="Calibri" pitchFamily="34" charset="-120"/>
                         </a:rPr>
-                        <a:t>1 829 919</a:t>
+                        <a:t>1,829,919</a:t>
                       </a:r>
                       <a:endParaRPr lang="en-US" sz="1300" dirty="0">
                         <a:latin typeface="Calibri" charset="0"/>
@@ -32656,7 +32704,7 @@
                           <a:ea typeface="Calibri" pitchFamily="34" charset="-122"/>
                           <a:cs typeface="Calibri" pitchFamily="34" charset="-120"/>
                         </a:rPr>
-                        <a:t>0,63%</a:t>
+                        <a:t>0.63%</a:t>
                       </a:r>
                       <a:endParaRPr lang="en-US" sz="1300" dirty="0">
                         <a:latin typeface="Calibri" charset="0"/>
@@ -32752,7 +32800,7 @@
                           <a:ea typeface="Calibri" pitchFamily="34" charset="-122"/>
                           <a:cs typeface="Calibri" pitchFamily="34" charset="-120"/>
                         </a:rPr>
-                        <a:t>1 399</a:t>
+                        <a:t>1,399</a:t>
                       </a:r>
                       <a:endParaRPr lang="en-US" sz="1300" dirty="0">
                         <a:latin typeface="Calibri" charset="0"/>
@@ -32846,7 +32894,7 @@
                           <a:ea typeface="Calibri" pitchFamily="34" charset="-122"/>
                           <a:cs typeface="Calibri" pitchFamily="34" charset="-120"/>
                         </a:rPr>
-                        <a:t>1 955 110</a:t>
+                        <a:t>1,955,110</a:t>
                       </a:r>
                       <a:endParaRPr lang="en-US" sz="1300" dirty="0">
                         <a:latin typeface="Calibri" charset="0"/>
@@ -32893,7 +32941,7 @@
                           <a:ea typeface="Calibri" pitchFamily="34" charset="-122"/>
                           <a:cs typeface="Calibri" pitchFamily="34" charset="-120"/>
                         </a:rPr>
-                        <a:t>1 745 122</a:t>
+                        <a:t>1,745,122</a:t>
                       </a:r>
                       <a:endParaRPr lang="en-US" sz="1300" dirty="0">
                         <a:latin typeface="Calibri" charset="0"/>
@@ -32940,7 +32988,7 @@
                           <a:ea typeface="Calibri" pitchFamily="34" charset="-122"/>
                           <a:cs typeface="Calibri" pitchFamily="34" charset="-120"/>
                         </a:rPr>
-                        <a:t>10,74%</a:t>
+                        <a:t>10.74%</a:t>
                       </a:r>
                       <a:endParaRPr lang="en-US" sz="1300" dirty="0">
                         <a:latin typeface="Calibri" charset="0"/>
@@ -33036,7 +33084,7 @@
                           <a:ea typeface="Calibri" pitchFamily="34" charset="-122"/>
                           <a:cs typeface="Calibri" pitchFamily="34" charset="-120"/>
                         </a:rPr>
-                        <a:t>2 426</a:t>
+                        <a:t>2,426</a:t>
                       </a:r>
                       <a:endParaRPr lang="en-US" sz="1300" dirty="0">
                         <a:latin typeface="Calibri" charset="0"/>
@@ -33130,7 +33178,7 @@
                           <a:ea typeface="Calibri" pitchFamily="34" charset="-122"/>
                           <a:cs typeface="Calibri" pitchFamily="34" charset="-120"/>
                         </a:rPr>
-                        <a:t>5 754 421</a:t>
+                        <a:t>5,754,421</a:t>
                       </a:r>
                       <a:endParaRPr lang="en-US" sz="1300" dirty="0">
                         <a:latin typeface="Calibri" charset="0"/>
@@ -33177,7 +33225,7 @@
                           <a:ea typeface="Calibri" pitchFamily="34" charset="-122"/>
                           <a:cs typeface="Calibri" pitchFamily="34" charset="-120"/>
                         </a:rPr>
-                        <a:t>5 493 062</a:t>
+                        <a:t>5,493,062</a:t>
                       </a:r>
                       <a:endParaRPr lang="en-US" sz="1300" dirty="0">
                         <a:latin typeface="Calibri" charset="0"/>
@@ -33224,7 +33272,7 @@
                           <a:ea typeface="Calibri" pitchFamily="34" charset="-122"/>
                           <a:cs typeface="Calibri" pitchFamily="34" charset="-120"/>
                         </a:rPr>
-                        <a:t>4,54%</a:t>
+                        <a:t>4.54%</a:t>
                       </a:r>
                       <a:endParaRPr lang="en-US" sz="1300" dirty="0">
                         <a:latin typeface="Calibri" charset="0"/>
@@ -33331,7 +33379,7 @@
                 <a:ea typeface="Calibri" pitchFamily="34" charset="-122"/>
                 <a:cs typeface="Calibri" pitchFamily="34" charset="-120"/>
               </a:rPr>
-              <a:t>brenda 0,63% të tavanit: praktikisht të zgjidhura</a:t>
+              <a:t>brenda 0.63% të tavanit: praktikisht të zgjidhura</a:t>
             </a:r>
             <a:endParaRPr lang="en-US" sz="1300" dirty="0"/>
           </a:p>
@@ -33409,7 +33457,7 @@
                 <a:ea typeface="Calibri" pitchFamily="34" charset="-122"/>
                 <a:cs typeface="Calibri" pitchFamily="34" charset="-120"/>
               </a:rPr>
-              <a:t>10,74%, kryesisht kufi i lirshëm: tw ≥ 63 heq vetëm 2 091 nga n² = 1 957 201</a:t>
+              <a:t>10.74%, kryesisht kufi i lirshëm: tw ≥ 63 heq vetëm 2,091 nga n² = 1,957,201</a:t>
             </a:r>
             <a:endParaRPr lang="en-US" sz="1300" dirty="0"/>
           </a:p>
@@ -33487,7 +33535,7 @@
                 <a:ea typeface="Calibri" pitchFamily="34" charset="-122"/>
                 <a:cs typeface="Calibri" pitchFamily="34" charset="-120"/>
               </a:rPr>
-              <a:t>një klikë me 500 kulme e ngulit tw në 499–500, pra 4,54% është hapësirë reale</a:t>
+              <a:t>një klikë me 500 kulme e ngulit tw në 499–500, pra 4.54% është hapësirë reale</a:t>
             </a:r>
             <a:endParaRPr lang="en-US" sz="1300" dirty="0"/>
           </a:p>
@@ -38046,7 +38094,7 @@
                 <a:ea typeface="Calibri" pitchFamily="34" charset="-122"/>
                 <a:cs typeface="Calibri" pitchFamily="34" charset="-120"/>
               </a:rPr>
-              <a:t>n = 1 357 · 2 280–2 282 brinjë · tw ≥ 5</a:t>
+              <a:t>n = 1,357 · 2,280–2,282 brinjë · tw ≥ 5</a:t>
             </a:r>
             <a:endParaRPr lang="en-US" sz="1250" dirty="0"/>
           </a:p>
@@ -38163,7 +38211,7 @@
                 <a:ea typeface="Calibri" pitchFamily="34" charset="-122"/>
                 <a:cs typeface="Calibri" pitchFamily="34" charset="-120"/>
               </a:rPr>
-              <a:t>n = 1 399 · 13 799 brinjë · tw ≥ 63–73</a:t>
+              <a:t>n = 1,399 · 13,799 brinjë · tw ≥ 63–73</a:t>
             </a:r>
             <a:endParaRPr lang="en-US" sz="1250" dirty="0"/>
           </a:p>
@@ -38280,7 +38328,7 @@
                 <a:ea typeface="Calibri" pitchFamily="34" charset="-122"/>
                 <a:cs typeface="Calibri" pitchFamily="34" charset="-120"/>
               </a:rPr>
-              <a:t>n = 2 426 · 253 895 brinjë · tw 499–500</a:t>
+              <a:t>n = 2,426 · 253,895 brinjë · tw 499–500</a:t>
             </a:r>
             <a:endParaRPr lang="en-US" sz="1250" dirty="0"/>
           </a:p>
@@ -39212,7 +39260,7 @@
                           <a:ea typeface="Calibri" pitchFamily="34" charset="-122"/>
                           <a:cs typeface="Calibri" pitchFamily="34" charset="-120"/>
                         </a:rPr>
-                        <a:t>1 808,0</a:t>
+                        <a:t>1,808.0</a:t>
                       </a:r>
                       <a:endParaRPr lang="en-US" sz="1250" dirty="0">
                         <a:latin typeface="Calibri" charset="0"/>
@@ -39253,7 +39301,7 @@
                           <a:ea typeface="Calibri" pitchFamily="34" charset="-122"/>
                           <a:cs typeface="Calibri" pitchFamily="34" charset="-120"/>
                         </a:rPr>
-                        <a:t>1 820,9</a:t>
+                        <a:t>1,820.9</a:t>
                       </a:r>
                       <a:endParaRPr lang="en-US" sz="1250" dirty="0">
                         <a:latin typeface="Calibri" charset="0"/>
@@ -39294,7 +39342,7 @@
                           <a:ea typeface="Calibri" pitchFamily="34" charset="-122"/>
                           <a:cs typeface="Calibri" pitchFamily="34" charset="-120"/>
                         </a:rPr>
-                        <a:t>1 827,5</a:t>
+                        <a:t>1,827.5</a:t>
                       </a:r>
                       <a:endParaRPr lang="en-US" sz="1250" dirty="0">
                         <a:latin typeface="Calibri" charset="0"/>
@@ -39340,7 +39388,7 @@
                           <a:ea typeface="Calibri" pitchFamily="34" charset="-122"/>
                           <a:cs typeface="Calibri" pitchFamily="34" charset="-120"/>
                         </a:rPr>
-                        <a:t>1 815,4</a:t>
+                        <a:t>1,815.4</a:t>
                       </a:r>
                       <a:endParaRPr lang="en-US" sz="1250" dirty="0">
                         <a:latin typeface="Calibri" charset="0"/>
@@ -39381,7 +39429,7 @@
                           <a:ea typeface="Calibri" pitchFamily="34" charset="-122"/>
                           <a:cs typeface="Calibri" pitchFamily="34" charset="-120"/>
                         </a:rPr>
-                        <a:t>1 814,5</a:t>
+                        <a:t>1,814.5</a:t>
                       </a:r>
                       <a:endParaRPr lang="en-US" sz="1250" dirty="0">
                         <a:latin typeface="Calibri" charset="0"/>
@@ -39465,7 +39513,7 @@
                           <a:ea typeface="Calibri" pitchFamily="34" charset="-122"/>
                           <a:cs typeface="Calibri" pitchFamily="34" charset="-120"/>
                         </a:rPr>
-                        <a:t>1 804,5</a:t>
+                        <a:t>1,804.5</a:t>
                       </a:r>
                       <a:endParaRPr lang="en-US" sz="1250" dirty="0">
                         <a:latin typeface="Calibri" charset="0"/>
@@ -39506,7 +39554,7 @@
                           <a:ea typeface="Calibri" pitchFamily="34" charset="-122"/>
                           <a:cs typeface="Calibri" pitchFamily="34" charset="-120"/>
                         </a:rPr>
-                        <a:t>1 818,7</a:t>
+                        <a:t>1,818.7</a:t>
                       </a:r>
                       <a:endParaRPr lang="en-US" sz="1250" dirty="0">
                         <a:latin typeface="Calibri" charset="0"/>
@@ -39547,7 +39595,7 @@
                           <a:ea typeface="Calibri" pitchFamily="34" charset="-122"/>
                           <a:cs typeface="Calibri" pitchFamily="34" charset="-120"/>
                         </a:rPr>
-                        <a:t>1 816,9</a:t>
+                        <a:t>1,816.9</a:t>
                       </a:r>
                       <a:endParaRPr lang="en-US" sz="1250" dirty="0">
                         <a:latin typeface="Calibri" charset="0"/>
@@ -39588,7 +39636,7 @@
                           <a:ea typeface="Calibri" pitchFamily="34" charset="-122"/>
                           <a:cs typeface="Calibri" pitchFamily="34" charset="-120"/>
                         </a:rPr>
-                        <a:t>1 819,9</a:t>
+                        <a:t>1,819.9</a:t>
                       </a:r>
                       <a:endParaRPr lang="en-US" sz="1250" dirty="0">
                         <a:latin typeface="Calibri" charset="0"/>
@@ -39634,7 +39682,7 @@
                           <a:ea typeface="Calibri" pitchFamily="34" charset="-122"/>
                           <a:cs typeface="Calibri" pitchFamily="34" charset="-120"/>
                         </a:rPr>
-                        <a:t>1 818,5</a:t>
+                        <a:t>1,818.5</a:t>
                       </a:r>
                       <a:endParaRPr lang="en-US" sz="1250" dirty="0">
                         <a:latin typeface="Calibri" charset="0"/>
@@ -39718,7 +39766,7 @@
                           <a:ea typeface="Calibri" pitchFamily="34" charset="-122"/>
                           <a:cs typeface="Calibri" pitchFamily="34" charset="-120"/>
                         </a:rPr>
-                        <a:t>1 803,8</a:t>
+                        <a:t>1,803.8</a:t>
                       </a:r>
                       <a:endParaRPr lang="en-US" sz="1250" dirty="0">
                         <a:latin typeface="Calibri" charset="0"/>
@@ -39759,7 +39807,7 @@
                           <a:ea typeface="Calibri" pitchFamily="34" charset="-122"/>
                           <a:cs typeface="Calibri" pitchFamily="34" charset="-120"/>
                         </a:rPr>
-                        <a:t>1 820,2</a:t>
+                        <a:t>1,820.2</a:t>
                       </a:r>
                       <a:endParaRPr lang="en-US" sz="1250" dirty="0">
                         <a:latin typeface="Calibri" charset="0"/>
@@ -39805,7 +39853,7 @@
                           <a:ea typeface="Calibri" pitchFamily="34" charset="-122"/>
                           <a:cs typeface="Calibri" pitchFamily="34" charset="-120"/>
                         </a:rPr>
-                        <a:t>1 817,5</a:t>
+                        <a:t>1,817.5</a:t>
                       </a:r>
                       <a:endParaRPr lang="en-US" sz="1250" dirty="0">
                         <a:latin typeface="Calibri" charset="0"/>
@@ -39846,7 +39894,7 @@
                           <a:ea typeface="Calibri" pitchFamily="34" charset="-122"/>
                           <a:cs typeface="Calibri" pitchFamily="34" charset="-120"/>
                         </a:rPr>
-                        <a:t>1 820,0</a:t>
+                        <a:t>1,820.0</a:t>
                       </a:r>
                       <a:endParaRPr lang="en-US" sz="1250" dirty="0">
                         <a:latin typeface="Calibri" charset="0"/>
@@ -39887,7 +39935,7 @@
                           <a:ea typeface="Calibri" pitchFamily="34" charset="-122"/>
                           <a:cs typeface="Calibri" pitchFamily="34" charset="-120"/>
                         </a:rPr>
-                        <a:t>1 819,9</a:t>
+                        <a:t>1,819.9</a:t>
                       </a:r>
                       <a:endParaRPr lang="en-US" sz="1250" dirty="0">
                         <a:latin typeface="Calibri" charset="0"/>
@@ -39971,7 +40019,7 @@
                           <a:ea typeface="Calibri" pitchFamily="34" charset="-122"/>
                           <a:cs typeface="Calibri" pitchFamily="34" charset="-120"/>
                         </a:rPr>
-                        <a:t>1 804,4</a:t>
+                        <a:t>1,804.4</a:t>
                       </a:r>
                       <a:endParaRPr lang="en-US" sz="1250" dirty="0">
                         <a:latin typeface="Calibri" charset="0"/>
@@ -40012,7 +40060,7 @@
                           <a:ea typeface="Calibri" pitchFamily="34" charset="-122"/>
                           <a:cs typeface="Calibri" pitchFamily="34" charset="-120"/>
                         </a:rPr>
-                        <a:t>1 817,6</a:t>
+                        <a:t>1,817.6</a:t>
                       </a:r>
                       <a:endParaRPr lang="en-US" sz="1250" dirty="0">
                         <a:latin typeface="Calibri" charset="0"/>
@@ -40053,7 +40101,7 @@
                           <a:ea typeface="Calibri" pitchFamily="34" charset="-122"/>
                           <a:cs typeface="Calibri" pitchFamily="34" charset="-120"/>
                         </a:rPr>
-                        <a:t>1 816,5</a:t>
+                        <a:t>1,816.5</a:t>
                       </a:r>
                       <a:endParaRPr lang="en-US" sz="1250" dirty="0">
                         <a:latin typeface="Calibri" charset="0"/>
@@ -40094,7 +40142,7 @@
                           <a:ea typeface="Calibri" pitchFamily="34" charset="-122"/>
                           <a:cs typeface="Calibri" pitchFamily="34" charset="-120"/>
                         </a:rPr>
-                        <a:t>1 819,9</a:t>
+                        <a:t>1,819.9</a:t>
                       </a:r>
                       <a:endParaRPr lang="en-US" sz="1250" dirty="0">
                         <a:latin typeface="Calibri" charset="0"/>
@@ -40140,7 +40188,7 @@
                           <a:ea typeface="Calibri" pitchFamily="34" charset="-122"/>
                           <a:cs typeface="Calibri" pitchFamily="34" charset="-120"/>
                         </a:rPr>
-                        <a:t>1 819,9</a:t>
+                        <a:t>1,819.9</a:t>
                       </a:r>
                       <a:endParaRPr lang="en-US" sz="1250" dirty="0">
                         <a:latin typeface="Calibri" charset="0"/>
@@ -40282,7 +40330,7 @@
                           <a:ea typeface="Calibri" pitchFamily="34" charset="-122"/>
                           <a:cs typeface="Calibri" pitchFamily="34" charset="-120"/>
                         </a:rPr>
-                        <a:t>1 663,1</a:t>
+                        <a:t>1,663.1</a:t>
                       </a:r>
                       <a:endParaRPr lang="en-US" sz="1250" dirty="0">
                         <a:latin typeface="Calibri" charset="0"/>
@@ -40323,7 +40371,7 @@
                           <a:ea typeface="Calibri" pitchFamily="34" charset="-122"/>
                           <a:cs typeface="Calibri" pitchFamily="34" charset="-120"/>
                         </a:rPr>
-                        <a:t>1 682,4</a:t>
+                        <a:t>1,682.4</a:t>
                       </a:r>
                       <a:endParaRPr lang="en-US" sz="1250" dirty="0">
                         <a:latin typeface="Calibri" charset="0"/>
@@ -40369,7 +40417,7 @@
                           <a:ea typeface="Calibri" pitchFamily="34" charset="-122"/>
                           <a:cs typeface="Calibri" pitchFamily="34" charset="-120"/>
                         </a:rPr>
-                        <a:t>1 566,5</a:t>
+                        <a:t>1,566.5</a:t>
                       </a:r>
                       <a:endParaRPr lang="en-US" sz="1250" dirty="0">
                         <a:latin typeface="Calibri" charset="0"/>
@@ -40410,7 +40458,7 @@
                           <a:ea typeface="Calibri" pitchFamily="34" charset="-122"/>
                           <a:cs typeface="Calibri" pitchFamily="34" charset="-120"/>
                         </a:rPr>
-                        <a:t>1 615,2</a:t>
+                        <a:t>1,615.2</a:t>
                       </a:r>
                       <a:endParaRPr lang="en-US" sz="1250" dirty="0">
                         <a:latin typeface="Calibri" charset="0"/>
@@ -40451,7 +40499,7 @@
                           <a:ea typeface="Calibri" pitchFamily="34" charset="-122"/>
                           <a:cs typeface="Calibri" pitchFamily="34" charset="-120"/>
                         </a:rPr>
-                        <a:t>1 606,4</a:t>
+                        <a:t>1,606.4</a:t>
                       </a:r>
                       <a:endParaRPr lang="en-US" sz="1250" dirty="0">
                         <a:latin typeface="Calibri" charset="0"/>
@@ -40535,7 +40583,7 @@
                           <a:ea typeface="Calibri" pitchFamily="34" charset="-122"/>
                           <a:cs typeface="Calibri" pitchFamily="34" charset="-120"/>
                         </a:rPr>
-                        <a:t>1 586,3</a:t>
+                        <a:t>1,586.3</a:t>
                       </a:r>
                       <a:endParaRPr lang="en-US" sz="1250" dirty="0">
                         <a:latin typeface="Calibri" charset="0"/>
@@ -40576,7 +40624,7 @@
                           <a:ea typeface="Calibri" pitchFamily="34" charset="-122"/>
                           <a:cs typeface="Calibri" pitchFamily="34" charset="-120"/>
                         </a:rPr>
-                        <a:t>1 592,3</a:t>
+                        <a:t>1,592.3</a:t>
                       </a:r>
                       <a:endParaRPr lang="en-US" sz="1250" dirty="0">
                         <a:latin typeface="Calibri" charset="0"/>
@@ -40622,7 +40670,7 @@
                           <a:ea typeface="Calibri" pitchFamily="34" charset="-122"/>
                           <a:cs typeface="Calibri" pitchFamily="34" charset="-120"/>
                         </a:rPr>
-                        <a:t>1 484,0</a:t>
+                        <a:t>1,484.0</a:t>
                       </a:r>
                       <a:endParaRPr lang="en-US" sz="1250" dirty="0">
                         <a:latin typeface="Calibri" charset="0"/>
@@ -40663,7 +40711,7 @@
                           <a:ea typeface="Calibri" pitchFamily="34" charset="-122"/>
                           <a:cs typeface="Calibri" pitchFamily="34" charset="-120"/>
                         </a:rPr>
-                        <a:t>1 564,0</a:t>
+                        <a:t>1,564.0</a:t>
                       </a:r>
                       <a:endParaRPr lang="en-US" sz="1250" dirty="0">
                         <a:latin typeface="Calibri" charset="0"/>
@@ -40704,7 +40752,7 @@
                           <a:ea typeface="Calibri" pitchFamily="34" charset="-122"/>
                           <a:cs typeface="Calibri" pitchFamily="34" charset="-120"/>
                         </a:rPr>
-                        <a:t>1 554,1</a:t>
+                        <a:t>1,554.1</a:t>
                       </a:r>
                       <a:endParaRPr lang="en-US" sz="1250" dirty="0">
                         <a:latin typeface="Calibri" charset="0"/>
@@ -40788,7 +40836,7 @@
                           <a:ea typeface="Calibri" pitchFamily="34" charset="-122"/>
                           <a:cs typeface="Calibri" pitchFamily="34" charset="-120"/>
                         </a:rPr>
-                        <a:t>1 582,9</a:t>
+                        <a:t>1,582.9</a:t>
                       </a:r>
                       <a:endParaRPr lang="en-US" sz="1250" dirty="0">
                         <a:latin typeface="Calibri" charset="0"/>
@@ -40829,7 +40877,7 @@
                           <a:ea typeface="Calibri" pitchFamily="34" charset="-122"/>
                           <a:cs typeface="Calibri" pitchFamily="34" charset="-120"/>
                         </a:rPr>
-                        <a:t>1 597,5</a:t>
+                        <a:t>1,597.5</a:t>
                       </a:r>
                       <a:endParaRPr lang="en-US" sz="1250" dirty="0">
                         <a:latin typeface="Calibri" charset="0"/>
@@ -40875,7 +40923,7 @@
                           <a:ea typeface="Calibri" pitchFamily="34" charset="-122"/>
                           <a:cs typeface="Calibri" pitchFamily="34" charset="-120"/>
                         </a:rPr>
-                        <a:t>1 473,4</a:t>
+                        <a:t>1,473.4</a:t>
                       </a:r>
                       <a:endParaRPr lang="en-US" sz="1250" dirty="0">
                         <a:latin typeface="Calibri" charset="0"/>
@@ -40916,7 +40964,7 @@
                           <a:ea typeface="Calibri" pitchFamily="34" charset="-122"/>
                           <a:cs typeface="Calibri" pitchFamily="34" charset="-120"/>
                         </a:rPr>
-                        <a:t>1 562,1</a:t>
+                        <a:t>1,562.1</a:t>
                       </a:r>
                       <a:endParaRPr lang="en-US" sz="1250" dirty="0">
                         <a:latin typeface="Calibri" charset="0"/>
@@ -40957,7 +41005,7 @@
                           <a:ea typeface="Calibri" pitchFamily="34" charset="-122"/>
                           <a:cs typeface="Calibri" pitchFamily="34" charset="-120"/>
                         </a:rPr>
-                        <a:t>1 558,5</a:t>
+                        <a:t>1,558.5</a:t>
                       </a:r>
                       <a:endParaRPr lang="en-US" sz="1250" dirty="0">
                         <a:latin typeface="Calibri" charset="0"/>
@@ -41099,7 +41147,7 @@
                           <a:ea typeface="Calibri" pitchFamily="34" charset="-122"/>
                           <a:cs typeface="Calibri" pitchFamily="34" charset="-120"/>
                         </a:rPr>
-                        <a:t>5 329,4</a:t>
+                        <a:t>5,329.4</a:t>
                       </a:r>
                       <a:endParaRPr lang="en-US" sz="1250" dirty="0">
                         <a:latin typeface="Calibri" charset="0"/>
@@ -41145,7 +41193,7 @@
                           <a:ea typeface="Calibri" pitchFamily="34" charset="-122"/>
                           <a:cs typeface="Calibri" pitchFamily="34" charset="-120"/>
                         </a:rPr>
-                        <a:t>4 836,8</a:t>
+                        <a:t>4,836.8</a:t>
                       </a:r>
                       <a:endParaRPr lang="en-US" sz="1250" dirty="0">
                         <a:latin typeface="Calibri" charset="0"/>
@@ -41227,7 +41275,7 @@
                           <a:ea typeface="Calibri" pitchFamily="34" charset="-122"/>
                           <a:cs typeface="Calibri" pitchFamily="34" charset="-120"/>
                         </a:rPr>
-                        <a:t>4 804,4</a:t>
+                        <a:t>4,804.4</a:t>
                       </a:r>
                       <a:endParaRPr lang="en-US" sz="1250" dirty="0">
                         <a:latin typeface="Calibri" charset="0"/>
@@ -41268,7 +41316,7 @@
                           <a:ea typeface="Calibri" pitchFamily="34" charset="-122"/>
                           <a:cs typeface="Calibri" pitchFamily="34" charset="-120"/>
                         </a:rPr>
-                        <a:t>4 793,7</a:t>
+                        <a:t>4,793.7</a:t>
                       </a:r>
                       <a:endParaRPr lang="en-US" sz="1250" dirty="0">
                         <a:latin typeface="Calibri" charset="0"/>
@@ -41352,7 +41400,7 @@
                           <a:ea typeface="Calibri" pitchFamily="34" charset="-122"/>
                           <a:cs typeface="Calibri" pitchFamily="34" charset="-120"/>
                         </a:rPr>
-                        <a:t>5 167,2</a:t>
+                        <a:t>5,167.2</a:t>
                       </a:r>
                       <a:endParaRPr lang="en-US" sz="1250" dirty="0">
                         <a:latin typeface="Calibri" charset="0"/>
@@ -41398,7 +41446,7 @@
                           <a:ea typeface="Calibri" pitchFamily="34" charset="-122"/>
                           <a:cs typeface="Calibri" pitchFamily="34" charset="-120"/>
                         </a:rPr>
-                        <a:t>4 797,9</a:t>
+                        <a:t>4,797.9</a:t>
                       </a:r>
                       <a:endParaRPr lang="en-US" sz="1250" dirty="0">
                         <a:latin typeface="Calibri" charset="0"/>
@@ -41480,7 +41528,7 @@
                           <a:ea typeface="Calibri" pitchFamily="34" charset="-122"/>
                           <a:cs typeface="Calibri" pitchFamily="34" charset="-120"/>
                         </a:rPr>
-                        <a:t>4 795,6</a:t>
+                        <a:t>4,795.6</a:t>
                       </a:r>
                       <a:endParaRPr lang="en-US" sz="1250" dirty="0">
                         <a:latin typeface="Calibri" charset="0"/>
@@ -41521,7 +41569,7 @@
                           <a:ea typeface="Calibri" pitchFamily="34" charset="-122"/>
                           <a:cs typeface="Calibri" pitchFamily="34" charset="-120"/>
                         </a:rPr>
-                        <a:t>4 793,7</a:t>
+                        <a:t>4,793.7</a:t>
                       </a:r>
                       <a:endParaRPr lang="en-US" sz="1250" dirty="0">
                         <a:latin typeface="Calibri" charset="0"/>
@@ -41611,7 +41659,7 @@
                           <a:ea typeface="Calibri" pitchFamily="34" charset="-122"/>
                           <a:cs typeface="Calibri" pitchFamily="34" charset="-120"/>
                         </a:rPr>
-                        <a:t>5 203,6</a:t>
+                        <a:t>5,203.6</a:t>
                       </a:r>
                       <a:endParaRPr lang="en-US" sz="1250" dirty="0">
                         <a:latin typeface="Calibri" charset="0"/>
@@ -41663,7 +41711,7 @@
                           <a:ea typeface="Calibri" pitchFamily="34" charset="-122"/>
                           <a:cs typeface="Calibri" pitchFamily="34" charset="-120"/>
                         </a:rPr>
-                        <a:t>4 800,0</a:t>
+                        <a:t>4,800.0</a:t>
                       </a:r>
                       <a:endParaRPr lang="en-US" sz="1250" dirty="0">
                         <a:latin typeface="Calibri" charset="0"/>
@@ -41757,7 +41805,7 @@
                           <a:ea typeface="Calibri" pitchFamily="34" charset="-122"/>
                           <a:cs typeface="Calibri" pitchFamily="34" charset="-120"/>
                         </a:rPr>
-                        <a:t>4 795,4</a:t>
+                        <a:t>4,795.4</a:t>
                       </a:r>
                       <a:endParaRPr lang="en-US" sz="1250" dirty="0">
                         <a:latin typeface="Calibri" charset="0"/>
@@ -41804,7 +41852,7 @@
                           <a:ea typeface="Calibri" pitchFamily="34" charset="-122"/>
                           <a:cs typeface="Calibri" pitchFamily="34" charset="-120"/>
                         </a:rPr>
-                        <a:t>4 793,7</a:t>
+                        <a:t>4,793.7</a:t>
                       </a:r>
                       <a:endParaRPr lang="en-US" sz="1250" dirty="0">
                         <a:latin typeface="Calibri" charset="0"/>
@@ -41872,7 +41920,7 @@
                 <a:ea typeface="Calibri" pitchFamily="34" charset="-122"/>
                 <a:cs typeface="Calibri" pitchFamily="34" charset="-120"/>
               </a:rPr>
-              <a:t>Hipervolum ×1 000, më i miri nga 3 seed-a, 1 200 s secili. Me të trasha: fituesi i rreshtit. — asnjë pikë e lejuar në asnjë seed.</a:t>
+              <a:t>Hipervolum ×1,000, më i miri nga 3 seed-a, 1,200 s secili. Me të trasha: fituesi i rreshtit. — asnjë pikë e lejuar në asnjë seed.</a:t>
             </a:r>
             <a:endParaRPr lang="en-US" sz="1050" dirty="0"/>
           </a:p>
@@ -41936,7 +41984,7 @@
                 <a:ea typeface="Calibri" pitchFamily="34" charset="-122"/>
                 <a:cs typeface="Calibri" pitchFamily="34" charset="-120"/>
               </a:rPr>
-              <a:t>1 200 s për ekzekutim, tre seed-a; një bërthamë CPU secili, Spacekangaroos në një GPU T4; çdo përgjigje rivlerësohet nga një vlerësues i kontrolluar me kodin e ESA-s.</a:t>
+              <a:t>1,200 s për ekzekutim, tre seed-a; një bërthamë CPU secili, Spacekangaroos në një GPU T4; çdo përgjigje rivlerësohet nga një vlerësues i kontrolluar me kodin e ESA-s.</a:t>
             </a:r>
             <a:endParaRPr lang="en-US" sz="1350" dirty="0"/>
           </a:p>
@@ -44028,7 +44076,7 @@
                 <a:ea typeface="Calibri" pitchFamily="34" charset="-122"/>
                 <a:cs typeface="Calibri" pitchFamily="34" charset="-120"/>
               </a:rPr>
-              <a:t>275 225 HV diferencë</a:t>
+              <a:t>275,225 HV diferencë</a:t>
             </a:r>
             <a:endParaRPr lang="en-US" sz="1150" dirty="0"/>
           </a:p>
@@ -44194,7 +44242,7 @@
                 <a:ea typeface="Calibri" pitchFamily="34" charset="-122"/>
                 <a:cs typeface="Calibri" pitchFamily="34" charset="-120"/>
               </a:rPr>
-              <a:t>1 234 HV diferencë</a:t>
+              <a:t>1,234 HV diferencë</a:t>
             </a:r>
             <a:endParaRPr lang="en-US" sz="1150" dirty="0"/>
           </a:p>
@@ -44233,7 +44281,7 @@
                 <a:ea typeface="Calibri" pitchFamily="34" charset="-122"/>
                 <a:cs typeface="Calibri" pitchFamily="34" charset="-120"/>
               </a:rPr>
-              <a:t>1,50M HV</a:t>
+              <a:t>1.50M HV</a:t>
             </a:r>
             <a:endParaRPr lang="en-US" sz="1000" dirty="0"/>
           </a:p>
@@ -44272,7 +44320,7 @@
                 <a:ea typeface="Calibri" pitchFamily="34" charset="-122"/>
                 <a:cs typeface="Calibri" pitchFamily="34" charset="-120"/>
               </a:rPr>
-              <a:t>1,83M HV</a:t>
+              <a:t>1.83M HV</a:t>
             </a:r>
             <a:endParaRPr lang="en-US" sz="1000" dirty="0"/>
           </a:p>
@@ -46644,7 +46692,7 @@
                 <a:ea typeface="Calibri" pitchFamily="34" charset="-122"/>
                 <a:cs typeface="Calibri" pitchFamily="34" charset="-120"/>
               </a:rPr>
-              <a:t>e vëzhguar: 21 519 HV</a:t>
+              <a:t>e vëzhguar: 21,519 HV</a:t>
             </a:r>
             <a:endParaRPr lang="en-US" sz="1200" dirty="0"/>
           </a:p>
@@ -46683,7 +46731,7 @@
                 <a:ea typeface="Calibri" pitchFamily="34" charset="-122"/>
                 <a:cs typeface="Calibri" pitchFamily="34" charset="-120"/>
               </a:rPr>
-              <a:t>vetëm 4,6% e 100 000 rishpërndarjeve e lëvizin totalin kaq larg</a:t>
+              <a:t>vetëm 4.6% e 100,000 rishpërndarjeve e lëvizin totalin kaq larg</a:t>
             </a:r>
             <a:endParaRPr lang="en-US" sz="1100" dirty="0"/>
           </a:p>
@@ -46761,7 +46809,7 @@
                 <a:ea typeface="Century Schoolbook" pitchFamily="34" charset="-122"/>
                 <a:cs typeface="Century Schoolbook" pitchFamily="34" charset="-120"/>
               </a:rPr>
-              <a:t>Zhurma varet nga metoda dhe instanca (9 deri në 281 976 HV për tre seed-a): asnjë prag i vetëm s’gjykon dot çdo rresht.</a:t>
+              <a:t>Zhurma varet nga metoda dhe instanca (9 deri në 281,976 HV për tre seed-a): asnjë prag i vetëm s’gjykon dot çdo rresht.</a:t>
             </a:r>
             <a:endParaRPr lang="en-US" sz="1350" dirty="0"/>
           </a:p>

--- a/SpOC3-Dekompozime-Torso-AlbShkenca2026-SQ.pptx
+++ b/SpOC3-Dekompozime-Torso-AlbShkenca2026-SQ.pptx
@@ -127,7 +127,7 @@
   <p:extLst>
     <p:ext uri="{521415D9-36F7-43E2-AB2F-B90AF26B5E84}">
       <p14:sectionLst xmlns:p14="http://schemas.microsoft.com/office/powerpoint/2010/main">
-        <p14:section name="Kumtesa" id="{1029733d-8089-38b1-7154-46a661a39ddc}">
+        <p14:section name="Kumtesa" id="{091b15f3-26a8-caa2-f17e-dcde8494b9d0}">
           <p14:sldIdLst>
             <p14:sldId id="256"/>
             <p14:sldId id="257"/>
@@ -143,16 +143,20 @@
             <p14:sldId id="267"/>
             <p14:sldId id="268"/>
             <p14:sldId id="269"/>
-            <p14:sldId id="270"/>
           </p14:sldIdLst>
         </p14:section>
-        <p14:section name="Shtojcë" id="{12897e26-91c0-d4ae-9b9f-1a215a7c38dd}">
+        <p14:section name="Shtojcë" id="{20045379-0844-60b6-4a54-ed355085dbb3}">
           <p14:sldIdLst>
+            <p14:sldId id="270"/>
             <p14:sldId id="271"/>
             <p14:sldId id="272"/>
             <p14:sldId id="273"/>
             <p14:sldId id="274"/>
             <p14:sldId id="275"/>
+          </p14:sldIdLst>
+        </p14:section>
+        <p14:section name="Mbyllja" id="{324e7a06-7ff4-deed-6789-baaad9c589bd}">
+          <p14:sldIdLst>
             <p14:sldId id="276"/>
           </p14:sldIdLst>
         </p14:section>
@@ -1088,7 +1092,7 @@
           <a:p>
             <a:r>
               <a:rPr lang="en-US" dirty="0"/>
-              <a:t>Lëre këtë slajd gjatë diskutimit; gjashtë shifrat janë ato që ka më shumë gjasa të kundërshtohen. Pas tij vijnë slajdet e shtojcës: gabimet që kapa, protokolli, çdo seed, pse familja e rrallë është njëpërmasore, gjetjet për operatorët dhe krahasimi i plotë i buxheteve.</a:t>
+              <a:t>Shtojcë. Të katër gabimet ishin të miat ose në kod që e përfshiva unë, dhe asnjë nuk u kap nga një test.</a:t>
             </a:r>
             <a:endParaRPr lang="en-US" dirty="0"/>
           </a:p>
@@ -1176,7 +1180,7 @@
           <a:p>
             <a:r>
               <a:rPr lang="en-US" dirty="0"/>
-              <a:t>Shtojcë. Të katër gabimet ishin të miat ose në kod që e përfshiva unë, dhe asnjë nuk u kap nga një test.</a:t>
+              <a:t>Shtojcë, për pyetje rreth drejtësisë së krahasimit. Nëse pyetin si e dimë që vlerësimi është i ESA-s: harness/esa_crosscheck.py ekzekuton skedarin e publikuar të vlerësimit të ESA-s pranë tonit; çdo kontroll është identik, dhe të tre grafet e garës janë identikë, bajt për bajt, me ata të ESA-s.</a:t>
             </a:r>
             <a:endParaRPr lang="en-US" dirty="0"/>
           </a:p>
@@ -1264,7 +1268,7 @@
           <a:p>
             <a:r>
               <a:rPr lang="en-US" dirty="0"/>
-              <a:t>Shtojcë, për pyetje rreth drejtësisë së krahasimit. Nëse pyetin si e dimë që vlerësimi është i ESA-s: harness/esa_crosscheck.py ekzekuton skedarin e publikuar të vlerësimit të ESA-s pranë tonit; çdo kontroll është identik, dhe të tre grafet e garës janë identikë, bajt për bajt, me ata të ESA-s.</a:t>
+              <a:t>Shtojcë. Çdo numër në slajdin e vendimeve mund të lexohet nga kjo tabelë.</a:t>
             </a:r>
             <a:endParaRPr lang="en-US" dirty="0"/>
           </a:p>
@@ -1352,7 +1356,7 @@
           <a:p>
             <a:r>
               <a:rPr lang="en-US" dirty="0"/>
-              <a:t>Shtojcë. Çdo numër në slajdin e vendimeve mund të lexohet nga kjo tabelë.</a:t>
+              <a:t>Shtojcë. Dy paragrafët e parë janë derivim, jo matje.</a:t>
             </a:r>
             <a:endParaRPr lang="en-US" dirty="0"/>
           </a:p>
@@ -1440,7 +1444,7 @@
           <a:p>
             <a:r>
               <a:rPr lang="en-US" dirty="0"/>
-              <a:t>Shtojcë. Dy paragrafët e parë janë derivim, jo matje.</a:t>
+              <a:t>Shtojcë, për pyetje rreth operatorëve të kërkimit. Burimet: harness/delta_check.log për saktësinë, harness/speed.log për përshpejtimin (matja e autorit: 1.70× të rrallat, 1.88× të mesmet, 1.89× të dendurat; një rimatje e pavarur në një makinë tjetër dha 1.76×).</a:t>
             </a:r>
             <a:endParaRPr lang="en-US" dirty="0"/>
           </a:p>
@@ -1616,7 +1620,7 @@
           <a:p>
             <a:r>
               <a:rPr lang="en-US" dirty="0"/>
-              <a:t>Shtojcë, për pyetje rreth operatorëve të kërkimit. Burimet: harness/delta_check.log për saktësinë, harness/speed.log për përshpejtimin (matja e autorit: 1.70× të rrallat, 1.88× të mesmet, 1.89× të dendurat; një rimatje e pavarur në një makinë tjetër dha 1.76×).</a:t>
+              <a:t>Shtojcë. Epërsia matet kundër mesatares së ndërtimit mbi tre buxhetet.</a:t>
             </a:r>
             <a:endParaRPr lang="en-US" dirty="0"/>
           </a:p>
@@ -1704,7 +1708,7 @@
           <a:p>
             <a:r>
               <a:rPr lang="en-US" dirty="0"/>
-              <a:t>Shtojcë. Epërsia matet kundër mesatares së ndërtimit mbi tre buxhetet.</a:t>
+              <a:t>Lëre këtë slajd gjatë diskutimit; gjashtë shifrat janë ato që ka më shumë gjasa të kundërshtohen. Ky është slajdi i fundit. Slajdet e shtojcës janë menjëherë para tij dhe fshihen gjatë prezantimit, kështu që nga kërkesat kalon drejt këtu; për të hapur njërin gjatë pyetjeve, shkruaj numrin e tij dhe shtyp Enter: 15 gabimet që kapa, 16 protokolli, 17 çdo seed, 18 pse familja e rrallë është njëpërmasore, 19 gjetjet për operatorët, 20 krahasimi i plotë i buxheteve.</a:t>
             </a:r>
             <a:endParaRPr lang="en-US" dirty="0"/>
           </a:p>
@@ -13080,7 +13084,7 @@
 </file>
 
 <file path=ppt/slides/slide15.xml><?xml version="1.0" encoding="utf-8"?>
-<p:sld xmlns:a="http://schemas.openxmlformats.org/drawingml/2006/main" xmlns:r="http://schemas.openxmlformats.org/officeDocument/2006/relationships" xmlns:p="http://schemas.openxmlformats.org/presentationml/2006/main">
+<p:sld xmlns:a="http://schemas.openxmlformats.org/drawingml/2006/main" xmlns:r="http://schemas.openxmlformats.org/officeDocument/2006/relationships" xmlns:p="http://schemas.openxmlformats.org/presentationml/2006/main" show="0">
   <p:cSld name="Slide 15">
     <p:spTree>
       <p:nvGrpSpPr>
@@ -13096,40 +13100,98 @@
           <a:chExt cx="0" cy="0"/>
         </a:xfrm>
       </p:grpSpPr>
-      <p:pic>
-        <p:nvPicPr>
-          <p:cNvPr id="2" name="Image 0" descr="Universiteti i Prishtinës">    </p:cNvPr>
-          <p:cNvPicPr>
-            <a:picLocks noChangeAspect="1"/>
-          </p:cNvPicPr>
-          <p:nvPr/>
-        </p:nvPicPr>
-        <p:blipFill>
-          <a:blip r:embed="rId1"/>
-          <a:stretch>
-            <a:fillRect/>
-          </a:stretch>
-        </p:blipFill>
-        <p:spPr>
-          <a:xfrm>
-            <a:off x="640080" y="274320"/>
-            <a:ext cx="713232" cy="713232"/>
-          </a:xfrm>
-          <a:prstGeom prst="rect">
-            <a:avLst/>
-          </a:prstGeom>
-        </p:spPr>
-      </p:pic>
-      <p:sp>
-        <p:nvSpPr>
-          <p:cNvPr id="3" name="Text 0"/>
+      <p:sp>
+        <p:nvSpPr>
+          <p:cNvPr id="2" name="Text 1"/>
+          <p:cNvSpPr/>
+          <p:nvPr>
+            <p:ph idx="101" type="body" hasCustomPrompt="1"/>
+          </p:nvPr>
+        </p:nvSpPr>
+        <p:spPr>
+          <a:xfrm>
+            <a:off x="640080" y="402336"/>
+            <a:ext cx="10911535" cy="256032"/>
+          </a:xfrm>
+          <a:prstGeom prst="rect">
+            <a:avLst/>
+          </a:prstGeom>
+          <a:noFill/>
+          <a:ln/>
+        </p:spPr>
+        <p:txBody>
+          <a:bodyPr wrap="square" lIns="0" tIns="0" rIns="0" bIns="0" rtlCol="0" anchor="t"/>
+          <a:lstStyle/>
+          <a:p>
+            <a:pPr algn="l" indent="0" marL="0">
+              <a:buNone/>
+            </a:pPr>
+            <a:r>
+              <a:rPr lang="en-US" sz="1050" b="1" spc="180" kern="0" dirty="0">
+                <a:solidFill>
+                  <a:srgbClr val="9AA6B6"/>
+                </a:solidFill>
+                <a:latin typeface="Calibri" pitchFamily="34" charset="0"/>
+                <a:ea typeface="Calibri" pitchFamily="34" charset="-122"/>
+                <a:cs typeface="Calibri" pitchFamily="34" charset="-120"/>
+              </a:rPr>
+              <a:t>SHTOJCË</a:t>
+            </a:r>
+            <a:endParaRPr lang="en-US" sz="1050" dirty="0"/>
+          </a:p>
+        </p:txBody>
+      </p:sp>
+      <p:sp>
+        <p:nvSpPr>
+          <p:cNvPr id="3" name="Text 1"/>
+          <p:cNvSpPr/>
+          <p:nvPr>
+            <p:ph idx="102" type="title" hasCustomPrompt="1"/>
+          </p:nvPr>
+        </p:nvSpPr>
+        <p:spPr>
+          <a:xfrm>
+            <a:off x="640080" y="676656"/>
+            <a:ext cx="10911535" cy="868680"/>
+          </a:xfrm>
+          <a:prstGeom prst="rect">
+            <a:avLst/>
+          </a:prstGeom>
+          <a:noFill/>
+          <a:ln/>
+        </p:spPr>
+        <p:txBody>
+          <a:bodyPr wrap="square" lIns="0" tIns="0" rIns="0" bIns="0" rtlCol="0" anchor="t"/>
+          <a:lstStyle/>
+          <a:p>
+            <a:pPr algn="l" indent="0" marL="0">
+              <a:buNone/>
+            </a:pPr>
+            <a:r>
+              <a:rPr lang="en-US" sz="2700" dirty="0">
+                <a:solidFill>
+                  <a:srgbClr val="E8ECF2"/>
+                </a:solidFill>
+                <a:latin typeface="Century Schoolbook" pitchFamily="34" charset="0"/>
+                <a:ea typeface="Century Schoolbook" pitchFamily="34" charset="-122"/>
+                <a:cs typeface="Century Schoolbook" pitchFamily="34" charset="-120"/>
+              </a:rPr>
+              <a:t>Katër mënyra si e gënjeva veten dhe si u kap secila</a:t>
+            </a:r>
+            <a:endParaRPr lang="en-US" sz="2700" dirty="0"/>
+          </a:p>
+        </p:txBody>
+      </p:sp>
+      <p:sp>
+        <p:nvSpPr>
+          <p:cNvPr id="4" name="Text 2"/>
           <p:cNvSpPr txBox="1"/>
           <p:nvPr/>
         </p:nvSpPr>
         <p:spPr>
           <a:xfrm>
-            <a:off x="640080" y="1143000"/>
-            <a:ext cx="5943600" cy="777240"/>
+            <a:off x="640080" y="1810512"/>
+            <a:ext cx="411480" cy="457200"/>
           </a:xfrm>
           <a:prstGeom prst="rect">
             <a:avLst/>
@@ -13145,30 +13207,30 @@
               <a:buNone/>
             </a:pPr>
             <a:r>
-              <a:rPr lang="en-US" sz="4400" dirty="0">
-                <a:solidFill>
-                  <a:srgbClr val="FFFFFF"/>
+              <a:rPr lang="en-US" sz="2200" dirty="0">
+                <a:solidFill>
+                  <a:srgbClr val="3DDC97"/>
                 </a:solidFill>
                 <a:latin typeface="Century Schoolbook" pitchFamily="34" charset="0"/>
                 <a:ea typeface="Century Schoolbook" pitchFamily="34" charset="-122"/>
                 <a:cs typeface="Century Schoolbook" pitchFamily="34" charset="-120"/>
               </a:rPr>
-              <a:t>Faleminderit</a:t>
-            </a:r>
-            <a:endParaRPr lang="en-US" sz="4400" dirty="0"/>
+              <a:t>1</a:t>
+            </a:r>
+            <a:endParaRPr lang="en-US" sz="2200" dirty="0"/>
           </a:p>
         </p:txBody>
       </p:sp>
       <p:sp>
         <p:nvSpPr>
-          <p:cNvPr id="4" name="Text 1"/>
+          <p:cNvPr id="5" name="Text 3"/>
           <p:cNvSpPr txBox="1"/>
           <p:nvPr/>
         </p:nvSpPr>
         <p:spPr>
           <a:xfrm>
-            <a:off x="640080" y="1901952"/>
-            <a:ext cx="5943600" cy="548640"/>
+            <a:off x="1097280" y="1837944"/>
+            <a:ext cx="2606040" cy="777240"/>
           </a:xfrm>
           <a:prstGeom prst="rect">
             <a:avLst/>
@@ -13184,30 +13246,30 @@
               <a:buNone/>
             </a:pPr>
             <a:r>
-              <a:rPr lang="en-US" sz="2800" dirty="0">
-                <a:solidFill>
-                  <a:srgbClr val="3DDC97"/>
-                </a:solidFill>
-                <a:latin typeface="Century Schoolbook" pitchFamily="34" charset="0"/>
-                <a:ea typeface="Century Schoolbook" pitchFamily="34" charset="-122"/>
-                <a:cs typeface="Century Schoolbook" pitchFamily="34" charset="-120"/>
-              </a:rPr>
-              <a:t>Pyetje</a:t>
-            </a:r>
-            <a:endParaRPr lang="en-US" sz="2800" dirty="0"/>
+              <a:rPr lang="en-US" sz="1400" b="1" dirty="0">
+                <a:solidFill>
+                  <a:srgbClr val="E8ECF2"/>
+                </a:solidFill>
+                <a:latin typeface="Calibri" pitchFamily="34" charset="0"/>
+                <a:ea typeface="Calibri" pitchFamily="34" charset="-122"/>
+                <a:cs typeface="Calibri" pitchFamily="34" charset="-120"/>
+              </a:rPr>
+              <a:t>Një sondë që e zbuloi përgjigjen</a:t>
+            </a:r>
+            <a:endParaRPr lang="en-US" sz="1400" dirty="0"/>
           </a:p>
         </p:txBody>
       </p:sp>
       <p:sp>
         <p:nvSpPr>
-          <p:cNvPr id="5" name="Text 2"/>
+          <p:cNvPr id="6" name="Text 4"/>
           <p:cNvSpPr txBox="1"/>
           <p:nvPr/>
         </p:nvSpPr>
         <p:spPr>
           <a:xfrm>
-            <a:off x="640080" y="2743200"/>
-            <a:ext cx="5943600" cy="237744"/>
+            <a:off x="3794760" y="1810512"/>
+            <a:ext cx="4572000" cy="822960"/>
           </a:xfrm>
           <a:prstGeom prst="rect">
             <a:avLst/>
@@ -13223,30 +13285,30 @@
               <a:buNone/>
             </a:pPr>
             <a:r>
-              <a:rPr lang="en-US" sz="1050" b="1" spc="160" kern="0" dirty="0">
-                <a:solidFill>
-                  <a:srgbClr val="9AA6B6"/>
+              <a:rPr lang="en-US" sz="1150" dirty="0">
+                <a:solidFill>
+                  <a:srgbClr val="E8ECF2"/>
                 </a:solidFill>
                 <a:latin typeface="Calibri" pitchFamily="34" charset="0"/>
                 <a:ea typeface="Calibri" pitchFamily="34" charset="-122"/>
                 <a:cs typeface="Calibri" pitchFamily="34" charset="-120"/>
               </a:rPr>
-              <a:t>SHIFRA PËR DISKUTIMIN</a:t>
-            </a:r>
-            <a:endParaRPr lang="en-US" sz="1050" dirty="0"/>
+              <a:t>hill_climbing.py i zgjidhte gjerësitë e synuara me një sondë min-degree pavarësisht nisjes së kërkuar, prandaj --start random merrte fshehtas një zgjidhje min-degree: 1,607,522 HV në medium-graph për një ekzekutim pa asnjë lëvizje të pranuar.</a:t>
+            </a:r>
+            <a:endParaRPr lang="en-US" sz="1150" dirty="0"/>
           </a:p>
         </p:txBody>
       </p:sp>
       <p:sp>
         <p:nvSpPr>
-          <p:cNvPr id="6" name="Text 3"/>
+          <p:cNvPr id="7" name="Text 5"/>
           <p:cNvSpPr txBox="1"/>
           <p:nvPr/>
         </p:nvSpPr>
         <p:spPr>
           <a:xfrm>
-            <a:off x="640080" y="3090672"/>
-            <a:ext cx="2926080" cy="365760"/>
+            <a:off x="8641080" y="1810512"/>
+            <a:ext cx="2910535" cy="822960"/>
           </a:xfrm>
           <a:prstGeom prst="rect">
             <a:avLst/>
@@ -13262,30 +13324,53 @@
               <a:buNone/>
             </a:pPr>
             <a:r>
-              <a:rPr lang="en-US" sz="1900" dirty="0">
-                <a:solidFill>
-                  <a:srgbClr val="FFFFFF"/>
-                </a:solidFill>
-                <a:latin typeface="Century Schoolbook" pitchFamily="34" charset="0"/>
-                <a:ea typeface="Century Schoolbook" pitchFamily="34" charset="-122"/>
-                <a:cs typeface="Century Schoolbook" pitchFamily="34" charset="-120"/>
-              </a:rPr>
-              <a:t>5 nga 10</a:t>
-            </a:r>
-            <a:endParaRPr lang="en-US" sz="1900" dirty="0"/>
+              <a:rPr lang="en-US" sz="1150" i="1" dirty="0">
+                <a:solidFill>
+                  <a:srgbClr val="9AA6B6"/>
+                </a:solidFill>
+                <a:latin typeface="Calibri" pitchFamily="34" charset="0"/>
+                <a:ea typeface="Calibri" pitchFamily="34" charset="-122"/>
+                <a:cs typeface="Calibri" pitchFamily="34" charset="-120"/>
+              </a:rPr>
+              <a:t>U kap duke pyetur pse një ekzekutim pa asnjë lëvizje të pranuar kishte rezultat fare.</a:t>
+            </a:r>
+            <a:endParaRPr lang="en-US" sz="1150" dirty="0"/>
           </a:p>
         </p:txBody>
       </p:sp>
       <p:sp>
         <p:nvSpPr>
-          <p:cNvPr id="7" name="Text 4"/>
+          <p:cNvPr id="8" name="Shape 6"/>
+          <p:cNvSpPr/>
+          <p:nvPr/>
+        </p:nvSpPr>
+        <p:spPr>
+          <a:xfrm>
+            <a:off x="640080" y="2651760"/>
+            <a:ext cx="10911535" cy="0"/>
+          </a:xfrm>
+          <a:prstGeom prst="line">
+            <a:avLst/>
+          </a:prstGeom>
+          <a:noFill/>
+          <a:ln w="6350">
+            <a:solidFill>
+              <a:srgbClr val="2A3546"/>
+            </a:solidFill>
+            <a:prstDash val="solid"/>
+          </a:ln>
+        </p:spPr>
+      </p:sp>
+      <p:sp>
+        <p:nvSpPr>
+          <p:cNvPr id="9" name="Text 7"/>
           <p:cNvSpPr txBox="1"/>
           <p:nvPr/>
         </p:nvSpPr>
         <p:spPr>
           <a:xfrm>
-            <a:off x="640080" y="3438144"/>
-            <a:ext cx="2834640" cy="420624"/>
+            <a:off x="640080" y="2743200"/>
+            <a:ext cx="411480" cy="457200"/>
           </a:xfrm>
           <a:prstGeom prst="rect">
             <a:avLst/>
@@ -13301,30 +13386,30 @@
               <a:buNone/>
             </a:pPr>
             <a:r>
-              <a:rPr lang="en-US" sz="1050" dirty="0">
-                <a:solidFill>
-                  <a:srgbClr val="9AA6B6"/>
-                </a:solidFill>
-                <a:latin typeface="Calibri" pitchFamily="34" charset="0"/>
-                <a:ea typeface="Calibri" pitchFamily="34" charset="-122"/>
-                <a:cs typeface="Calibri" pitchFamily="34" charset="-120"/>
-              </a:rPr>
-              <a:t>rreshta që seed-at i vendosin</a:t>
-            </a:r>
-            <a:endParaRPr lang="en-US" sz="1050" dirty="0"/>
+              <a:rPr lang="en-US" sz="2200" dirty="0">
+                <a:solidFill>
+                  <a:srgbClr val="3DDC97"/>
+                </a:solidFill>
+                <a:latin typeface="Century Schoolbook" pitchFamily="34" charset="0"/>
+                <a:ea typeface="Century Schoolbook" pitchFamily="34" charset="-122"/>
+                <a:cs typeface="Century Schoolbook" pitchFamily="34" charset="-120"/>
+              </a:rPr>
+              <a:t>2</a:t>
+            </a:r>
+            <a:endParaRPr lang="en-US" sz="2200" dirty="0"/>
           </a:p>
         </p:txBody>
       </p:sp>
       <p:sp>
         <p:nvSpPr>
-          <p:cNvPr id="8" name="Text 5"/>
+          <p:cNvPr id="10" name="Text 8"/>
           <p:cNvSpPr txBox="1"/>
           <p:nvPr/>
         </p:nvSpPr>
         <p:spPr>
           <a:xfrm>
-            <a:off x="3703320" y="3090672"/>
-            <a:ext cx="2926080" cy="365760"/>
+            <a:off x="1097280" y="2770632"/>
+            <a:ext cx="2606040" cy="777240"/>
           </a:xfrm>
           <a:prstGeom prst="rect">
             <a:avLst/>
@@ -13340,30 +13425,47 @@
               <a:buNone/>
             </a:pPr>
             <a:r>
-              <a:rPr lang="en-US" sz="1900" dirty="0">
-                <a:solidFill>
-                  <a:srgbClr val="FFFFFF"/>
-                </a:solidFill>
-                <a:latin typeface="Century Schoolbook" pitchFamily="34" charset="0"/>
-                <a:ea typeface="Century Schoolbook" pitchFamily="34" charset="-122"/>
-                <a:cs typeface="Century Schoolbook" pitchFamily="34" charset="-120"/>
-              </a:rPr>
-              <a:t>15.9×</a:t>
-            </a:r>
-            <a:endParaRPr lang="en-US" sz="1900" dirty="0"/>
+              <a:rPr lang="en-US" sz="1400" b="1" dirty="0">
+                <a:solidFill>
+                  <a:srgbClr val="E8ECF2"/>
+                </a:solidFill>
+                <a:latin typeface="Calibri" pitchFamily="34" charset="0"/>
+                <a:ea typeface="Calibri" pitchFamily="34" charset="-122"/>
+                <a:cs typeface="Calibri" pitchFamily="34" charset="-120"/>
+              </a:rPr>
+              <a:t>Një verifikim që ishte</a:t>
+            </a:r>
+            <a:endParaRPr lang="en-US" sz="1400" dirty="0"/>
+          </a:p>
+          <a:p>
+            <a:pPr indent="0" marL="0">
+              <a:buNone/>
+            </a:pPr>
+            <a:r>
+              <a:rPr lang="en-US" sz="1400" b="1" dirty="0">
+                <a:solidFill>
+                  <a:srgbClr val="E8ECF2"/>
+                </a:solidFill>
+                <a:latin typeface="Calibri" pitchFamily="34" charset="0"/>
+                <a:ea typeface="Calibri" pitchFamily="34" charset="-122"/>
+                <a:cs typeface="Calibri" pitchFamily="34" charset="-120"/>
+              </a:rPr>
+              <a:t>vetë i gabuar</a:t>
+            </a:r>
+            <a:endParaRPr lang="en-US" sz="1400" dirty="0"/>
           </a:p>
         </p:txBody>
       </p:sp>
       <p:sp>
         <p:nvSpPr>
-          <p:cNvPr id="9" name="Text 6"/>
+          <p:cNvPr id="11" name="Text 9"/>
           <p:cNvSpPr txBox="1"/>
           <p:nvPr/>
         </p:nvSpPr>
         <p:spPr>
           <a:xfrm>
-            <a:off x="3703320" y="3438144"/>
-            <a:ext cx="2834640" cy="420624"/>
+            <a:off x="3794760" y="2743200"/>
+            <a:ext cx="4572000" cy="822960"/>
           </a:xfrm>
           <a:prstGeom prst="rect">
             <a:avLst/>
@@ -13379,30 +13481,30 @@
               <a:buNone/>
             </a:pPr>
             <a:r>
-              <a:rPr lang="en-US" sz="1050" dirty="0">
-                <a:solidFill>
-                  <a:srgbClr val="9AA6B6"/>
+              <a:rPr lang="en-US" sz="1150" dirty="0">
+                <a:solidFill>
+                  <a:srgbClr val="E8ECF2"/>
                 </a:solidFill>
                 <a:latin typeface="Calibri" pitchFamily="34" charset="0"/>
                 <a:ea typeface="Calibri" pitchFamily="34" charset="-122"/>
                 <a:cs typeface="Calibri" pitchFamily="34" charset="-120"/>
               </a:rPr>
-              <a:t>ndërtimi kundër rimostrimit të kontrollit; variantet e kërkimit 0.4–2.0×</a:t>
-            </a:r>
-            <a:endParaRPr lang="en-US" sz="1050" dirty="0"/>
+              <a:t>Riekzekutimi i ekzekutimeve për t’i konfirmuar dha mospërputhje në 29 nga 30 rreshta. Ngjitja ndalon sipas kohës së kaluar, prandaj një ekzekutim mund të rimostrohet, por nuk mund të riprodhohet kurrë.</a:t>
+            </a:r>
+            <a:endParaRPr lang="en-US" sz="1150" dirty="0"/>
           </a:p>
         </p:txBody>
       </p:sp>
       <p:sp>
         <p:nvSpPr>
-          <p:cNvPr id="10" name="Text 7"/>
+          <p:cNvPr id="12" name="Text 10"/>
           <p:cNvSpPr txBox="1"/>
           <p:nvPr/>
         </p:nvSpPr>
         <p:spPr>
           <a:xfrm>
-            <a:off x="640080" y="3931920"/>
-            <a:ext cx="2926080" cy="365760"/>
+            <a:off x="8641080" y="2743200"/>
+            <a:ext cx="2910535" cy="822960"/>
           </a:xfrm>
           <a:prstGeom prst="rect">
             <a:avLst/>
@@ -13418,30 +13520,53 @@
               <a:buNone/>
             </a:pPr>
             <a:r>
-              <a:rPr lang="en-US" sz="1900" dirty="0">
-                <a:solidFill>
-                  <a:srgbClr val="FFFFFF"/>
-                </a:solidFill>
-                <a:latin typeface="Century Schoolbook" pitchFamily="34" charset="0"/>
-                <a:ea typeface="Century Schoolbook" pitchFamily="34" charset="-122"/>
-                <a:cs typeface="Century Schoolbook" pitchFamily="34" charset="-120"/>
-              </a:rPr>
-              <a:t>21,519 HV</a:t>
-            </a:r>
-            <a:endParaRPr lang="en-US" sz="1900" dirty="0"/>
+              <a:rPr lang="en-US" sz="1150" i="1" dirty="0">
+                <a:solidFill>
+                  <a:srgbClr val="9AA6B6"/>
+                </a:solidFill>
+                <a:latin typeface="Calibri" pitchFamily="34" charset="0"/>
+                <a:ea typeface="Calibri" pitchFamily="34" charset="-122"/>
+                <a:cs typeface="Calibri" pitchFamily="34" charset="-120"/>
+              </a:rPr>
+              <a:t>Verifikimi ishte i gabuar, jo harness-i, dhe aksidenti prodhoi dy kontrolle të pavarura.</a:t>
+            </a:r>
+            <a:endParaRPr lang="en-US" sz="1150" dirty="0"/>
           </a:p>
         </p:txBody>
       </p:sp>
       <p:sp>
         <p:nvSpPr>
-          <p:cNvPr id="11" name="Text 8"/>
+          <p:cNvPr id="13" name="Shape 11"/>
+          <p:cNvSpPr/>
+          <p:nvPr/>
+        </p:nvSpPr>
+        <p:spPr>
+          <a:xfrm>
+            <a:off x="640080" y="3584448"/>
+            <a:ext cx="10911535" cy="0"/>
+          </a:xfrm>
+          <a:prstGeom prst="line">
+            <a:avLst/>
+          </a:prstGeom>
+          <a:noFill/>
+          <a:ln w="6350">
+            <a:solidFill>
+              <a:srgbClr val="2A3546"/>
+            </a:solidFill>
+            <a:prstDash val="solid"/>
+          </a:ln>
+        </p:spPr>
+      </p:sp>
+      <p:sp>
+        <p:nvSpPr>
+          <p:cNvPr id="14" name="Text 12"/>
           <p:cNvSpPr txBox="1"/>
           <p:nvPr/>
         </p:nvSpPr>
         <p:spPr>
           <a:xfrm>
-            <a:off x="640080" y="4279392"/>
-            <a:ext cx="2834640" cy="420624"/>
+            <a:off x="640080" y="3675888"/>
+            <a:ext cx="411480" cy="457200"/>
           </a:xfrm>
           <a:prstGeom prst="rect">
             <a:avLst/>
@@ -13457,30 +13582,30 @@
               <a:buNone/>
             </a:pPr>
             <a:r>
-              <a:rPr lang="en-US" sz="1050" dirty="0">
-                <a:solidFill>
-                  <a:srgbClr val="9AA6B6"/>
-                </a:solidFill>
-                <a:latin typeface="Calibri" pitchFamily="34" charset="0"/>
-                <a:ea typeface="Calibri" pitchFamily="34" charset="-122"/>
-                <a:cs typeface="Calibri" pitchFamily="34" charset="-120"/>
-              </a:rPr>
-              <a:t>zhvendosja mes sesioneve e totalit të dhjetë instancave (p ≈ 0.05)</a:t>
-            </a:r>
-            <a:endParaRPr lang="en-US" sz="1050" dirty="0"/>
+              <a:rPr lang="en-US" sz="2200" dirty="0">
+                <a:solidFill>
+                  <a:srgbClr val="3DDC97"/>
+                </a:solidFill>
+                <a:latin typeface="Century Schoolbook" pitchFamily="34" charset="0"/>
+                <a:ea typeface="Century Schoolbook" pitchFamily="34" charset="-122"/>
+                <a:cs typeface="Century Schoolbook" pitchFamily="34" charset="-120"/>
+              </a:rPr>
+              <a:t>3</a:t>
+            </a:r>
+            <a:endParaRPr lang="en-US" sz="2200" dirty="0"/>
           </a:p>
         </p:txBody>
       </p:sp>
       <p:sp>
         <p:nvSpPr>
-          <p:cNvPr id="12" name="Text 9"/>
+          <p:cNvPr id="15" name="Text 13"/>
           <p:cNvSpPr txBox="1"/>
           <p:nvPr/>
         </p:nvSpPr>
         <p:spPr>
           <a:xfrm>
-            <a:off x="3703320" y="3931920"/>
-            <a:ext cx="2926080" cy="365760"/>
+            <a:off x="1097280" y="3703320"/>
+            <a:ext cx="2606040" cy="777240"/>
           </a:xfrm>
           <a:prstGeom prst="rect">
             <a:avLst/>
@@ -13496,30 +13621,30 @@
               <a:buNone/>
             </a:pPr>
             <a:r>
-              <a:rPr lang="en-US" sz="1900" dirty="0">
-                <a:solidFill>
-                  <a:srgbClr val="FFFFFF"/>
-                </a:solidFill>
-                <a:latin typeface="Century Schoolbook" pitchFamily="34" charset="0"/>
-                <a:ea typeface="Century Schoolbook" pitchFamily="34" charset="-122"/>
-                <a:cs typeface="Century Schoolbook" pitchFamily="34" charset="-120"/>
-              </a:rPr>
-              <a:t>0.23%</a:t>
-            </a:r>
-            <a:endParaRPr lang="en-US" sz="1900" dirty="0"/>
+              <a:rPr lang="en-US" sz="1400" b="1" dirty="0">
+                <a:solidFill>
+                  <a:srgbClr val="E8ECF2"/>
+                </a:solidFill>
+                <a:latin typeface="Calibri" pitchFamily="34" charset="0"/>
+                <a:ea typeface="Calibri" pitchFamily="34" charset="-122"/>
+                <a:cs typeface="Calibri" pitchFamily="34" charset="-120"/>
+              </a:rPr>
+              <a:t>Një tejmbushje 32-bitëshe në kernelin e dikujt tjetër</a:t>
+            </a:r>
+            <a:endParaRPr lang="en-US" sz="1400" dirty="0"/>
           </a:p>
         </p:txBody>
       </p:sp>
       <p:sp>
         <p:nvSpPr>
-          <p:cNvPr id="13" name="Text 10"/>
+          <p:cNvPr id="16" name="Text 14"/>
           <p:cNvSpPr txBox="1"/>
           <p:nvPr/>
         </p:nvSpPr>
         <p:spPr>
           <a:xfrm>
-            <a:off x="3703320" y="4279392"/>
-            <a:ext cx="2834640" cy="420624"/>
+            <a:off x="3794760" y="3675888"/>
+            <a:ext cx="4572000" cy="822960"/>
           </a:xfrm>
           <a:prstGeom prst="rect">
             <a:avLst/>
@@ -13535,30 +13660,30 @@
               <a:buNone/>
             </a:pPr>
             <a:r>
-              <a:rPr lang="en-US" sz="1050" dirty="0">
-                <a:solidFill>
-                  <a:srgbClr val="9AA6B6"/>
+              <a:rPr lang="en-US" sz="1150" dirty="0">
+                <a:solidFill>
+                  <a:srgbClr val="E8ECF2"/>
                 </a:solidFill>
                 <a:latin typeface="Calibri" pitchFamily="34" charset="0"/>
                 <a:ea typeface="Calibri" pitchFamily="34" charset="-122"/>
                 <a:cs typeface="Calibri" pitchFamily="34" charset="-120"/>
               </a:rPr>
-              <a:t>shkalla më e lartë e pranimit e matur kudo</a:t>
-            </a:r>
-            <a:endParaRPr lang="en-US" sz="1050" dirty="0"/>
+              <a:t>Vlerësuesi CUDA i përfshirë indeksonte një varg B×N×N me një zhvendosje int, që mbështillet pas 2³¹ në n = 2,426, fija 365 nga 1,024.</a:t>
+            </a:r>
+            <a:endParaRPr lang="en-US" sz="1150" dirty="0"/>
           </a:p>
         </p:txBody>
       </p:sp>
       <p:sp>
         <p:nvSpPr>
-          <p:cNvPr id="14" name="Text 11"/>
+          <p:cNvPr id="17" name="Text 15"/>
           <p:cNvSpPr txBox="1"/>
           <p:nvPr/>
         </p:nvSpPr>
         <p:spPr>
           <a:xfrm>
-            <a:off x="640080" y="4773168"/>
-            <a:ext cx="2926080" cy="365760"/>
+            <a:off x="8641080" y="3675888"/>
+            <a:ext cx="2910535" cy="822960"/>
           </a:xfrm>
           <a:prstGeom prst="rect">
             <a:avLst/>
@@ -13574,30 +13699,53 @@
               <a:buNone/>
             </a:pPr>
             <a:r>
-              <a:rPr lang="en-US" sz="1900" dirty="0">
-                <a:solidFill>
-                  <a:srgbClr val="FFFFFF"/>
-                </a:solidFill>
-                <a:latin typeface="Century Schoolbook" pitchFamily="34" charset="0"/>
-                <a:ea typeface="Century Schoolbook" pitchFamily="34" charset="-122"/>
-                <a:cs typeface="Century Schoolbook" pitchFamily="34" charset="-120"/>
-              </a:rPr>
-              <a:t>+33,043 HV</a:t>
-            </a:r>
-            <a:endParaRPr lang="en-US" sz="1900" dirty="0"/>
+              <a:rPr lang="en-US" sz="1150" i="1" dirty="0">
+                <a:solidFill>
+                  <a:srgbClr val="9AA6B6"/>
+                </a:solidFill>
+                <a:latin typeface="Calibri" pitchFamily="34" charset="0"/>
+                <a:ea typeface="Calibri" pitchFamily="34" charset="-122"/>
+                <a:cs typeface="Calibri" pitchFamily="34" charset="-120"/>
+              </a:rPr>
+              <a:t>U kap sepse çdo ekzekutim me n = 2,426 dështonte herët me një qasje të paligjshme në memorie; një ndryshim tipi e rregulloi.</a:t>
+            </a:r>
+            <a:endParaRPr lang="en-US" sz="1150" dirty="0"/>
           </a:p>
         </p:txBody>
       </p:sp>
       <p:sp>
         <p:nvSpPr>
-          <p:cNvPr id="15" name="Text 12"/>
+          <p:cNvPr id="18" name="Shape 16"/>
+          <p:cNvSpPr/>
+          <p:nvPr/>
+        </p:nvSpPr>
+        <p:spPr>
+          <a:xfrm>
+            <a:off x="640080" y="4517136"/>
+            <a:ext cx="10911535" cy="0"/>
+          </a:xfrm>
+          <a:prstGeom prst="line">
+            <a:avLst/>
+          </a:prstGeom>
+          <a:noFill/>
+          <a:ln w="6350">
+            <a:solidFill>
+              <a:srgbClr val="2A3546"/>
+            </a:solidFill>
+            <a:prstDash val="solid"/>
+          </a:ln>
+        </p:spPr>
+      </p:sp>
+      <p:sp>
+        <p:nvSpPr>
+          <p:cNvPr id="19" name="Text 17"/>
           <p:cNvSpPr txBox="1"/>
           <p:nvPr/>
         </p:nvSpPr>
         <p:spPr>
           <a:xfrm>
-            <a:off x="640080" y="5120640"/>
-            <a:ext cx="2834640" cy="420624"/>
+            <a:off x="640080" y="4608576"/>
+            <a:ext cx="411480" cy="457200"/>
           </a:xfrm>
           <a:prstGeom prst="rect">
             <a:avLst/>
@@ -13613,30 +13761,30 @@
               <a:buNone/>
             </a:pPr>
             <a:r>
-              <a:rPr lang="en-US" sz="1050" dirty="0">
-                <a:solidFill>
-                  <a:srgbClr val="9AA6B6"/>
-                </a:solidFill>
-                <a:latin typeface="Calibri" pitchFamily="34" charset="0"/>
-                <a:ea typeface="Calibri" pitchFamily="34" charset="-122"/>
-                <a:cs typeface="Calibri" pitchFamily="34" charset="-120"/>
-              </a:rPr>
-              <a:t>çfarë i blen kërkimit dhjetëfishi i buxhetit, kundër një epërsie ≥ 269,607</a:t>
-            </a:r>
-            <a:endParaRPr lang="en-US" sz="1050" dirty="0"/>
+              <a:rPr lang="en-US" sz="2200" dirty="0">
+                <a:solidFill>
+                  <a:srgbClr val="F2C14E"/>
+                </a:solidFill>
+                <a:latin typeface="Century Schoolbook" pitchFamily="34" charset="0"/>
+                <a:ea typeface="Century Schoolbook" pitchFamily="34" charset="-122"/>
+                <a:cs typeface="Century Schoolbook" pitchFamily="34" charset="-120"/>
+              </a:rPr>
+              <a:t>4</a:t>
+            </a:r>
+            <a:endParaRPr lang="en-US" sz="2200" dirty="0"/>
           </a:p>
         </p:txBody>
       </p:sp>
       <p:sp>
         <p:nvSpPr>
-          <p:cNvPr id="16" name="Text 13"/>
+          <p:cNvPr id="20" name="Text 18"/>
           <p:cNvSpPr txBox="1"/>
           <p:nvPr/>
         </p:nvSpPr>
         <p:spPr>
           <a:xfrm>
-            <a:off x="3703320" y="4773168"/>
-            <a:ext cx="2926080" cy="365760"/>
+            <a:off x="1097280" y="4636008"/>
+            <a:ext cx="2606040" cy="777240"/>
           </a:xfrm>
           <a:prstGeom prst="rect">
             <a:avLst/>
@@ -13652,30 +13800,30 @@
               <a:buNone/>
             </a:pPr>
             <a:r>
-              <a:rPr lang="en-US" sz="1900" dirty="0">
-                <a:solidFill>
-                  <a:srgbClr val="FFFFFF"/>
-                </a:solidFill>
-                <a:latin typeface="Century Schoolbook" pitchFamily="34" charset="0"/>
-                <a:ea typeface="Century Schoolbook" pitchFamily="34" charset="-122"/>
-                <a:cs typeface="Century Schoolbook" pitchFamily="34" charset="-120"/>
-              </a:rPr>
-              <a:t>0.63%</a:t>
-            </a:r>
-            <a:endParaRPr lang="en-US" sz="1900" dirty="0"/>
+              <a:rPr lang="en-US" sz="1400" b="1" dirty="0">
+                <a:solidFill>
+                  <a:srgbClr val="E8ECF2"/>
+                </a:solidFill>
+                <a:latin typeface="Calibri" pitchFamily="34" charset="0"/>
+                <a:ea typeface="Calibri" pitchFamily="34" charset="-122"/>
+                <a:cs typeface="Calibri" pitchFamily="34" charset="-120"/>
+              </a:rPr>
+              <a:t>Një prag i huazuar nga një metodë</a:t>
+            </a:r>
+            <a:endParaRPr lang="en-US" sz="1400" dirty="0"/>
           </a:p>
         </p:txBody>
       </p:sp>
       <p:sp>
         <p:nvSpPr>
-          <p:cNvPr id="17" name="Text 14"/>
+          <p:cNvPr id="21" name="Text 19"/>
           <p:cNvSpPr txBox="1"/>
           <p:nvPr/>
         </p:nvSpPr>
         <p:spPr>
           <a:xfrm>
-            <a:off x="3703320" y="5120640"/>
-            <a:ext cx="2834640" cy="420624"/>
+            <a:off x="3794760" y="4608576"/>
+            <a:ext cx="4572000" cy="822960"/>
           </a:xfrm>
           <a:prstGeom prst="rect">
             <a:avLst/>
@@ -13691,30 +13839,30 @@
               <a:buNone/>
             </a:pPr>
             <a:r>
-              <a:rPr lang="en-US" sz="1050" dirty="0">
-                <a:solidFill>
-                  <a:srgbClr val="9AA6B6"/>
+              <a:rPr lang="en-US" sz="1150" dirty="0">
+                <a:solidFill>
+                  <a:srgbClr val="E8ECF2"/>
                 </a:solidFill>
                 <a:latin typeface="Calibri" pitchFamily="34" charset="0"/>
                 <a:ea typeface="Calibri" pitchFamily="34" charset="-122"/>
                 <a:cs typeface="Calibri" pitchFamily="34" charset="-120"/>
               </a:rPr>
-              <a:t>rezultati më i mirë i njohur në small-graph, nën një tavan të vërtetueshëm</a:t>
-            </a:r>
-            <a:endParaRPr lang="en-US" sz="1050" dirty="0"/>
+              <a:t>Një prag prej 7,881 HV, i marrë nga instanca më e keqe e Hill Climbing, gjykoi rreshtat e çdo metode, ndërsa seed-at e vetë Team HRI në medium-graph shpërndahen 80,376 HV.</a:t>
+            </a:r>
+            <a:endParaRPr lang="en-US" sz="1150" dirty="0"/>
           </a:p>
         </p:txBody>
       </p:sp>
       <p:sp>
         <p:nvSpPr>
-          <p:cNvPr id="18" name="Text 15"/>
+          <p:cNvPr id="22" name="Text 20"/>
           <p:cNvSpPr txBox="1"/>
           <p:nvPr/>
         </p:nvSpPr>
         <p:spPr>
           <a:xfrm>
-            <a:off x="640080" y="5833872"/>
-            <a:ext cx="6858000" cy="274320"/>
+            <a:off x="8641080" y="4608576"/>
+            <a:ext cx="2910535" cy="822960"/>
           </a:xfrm>
           <a:prstGeom prst="rect">
             <a:avLst/>
@@ -13730,30 +13878,30 @@
               <a:buNone/>
             </a:pPr>
             <a:r>
-              <a:rPr lang="en-US" sz="1300" dirty="0">
-                <a:solidFill>
-                  <a:srgbClr val="E8ECF2"/>
+              <a:rPr lang="en-US" sz="1150" i="1" dirty="0">
+                <a:solidFill>
+                  <a:srgbClr val="9AA6B6"/>
                 </a:solidFill>
                 <a:latin typeface="Calibri" pitchFamily="34" charset="0"/>
                 <a:ea typeface="Calibri" pitchFamily="34" charset="-122"/>
                 <a:cs typeface="Calibri" pitchFamily="34" charset="-120"/>
               </a:rPr>
-              <a:t>Adrian Ymeri · adrian.ymeri@uni-pr.edu · Universiteti i Prishtinës</a:t>
-            </a:r>
-            <a:endParaRPr lang="en-US" sz="1300" dirty="0"/>
+              <a:t>U kap duke lexuar seed-at në vend të më të mirit nga tre: ndryshuan katër nga dhjetë vendime.</a:t>
+            </a:r>
+            <a:endParaRPr lang="en-US" sz="1150" dirty="0"/>
           </a:p>
         </p:txBody>
       </p:sp>
       <p:sp>
         <p:nvSpPr>
-          <p:cNvPr id="19" name="Text 16"/>
+          <p:cNvPr id="23" name="Text 21"/>
           <p:cNvSpPr txBox="1"/>
           <p:nvPr/>
         </p:nvSpPr>
         <p:spPr>
           <a:xfrm>
-            <a:off x="640080" y="6163056"/>
-            <a:ext cx="6858000" cy="237744"/>
+            <a:off x="640080" y="5650992"/>
+            <a:ext cx="10911535" cy="502920"/>
           </a:xfrm>
           <a:prstGeom prst="rect">
             <a:avLst/>
@@ -13769,17 +13917,65 @@
               <a:buNone/>
             </a:pPr>
             <a:r>
-              <a:rPr lang="en-US" sz="1050" dirty="0">
+              <a:rPr lang="en-US" sz="1550" i="1" dirty="0">
+                <a:solidFill>
+                  <a:srgbClr val="E8ECF2"/>
+                </a:solidFill>
+                <a:latin typeface="Century Schoolbook" pitchFamily="34" charset="0"/>
+                <a:ea typeface="Century Schoolbook" pitchFamily="34" charset="-122"/>
+                <a:cs typeface="Century Schoolbook" pitchFamily="34" charset="-120"/>
+              </a:rPr>
+              <a:t>Asnjë nuk u kap nga një grup testesh. Secila u kap nga një numër që kishte formën e gabuar për historinë e vet.</a:t>
+            </a:r>
+            <a:endParaRPr lang="en-US" sz="1550" dirty="0"/>
+          </a:p>
+        </p:txBody>
+      </p:sp>
+      <p:sp>
+        <p:nvSpPr>
+          <p:cNvPr id="25" name="Slide Number Placeholder 0"/>
+          <p:cNvSpPr>
+            <a:spLocks noGrp="1"/>
+          </p:cNvSpPr>
+          <p:nvPr>
+            <p:ph type="sldNum" sz="quarter" idx="4294967295"/>
+          </p:nvPr>
+        </p:nvSpPr>
+        <p:spPr>
+          <a:xfrm>
+            <a:off x="11002975" y="6446520"/>
+            <a:ext cx="548640" cy="219456"/>
+          </a:xfrm>
+          <a:prstGeom prst="rect">
+            <a:avLst/>
+          </a:prstGeom>
+          <a:extLst>
+            <a:ext uri="{C572A759-6A51-4108-AA02-DFA0A04FC94B}">
+              <ma14:wrappingTextBoxFlag xmlns:ma14="http://schemas.microsoft.com/office/mac/drawingml/2011/main" val="0"/>
+            </a:ext>
+          </a:extLst>
+        </p:spPr>
+        <p:txBody>
+          <a:bodyPr/>
+          <a:lstStyle>
+            <a:lvl1pPr>
+              <a:defRPr sz="1000">
                 <a:solidFill>
                   <a:srgbClr val="7D8AA0"/>
                 </a:solidFill>
-                <a:latin typeface="Calibri" pitchFamily="34" charset="0"/>
-                <a:ea typeface="Calibri" pitchFamily="34" charset="-122"/>
-                <a:cs typeface="Calibri" pitchFamily="34" charset="-120"/>
-              </a:rPr>
-              <a:t>Kodi, CSV-të e papërpunuara dhe çdo figurë në këtë kumtesë rigjenerohen nga harness-i i studimit.</a:t>
-            </a:r>
-            <a:endParaRPr lang="en-US" sz="1050" dirty="0"/>
+                <a:latin typeface="Calibri"/>
+                <a:ea typeface="Calibri"/>
+                <a:cs typeface="Calibri"/>
+              </a:defRPr>
+            </a:lvl1pPr>
+          </a:lstStyle>
+          <a:p>
+            <a:pPr algn="r"/>
+            <a:fld id="{F7021451-1387-4CA6-816F-3879F97B5CBC}" type="slidenum">
+              <a:rPr b="0" lang="en-US"/>
+              <a:t>15</a:t>
+            </a:fld>
+            <a:endParaRPr lang="en-US"/>
           </a:p>
         </p:txBody>
       </p:sp>
@@ -13792,7 +13988,7 @@
 </file>
 
 <file path=ppt/slides/slide16.xml><?xml version="1.0" encoding="utf-8"?>
-<p:sld xmlns:a="http://schemas.openxmlformats.org/drawingml/2006/main" xmlns:r="http://schemas.openxmlformats.org/officeDocument/2006/relationships" xmlns:p="http://schemas.openxmlformats.org/presentationml/2006/main">
+<p:sld xmlns:a="http://schemas.openxmlformats.org/drawingml/2006/main" xmlns:r="http://schemas.openxmlformats.org/officeDocument/2006/relationships" xmlns:p="http://schemas.openxmlformats.org/presentationml/2006/main" show="0">
   <p:cSld name="Slide 16">
     <p:spTree>
       <p:nvGrpSpPr>
@@ -13884,7 +14080,7 @@
                 <a:ea typeface="Century Schoolbook" pitchFamily="34" charset="-122"/>
                 <a:cs typeface="Century Schoolbook" pitchFamily="34" charset="-120"/>
               </a:rPr>
-              <a:t>Katër mënyra si e gënjeva veten dhe si u kap secila</a:t>
+              <a:t>Protokolli dhe çfarë nuk kontrollon</a:t>
             </a:r>
             <a:endParaRPr lang="en-US" sz="2700" dirty="0"/>
           </a:p>
@@ -13899,7 +14095,7 @@
         <p:spPr>
           <a:xfrm>
             <a:off x="640080" y="1810512"/>
-            <a:ext cx="411480" cy="457200"/>
+            <a:ext cx="2011680" cy="548640"/>
           </a:xfrm>
           <a:prstGeom prst="rect">
             <a:avLst/>
@@ -13915,17 +14111,17 @@
               <a:buNone/>
             </a:pPr>
             <a:r>
-              <a:rPr lang="en-US" sz="2200" dirty="0">
+              <a:rPr lang="en-US" sz="1400" b="1" dirty="0">
                 <a:solidFill>
                   <a:srgbClr val="3DDC97"/>
                 </a:solidFill>
-                <a:latin typeface="Century Schoolbook" pitchFamily="34" charset="0"/>
-                <a:ea typeface="Century Schoolbook" pitchFamily="34" charset="-122"/>
-                <a:cs typeface="Century Schoolbook" pitchFamily="34" charset="-120"/>
-              </a:rPr>
-              <a:t>1</a:t>
-            </a:r>
-            <a:endParaRPr lang="en-US" sz="2200" dirty="0"/>
+                <a:latin typeface="Calibri" pitchFamily="34" charset="0"/>
+                <a:ea typeface="Calibri" pitchFamily="34" charset="-122"/>
+                <a:cs typeface="Calibri" pitchFamily="34" charset="-120"/>
+              </a:rPr>
+              <a:t>Buxheti</a:t>
+            </a:r>
+            <a:endParaRPr lang="en-US" sz="1400" dirty="0"/>
           </a:p>
         </p:txBody>
       </p:sp>
@@ -13937,8 +14133,8 @@
         </p:nvSpPr>
         <p:spPr>
           <a:xfrm>
-            <a:off x="1097280" y="1837944"/>
-            <a:ext cx="2606040" cy="777240"/>
+            <a:off x="2834640" y="1810512"/>
+            <a:ext cx="8716975" cy="603504"/>
           </a:xfrm>
           <a:prstGeom prst="rect">
             <a:avLst/>
@@ -13954,7 +14150,7 @@
               <a:buNone/>
             </a:pPr>
             <a:r>
-              <a:rPr lang="en-US" sz="1400" b="1" dirty="0">
+              <a:rPr lang="en-US" sz="1300" dirty="0">
                 <a:solidFill>
                   <a:srgbClr val="E8ECF2"/>
                 </a:solidFill>
@@ -13962,99 +14158,21 @@
                 <a:ea typeface="Calibri" pitchFamily="34" charset="-122"/>
                 <a:cs typeface="Calibri" pitchFamily="34" charset="-120"/>
               </a:rPr>
-              <a:t>Një sondë që e zbuloi përgjigjen</a:t>
-            </a:r>
-            <a:endParaRPr lang="en-US" sz="1400" dirty="0"/>
+              <a:t>1,200 s kohë reale për ekzekutim, tre seed-a, dhjetë instanca. Katër ekzekutime ranë jashtë 1,150–1,400 s pas ngecjeve të makinës; asnjë prej tyre nuk e jep vlerën më të mirë nga tre.</a:t>
+            </a:r>
+            <a:endParaRPr lang="en-US" sz="1300" dirty="0"/>
           </a:p>
         </p:txBody>
       </p:sp>
       <p:sp>
         <p:nvSpPr>
-          <p:cNvPr id="6" name="Text 4"/>
-          <p:cNvSpPr txBox="1"/>
-          <p:nvPr/>
-        </p:nvSpPr>
-        <p:spPr>
-          <a:xfrm>
-            <a:off x="3794760" y="1810512"/>
-            <a:ext cx="4572000" cy="822960"/>
-          </a:xfrm>
-          <a:prstGeom prst="rect">
-            <a:avLst/>
-          </a:prstGeom>
-          <a:noFill/>
-          <a:ln/>
-        </p:spPr>
-        <p:txBody>
-          <a:bodyPr wrap="square" lIns="0" tIns="0" rIns="0" bIns="0" rtlCol="0" anchor="t"/>
-          <a:lstStyle/>
-          <a:p>
-            <a:pPr indent="0" marL="0">
-              <a:buNone/>
-            </a:pPr>
-            <a:r>
-              <a:rPr lang="en-US" sz="1150" dirty="0">
-                <a:solidFill>
-                  <a:srgbClr val="E8ECF2"/>
-                </a:solidFill>
-                <a:latin typeface="Calibri" pitchFamily="34" charset="0"/>
-                <a:ea typeface="Calibri" pitchFamily="34" charset="-122"/>
-                <a:cs typeface="Calibri" pitchFamily="34" charset="-120"/>
-              </a:rPr>
-              <a:t>hill_climbing.py i zgjidhte gjerësitë e synuara me një sondë min-degree pavarësisht nisjes së kërkuar, prandaj --start random merrte fshehtas një zgjidhje min-degree: 1,607,522 HV në medium-graph për një ekzekutim pa asnjë lëvizje të pranuar.</a:t>
-            </a:r>
-            <a:endParaRPr lang="en-US" sz="1150" dirty="0"/>
-          </a:p>
-        </p:txBody>
-      </p:sp>
-      <p:sp>
-        <p:nvSpPr>
-          <p:cNvPr id="7" name="Text 5"/>
-          <p:cNvSpPr txBox="1"/>
-          <p:nvPr/>
-        </p:nvSpPr>
-        <p:spPr>
-          <a:xfrm>
-            <a:off x="8641080" y="1810512"/>
-            <a:ext cx="2910535" cy="822960"/>
-          </a:xfrm>
-          <a:prstGeom prst="rect">
-            <a:avLst/>
-          </a:prstGeom>
-          <a:noFill/>
-          <a:ln/>
-        </p:spPr>
-        <p:txBody>
-          <a:bodyPr wrap="square" lIns="0" tIns="0" rIns="0" bIns="0" rtlCol="0" anchor="t"/>
-          <a:lstStyle/>
-          <a:p>
-            <a:pPr indent="0" marL="0">
-              <a:buNone/>
-            </a:pPr>
-            <a:r>
-              <a:rPr lang="en-US" sz="1150" i="1" dirty="0">
-                <a:solidFill>
-                  <a:srgbClr val="9AA6B6"/>
-                </a:solidFill>
-                <a:latin typeface="Calibri" pitchFamily="34" charset="0"/>
-                <a:ea typeface="Calibri" pitchFamily="34" charset="-122"/>
-                <a:cs typeface="Calibri" pitchFamily="34" charset="-120"/>
-              </a:rPr>
-              <a:t>U kap duke pyetur pse një ekzekutim pa asnjë lëvizje të pranuar kishte rezultat fare.</a:t>
-            </a:r>
-            <a:endParaRPr lang="en-US" sz="1150" dirty="0"/>
-          </a:p>
-        </p:txBody>
-      </p:sp>
-      <p:sp>
-        <p:nvSpPr>
-          <p:cNvPr id="8" name="Shape 6"/>
-          <p:cNvSpPr/>
-          <p:nvPr/>
-        </p:nvSpPr>
-        <p:spPr>
-          <a:xfrm>
-            <a:off x="640080" y="2651760"/>
+          <p:cNvPr id="6" name="Shape 4"/>
+          <p:cNvSpPr/>
+          <p:nvPr/>
+        </p:nvSpPr>
+        <p:spPr>
+          <a:xfrm>
+            <a:off x="640080" y="2432304"/>
             <a:ext cx="10911535" cy="0"/>
           </a:xfrm>
           <a:prstGeom prst="line">
@@ -14071,14 +14189,14 @@
       </p:sp>
       <p:sp>
         <p:nvSpPr>
-          <p:cNvPr id="9" name="Text 7"/>
+          <p:cNvPr id="7" name="Text 5"/>
           <p:cNvSpPr txBox="1"/>
           <p:nvPr/>
         </p:nvSpPr>
         <p:spPr>
           <a:xfrm>
-            <a:off x="640080" y="2743200"/>
-            <a:ext cx="411480" cy="457200"/>
+            <a:off x="640080" y="2523744"/>
+            <a:ext cx="2011680" cy="548640"/>
           </a:xfrm>
           <a:prstGeom prst="rect">
             <a:avLst/>
@@ -14094,30 +14212,30 @@
               <a:buNone/>
             </a:pPr>
             <a:r>
-              <a:rPr lang="en-US" sz="2200" dirty="0">
+              <a:rPr lang="en-US" sz="1400" b="1" dirty="0">
                 <a:solidFill>
                   <a:srgbClr val="3DDC97"/>
                 </a:solidFill>
-                <a:latin typeface="Century Schoolbook" pitchFamily="34" charset="0"/>
-                <a:ea typeface="Century Schoolbook" pitchFamily="34" charset="-122"/>
-                <a:cs typeface="Century Schoolbook" pitchFamily="34" charset="-120"/>
-              </a:rPr>
-              <a:t>2</a:t>
-            </a:r>
-            <a:endParaRPr lang="en-US" sz="2200" dirty="0"/>
+                <a:latin typeface="Calibri" pitchFamily="34" charset="0"/>
+                <a:ea typeface="Calibri" pitchFamily="34" charset="-122"/>
+                <a:cs typeface="Calibri" pitchFamily="34" charset="-120"/>
+              </a:rPr>
+              <a:t>Hardueri</a:t>
+            </a:r>
+            <a:endParaRPr lang="en-US" sz="1400" dirty="0"/>
           </a:p>
         </p:txBody>
       </p:sp>
       <p:sp>
         <p:nvSpPr>
-          <p:cNvPr id="10" name="Text 8"/>
+          <p:cNvPr id="8" name="Text 6"/>
           <p:cNvSpPr txBox="1"/>
           <p:nvPr/>
         </p:nvSpPr>
         <p:spPr>
           <a:xfrm>
-            <a:off x="1097280" y="2770632"/>
-            <a:ext cx="2606040" cy="777240"/>
+            <a:off x="2834640" y="2523744"/>
+            <a:ext cx="8716975" cy="603504"/>
           </a:xfrm>
           <a:prstGeom prst="rect">
             <a:avLst/>
@@ -14133,7 +14251,7 @@
               <a:buNone/>
             </a:pPr>
             <a:r>
-              <a:rPr lang="en-US" sz="1400" b="1" dirty="0">
+              <a:rPr lang="en-US" sz="1300" dirty="0">
                 <a:solidFill>
                   <a:srgbClr val="E8ECF2"/>
                 </a:solidFill>
@@ -14141,116 +14259,21 @@
                 <a:ea typeface="Calibri" pitchFamily="34" charset="-122"/>
                 <a:cs typeface="Calibri" pitchFamily="34" charset="-120"/>
               </a:rPr>
-              <a:t>Një verifikim që ishte</a:t>
-            </a:r>
-            <a:endParaRPr lang="en-US" sz="1400" dirty="0"/>
-          </a:p>
-          <a:p>
-            <a:pPr indent="0" marL="0">
-              <a:buNone/>
-            </a:pPr>
-            <a:r>
-              <a:rPr lang="en-US" sz="1400" b="1" dirty="0">
-                <a:solidFill>
-                  <a:srgbClr val="E8ECF2"/>
-                </a:solidFill>
-                <a:latin typeface="Calibri" pitchFamily="34" charset="0"/>
-                <a:ea typeface="Calibri" pitchFamily="34" charset="-122"/>
-                <a:cs typeface="Calibri" pitchFamily="34" charset="-120"/>
-              </a:rPr>
-              <a:t>vetë i gabuar</a:t>
-            </a:r>
-            <a:endParaRPr lang="en-US" sz="1400" dirty="0"/>
+              <a:t>fcmaes, Team HRI dhe Hill Climbing në një bërthamë CPU të fiksuar secili. Spacekangaroos me kodin e vet CUDA në një Kaggle T4, batch 1,024 (512 në n = 2,426).</a:t>
+            </a:r>
+            <a:endParaRPr lang="en-US" sz="1300" dirty="0"/>
           </a:p>
         </p:txBody>
       </p:sp>
       <p:sp>
         <p:nvSpPr>
-          <p:cNvPr id="11" name="Text 9"/>
-          <p:cNvSpPr txBox="1"/>
-          <p:nvPr/>
-        </p:nvSpPr>
-        <p:spPr>
-          <a:xfrm>
-            <a:off x="3794760" y="2743200"/>
-            <a:ext cx="4572000" cy="822960"/>
-          </a:xfrm>
-          <a:prstGeom prst="rect">
-            <a:avLst/>
-          </a:prstGeom>
-          <a:noFill/>
-          <a:ln/>
-        </p:spPr>
-        <p:txBody>
-          <a:bodyPr wrap="square" lIns="0" tIns="0" rIns="0" bIns="0" rtlCol="0" anchor="t"/>
-          <a:lstStyle/>
-          <a:p>
-            <a:pPr indent="0" marL="0">
-              <a:buNone/>
-            </a:pPr>
-            <a:r>
-              <a:rPr lang="en-US" sz="1150" dirty="0">
-                <a:solidFill>
-                  <a:srgbClr val="E8ECF2"/>
-                </a:solidFill>
-                <a:latin typeface="Calibri" pitchFamily="34" charset="0"/>
-                <a:ea typeface="Calibri" pitchFamily="34" charset="-122"/>
-                <a:cs typeface="Calibri" pitchFamily="34" charset="-120"/>
-              </a:rPr>
-              <a:t>Riekzekutimi i ekzekutimeve për t’i konfirmuar dha mospërputhje në 29 nga 30 rreshta. Ngjitja ndalon sipas kohës së kaluar, prandaj një ekzekutim mund të rimostrohet, por nuk mund të riprodhohet kurrë.</a:t>
-            </a:r>
-            <a:endParaRPr lang="en-US" sz="1150" dirty="0"/>
-          </a:p>
-        </p:txBody>
-      </p:sp>
-      <p:sp>
-        <p:nvSpPr>
-          <p:cNvPr id="12" name="Text 10"/>
-          <p:cNvSpPr txBox="1"/>
-          <p:nvPr/>
-        </p:nvSpPr>
-        <p:spPr>
-          <a:xfrm>
-            <a:off x="8641080" y="2743200"/>
-            <a:ext cx="2910535" cy="822960"/>
-          </a:xfrm>
-          <a:prstGeom prst="rect">
-            <a:avLst/>
-          </a:prstGeom>
-          <a:noFill/>
-          <a:ln/>
-        </p:spPr>
-        <p:txBody>
-          <a:bodyPr wrap="square" lIns="0" tIns="0" rIns="0" bIns="0" rtlCol="0" anchor="t"/>
-          <a:lstStyle/>
-          <a:p>
-            <a:pPr indent="0" marL="0">
-              <a:buNone/>
-            </a:pPr>
-            <a:r>
-              <a:rPr lang="en-US" sz="1150" i="1" dirty="0">
-                <a:solidFill>
-                  <a:srgbClr val="9AA6B6"/>
-                </a:solidFill>
-                <a:latin typeface="Calibri" pitchFamily="34" charset="0"/>
-                <a:ea typeface="Calibri" pitchFamily="34" charset="-122"/>
-                <a:cs typeface="Calibri" pitchFamily="34" charset="-120"/>
-              </a:rPr>
-              <a:t>Verifikimi ishte i gabuar, jo harness-i, dhe aksidenti prodhoi dy kontrolle të pavarura.</a:t>
-            </a:r>
-            <a:endParaRPr lang="en-US" sz="1150" dirty="0"/>
-          </a:p>
-        </p:txBody>
-      </p:sp>
-      <p:sp>
-        <p:nvSpPr>
-          <p:cNvPr id="13" name="Shape 11"/>
-          <p:cNvSpPr/>
-          <p:nvPr/>
-        </p:nvSpPr>
-        <p:spPr>
-          <a:xfrm>
-            <a:off x="640080" y="3584448"/>
+          <p:cNvPr id="9" name="Shape 7"/>
+          <p:cNvSpPr/>
+          <p:nvPr/>
+        </p:nvSpPr>
+        <p:spPr>
+          <a:xfrm>
+            <a:off x="640080" y="3145536"/>
             <a:ext cx="10911535" cy="0"/>
           </a:xfrm>
           <a:prstGeom prst="line">
@@ -14267,14 +14290,14 @@
       </p:sp>
       <p:sp>
         <p:nvSpPr>
-          <p:cNvPr id="14" name="Text 12"/>
+          <p:cNvPr id="10" name="Text 8"/>
           <p:cNvSpPr txBox="1"/>
           <p:nvPr/>
         </p:nvSpPr>
         <p:spPr>
           <a:xfrm>
-            <a:off x="640080" y="3675888"/>
-            <a:ext cx="411480" cy="457200"/>
+            <a:off x="640080" y="3236976"/>
+            <a:ext cx="2011680" cy="548640"/>
           </a:xfrm>
           <a:prstGeom prst="rect">
             <a:avLst/>
@@ -14290,30 +14313,30 @@
               <a:buNone/>
             </a:pPr>
             <a:r>
-              <a:rPr lang="en-US" sz="2200" dirty="0">
+              <a:rPr lang="en-US" sz="1400" b="1" dirty="0">
                 <a:solidFill>
                   <a:srgbClr val="3DDC97"/>
                 </a:solidFill>
-                <a:latin typeface="Century Schoolbook" pitchFamily="34" charset="0"/>
-                <a:ea typeface="Century Schoolbook" pitchFamily="34" charset="-122"/>
-                <a:cs typeface="Century Schoolbook" pitchFamily="34" charset="-120"/>
-              </a:rPr>
-              <a:t>3</a:t>
-            </a:r>
-            <a:endParaRPr lang="en-US" sz="2200" dirty="0"/>
+                <a:latin typeface="Calibri" pitchFamily="34" charset="0"/>
+                <a:ea typeface="Calibri" pitchFamily="34" charset="-122"/>
+                <a:cs typeface="Calibri" pitchFamily="34" charset="-120"/>
+              </a:rPr>
+              <a:t>Implementimet</a:t>
+            </a:r>
+            <a:endParaRPr lang="en-US" sz="1400" dirty="0"/>
           </a:p>
         </p:txBody>
       </p:sp>
       <p:sp>
         <p:nvSpPr>
-          <p:cNvPr id="15" name="Text 13"/>
+          <p:cNvPr id="11" name="Text 9"/>
           <p:cNvSpPr txBox="1"/>
           <p:nvPr/>
         </p:nvSpPr>
         <p:spPr>
           <a:xfrm>
-            <a:off x="1097280" y="3703320"/>
-            <a:ext cx="2606040" cy="777240"/>
+            <a:off x="2834640" y="3236976"/>
+            <a:ext cx="8716975" cy="603504"/>
           </a:xfrm>
           <a:prstGeom prst="rect">
             <a:avLst/>
@@ -14329,7 +14352,7 @@
               <a:buNone/>
             </a:pPr>
             <a:r>
-              <a:rPr lang="en-US" sz="1400" b="1" dirty="0">
+              <a:rPr lang="en-US" sz="1300" dirty="0">
                 <a:solidFill>
                   <a:srgbClr val="E8ECF2"/>
                 </a:solidFill>
@@ -14337,99 +14360,21 @@
                 <a:ea typeface="Calibri" pitchFamily="34" charset="-122"/>
                 <a:cs typeface="Calibri" pitchFamily="34" charset="-120"/>
               </a:rPr>
-              <a:t>Një tejmbushje 32-bitëshe në kernelin e dikujt tjetër</a:t>
-            </a:r>
-            <a:endParaRPr lang="en-US" sz="1400" dirty="0"/>
+              <a:t>fcmaes i porturar nga qasja fast-cma-es; Team HRI i riimplementuar nga punimi, sepse kodi nuk u publikua; Spacekangaroos i ekzekutuar siç u publikua, plus një rregullim i tejmbushjes 32-bitëshe.</a:t>
+            </a:r>
+            <a:endParaRPr lang="en-US" sz="1300" dirty="0"/>
           </a:p>
         </p:txBody>
       </p:sp>
       <p:sp>
         <p:nvSpPr>
-          <p:cNvPr id="16" name="Text 14"/>
-          <p:cNvSpPr txBox="1"/>
-          <p:nvPr/>
-        </p:nvSpPr>
-        <p:spPr>
-          <a:xfrm>
-            <a:off x="3794760" y="3675888"/>
-            <a:ext cx="4572000" cy="822960"/>
-          </a:xfrm>
-          <a:prstGeom prst="rect">
-            <a:avLst/>
-          </a:prstGeom>
-          <a:noFill/>
-          <a:ln/>
-        </p:spPr>
-        <p:txBody>
-          <a:bodyPr wrap="square" lIns="0" tIns="0" rIns="0" bIns="0" rtlCol="0" anchor="t"/>
-          <a:lstStyle/>
-          <a:p>
-            <a:pPr indent="0" marL="0">
-              <a:buNone/>
-            </a:pPr>
-            <a:r>
-              <a:rPr lang="en-US" sz="1150" dirty="0">
-                <a:solidFill>
-                  <a:srgbClr val="E8ECF2"/>
-                </a:solidFill>
-                <a:latin typeface="Calibri" pitchFamily="34" charset="0"/>
-                <a:ea typeface="Calibri" pitchFamily="34" charset="-122"/>
-                <a:cs typeface="Calibri" pitchFamily="34" charset="-120"/>
-              </a:rPr>
-              <a:t>Vlerësuesi CUDA i përfshirë indeksonte një varg B×N×N me një zhvendosje int, që mbështillet pas 2³¹ në n = 2,426, fija 365 nga 1,024.</a:t>
-            </a:r>
-            <a:endParaRPr lang="en-US" sz="1150" dirty="0"/>
-          </a:p>
-        </p:txBody>
-      </p:sp>
-      <p:sp>
-        <p:nvSpPr>
-          <p:cNvPr id="17" name="Text 15"/>
-          <p:cNvSpPr txBox="1"/>
-          <p:nvPr/>
-        </p:nvSpPr>
-        <p:spPr>
-          <a:xfrm>
-            <a:off x="8641080" y="3675888"/>
-            <a:ext cx="2910535" cy="822960"/>
-          </a:xfrm>
-          <a:prstGeom prst="rect">
-            <a:avLst/>
-          </a:prstGeom>
-          <a:noFill/>
-          <a:ln/>
-        </p:spPr>
-        <p:txBody>
-          <a:bodyPr wrap="square" lIns="0" tIns="0" rIns="0" bIns="0" rtlCol="0" anchor="t"/>
-          <a:lstStyle/>
-          <a:p>
-            <a:pPr indent="0" marL="0">
-              <a:buNone/>
-            </a:pPr>
-            <a:r>
-              <a:rPr lang="en-US" sz="1150" i="1" dirty="0">
-                <a:solidFill>
-                  <a:srgbClr val="9AA6B6"/>
-                </a:solidFill>
-                <a:latin typeface="Calibri" pitchFamily="34" charset="0"/>
-                <a:ea typeface="Calibri" pitchFamily="34" charset="-122"/>
-                <a:cs typeface="Calibri" pitchFamily="34" charset="-120"/>
-              </a:rPr>
-              <a:t>U kap sepse çdo ekzekutim me n = 2,426 dështonte herët me një qasje të paligjshme në memorie; një ndryshim tipi e rregulloi.</a:t>
-            </a:r>
-            <a:endParaRPr lang="en-US" sz="1150" dirty="0"/>
-          </a:p>
-        </p:txBody>
-      </p:sp>
-      <p:sp>
-        <p:nvSpPr>
-          <p:cNvPr id="18" name="Shape 16"/>
-          <p:cNvSpPr/>
-          <p:nvPr/>
-        </p:nvSpPr>
-        <p:spPr>
-          <a:xfrm>
-            <a:off x="640080" y="4517136"/>
+          <p:cNvPr id="12" name="Shape 10"/>
+          <p:cNvSpPr/>
+          <p:nvPr/>
+        </p:nvSpPr>
+        <p:spPr>
+          <a:xfrm>
+            <a:off x="640080" y="3858768"/>
             <a:ext cx="10911535" cy="0"/>
           </a:xfrm>
           <a:prstGeom prst="line">
@@ -14446,14 +14391,14 @@
       </p:sp>
       <p:sp>
         <p:nvSpPr>
-          <p:cNvPr id="19" name="Text 17"/>
+          <p:cNvPr id="13" name="Text 11"/>
           <p:cNvSpPr txBox="1"/>
           <p:nvPr/>
         </p:nvSpPr>
         <p:spPr>
           <a:xfrm>
-            <a:off x="640080" y="4608576"/>
-            <a:ext cx="411480" cy="457200"/>
+            <a:off x="640080" y="3950208"/>
+            <a:ext cx="2011680" cy="548640"/>
           </a:xfrm>
           <a:prstGeom prst="rect">
             <a:avLst/>
@@ -14469,30 +14414,30 @@
               <a:buNone/>
             </a:pPr>
             <a:r>
-              <a:rPr lang="en-US" sz="2200" dirty="0">
-                <a:solidFill>
-                  <a:srgbClr val="F2C14E"/>
-                </a:solidFill>
-                <a:latin typeface="Century Schoolbook" pitchFamily="34" charset="0"/>
-                <a:ea typeface="Century Schoolbook" pitchFamily="34" charset="-122"/>
-                <a:cs typeface="Century Schoolbook" pitchFamily="34" charset="-120"/>
-              </a:rPr>
-              <a:t>4</a:t>
-            </a:r>
-            <a:endParaRPr lang="en-US" sz="2200" dirty="0"/>
+              <a:rPr lang="en-US" sz="1400" b="1" dirty="0">
+                <a:solidFill>
+                  <a:srgbClr val="3DDC97"/>
+                </a:solidFill>
+                <a:latin typeface="Calibri" pitchFamily="34" charset="0"/>
+                <a:ea typeface="Calibri" pitchFamily="34" charset="-122"/>
+                <a:cs typeface="Calibri" pitchFamily="34" charset="-120"/>
+              </a:rPr>
+              <a:t>Nisjet</a:t>
+            </a:r>
+            <a:endParaRPr lang="en-US" sz="1400" dirty="0"/>
           </a:p>
         </p:txBody>
       </p:sp>
       <p:sp>
         <p:nvSpPr>
-          <p:cNvPr id="20" name="Text 18"/>
+          <p:cNvPr id="14" name="Text 12"/>
           <p:cNvSpPr txBox="1"/>
           <p:nvPr/>
         </p:nvSpPr>
         <p:spPr>
           <a:xfrm>
-            <a:off x="1097280" y="4636008"/>
-            <a:ext cx="2606040" cy="777240"/>
+            <a:off x="2834640" y="3950208"/>
+            <a:ext cx="8716975" cy="603504"/>
           </a:xfrm>
           <a:prstGeom prst="rect">
             <a:avLst/>
@@ -14508,7 +14453,7 @@
               <a:buNone/>
             </a:pPr>
             <a:r>
-              <a:rPr lang="en-US" sz="1400" b="1" dirty="0">
+              <a:rPr lang="en-US" sz="1300" dirty="0">
                 <a:solidFill>
                   <a:srgbClr val="E8ECF2"/>
                 </a:solidFill>
@@ -14516,22 +14461,45 @@
                 <a:ea typeface="Calibri" pitchFamily="34" charset="-122"/>
                 <a:cs typeface="Calibri" pitchFamily="34" charset="-120"/>
               </a:rPr>
-              <a:t>Një prag i huazuar nga një metodë</a:t>
-            </a:r>
-            <a:endParaRPr lang="en-US" sz="1400" dirty="0"/>
+              <a:t>Të dy zgjidhësit në hapësirën e permutacioneve nisen nga i njëjti ndërtim min-degree, i llogaritur nga e para në çdo ekzekutim.</a:t>
+            </a:r>
+            <a:endParaRPr lang="en-US" sz="1300" dirty="0"/>
           </a:p>
         </p:txBody>
       </p:sp>
       <p:sp>
         <p:nvSpPr>
-          <p:cNvPr id="21" name="Text 19"/>
+          <p:cNvPr id="15" name="Shape 13"/>
+          <p:cNvSpPr/>
+          <p:nvPr/>
+        </p:nvSpPr>
+        <p:spPr>
+          <a:xfrm>
+            <a:off x="640080" y="4572000"/>
+            <a:ext cx="10911535" cy="0"/>
+          </a:xfrm>
+          <a:prstGeom prst="line">
+            <a:avLst/>
+          </a:prstGeom>
+          <a:noFill/>
+          <a:ln w="6350">
+            <a:solidFill>
+              <a:srgbClr val="2A3546"/>
+            </a:solidFill>
+            <a:prstDash val="solid"/>
+          </a:ln>
+        </p:spPr>
+      </p:sp>
+      <p:sp>
+        <p:nvSpPr>
+          <p:cNvPr id="16" name="Text 14"/>
           <p:cNvSpPr txBox="1"/>
           <p:nvPr/>
         </p:nvSpPr>
         <p:spPr>
           <a:xfrm>
-            <a:off x="3794760" y="4608576"/>
-            <a:ext cx="4572000" cy="822960"/>
+            <a:off x="640080" y="4663440"/>
+            <a:ext cx="2011680" cy="548640"/>
           </a:xfrm>
           <a:prstGeom prst="rect">
             <a:avLst/>
@@ -14547,30 +14515,30 @@
               <a:buNone/>
             </a:pPr>
             <a:r>
-              <a:rPr lang="en-US" sz="1150" dirty="0">
-                <a:solidFill>
-                  <a:srgbClr val="E8ECF2"/>
+              <a:rPr lang="en-US" sz="1400" b="1" dirty="0">
+                <a:solidFill>
+                  <a:srgbClr val="3DDC97"/>
                 </a:solidFill>
                 <a:latin typeface="Calibri" pitchFamily="34" charset="0"/>
                 <a:ea typeface="Calibri" pitchFamily="34" charset="-122"/>
                 <a:cs typeface="Calibri" pitchFamily="34" charset="-120"/>
               </a:rPr>
-              <a:t>Një prag prej 7,881 HV, i marrë nga instanca më e keqe e Hill Climbing, gjykoi rreshtat e çdo metode, ndërsa seed-at e vetë Team HRI në medium-graph shpërndahen 80,376 HV.</a:t>
-            </a:r>
-            <a:endParaRPr lang="en-US" sz="1150" dirty="0"/>
+              <a:t>Vlerësimi</a:t>
+            </a:r>
+            <a:endParaRPr lang="en-US" sz="1400" dirty="0"/>
           </a:p>
         </p:txBody>
       </p:sp>
       <p:sp>
         <p:nvSpPr>
-          <p:cNvPr id="22" name="Text 20"/>
+          <p:cNvPr id="17" name="Text 15"/>
           <p:cNvSpPr txBox="1"/>
           <p:nvPr/>
         </p:nvSpPr>
         <p:spPr>
           <a:xfrm>
-            <a:off x="8641080" y="4608576"/>
-            <a:ext cx="2910535" cy="822960"/>
+            <a:off x="2834640" y="4663440"/>
+            <a:ext cx="8716975" cy="603504"/>
           </a:xfrm>
           <a:prstGeom prst="rect">
             <a:avLst/>
@@ -14586,30 +14554,53 @@
               <a:buNone/>
             </a:pPr>
             <a:r>
-              <a:rPr lang="en-US" sz="1150" i="1" dirty="0">
-                <a:solidFill>
-                  <a:srgbClr val="9AA6B6"/>
+              <a:rPr lang="en-US" sz="1300" dirty="0">
+                <a:solidFill>
+                  <a:srgbClr val="E8ECF2"/>
                 </a:solidFill>
                 <a:latin typeface="Calibri" pitchFamily="34" charset="0"/>
                 <a:ea typeface="Calibri" pitchFamily="34" charset="-122"/>
                 <a:cs typeface="Calibri" pitchFamily="34" charset="-120"/>
               </a:rPr>
-              <a:t>U kap duke lexuar seed-at në vend të më të mirit nga tre: ndryshuan katër nga dhjetë vendime.</a:t>
-            </a:r>
-            <a:endParaRPr lang="en-US" sz="1150" dirty="0"/>
+              <a:t>Çdo përgjigje rivlerësohet me esa_eval.py. Kodi i vlerësimit i ESA-s, i ekzekutuar pranë tij, përputhet në të dhjetë instancat: 220 renditje, 2,000 hipervolume, kolona min-degree ×8. ESA e vlerëson me gjerësi 501 një vektor mbi kufi; ne e hedhim dorëzimin.</a:t>
+            </a:r>
+            <a:endParaRPr lang="en-US" sz="1300" dirty="0"/>
           </a:p>
         </p:txBody>
       </p:sp>
       <p:sp>
         <p:nvSpPr>
-          <p:cNvPr id="23" name="Text 21"/>
+          <p:cNvPr id="18" name="Shape 16"/>
+          <p:cNvSpPr/>
+          <p:nvPr/>
+        </p:nvSpPr>
+        <p:spPr>
+          <a:xfrm>
+            <a:off x="640080" y="5285232"/>
+            <a:ext cx="10911535" cy="0"/>
+          </a:xfrm>
+          <a:prstGeom prst="line">
+            <a:avLst/>
+          </a:prstGeom>
+          <a:noFill/>
+          <a:ln w="6350">
+            <a:solidFill>
+              <a:srgbClr val="2A3546"/>
+            </a:solidFill>
+            <a:prstDash val="solid"/>
+          </a:ln>
+        </p:spPr>
+      </p:sp>
+      <p:sp>
+        <p:nvSpPr>
+          <p:cNvPr id="19" name="Text 17"/>
           <p:cNvSpPr txBox="1"/>
           <p:nvPr/>
         </p:nvSpPr>
         <p:spPr>
           <a:xfrm>
-            <a:off x="640080" y="5650992"/>
-            <a:ext cx="10911535" cy="502920"/>
+            <a:off x="640080" y="5376672"/>
+            <a:ext cx="2011680" cy="548640"/>
           </a:xfrm>
           <a:prstGeom prst="rect">
             <a:avLst/>
@@ -14625,17 +14616,56 @@
               <a:buNone/>
             </a:pPr>
             <a:r>
-              <a:rPr lang="en-US" sz="1550" i="1" dirty="0">
+              <a:rPr lang="en-US" sz="1400" b="1" dirty="0">
+                <a:solidFill>
+                  <a:srgbClr val="F2C14E"/>
+                </a:solidFill>
+                <a:latin typeface="Calibri" pitchFamily="34" charset="0"/>
+                <a:ea typeface="Calibri" pitchFamily="34" charset="-122"/>
+                <a:cs typeface="Calibri" pitchFamily="34" charset="-120"/>
+              </a:rPr>
+              <a:t>Të pakontrolluara</a:t>
+            </a:r>
+            <a:endParaRPr lang="en-US" sz="1400" dirty="0"/>
+          </a:p>
+        </p:txBody>
+      </p:sp>
+      <p:sp>
+        <p:nvSpPr>
+          <p:cNvPr id="20" name="Text 18"/>
+          <p:cNvSpPr txBox="1"/>
+          <p:nvPr/>
+        </p:nvSpPr>
+        <p:spPr>
+          <a:xfrm>
+            <a:off x="2834640" y="5376672"/>
+            <a:ext cx="8716975" cy="603504"/>
+          </a:xfrm>
+          <a:prstGeom prst="rect">
+            <a:avLst/>
+          </a:prstGeom>
+          <a:noFill/>
+          <a:ln/>
+        </p:spPr>
+        <p:txBody>
+          <a:bodyPr wrap="square" lIns="0" tIns="0" rIns="0" bIns="0" rtlCol="0" anchor="t"/>
+          <a:lstStyle/>
+          <a:p>
+            <a:pPr indent="0" marL="0">
+              <a:buNone/>
+            </a:pPr>
+            <a:r>
+              <a:rPr lang="en-US" sz="1300" dirty="0">
                 <a:solidFill>
                   <a:srgbClr val="E8ECF2"/>
                 </a:solidFill>
-                <a:latin typeface="Century Schoolbook" pitchFamily="34" charset="0"/>
-                <a:ea typeface="Century Schoolbook" pitchFamily="34" charset="-122"/>
-                <a:cs typeface="Century Schoolbook" pitchFamily="34" charset="-120"/>
-              </a:rPr>
-              <a:t>Asnjë nuk u kap nga një grup testesh. Secila u kap nga një numër që kishte formën e gabuar për historinë e vet.</a:t>
-            </a:r>
-            <a:endParaRPr lang="en-US" sz="1550" dirty="0"/>
+                <a:latin typeface="Calibri" pitchFamily="34" charset="0"/>
+                <a:ea typeface="Calibri" pitchFamily="34" charset="-122"/>
+                <a:cs typeface="Calibri" pitchFamily="34" charset="-120"/>
+              </a:rPr>
+              <a:t>Më i miri nga tre favorizon metodat e zhurmshme, prandaj vendimet sipas seed-ave. Tre seed-a për qelizë. Familja e dendur përbëhet nga tre variante të një grafi.</a:t>
+            </a:r>
+            <a:endParaRPr lang="en-US" sz="1300" dirty="0"/>
           </a:p>
         </p:txBody>
       </p:sp>
@@ -14696,7 +14726,7 @@
 </file>
 
 <file path=ppt/slides/slide17.xml><?xml version="1.0" encoding="utf-8"?>
-<p:sld xmlns:a="http://schemas.openxmlformats.org/drawingml/2006/main" xmlns:r="http://schemas.openxmlformats.org/officeDocument/2006/relationships" xmlns:p="http://schemas.openxmlformats.org/presentationml/2006/main">
+<p:sld xmlns:a="http://schemas.openxmlformats.org/drawingml/2006/main" xmlns:r="http://schemas.openxmlformats.org/officeDocument/2006/relationships" xmlns:p="http://schemas.openxmlformats.org/presentationml/2006/main" show="0">
   <p:cSld name="Slide 17">
     <p:spTree>
       <p:nvGrpSpPr>
@@ -14788,753 +14818,15 @@
                 <a:ea typeface="Century Schoolbook" pitchFamily="34" charset="-122"/>
                 <a:cs typeface="Century Schoolbook" pitchFamily="34" charset="-120"/>
               </a:rPr>
-              <a:t>Protokolli dhe çfarë nuk kontrollon</a:t>
+              <a:t>Çdo seed pas tabelës</a:t>
             </a:r>
             <a:endParaRPr lang="en-US" sz="2700" dirty="0"/>
           </a:p>
         </p:txBody>
       </p:sp>
-      <p:sp>
-        <p:nvSpPr>
-          <p:cNvPr id="4" name="Text 2"/>
-          <p:cNvSpPr txBox="1"/>
-          <p:nvPr/>
-        </p:nvSpPr>
-        <p:spPr>
-          <a:xfrm>
-            <a:off x="640080" y="1810512"/>
-            <a:ext cx="2011680" cy="548640"/>
-          </a:xfrm>
-          <a:prstGeom prst="rect">
-            <a:avLst/>
-          </a:prstGeom>
-          <a:noFill/>
-          <a:ln/>
-        </p:spPr>
-        <p:txBody>
-          <a:bodyPr wrap="square" lIns="0" tIns="0" rIns="0" bIns="0" rtlCol="0" anchor="t"/>
-          <a:lstStyle/>
-          <a:p>
-            <a:pPr indent="0" marL="0">
-              <a:buNone/>
-            </a:pPr>
-            <a:r>
-              <a:rPr lang="en-US" sz="1400" b="1" dirty="0">
-                <a:solidFill>
-                  <a:srgbClr val="3DDC97"/>
-                </a:solidFill>
-                <a:latin typeface="Calibri" pitchFamily="34" charset="0"/>
-                <a:ea typeface="Calibri" pitchFamily="34" charset="-122"/>
-                <a:cs typeface="Calibri" pitchFamily="34" charset="-120"/>
-              </a:rPr>
-              <a:t>Buxheti</a:t>
-            </a:r>
-            <a:endParaRPr lang="en-US" sz="1400" dirty="0"/>
-          </a:p>
-        </p:txBody>
-      </p:sp>
-      <p:sp>
-        <p:nvSpPr>
-          <p:cNvPr id="5" name="Text 3"/>
-          <p:cNvSpPr txBox="1"/>
-          <p:nvPr/>
-        </p:nvSpPr>
-        <p:spPr>
-          <a:xfrm>
-            <a:off x="2834640" y="1810512"/>
-            <a:ext cx="8716975" cy="603504"/>
-          </a:xfrm>
-          <a:prstGeom prst="rect">
-            <a:avLst/>
-          </a:prstGeom>
-          <a:noFill/>
-          <a:ln/>
-        </p:spPr>
-        <p:txBody>
-          <a:bodyPr wrap="square" lIns="0" tIns="0" rIns="0" bIns="0" rtlCol="0" anchor="t"/>
-          <a:lstStyle/>
-          <a:p>
-            <a:pPr indent="0" marL="0">
-              <a:buNone/>
-            </a:pPr>
-            <a:r>
-              <a:rPr lang="en-US" sz="1300" dirty="0">
-                <a:solidFill>
-                  <a:srgbClr val="E8ECF2"/>
-                </a:solidFill>
-                <a:latin typeface="Calibri" pitchFamily="34" charset="0"/>
-                <a:ea typeface="Calibri" pitchFamily="34" charset="-122"/>
-                <a:cs typeface="Calibri" pitchFamily="34" charset="-120"/>
-              </a:rPr>
-              <a:t>1,200 s kohë reale për ekzekutim, tre seed-a, dhjetë instanca. Katër ekzekutime ranë jashtë 1,150–1,400 s pas ngecjeve të makinës; asnjë prej tyre nuk e jep vlerën më të mirë nga tre.</a:t>
-            </a:r>
-            <a:endParaRPr lang="en-US" sz="1300" dirty="0"/>
-          </a:p>
-        </p:txBody>
-      </p:sp>
-      <p:sp>
-        <p:nvSpPr>
-          <p:cNvPr id="6" name="Shape 4"/>
-          <p:cNvSpPr/>
-          <p:nvPr/>
-        </p:nvSpPr>
-        <p:spPr>
-          <a:xfrm>
-            <a:off x="640080" y="2432304"/>
-            <a:ext cx="10911535" cy="0"/>
-          </a:xfrm>
-          <a:prstGeom prst="line">
-            <a:avLst/>
-          </a:prstGeom>
-          <a:noFill/>
-          <a:ln w="6350">
-            <a:solidFill>
-              <a:srgbClr val="2A3546"/>
-            </a:solidFill>
-            <a:prstDash val="solid"/>
-          </a:ln>
-        </p:spPr>
-      </p:sp>
-      <p:sp>
-        <p:nvSpPr>
-          <p:cNvPr id="7" name="Text 5"/>
-          <p:cNvSpPr txBox="1"/>
-          <p:nvPr/>
-        </p:nvSpPr>
-        <p:spPr>
-          <a:xfrm>
-            <a:off x="640080" y="2523744"/>
-            <a:ext cx="2011680" cy="548640"/>
-          </a:xfrm>
-          <a:prstGeom prst="rect">
-            <a:avLst/>
-          </a:prstGeom>
-          <a:noFill/>
-          <a:ln/>
-        </p:spPr>
-        <p:txBody>
-          <a:bodyPr wrap="square" lIns="0" tIns="0" rIns="0" bIns="0" rtlCol="0" anchor="t"/>
-          <a:lstStyle/>
-          <a:p>
-            <a:pPr indent="0" marL="0">
-              <a:buNone/>
-            </a:pPr>
-            <a:r>
-              <a:rPr lang="en-US" sz="1400" b="1" dirty="0">
-                <a:solidFill>
-                  <a:srgbClr val="3DDC97"/>
-                </a:solidFill>
-                <a:latin typeface="Calibri" pitchFamily="34" charset="0"/>
-                <a:ea typeface="Calibri" pitchFamily="34" charset="-122"/>
-                <a:cs typeface="Calibri" pitchFamily="34" charset="-120"/>
-              </a:rPr>
-              <a:t>Hardueri</a:t>
-            </a:r>
-            <a:endParaRPr lang="en-US" sz="1400" dirty="0"/>
-          </a:p>
-        </p:txBody>
-      </p:sp>
-      <p:sp>
-        <p:nvSpPr>
-          <p:cNvPr id="8" name="Text 6"/>
-          <p:cNvSpPr txBox="1"/>
-          <p:nvPr/>
-        </p:nvSpPr>
-        <p:spPr>
-          <a:xfrm>
-            <a:off x="2834640" y="2523744"/>
-            <a:ext cx="8716975" cy="603504"/>
-          </a:xfrm>
-          <a:prstGeom prst="rect">
-            <a:avLst/>
-          </a:prstGeom>
-          <a:noFill/>
-          <a:ln/>
-        </p:spPr>
-        <p:txBody>
-          <a:bodyPr wrap="square" lIns="0" tIns="0" rIns="0" bIns="0" rtlCol="0" anchor="t"/>
-          <a:lstStyle/>
-          <a:p>
-            <a:pPr indent="0" marL="0">
-              <a:buNone/>
-            </a:pPr>
-            <a:r>
-              <a:rPr lang="en-US" sz="1300" dirty="0">
-                <a:solidFill>
-                  <a:srgbClr val="E8ECF2"/>
-                </a:solidFill>
-                <a:latin typeface="Calibri" pitchFamily="34" charset="0"/>
-                <a:ea typeface="Calibri" pitchFamily="34" charset="-122"/>
-                <a:cs typeface="Calibri" pitchFamily="34" charset="-120"/>
-              </a:rPr>
-              <a:t>fcmaes, Team HRI dhe Hill Climbing në një bërthamë CPU të fiksuar secili. Spacekangaroos me kodin e vet CUDA në një Kaggle T4, batch 1,024 (512 në n = 2,426).</a:t>
-            </a:r>
-            <a:endParaRPr lang="en-US" sz="1300" dirty="0"/>
-          </a:p>
-        </p:txBody>
-      </p:sp>
-      <p:sp>
-        <p:nvSpPr>
-          <p:cNvPr id="9" name="Shape 7"/>
-          <p:cNvSpPr/>
-          <p:nvPr/>
-        </p:nvSpPr>
-        <p:spPr>
-          <a:xfrm>
-            <a:off x="640080" y="3145536"/>
-            <a:ext cx="10911535" cy="0"/>
-          </a:xfrm>
-          <a:prstGeom prst="line">
-            <a:avLst/>
-          </a:prstGeom>
-          <a:noFill/>
-          <a:ln w="6350">
-            <a:solidFill>
-              <a:srgbClr val="2A3546"/>
-            </a:solidFill>
-            <a:prstDash val="solid"/>
-          </a:ln>
-        </p:spPr>
-      </p:sp>
-      <p:sp>
-        <p:nvSpPr>
-          <p:cNvPr id="10" name="Text 8"/>
-          <p:cNvSpPr txBox="1"/>
-          <p:nvPr/>
-        </p:nvSpPr>
-        <p:spPr>
-          <a:xfrm>
-            <a:off x="640080" y="3236976"/>
-            <a:ext cx="2011680" cy="548640"/>
-          </a:xfrm>
-          <a:prstGeom prst="rect">
-            <a:avLst/>
-          </a:prstGeom>
-          <a:noFill/>
-          <a:ln/>
-        </p:spPr>
-        <p:txBody>
-          <a:bodyPr wrap="square" lIns="0" tIns="0" rIns="0" bIns="0" rtlCol="0" anchor="t"/>
-          <a:lstStyle/>
-          <a:p>
-            <a:pPr indent="0" marL="0">
-              <a:buNone/>
-            </a:pPr>
-            <a:r>
-              <a:rPr lang="en-US" sz="1400" b="1" dirty="0">
-                <a:solidFill>
-                  <a:srgbClr val="3DDC97"/>
-                </a:solidFill>
-                <a:latin typeface="Calibri" pitchFamily="34" charset="0"/>
-                <a:ea typeface="Calibri" pitchFamily="34" charset="-122"/>
-                <a:cs typeface="Calibri" pitchFamily="34" charset="-120"/>
-              </a:rPr>
-              <a:t>Implementimet</a:t>
-            </a:r>
-            <a:endParaRPr lang="en-US" sz="1400" dirty="0"/>
-          </a:p>
-        </p:txBody>
-      </p:sp>
-      <p:sp>
-        <p:nvSpPr>
-          <p:cNvPr id="11" name="Text 9"/>
-          <p:cNvSpPr txBox="1"/>
-          <p:nvPr/>
-        </p:nvSpPr>
-        <p:spPr>
-          <a:xfrm>
-            <a:off x="2834640" y="3236976"/>
-            <a:ext cx="8716975" cy="603504"/>
-          </a:xfrm>
-          <a:prstGeom prst="rect">
-            <a:avLst/>
-          </a:prstGeom>
-          <a:noFill/>
-          <a:ln/>
-        </p:spPr>
-        <p:txBody>
-          <a:bodyPr wrap="square" lIns="0" tIns="0" rIns="0" bIns="0" rtlCol="0" anchor="t"/>
-          <a:lstStyle/>
-          <a:p>
-            <a:pPr indent="0" marL="0">
-              <a:buNone/>
-            </a:pPr>
-            <a:r>
-              <a:rPr lang="en-US" sz="1300" dirty="0">
-                <a:solidFill>
-                  <a:srgbClr val="E8ECF2"/>
-                </a:solidFill>
-                <a:latin typeface="Calibri" pitchFamily="34" charset="0"/>
-                <a:ea typeface="Calibri" pitchFamily="34" charset="-122"/>
-                <a:cs typeface="Calibri" pitchFamily="34" charset="-120"/>
-              </a:rPr>
-              <a:t>fcmaes i porturar nga qasja fast-cma-es; Team HRI i riimplementuar nga punimi, sepse kodi nuk u publikua; Spacekangaroos i ekzekutuar siç u publikua, plus një rregullim i tejmbushjes 32-bitëshe.</a:t>
-            </a:r>
-            <a:endParaRPr lang="en-US" sz="1300" dirty="0"/>
-          </a:p>
-        </p:txBody>
-      </p:sp>
-      <p:sp>
-        <p:nvSpPr>
-          <p:cNvPr id="12" name="Shape 10"/>
-          <p:cNvSpPr/>
-          <p:nvPr/>
-        </p:nvSpPr>
-        <p:spPr>
-          <a:xfrm>
-            <a:off x="640080" y="3858768"/>
-            <a:ext cx="10911535" cy="0"/>
-          </a:xfrm>
-          <a:prstGeom prst="line">
-            <a:avLst/>
-          </a:prstGeom>
-          <a:noFill/>
-          <a:ln w="6350">
-            <a:solidFill>
-              <a:srgbClr val="2A3546"/>
-            </a:solidFill>
-            <a:prstDash val="solid"/>
-          </a:ln>
-        </p:spPr>
-      </p:sp>
-      <p:sp>
-        <p:nvSpPr>
-          <p:cNvPr id="13" name="Text 11"/>
-          <p:cNvSpPr txBox="1"/>
-          <p:nvPr/>
-        </p:nvSpPr>
-        <p:spPr>
-          <a:xfrm>
-            <a:off x="640080" y="3950208"/>
-            <a:ext cx="2011680" cy="548640"/>
-          </a:xfrm>
-          <a:prstGeom prst="rect">
-            <a:avLst/>
-          </a:prstGeom>
-          <a:noFill/>
-          <a:ln/>
-        </p:spPr>
-        <p:txBody>
-          <a:bodyPr wrap="square" lIns="0" tIns="0" rIns="0" bIns="0" rtlCol="0" anchor="t"/>
-          <a:lstStyle/>
-          <a:p>
-            <a:pPr indent="0" marL="0">
-              <a:buNone/>
-            </a:pPr>
-            <a:r>
-              <a:rPr lang="en-US" sz="1400" b="1" dirty="0">
-                <a:solidFill>
-                  <a:srgbClr val="3DDC97"/>
-                </a:solidFill>
-                <a:latin typeface="Calibri" pitchFamily="34" charset="0"/>
-                <a:ea typeface="Calibri" pitchFamily="34" charset="-122"/>
-                <a:cs typeface="Calibri" pitchFamily="34" charset="-120"/>
-              </a:rPr>
-              <a:t>Nisjet</a:t>
-            </a:r>
-            <a:endParaRPr lang="en-US" sz="1400" dirty="0"/>
-          </a:p>
-        </p:txBody>
-      </p:sp>
-      <p:sp>
-        <p:nvSpPr>
-          <p:cNvPr id="14" name="Text 12"/>
-          <p:cNvSpPr txBox="1"/>
-          <p:nvPr/>
-        </p:nvSpPr>
-        <p:spPr>
-          <a:xfrm>
-            <a:off x="2834640" y="3950208"/>
-            <a:ext cx="8716975" cy="603504"/>
-          </a:xfrm>
-          <a:prstGeom prst="rect">
-            <a:avLst/>
-          </a:prstGeom>
-          <a:noFill/>
-          <a:ln/>
-        </p:spPr>
-        <p:txBody>
-          <a:bodyPr wrap="square" lIns="0" tIns="0" rIns="0" bIns="0" rtlCol="0" anchor="t"/>
-          <a:lstStyle/>
-          <a:p>
-            <a:pPr indent="0" marL="0">
-              <a:buNone/>
-            </a:pPr>
-            <a:r>
-              <a:rPr lang="en-US" sz="1300" dirty="0">
-                <a:solidFill>
-                  <a:srgbClr val="E8ECF2"/>
-                </a:solidFill>
-                <a:latin typeface="Calibri" pitchFamily="34" charset="0"/>
-                <a:ea typeface="Calibri" pitchFamily="34" charset="-122"/>
-                <a:cs typeface="Calibri" pitchFamily="34" charset="-120"/>
-              </a:rPr>
-              <a:t>Të dy zgjidhësit në hapësirën e permutacioneve nisen nga i njëjti ndërtim min-degree, i llogaritur nga e para në çdo ekzekutim.</a:t>
-            </a:r>
-            <a:endParaRPr lang="en-US" sz="1300" dirty="0"/>
-          </a:p>
-        </p:txBody>
-      </p:sp>
-      <p:sp>
-        <p:nvSpPr>
-          <p:cNvPr id="15" name="Shape 13"/>
-          <p:cNvSpPr/>
-          <p:nvPr/>
-        </p:nvSpPr>
-        <p:spPr>
-          <a:xfrm>
-            <a:off x="640080" y="4572000"/>
-            <a:ext cx="10911535" cy="0"/>
-          </a:xfrm>
-          <a:prstGeom prst="line">
-            <a:avLst/>
-          </a:prstGeom>
-          <a:noFill/>
-          <a:ln w="6350">
-            <a:solidFill>
-              <a:srgbClr val="2A3546"/>
-            </a:solidFill>
-            <a:prstDash val="solid"/>
-          </a:ln>
-        </p:spPr>
-      </p:sp>
-      <p:sp>
-        <p:nvSpPr>
-          <p:cNvPr id="16" name="Text 14"/>
-          <p:cNvSpPr txBox="1"/>
-          <p:nvPr/>
-        </p:nvSpPr>
-        <p:spPr>
-          <a:xfrm>
-            <a:off x="640080" y="4663440"/>
-            <a:ext cx="2011680" cy="548640"/>
-          </a:xfrm>
-          <a:prstGeom prst="rect">
-            <a:avLst/>
-          </a:prstGeom>
-          <a:noFill/>
-          <a:ln/>
-        </p:spPr>
-        <p:txBody>
-          <a:bodyPr wrap="square" lIns="0" tIns="0" rIns="0" bIns="0" rtlCol="0" anchor="t"/>
-          <a:lstStyle/>
-          <a:p>
-            <a:pPr indent="0" marL="0">
-              <a:buNone/>
-            </a:pPr>
-            <a:r>
-              <a:rPr lang="en-US" sz="1400" b="1" dirty="0">
-                <a:solidFill>
-                  <a:srgbClr val="3DDC97"/>
-                </a:solidFill>
-                <a:latin typeface="Calibri" pitchFamily="34" charset="0"/>
-                <a:ea typeface="Calibri" pitchFamily="34" charset="-122"/>
-                <a:cs typeface="Calibri" pitchFamily="34" charset="-120"/>
-              </a:rPr>
-              <a:t>Vlerësimi</a:t>
-            </a:r>
-            <a:endParaRPr lang="en-US" sz="1400" dirty="0"/>
-          </a:p>
-        </p:txBody>
-      </p:sp>
-      <p:sp>
-        <p:nvSpPr>
-          <p:cNvPr id="17" name="Text 15"/>
-          <p:cNvSpPr txBox="1"/>
-          <p:nvPr/>
-        </p:nvSpPr>
-        <p:spPr>
-          <a:xfrm>
-            <a:off x="2834640" y="4663440"/>
-            <a:ext cx="8716975" cy="603504"/>
-          </a:xfrm>
-          <a:prstGeom prst="rect">
-            <a:avLst/>
-          </a:prstGeom>
-          <a:noFill/>
-          <a:ln/>
-        </p:spPr>
-        <p:txBody>
-          <a:bodyPr wrap="square" lIns="0" tIns="0" rIns="0" bIns="0" rtlCol="0" anchor="t"/>
-          <a:lstStyle/>
-          <a:p>
-            <a:pPr indent="0" marL="0">
-              <a:buNone/>
-            </a:pPr>
-            <a:r>
-              <a:rPr lang="en-US" sz="1300" dirty="0">
-                <a:solidFill>
-                  <a:srgbClr val="E8ECF2"/>
-                </a:solidFill>
-                <a:latin typeface="Calibri" pitchFamily="34" charset="0"/>
-                <a:ea typeface="Calibri" pitchFamily="34" charset="-122"/>
-                <a:cs typeface="Calibri" pitchFamily="34" charset="-120"/>
-              </a:rPr>
-              <a:t>Çdo përgjigje rivlerësohet me esa_eval.py. Kodi i vlerësimit i ESA-s, i ekzekutuar pranë tij, përputhet në të dhjetë instancat: 220 renditje, 2,000 hipervolume, kolona min-degree ×8. ESA e vlerëson me gjerësi 501 një vektor mbi kufi; ne e hedhim dorëzimin.</a:t>
-            </a:r>
-            <a:endParaRPr lang="en-US" sz="1300" dirty="0"/>
-          </a:p>
-        </p:txBody>
-      </p:sp>
-      <p:sp>
-        <p:nvSpPr>
-          <p:cNvPr id="18" name="Shape 16"/>
-          <p:cNvSpPr/>
-          <p:nvPr/>
-        </p:nvSpPr>
-        <p:spPr>
-          <a:xfrm>
-            <a:off x="640080" y="5285232"/>
-            <a:ext cx="10911535" cy="0"/>
-          </a:xfrm>
-          <a:prstGeom prst="line">
-            <a:avLst/>
-          </a:prstGeom>
-          <a:noFill/>
-          <a:ln w="6350">
-            <a:solidFill>
-              <a:srgbClr val="2A3546"/>
-            </a:solidFill>
-            <a:prstDash val="solid"/>
-          </a:ln>
-        </p:spPr>
-      </p:sp>
-      <p:sp>
-        <p:nvSpPr>
-          <p:cNvPr id="19" name="Text 17"/>
-          <p:cNvSpPr txBox="1"/>
-          <p:nvPr/>
-        </p:nvSpPr>
-        <p:spPr>
-          <a:xfrm>
-            <a:off x="640080" y="5376672"/>
-            <a:ext cx="2011680" cy="548640"/>
-          </a:xfrm>
-          <a:prstGeom prst="rect">
-            <a:avLst/>
-          </a:prstGeom>
-          <a:noFill/>
-          <a:ln/>
-        </p:spPr>
-        <p:txBody>
-          <a:bodyPr wrap="square" lIns="0" tIns="0" rIns="0" bIns="0" rtlCol="0" anchor="t"/>
-          <a:lstStyle/>
-          <a:p>
-            <a:pPr indent="0" marL="0">
-              <a:buNone/>
-            </a:pPr>
-            <a:r>
-              <a:rPr lang="en-US" sz="1400" b="1" dirty="0">
-                <a:solidFill>
-                  <a:srgbClr val="F2C14E"/>
-                </a:solidFill>
-                <a:latin typeface="Calibri" pitchFamily="34" charset="0"/>
-                <a:ea typeface="Calibri" pitchFamily="34" charset="-122"/>
-                <a:cs typeface="Calibri" pitchFamily="34" charset="-120"/>
-              </a:rPr>
-              <a:t>Të pakontrolluara</a:t>
-            </a:r>
-            <a:endParaRPr lang="en-US" sz="1400" dirty="0"/>
-          </a:p>
-        </p:txBody>
-      </p:sp>
-      <p:sp>
-        <p:nvSpPr>
-          <p:cNvPr id="20" name="Text 18"/>
-          <p:cNvSpPr txBox="1"/>
-          <p:nvPr/>
-        </p:nvSpPr>
-        <p:spPr>
-          <a:xfrm>
-            <a:off x="2834640" y="5376672"/>
-            <a:ext cx="8716975" cy="603504"/>
-          </a:xfrm>
-          <a:prstGeom prst="rect">
-            <a:avLst/>
-          </a:prstGeom>
-          <a:noFill/>
-          <a:ln/>
-        </p:spPr>
-        <p:txBody>
-          <a:bodyPr wrap="square" lIns="0" tIns="0" rIns="0" bIns="0" rtlCol="0" anchor="t"/>
-          <a:lstStyle/>
-          <a:p>
-            <a:pPr indent="0" marL="0">
-              <a:buNone/>
-            </a:pPr>
-            <a:r>
-              <a:rPr lang="en-US" sz="1300" dirty="0">
-                <a:solidFill>
-                  <a:srgbClr val="E8ECF2"/>
-                </a:solidFill>
-                <a:latin typeface="Calibri" pitchFamily="34" charset="0"/>
-                <a:ea typeface="Calibri" pitchFamily="34" charset="-122"/>
-                <a:cs typeface="Calibri" pitchFamily="34" charset="-120"/>
-              </a:rPr>
-              <a:t>Më i miri nga tre favorizon metodat e zhurmshme, prandaj vendimet sipas seed-ave. Tre seed-a për qelizë. Familja e dendur përbëhet nga tre variante të një grafi.</a:t>
-            </a:r>
-            <a:endParaRPr lang="en-US" sz="1300" dirty="0"/>
-          </a:p>
-        </p:txBody>
-      </p:sp>
-      <p:sp>
-        <p:nvSpPr>
-          <p:cNvPr id="25" name="Slide Number Placeholder 0"/>
-          <p:cNvSpPr>
-            <a:spLocks noGrp="1"/>
-          </p:cNvSpPr>
-          <p:nvPr>
-            <p:ph type="sldNum" sz="quarter" idx="4294967295"/>
-          </p:nvPr>
-        </p:nvSpPr>
-        <p:spPr>
-          <a:xfrm>
-            <a:off x="11002975" y="6446520"/>
-            <a:ext cx="548640" cy="219456"/>
-          </a:xfrm>
-          <a:prstGeom prst="rect">
-            <a:avLst/>
-          </a:prstGeom>
-          <a:extLst>
-            <a:ext uri="{C572A759-6A51-4108-AA02-DFA0A04FC94B}">
-              <ma14:wrappingTextBoxFlag xmlns:ma14="http://schemas.microsoft.com/office/mac/drawingml/2011/main" val="0"/>
-            </a:ext>
-          </a:extLst>
-        </p:spPr>
-        <p:txBody>
-          <a:bodyPr/>
-          <a:lstStyle>
-            <a:lvl1pPr>
-              <a:defRPr sz="1000">
-                <a:solidFill>
-                  <a:srgbClr val="7D8AA0"/>
-                </a:solidFill>
-                <a:latin typeface="Calibri"/>
-                <a:ea typeface="Calibri"/>
-                <a:cs typeface="Calibri"/>
-              </a:defRPr>
-            </a:lvl1pPr>
-          </a:lstStyle>
-          <a:p>
-            <a:pPr algn="r"/>
-            <a:fld id="{F7021451-1387-4CA6-816F-3879F97B5CBC}" type="slidenum">
-              <a:rPr b="0" lang="en-US"/>
-              <a:t>17</a:t>
-            </a:fld>
-            <a:endParaRPr lang="en-US"/>
-          </a:p>
-        </p:txBody>
-      </p:sp>
-    </p:spTree>
-  </p:cSld>
-  <p:clrMapOvr>
-    <a:masterClrMapping/>
-  </p:clrMapOvr>
-</p:sld>
-</file>
-
-<file path=ppt/slides/slide18.xml><?xml version="1.0" encoding="utf-8"?>
-<p:sld xmlns:a="http://schemas.openxmlformats.org/drawingml/2006/main" xmlns:r="http://schemas.openxmlformats.org/officeDocument/2006/relationships" xmlns:p="http://schemas.openxmlformats.org/presentationml/2006/main">
-  <p:cSld name="Slide 18">
-    <p:spTree>
-      <p:nvGrpSpPr>
-        <p:cNvPr id="1" name=""/>
-        <p:cNvGrpSpPr/>
-        <p:nvPr/>
-      </p:nvGrpSpPr>
-      <p:grpSpPr>
-        <a:xfrm>
-          <a:off x="0" y="0"/>
-          <a:ext cx="0" cy="0"/>
-          <a:chOff x="0" y="0"/>
-          <a:chExt cx="0" cy="0"/>
-        </a:xfrm>
-      </p:grpSpPr>
-      <p:sp>
-        <p:nvSpPr>
-          <p:cNvPr id="2" name="Text 1"/>
-          <p:cNvSpPr/>
-          <p:nvPr>
-            <p:ph idx="101" type="body" hasCustomPrompt="1"/>
-          </p:nvPr>
-        </p:nvSpPr>
-        <p:spPr>
-          <a:xfrm>
-            <a:off x="640080" y="402336"/>
-            <a:ext cx="10911535" cy="256032"/>
-          </a:xfrm>
-          <a:prstGeom prst="rect">
-            <a:avLst/>
-          </a:prstGeom>
-          <a:noFill/>
-          <a:ln/>
-        </p:spPr>
-        <p:txBody>
-          <a:bodyPr wrap="square" lIns="0" tIns="0" rIns="0" bIns="0" rtlCol="0" anchor="t"/>
-          <a:lstStyle/>
-          <a:p>
-            <a:pPr algn="l" indent="0" marL="0">
-              <a:buNone/>
-            </a:pPr>
-            <a:r>
-              <a:rPr lang="en-US" sz="1050" b="1" spc="180" kern="0" dirty="0">
-                <a:solidFill>
-                  <a:srgbClr val="9AA6B6"/>
-                </a:solidFill>
-                <a:latin typeface="Calibri" pitchFamily="34" charset="0"/>
-                <a:ea typeface="Calibri" pitchFamily="34" charset="-122"/>
-                <a:cs typeface="Calibri" pitchFamily="34" charset="-120"/>
-              </a:rPr>
-              <a:t>SHTOJCË</a:t>
-            </a:r>
-            <a:endParaRPr lang="en-US" sz="1050" dirty="0"/>
-          </a:p>
-        </p:txBody>
-      </p:sp>
-      <p:sp>
-        <p:nvSpPr>
-          <p:cNvPr id="3" name="Text 1"/>
-          <p:cNvSpPr/>
-          <p:nvPr>
-            <p:ph idx="102" type="title" hasCustomPrompt="1"/>
-          </p:nvPr>
-        </p:nvSpPr>
-        <p:spPr>
-          <a:xfrm>
-            <a:off x="640080" y="676656"/>
-            <a:ext cx="10911535" cy="868680"/>
-          </a:xfrm>
-          <a:prstGeom prst="rect">
-            <a:avLst/>
-          </a:prstGeom>
-          <a:noFill/>
-          <a:ln/>
-        </p:spPr>
-        <p:txBody>
-          <a:bodyPr wrap="square" lIns="0" tIns="0" rIns="0" bIns="0" rtlCol="0" anchor="t"/>
-          <a:lstStyle/>
-          <a:p>
-            <a:pPr algn="l" indent="0" marL="0">
-              <a:buNone/>
-            </a:pPr>
-            <a:r>
-              <a:rPr lang="en-US" sz="2700" dirty="0">
-                <a:solidFill>
-                  <a:srgbClr val="E8ECF2"/>
-                </a:solidFill>
-                <a:latin typeface="Century Schoolbook" pitchFamily="34" charset="0"/>
-                <a:ea typeface="Century Schoolbook" pitchFamily="34" charset="-122"/>
-                <a:cs typeface="Century Schoolbook" pitchFamily="34" charset="-120"/>
-              </a:rPr>
-              <a:t>Çdo seed pas tabelës</a:t>
-            </a:r>
-            <a:endParaRPr lang="en-US" sz="2700" dirty="0"/>
-          </a:p>
-        </p:txBody>
-      </p:sp>
       <p:graphicFrame>
         <p:nvGraphicFramePr>
-          <p:cNvPr id="19" name="Table 0"/>
+          <p:cNvPr id="18" name="Table 0"/>
           <p:cNvGraphicFramePr>
             <a:graphicFrameLocks noGrp="1"/>
           </p:cNvGraphicFramePr>
@@ -22602,6 +21894,997 @@
             <a:pPr algn="r"/>
             <a:fld id="{F7021451-1387-4CA6-816F-3879F97B5CBC}" type="slidenum">
               <a:rPr b="0" lang="en-US"/>
+              <a:t>17</a:t>
+            </a:fld>
+            <a:endParaRPr lang="en-US"/>
+          </a:p>
+        </p:txBody>
+      </p:sp>
+    </p:spTree>
+  </p:cSld>
+  <p:clrMapOvr>
+    <a:masterClrMapping/>
+  </p:clrMapOvr>
+</p:sld>
+</file>
+
+<file path=ppt/slides/slide18.xml><?xml version="1.0" encoding="utf-8"?>
+<p:sld xmlns:a="http://schemas.openxmlformats.org/drawingml/2006/main" xmlns:r="http://schemas.openxmlformats.org/officeDocument/2006/relationships" xmlns:p="http://schemas.openxmlformats.org/presentationml/2006/main" show="0">
+  <p:cSld name="Slide 18">
+    <p:spTree>
+      <p:nvGrpSpPr>
+        <p:cNvPr id="1" name=""/>
+        <p:cNvGrpSpPr/>
+        <p:nvPr/>
+      </p:nvGrpSpPr>
+      <p:grpSpPr>
+        <a:xfrm>
+          <a:off x="0" y="0"/>
+          <a:ext cx="0" cy="0"/>
+          <a:chOff x="0" y="0"/>
+          <a:chExt cx="0" cy="0"/>
+        </a:xfrm>
+      </p:grpSpPr>
+      <p:sp>
+        <p:nvSpPr>
+          <p:cNvPr id="2" name="Text 1"/>
+          <p:cNvSpPr/>
+          <p:nvPr>
+            <p:ph idx="101" type="body" hasCustomPrompt="1"/>
+          </p:nvPr>
+        </p:nvSpPr>
+        <p:spPr>
+          <a:xfrm>
+            <a:off x="640080" y="402336"/>
+            <a:ext cx="10911535" cy="256032"/>
+          </a:xfrm>
+          <a:prstGeom prst="rect">
+            <a:avLst/>
+          </a:prstGeom>
+          <a:noFill/>
+          <a:ln/>
+        </p:spPr>
+        <p:txBody>
+          <a:bodyPr wrap="square" lIns="0" tIns="0" rIns="0" bIns="0" rtlCol="0" anchor="t"/>
+          <a:lstStyle/>
+          <a:p>
+            <a:pPr algn="l" indent="0" marL="0">
+              <a:buNone/>
+            </a:pPr>
+            <a:r>
+              <a:rPr lang="en-US" sz="1050" b="1" spc="180" kern="0" dirty="0">
+                <a:solidFill>
+                  <a:srgbClr val="9AA6B6"/>
+                </a:solidFill>
+                <a:latin typeface="Calibri" pitchFamily="34" charset="0"/>
+                <a:ea typeface="Calibri" pitchFamily="34" charset="-122"/>
+                <a:cs typeface="Calibri" pitchFamily="34" charset="-120"/>
+              </a:rPr>
+              <a:t>SHTOJCË</a:t>
+            </a:r>
+            <a:endParaRPr lang="en-US" sz="1050" dirty="0"/>
+          </a:p>
+        </p:txBody>
+      </p:sp>
+      <p:sp>
+        <p:nvSpPr>
+          <p:cNvPr id="3" name="Text 1"/>
+          <p:cNvSpPr/>
+          <p:nvPr>
+            <p:ph idx="102" type="title" hasCustomPrompt="1"/>
+          </p:nvPr>
+        </p:nvSpPr>
+        <p:spPr>
+          <a:xfrm>
+            <a:off x="640080" y="676656"/>
+            <a:ext cx="10911535" cy="868680"/>
+          </a:xfrm>
+          <a:prstGeom prst="rect">
+            <a:avLst/>
+          </a:prstGeom>
+          <a:noFill/>
+          <a:ln/>
+        </p:spPr>
+        <p:txBody>
+          <a:bodyPr wrap="square" lIns="0" tIns="0" rIns="0" bIns="0" rtlCol="0" anchor="t"/>
+          <a:lstStyle/>
+          <a:p>
+            <a:pPr algn="l" indent="0" marL="0">
+              <a:buNone/>
+            </a:pPr>
+            <a:r>
+              <a:rPr lang="en-US" sz="2700" dirty="0">
+                <a:solidFill>
+                  <a:srgbClr val="E8ECF2"/>
+                </a:solidFill>
+                <a:latin typeface="Century Schoolbook" pitchFamily="34" charset="0"/>
+                <a:ea typeface="Century Schoolbook" pitchFamily="34" charset="-122"/>
+                <a:cs typeface="Century Schoolbook" pitchFamily="34" charset="-120"/>
+              </a:rPr>
+              <a:t>Në instancat e rralla problemi është njëpërmasor</a:t>
+            </a:r>
+            <a:endParaRPr lang="en-US" sz="2700" dirty="0"/>
+          </a:p>
+        </p:txBody>
+      </p:sp>
+      <p:sp>
+        <p:nvSpPr>
+          <p:cNvPr id="4" name="Text 2"/>
+          <p:cNvSpPr txBox="1"/>
+          <p:nvPr/>
+        </p:nvSpPr>
+        <p:spPr>
+          <a:xfrm>
+            <a:off x="640080" y="1810512"/>
+            <a:ext cx="5852160" cy="1280160"/>
+          </a:xfrm>
+          <a:prstGeom prst="rect">
+            <a:avLst/>
+          </a:prstGeom>
+          <a:noFill/>
+          <a:ln/>
+        </p:spPr>
+        <p:txBody>
+          <a:bodyPr wrap="square" lIns="0" tIns="0" rIns="0" bIns="0" rtlCol="0" anchor="t"/>
+          <a:lstStyle/>
+          <a:p>
+            <a:pPr indent="0" marL="0">
+              <a:buNone/>
+            </a:pPr>
+            <a:r>
+              <a:rPr lang="en-US" sz="1400" dirty="0">
+                <a:solidFill>
+                  <a:srgbClr val="E8ECF2"/>
+                </a:solidFill>
+                <a:latin typeface="Calibri" pitchFamily="34" charset="0"/>
+                <a:ea typeface="Calibri" pitchFamily="34" charset="-122"/>
+                <a:cs typeface="Calibri" pitchFamily="34" charset="-120"/>
+              </a:rPr>
+              <a:t>Një pikë në </a:t>
+            </a:r>
+            <a:pPr indent="0" marL="0">
+              <a:buNone/>
+            </a:pPr>
+            <a:r>
+              <a:rPr lang="en-US" sz="1400" i="1" dirty="0">
+                <a:solidFill>
+                  <a:srgbClr val="E8ECF2"/>
+                </a:solidFill>
+                <a:latin typeface="Calibri" pitchFamily="34" charset="0"/>
+                <a:ea typeface="Calibri" pitchFamily="34" charset="-122"/>
+                <a:cs typeface="Calibri" pitchFamily="34" charset="-120"/>
+              </a:rPr>
+              <a:t>t</a:t>
+            </a:r>
+            <a:pPr indent="0" marL="0">
+              <a:buNone/>
+            </a:pPr>
+            <a:r>
+              <a:rPr lang="en-US" sz="1400" dirty="0">
+                <a:solidFill>
+                  <a:srgbClr val="E8ECF2"/>
+                </a:solidFill>
+                <a:latin typeface="Calibri" pitchFamily="34" charset="0"/>
+                <a:ea typeface="Calibri" pitchFamily="34" charset="-122"/>
+                <a:cs typeface="Calibri" pitchFamily="34" charset="-120"/>
+              </a:rPr>
+              <a:t> = 0 mbulon (</a:t>
+            </a:r>
+            <a:pPr indent="0" marL="0">
+              <a:buNone/>
+            </a:pPr>
+            <a:r>
+              <a:rPr lang="en-US" sz="1400" i="1" dirty="0">
+                <a:solidFill>
+                  <a:srgbClr val="E8ECF2"/>
+                </a:solidFill>
+                <a:latin typeface="Calibri" pitchFamily="34" charset="0"/>
+                <a:ea typeface="Calibri" pitchFamily="34" charset="-122"/>
+                <a:cs typeface="Calibri" pitchFamily="34" charset="-120"/>
+              </a:rPr>
+              <a:t>n</a:t>
+            </a:r>
+            <a:pPr indent="0" marL="0">
+              <a:buNone/>
+            </a:pPr>
+            <a:r>
+              <a:rPr lang="en-US" sz="1400" dirty="0">
+                <a:solidFill>
+                  <a:srgbClr val="E8ECF2"/>
+                </a:solidFill>
+                <a:latin typeface="Calibri" pitchFamily="34" charset="0"/>
+                <a:ea typeface="Calibri" pitchFamily="34" charset="-122"/>
+                <a:cs typeface="Calibri" pitchFamily="34" charset="-120"/>
+              </a:rPr>
+              <a:t> − </a:t>
+            </a:r>
+            <a:pPr indent="0" marL="0">
+              <a:buNone/>
+            </a:pPr>
+            <a:r>
+              <a:rPr lang="en-US" sz="1400" i="1" dirty="0">
+                <a:solidFill>
+                  <a:srgbClr val="E8ECF2"/>
+                </a:solidFill>
+                <a:latin typeface="Calibri" pitchFamily="34" charset="0"/>
+                <a:ea typeface="Calibri" pitchFamily="34" charset="-122"/>
+                <a:cs typeface="Calibri" pitchFamily="34" charset="-120"/>
+              </a:rPr>
+              <a:t>w</a:t>
+            </a:r>
+            <a:pPr indent="0" marL="0">
+              <a:buNone/>
+            </a:pPr>
+            <a:r>
+              <a:rPr lang="en-US" sz="1400" dirty="0">
+                <a:solidFill>
+                  <a:srgbClr val="E8ECF2"/>
+                </a:solidFill>
+                <a:latin typeface="Calibri" pitchFamily="34" charset="0"/>
+                <a:ea typeface="Calibri" pitchFamily="34" charset="-122"/>
+                <a:cs typeface="Calibri" pitchFamily="34" charset="-120"/>
+              </a:rPr>
+              <a:t>)·</a:t>
+            </a:r>
+            <a:pPr indent="0" marL="0">
+              <a:buNone/>
+            </a:pPr>
+            <a:r>
+              <a:rPr lang="en-US" sz="1400" i="1" dirty="0">
+                <a:solidFill>
+                  <a:srgbClr val="E8ECF2"/>
+                </a:solidFill>
+                <a:latin typeface="Calibri" pitchFamily="34" charset="0"/>
+                <a:ea typeface="Calibri" pitchFamily="34" charset="-122"/>
+                <a:cs typeface="Calibri" pitchFamily="34" charset="-120"/>
+              </a:rPr>
+              <a:t>n</a:t>
+            </a:r>
+            <a:pPr indent="0" marL="0">
+              <a:buNone/>
+            </a:pPr>
+            <a:r>
+              <a:rPr lang="en-US" sz="1400" dirty="0">
+                <a:solidFill>
+                  <a:srgbClr val="E8ECF2"/>
+                </a:solidFill>
+                <a:latin typeface="Calibri" pitchFamily="34" charset="0"/>
+                <a:ea typeface="Calibri" pitchFamily="34" charset="-122"/>
+                <a:cs typeface="Calibri" pitchFamily="34" charset="-120"/>
+              </a:rPr>
+              <a:t> nga katrori </a:t>
+            </a:r>
+            <a:pPr indent="0" marL="0">
+              <a:buNone/>
+            </a:pPr>
+            <a:r>
+              <a:rPr lang="en-US" sz="1400" i="1" dirty="0">
+                <a:solidFill>
+                  <a:srgbClr val="E8ECF2"/>
+                </a:solidFill>
+                <a:latin typeface="Calibri" pitchFamily="34" charset="0"/>
+                <a:ea typeface="Calibri" pitchFamily="34" charset="-122"/>
+                <a:cs typeface="Calibri" pitchFamily="34" charset="-120"/>
+              </a:rPr>
+              <a:t>n</a:t>
+            </a:r>
+            <a:pPr indent="0" marL="0">
+              <a:buNone/>
+            </a:pPr>
+            <a:r>
+              <a:rPr lang="en-US" sz="1400" dirty="0">
+                <a:solidFill>
+                  <a:srgbClr val="E8ECF2"/>
+                </a:solidFill>
+                <a:latin typeface="Calibri" pitchFamily="34" charset="0"/>
+                <a:ea typeface="Calibri" pitchFamily="34" charset="-122"/>
+                <a:cs typeface="Calibri" pitchFamily="34" charset="-120"/>
+              </a:rPr>
+              <a:t> × </a:t>
+            </a:r>
+            <a:pPr indent="0" marL="0">
+              <a:buNone/>
+            </a:pPr>
+            <a:r>
+              <a:rPr lang="en-US" sz="1400" i="1" dirty="0">
+                <a:solidFill>
+                  <a:srgbClr val="E8ECF2"/>
+                </a:solidFill>
+                <a:latin typeface="Calibri" pitchFamily="34" charset="0"/>
+                <a:ea typeface="Calibri" pitchFamily="34" charset="-122"/>
+                <a:cs typeface="Calibri" pitchFamily="34" charset="-120"/>
+              </a:rPr>
+              <a:t>n</a:t>
+            </a:r>
+            <a:pPr indent="0" marL="0">
+              <a:buNone/>
+            </a:pPr>
+            <a:r>
+              <a:rPr lang="en-US" sz="1400" dirty="0">
+                <a:solidFill>
+                  <a:srgbClr val="E8ECF2"/>
+                </a:solidFill>
+                <a:latin typeface="Calibri" pitchFamily="34" charset="0"/>
+                <a:ea typeface="Calibri" pitchFamily="34" charset="-122"/>
+                <a:cs typeface="Calibri" pitchFamily="34" charset="-120"/>
+              </a:rPr>
+              <a:t>. Në small-graph pika </a:t>
+            </a:r>
+            <a:pPr indent="0" marL="0">
+              <a:buNone/>
+            </a:pPr>
+            <a:r>
+              <a:rPr lang="en-US" sz="1400" i="1" dirty="0">
+                <a:solidFill>
+                  <a:srgbClr val="E8ECF2"/>
+                </a:solidFill>
+                <a:latin typeface="Calibri" pitchFamily="34" charset="0"/>
+                <a:ea typeface="Calibri" pitchFamily="34" charset="-122"/>
+                <a:cs typeface="Calibri" pitchFamily="34" charset="-120"/>
+              </a:rPr>
+              <a:t>t</a:t>
+            </a:r>
+            <a:pPr indent="0" marL="0">
+              <a:buNone/>
+            </a:pPr>
+            <a:r>
+              <a:rPr lang="en-US" sz="1400" dirty="0">
+                <a:solidFill>
+                  <a:srgbClr val="E8ECF2"/>
+                </a:solidFill>
+                <a:latin typeface="Calibri" pitchFamily="34" charset="0"/>
+                <a:ea typeface="Calibri" pitchFamily="34" charset="-122"/>
+                <a:cs typeface="Calibri" pitchFamily="34" charset="-120"/>
+              </a:rPr>
+              <a:t> = 0 e ndërtimit, me gjerësi 20, mbart 99.99% të rezultatit të tij; në medium-graph, me gjerësi 277, mbart 97.7%.</a:t>
+            </a:r>
+            <a:endParaRPr lang="en-US" sz="1400" dirty="0"/>
+          </a:p>
+        </p:txBody>
+      </p:sp>
+      <p:sp>
+        <p:nvSpPr>
+          <p:cNvPr id="5" name="Text 3"/>
+          <p:cNvSpPr txBox="1"/>
+          <p:nvPr/>
+        </p:nvSpPr>
+        <p:spPr>
+          <a:xfrm>
+            <a:off x="640080" y="3182112"/>
+            <a:ext cx="5852160" cy="1280160"/>
+          </a:xfrm>
+          <a:prstGeom prst="rect">
+            <a:avLst/>
+          </a:prstGeom>
+          <a:noFill/>
+          <a:ln/>
+        </p:spPr>
+        <p:txBody>
+          <a:bodyPr wrap="square" lIns="0" tIns="0" rIns="0" bIns="0" rtlCol="0" anchor="t"/>
+          <a:lstStyle/>
+          <a:p>
+            <a:pPr indent="0" marL="0">
+              <a:buNone/>
+            </a:pPr>
+            <a:r>
+              <a:rPr lang="en-US" sz="1400" dirty="0">
+                <a:solidFill>
+                  <a:srgbClr val="E8ECF2"/>
+                </a:solidFill>
+                <a:latin typeface="Calibri" pitchFamily="34" charset="0"/>
+                <a:ea typeface="Calibri" pitchFamily="34" charset="-122"/>
+                <a:cs typeface="Calibri" pitchFamily="34" charset="-120"/>
+              </a:rPr>
+              <a:t>Në large-graph asnjë pikë e vetme nuk mund të kalojë (</a:t>
+            </a:r>
+            <a:pPr indent="0" marL="0">
+              <a:buNone/>
+            </a:pPr>
+            <a:r>
+              <a:rPr lang="en-US" sz="1400" i="1" dirty="0">
+                <a:solidFill>
+                  <a:srgbClr val="E8ECF2"/>
+                </a:solidFill>
+                <a:latin typeface="Calibri" pitchFamily="34" charset="0"/>
+                <a:ea typeface="Calibri" pitchFamily="34" charset="-122"/>
+                <a:cs typeface="Calibri" pitchFamily="34" charset="-120"/>
+              </a:rPr>
+              <a:t>n</a:t>
+            </a:r>
+            <a:pPr indent="0" marL="0">
+              <a:buNone/>
+            </a:pPr>
+            <a:r>
+              <a:rPr lang="en-US" sz="1400" dirty="0">
+                <a:solidFill>
+                  <a:srgbClr val="E8ECF2"/>
+                </a:solidFill>
+                <a:latin typeface="Calibri" pitchFamily="34" charset="0"/>
+                <a:ea typeface="Calibri" pitchFamily="34" charset="-122"/>
+                <a:cs typeface="Calibri" pitchFamily="34" charset="-120"/>
+              </a:rPr>
+              <a:t> − 499)·</a:t>
+            </a:r>
+            <a:pPr indent="0" marL="0">
+              <a:buNone/>
+            </a:pPr>
+            <a:r>
+              <a:rPr lang="en-US" sz="1400" i="1" dirty="0">
+                <a:solidFill>
+                  <a:srgbClr val="E8ECF2"/>
+                </a:solidFill>
+                <a:latin typeface="Calibri" pitchFamily="34" charset="0"/>
+                <a:ea typeface="Calibri" pitchFamily="34" charset="-122"/>
+                <a:cs typeface="Calibri" pitchFamily="34" charset="-120"/>
+              </a:rPr>
+              <a:t>n</a:t>
+            </a:r>
+            <a:pPr indent="0" marL="0">
+              <a:buNone/>
+            </a:pPr>
+            <a:r>
+              <a:rPr lang="en-US" sz="1400" dirty="0">
+                <a:solidFill>
+                  <a:srgbClr val="E8ECF2"/>
+                </a:solidFill>
+                <a:latin typeface="Calibri" pitchFamily="34" charset="0"/>
+                <a:ea typeface="Calibri" pitchFamily="34" charset="-122"/>
+                <a:cs typeface="Calibri" pitchFamily="34" charset="-120"/>
+              </a:rPr>
+              <a:t>, 79.4% të katrorit, ndërsa më i miri i njohur arrin 93.3%: vetëm në familjen e dendur shkallarja e meriton vendin e vet.</a:t>
+            </a:r>
+            <a:endParaRPr lang="en-US" sz="1400" dirty="0"/>
+          </a:p>
+        </p:txBody>
+      </p:sp>
+      <p:sp>
+        <p:nvSpPr>
+          <p:cNvPr id="6" name="Text 4"/>
+          <p:cNvSpPr txBox="1"/>
+          <p:nvPr/>
+        </p:nvSpPr>
+        <p:spPr>
+          <a:xfrm>
+            <a:off x="640080" y="4553712"/>
+            <a:ext cx="5852160" cy="1280160"/>
+          </a:xfrm>
+          <a:prstGeom prst="rect">
+            <a:avLst/>
+          </a:prstGeom>
+          <a:noFill/>
+          <a:ln/>
+        </p:spPr>
+        <p:txBody>
+          <a:bodyPr wrap="square" lIns="0" tIns="0" rIns="0" bIns="0" rtlCol="0" anchor="t"/>
+          <a:lstStyle/>
+          <a:p>
+            <a:pPr indent="0" marL="0">
+              <a:buNone/>
+            </a:pPr>
+            <a:r>
+              <a:rPr lang="en-US" sz="1400" dirty="0">
+                <a:solidFill>
+                  <a:srgbClr val="9AA6B6"/>
+                </a:solidFill>
+                <a:latin typeface="Calibri" pitchFamily="34" charset="0"/>
+                <a:ea typeface="Calibri" pitchFamily="34" charset="-122"/>
+                <a:cs typeface="Calibri" pitchFamily="34" charset="-120"/>
+              </a:rPr>
+              <a:t>Dhe problemi është i vështirë dy herë: zgjidh cilat </a:t>
+            </a:r>
+            <a:pPr indent="0" marL="0">
+              <a:buNone/>
+            </a:pPr>
+            <a:r>
+              <a:rPr lang="en-US" sz="1400" i="1" dirty="0">
+                <a:solidFill>
+                  <a:srgbClr val="9AA6B6"/>
+                </a:solidFill>
+                <a:latin typeface="Calibri" pitchFamily="34" charset="0"/>
+                <a:ea typeface="Calibri" pitchFamily="34" charset="-122"/>
+                <a:cs typeface="Calibri" pitchFamily="34" charset="-120"/>
+              </a:rPr>
+              <a:t>t</a:t>
+            </a:r>
+            <a:pPr indent="0" marL="0">
+              <a:buNone/>
+            </a:pPr>
+            <a:r>
+              <a:rPr lang="en-US" sz="1400" dirty="0">
+                <a:solidFill>
+                  <a:srgbClr val="9AA6B6"/>
+                </a:solidFill>
+                <a:latin typeface="Calibri" pitchFamily="34" charset="0"/>
+                <a:ea typeface="Calibri" pitchFamily="34" charset="-122"/>
+                <a:cs typeface="Calibri" pitchFamily="34" charset="-120"/>
+              </a:rPr>
+              <a:t> kulme të hiqen (rreth 10⁴⁰³ nënbashkësi për </a:t>
+            </a:r>
+            <a:pPr indent="0" marL="0">
+              <a:buNone/>
+            </a:pPr>
+            <a:r>
+              <a:rPr lang="en-US" sz="1400" i="1" dirty="0">
+                <a:solidFill>
+                  <a:srgbClr val="9AA6B6"/>
+                </a:solidFill>
+                <a:latin typeface="Calibri" pitchFamily="34" charset="0"/>
+                <a:ea typeface="Calibri" pitchFamily="34" charset="-122"/>
+                <a:cs typeface="Calibri" pitchFamily="34" charset="-120"/>
+              </a:rPr>
+              <a:t>n</a:t>
+            </a:r>
+            <a:pPr indent="0" marL="0">
+              <a:buNone/>
+            </a:pPr>
+            <a:r>
+              <a:rPr lang="en-US" sz="1400" dirty="0">
+                <a:solidFill>
+                  <a:srgbClr val="9AA6B6"/>
+                </a:solidFill>
+                <a:latin typeface="Calibri" pitchFamily="34" charset="0"/>
+                <a:ea typeface="Calibri" pitchFamily="34" charset="-122"/>
+                <a:cs typeface="Calibri" pitchFamily="34" charset="-120"/>
+              </a:rPr>
+              <a:t> = 1,357, </a:t>
+            </a:r>
+            <a:pPr indent="0" marL="0">
+              <a:buNone/>
+            </a:pPr>
+            <a:r>
+              <a:rPr lang="en-US" sz="1400" i="1" dirty="0">
+                <a:solidFill>
+                  <a:srgbClr val="9AA6B6"/>
+                </a:solidFill>
+                <a:latin typeface="Calibri" pitchFamily="34" charset="0"/>
+                <a:ea typeface="Calibri" pitchFamily="34" charset="-122"/>
+                <a:cs typeface="Calibri" pitchFamily="34" charset="-120"/>
+              </a:rPr>
+              <a:t>t</a:t>
+            </a:r>
+            <a:pPr indent="0" marL="0">
+              <a:buNone/>
+            </a:pPr>
+            <a:r>
+              <a:rPr lang="en-US" sz="1400" dirty="0">
+                <a:solidFill>
+                  <a:srgbClr val="9AA6B6"/>
+                </a:solidFill>
+                <a:latin typeface="Calibri" pitchFamily="34" charset="0"/>
+                <a:ea typeface="Calibri" pitchFamily="34" charset="-122"/>
+                <a:cs typeface="Calibri" pitchFamily="34" charset="-120"/>
+              </a:rPr>
+              <a:t> = 600), pastaj minimizo gjerësinë e asaj që mbetet, që është vetë gjerësia e pemës, NP-e vështirë (Arnborg, Corneil dhe Proskurowski, 1987).</a:t>
+            </a:r>
+            <a:endParaRPr lang="en-US" sz="1400" dirty="0"/>
+          </a:p>
+        </p:txBody>
+      </p:sp>
+      <p:sp>
+        <p:nvSpPr>
+          <p:cNvPr id="7" name="Shape 5"/>
+          <p:cNvSpPr/>
+          <p:nvPr/>
+        </p:nvSpPr>
+        <p:spPr>
+          <a:xfrm>
+            <a:off x="6949440" y="2148840"/>
+            <a:ext cx="2194560" cy="2194560"/>
+          </a:xfrm>
+          <a:prstGeom prst="rect">
+            <a:avLst/>
+          </a:prstGeom>
+          <a:ln w="12700">
+            <a:solidFill>
+              <a:srgbClr val="9AA6B6"/>
+            </a:solidFill>
+            <a:prstDash val="solid"/>
+          </a:ln>
+        </p:spPr>
+      </p:sp>
+      <p:sp>
+        <p:nvSpPr>
+          <p:cNvPr id="8" name="Shape 6"/>
+          <p:cNvSpPr/>
+          <p:nvPr/>
+        </p:nvSpPr>
+        <p:spPr>
+          <a:xfrm>
+            <a:off x="6981784" y="2148840"/>
+            <a:ext cx="2162216" cy="2194560"/>
+          </a:xfrm>
+          <a:prstGeom prst="rect">
+            <a:avLst/>
+          </a:prstGeom>
+          <a:solidFill>
+            <a:srgbClr val="3DDC97">
+              <a:alpha val="30000"/>
+            </a:srgbClr>
+          </a:solidFill>
+          <a:ln/>
+        </p:spPr>
+      </p:sp>
+      <p:sp>
+        <p:nvSpPr>
+          <p:cNvPr id="9" name="Text 7"/>
+          <p:cNvSpPr txBox="1"/>
+          <p:nvPr/>
+        </p:nvSpPr>
+        <p:spPr>
+          <a:xfrm>
+            <a:off x="6949440" y="4453128"/>
+            <a:ext cx="2194560" cy="256032"/>
+          </a:xfrm>
+          <a:prstGeom prst="rect">
+            <a:avLst/>
+          </a:prstGeom>
+          <a:noFill/>
+          <a:ln/>
+        </p:spPr>
+        <p:txBody>
+          <a:bodyPr wrap="square" lIns="0" tIns="0" rIns="0" bIns="0" rtlCol="0" anchor="t"/>
+          <a:lstStyle/>
+          <a:p>
+            <a:pPr algn="ctr" indent="0" marL="0">
+              <a:buNone/>
+            </a:pPr>
+            <a:r>
+              <a:rPr lang="en-US" sz="1300" b="1" dirty="0">
+                <a:solidFill>
+                  <a:srgbClr val="E8ECF2"/>
+                </a:solidFill>
+                <a:latin typeface="Calibri" pitchFamily="34" charset="0"/>
+                <a:ea typeface="Calibri" pitchFamily="34" charset="-122"/>
+                <a:cs typeface="Calibri" pitchFamily="34" charset="-120"/>
+              </a:rPr>
+              <a:t>small-graph</a:t>
+            </a:r>
+            <a:endParaRPr lang="en-US" sz="1300" dirty="0"/>
+          </a:p>
+        </p:txBody>
+      </p:sp>
+      <p:sp>
+        <p:nvSpPr>
+          <p:cNvPr id="10" name="Text 8"/>
+          <p:cNvSpPr txBox="1"/>
+          <p:nvPr/>
+        </p:nvSpPr>
+        <p:spPr>
+          <a:xfrm>
+            <a:off x="6949440" y="3017520"/>
+            <a:ext cx="2194560" cy="457200"/>
+          </a:xfrm>
+          <a:prstGeom prst="rect">
+            <a:avLst/>
+          </a:prstGeom>
+          <a:noFill/>
+          <a:ln/>
+        </p:spPr>
+        <p:txBody>
+          <a:bodyPr wrap="square" lIns="0" tIns="0" rIns="0" bIns="0" rtlCol="0" anchor="t"/>
+          <a:lstStyle/>
+          <a:p>
+            <a:pPr algn="ctr" indent="0" marL="0">
+              <a:buNone/>
+            </a:pPr>
+            <a:r>
+              <a:rPr lang="en-US" sz="2400" dirty="0">
+                <a:solidFill>
+                  <a:srgbClr val="FFFFFF"/>
+                </a:solidFill>
+                <a:latin typeface="Century Schoolbook" pitchFamily="34" charset="0"/>
+                <a:ea typeface="Century Schoolbook" pitchFamily="34" charset="-122"/>
+                <a:cs typeface="Century Schoolbook" pitchFamily="34" charset="-120"/>
+              </a:rPr>
+              <a:t>98.5%</a:t>
+            </a:r>
+            <a:endParaRPr lang="en-US" sz="2400" dirty="0"/>
+          </a:p>
+        </p:txBody>
+      </p:sp>
+      <p:sp>
+        <p:nvSpPr>
+          <p:cNvPr id="11" name="Text 9"/>
+          <p:cNvSpPr txBox="1"/>
+          <p:nvPr/>
+        </p:nvSpPr>
+        <p:spPr>
+          <a:xfrm>
+            <a:off x="6858000" y="4727448"/>
+            <a:ext cx="2377440" cy="219456"/>
+          </a:xfrm>
+          <a:prstGeom prst="rect">
+            <a:avLst/>
+          </a:prstGeom>
+          <a:noFill/>
+          <a:ln/>
+        </p:spPr>
+        <p:txBody>
+          <a:bodyPr wrap="square" lIns="0" tIns="0" rIns="0" bIns="0" rtlCol="0" anchor="t"/>
+          <a:lstStyle/>
+          <a:p>
+            <a:pPr algn="ctr" indent="0" marL="0">
+              <a:buNone/>
+            </a:pPr>
+            <a:r>
+              <a:rPr lang="en-US" sz="1050" dirty="0">
+                <a:solidFill>
+                  <a:srgbClr val="9AA6B6"/>
+                </a:solidFill>
+                <a:latin typeface="Calibri" pitchFamily="34" charset="0"/>
+                <a:ea typeface="Calibri" pitchFamily="34" charset="-122"/>
+                <a:cs typeface="Calibri" pitchFamily="34" charset="-120"/>
+              </a:rPr>
+              <a:t>w = 20 nga n = 1,357 · 99.99% e rezultatit</a:t>
+            </a:r>
+            <a:endParaRPr lang="en-US" sz="1050" dirty="0"/>
+          </a:p>
+        </p:txBody>
+      </p:sp>
+      <p:sp>
+        <p:nvSpPr>
+          <p:cNvPr id="12" name="Shape 10"/>
+          <p:cNvSpPr/>
+          <p:nvPr/>
+        </p:nvSpPr>
+        <p:spPr>
+          <a:xfrm>
+            <a:off x="9372600" y="2148840"/>
+            <a:ext cx="2194560" cy="2194560"/>
+          </a:xfrm>
+          <a:prstGeom prst="rect">
+            <a:avLst/>
+          </a:prstGeom>
+          <a:ln w="12700">
+            <a:solidFill>
+              <a:srgbClr val="9AA6B6"/>
+            </a:solidFill>
+            <a:prstDash val="solid"/>
+          </a:ln>
+        </p:spPr>
+      </p:sp>
+      <p:sp>
+        <p:nvSpPr>
+          <p:cNvPr id="13" name="Shape 11"/>
+          <p:cNvSpPr/>
+          <p:nvPr/>
+        </p:nvSpPr>
+        <p:spPr>
+          <a:xfrm>
+            <a:off x="9823995" y="2148840"/>
+            <a:ext cx="1743165" cy="2194560"/>
+          </a:xfrm>
+          <a:prstGeom prst="rect">
+            <a:avLst/>
+          </a:prstGeom>
+          <a:solidFill>
+            <a:srgbClr val="3DDC97">
+              <a:alpha val="30000"/>
+            </a:srgbClr>
+          </a:solidFill>
+          <a:ln/>
+        </p:spPr>
+      </p:sp>
+      <p:sp>
+        <p:nvSpPr>
+          <p:cNvPr id="14" name="Text 12"/>
+          <p:cNvSpPr txBox="1"/>
+          <p:nvPr/>
+        </p:nvSpPr>
+        <p:spPr>
+          <a:xfrm>
+            <a:off x="9372600" y="4453128"/>
+            <a:ext cx="2194560" cy="256032"/>
+          </a:xfrm>
+          <a:prstGeom prst="rect">
+            <a:avLst/>
+          </a:prstGeom>
+          <a:noFill/>
+          <a:ln/>
+        </p:spPr>
+        <p:txBody>
+          <a:bodyPr wrap="square" lIns="0" tIns="0" rIns="0" bIns="0" rtlCol="0" anchor="t"/>
+          <a:lstStyle/>
+          <a:p>
+            <a:pPr algn="ctr" indent="0" marL="0">
+              <a:buNone/>
+            </a:pPr>
+            <a:r>
+              <a:rPr lang="en-US" sz="1300" b="1" dirty="0">
+                <a:solidFill>
+                  <a:srgbClr val="E8ECF2"/>
+                </a:solidFill>
+                <a:latin typeface="Calibri" pitchFamily="34" charset="0"/>
+                <a:ea typeface="Calibri" pitchFamily="34" charset="-122"/>
+                <a:cs typeface="Calibri" pitchFamily="34" charset="-120"/>
+              </a:rPr>
+              <a:t>large-graph</a:t>
+            </a:r>
+            <a:endParaRPr lang="en-US" sz="1300" dirty="0"/>
+          </a:p>
+        </p:txBody>
+      </p:sp>
+      <p:sp>
+        <p:nvSpPr>
+          <p:cNvPr id="15" name="Text 13"/>
+          <p:cNvSpPr txBox="1"/>
+          <p:nvPr/>
+        </p:nvSpPr>
+        <p:spPr>
+          <a:xfrm>
+            <a:off x="9372600" y="3017520"/>
+            <a:ext cx="2194560" cy="457200"/>
+          </a:xfrm>
+          <a:prstGeom prst="rect">
+            <a:avLst/>
+          </a:prstGeom>
+          <a:noFill/>
+          <a:ln/>
+        </p:spPr>
+        <p:txBody>
+          <a:bodyPr wrap="square" lIns="0" tIns="0" rIns="0" bIns="0" rtlCol="0" anchor="t"/>
+          <a:lstStyle/>
+          <a:p>
+            <a:pPr algn="ctr" indent="0" marL="0">
+              <a:buNone/>
+            </a:pPr>
+            <a:r>
+              <a:rPr lang="en-US" sz="2400" dirty="0">
+                <a:solidFill>
+                  <a:srgbClr val="FFFFFF"/>
+                </a:solidFill>
+                <a:latin typeface="Century Schoolbook" pitchFamily="34" charset="0"/>
+                <a:ea typeface="Century Schoolbook" pitchFamily="34" charset="-122"/>
+                <a:cs typeface="Century Schoolbook" pitchFamily="34" charset="-120"/>
+              </a:rPr>
+              <a:t>79.4%</a:t>
+            </a:r>
+            <a:endParaRPr lang="en-US" sz="2400" dirty="0"/>
+          </a:p>
+        </p:txBody>
+      </p:sp>
+      <p:sp>
+        <p:nvSpPr>
+          <p:cNvPr id="16" name="Text 14"/>
+          <p:cNvSpPr txBox="1"/>
+          <p:nvPr/>
+        </p:nvSpPr>
+        <p:spPr>
+          <a:xfrm>
+            <a:off x="9281160" y="4727448"/>
+            <a:ext cx="2377440" cy="219456"/>
+          </a:xfrm>
+          <a:prstGeom prst="rect">
+            <a:avLst/>
+          </a:prstGeom>
+          <a:noFill/>
+          <a:ln/>
+        </p:spPr>
+        <p:txBody>
+          <a:bodyPr wrap="square" lIns="0" tIns="0" rIns="0" bIns="0" rtlCol="0" anchor="t"/>
+          <a:lstStyle/>
+          <a:p>
+            <a:pPr algn="ctr" indent="0" marL="0">
+              <a:buNone/>
+            </a:pPr>
+            <a:r>
+              <a:rPr lang="en-US" sz="1050" dirty="0">
+                <a:solidFill>
+                  <a:srgbClr val="9AA6B6"/>
+                </a:solidFill>
+                <a:latin typeface="Calibri" pitchFamily="34" charset="0"/>
+                <a:ea typeface="Calibri" pitchFamily="34" charset="-122"/>
+                <a:cs typeface="Calibri" pitchFamily="34" charset="-120"/>
+              </a:rPr>
+              <a:t>w ≥ 499 nga n = 2,426 · më i miri i njohur 93.3%</a:t>
+            </a:r>
+            <a:endParaRPr lang="en-US" sz="1050" dirty="0"/>
+          </a:p>
+        </p:txBody>
+      </p:sp>
+      <p:sp>
+        <p:nvSpPr>
+          <p:cNvPr id="17" name="Shape 15"/>
+          <p:cNvSpPr/>
+          <p:nvPr/>
+        </p:nvSpPr>
+        <p:spPr>
+          <a:xfrm>
+            <a:off x="6949440" y="5257800"/>
+            <a:ext cx="228600" cy="128016"/>
+          </a:xfrm>
+          <a:prstGeom prst="rect">
+            <a:avLst/>
+          </a:prstGeom>
+          <a:solidFill>
+            <a:srgbClr val="3DDC97">
+              <a:alpha val="30000"/>
+            </a:srgbClr>
+          </a:solidFill>
+          <a:ln/>
+        </p:spPr>
+      </p:sp>
+      <p:sp>
+        <p:nvSpPr>
+          <p:cNvPr id="18" name="Text 16"/>
+          <p:cNvSpPr txBox="1"/>
+          <p:nvPr/>
+        </p:nvSpPr>
+        <p:spPr>
+          <a:xfrm>
+            <a:off x="7251192" y="5202936"/>
+            <a:ext cx="2194560" cy="228600"/>
+          </a:xfrm>
+          <a:prstGeom prst="rect">
+            <a:avLst/>
+          </a:prstGeom>
+          <a:noFill/>
+          <a:ln/>
+        </p:spPr>
+        <p:txBody>
+          <a:bodyPr wrap="square" lIns="0" tIns="0" rIns="0" bIns="0" rtlCol="0" anchor="t"/>
+          <a:lstStyle/>
+          <a:p>
+            <a:pPr indent="0" marL="0">
+              <a:buNone/>
+            </a:pPr>
+            <a:r>
+              <a:rPr lang="en-US" sz="1050" dirty="0">
+                <a:solidFill>
+                  <a:srgbClr val="9AA6B6"/>
+                </a:solidFill>
+                <a:latin typeface="Calibri" pitchFamily="34" charset="0"/>
+                <a:ea typeface="Calibri" pitchFamily="34" charset="-122"/>
+                <a:cs typeface="Calibri" pitchFamily="34" charset="-120"/>
+              </a:rPr>
+              <a:t>një pikë në t = 0</a:t>
+            </a:r>
+            <a:endParaRPr lang="en-US" sz="1050" dirty="0"/>
+          </a:p>
+        </p:txBody>
+      </p:sp>
+      <p:sp>
+        <p:nvSpPr>
+          <p:cNvPr id="25" name="Slide Number Placeholder 0"/>
+          <p:cNvSpPr>
+            <a:spLocks noGrp="1"/>
+          </p:cNvSpPr>
+          <p:nvPr>
+            <p:ph type="sldNum" sz="quarter" idx="4294967295"/>
+          </p:nvPr>
+        </p:nvSpPr>
+        <p:spPr>
+          <a:xfrm>
+            <a:off x="11002975" y="6446520"/>
+            <a:ext cx="548640" cy="219456"/>
+          </a:xfrm>
+          <a:prstGeom prst="rect">
+            <a:avLst/>
+          </a:prstGeom>
+          <a:extLst>
+            <a:ext uri="{C572A759-6A51-4108-AA02-DFA0A04FC94B}">
+              <ma14:wrappingTextBoxFlag xmlns:ma14="http://schemas.microsoft.com/office/mac/drawingml/2011/main" val="0"/>
+            </a:ext>
+          </a:extLst>
+        </p:spPr>
+        <p:txBody>
+          <a:bodyPr/>
+          <a:lstStyle>
+            <a:lvl1pPr>
+              <a:defRPr sz="1000">
+                <a:solidFill>
+                  <a:srgbClr val="7D8AA0"/>
+                </a:solidFill>
+                <a:latin typeface="Calibri"/>
+                <a:ea typeface="Calibri"/>
+                <a:cs typeface="Calibri"/>
+              </a:defRPr>
+            </a:lvl1pPr>
+          </a:lstStyle>
+          <a:p>
+            <a:pPr algn="r"/>
+            <a:fld id="{F7021451-1387-4CA6-816F-3879F97B5CBC}" type="slidenum">
+              <a:rPr b="0" lang="en-US"/>
               <a:t>18</a:t>
             </a:fld>
             <a:endParaRPr lang="en-US"/>
@@ -22617,7 +22900,7 @@
 </file>
 
 <file path=ppt/slides/slide19.xml><?xml version="1.0" encoding="utf-8"?>
-<p:sld xmlns:a="http://schemas.openxmlformats.org/drawingml/2006/main" xmlns:r="http://schemas.openxmlformats.org/officeDocument/2006/relationships" xmlns:p="http://schemas.openxmlformats.org/presentationml/2006/main">
+<p:sld xmlns:a="http://schemas.openxmlformats.org/drawingml/2006/main" xmlns:r="http://schemas.openxmlformats.org/officeDocument/2006/relationships" xmlns:p="http://schemas.openxmlformats.org/presentationml/2006/main" show="0">
   <p:cSld name="Slide 19">
     <p:spTree>
       <p:nvGrpSpPr>
@@ -22709,7 +22992,7 @@
                 <a:ea typeface="Century Schoolbook" pitchFamily="34" charset="-122"/>
                 <a:cs typeface="Century Schoolbook" pitchFamily="34" charset="-120"/>
               </a:rPr>
-              <a:t>Në instancat e rralla problemi është njëpërmasor</a:t>
+              <a:t>Dy gjetje për problemin, jo për kërkimin</a:t>
             </a:r>
             <a:endParaRPr lang="en-US" sz="2700" dirty="0"/>
           </a:p>
@@ -22724,7 +23007,7 @@
         <p:spPr>
           <a:xfrm>
             <a:off x="640080" y="1810512"/>
-            <a:ext cx="5852160" cy="1280160"/>
+            <a:ext cx="5212080" cy="365760"/>
           </a:xfrm>
           <a:prstGeom prst="rect">
             <a:avLst/>
@@ -22740,213 +23023,17 @@
               <a:buNone/>
             </a:pPr>
             <a:r>
-              <a:rPr lang="en-US" sz="1400" dirty="0">
+              <a:rPr lang="en-US" sz="1800" dirty="0">
                 <a:solidFill>
                   <a:srgbClr val="E8ECF2"/>
                 </a:solidFill>
-                <a:latin typeface="Calibri" pitchFamily="34" charset="0"/>
-                <a:ea typeface="Calibri" pitchFamily="34" charset="-122"/>
-                <a:cs typeface="Calibri" pitchFamily="34" charset="-120"/>
-              </a:rPr>
-              <a:t>Një pikë në </a:t>
-            </a:r>
-            <a:pPr indent="0" marL="0">
-              <a:buNone/>
-            </a:pPr>
-            <a:r>
-              <a:rPr lang="en-US" sz="1400" i="1" dirty="0">
-                <a:solidFill>
-                  <a:srgbClr val="E8ECF2"/>
-                </a:solidFill>
-                <a:latin typeface="Calibri" pitchFamily="34" charset="0"/>
-                <a:ea typeface="Calibri" pitchFamily="34" charset="-122"/>
-                <a:cs typeface="Calibri" pitchFamily="34" charset="-120"/>
-              </a:rPr>
-              <a:t>t</a:t>
-            </a:r>
-            <a:pPr indent="0" marL="0">
-              <a:buNone/>
-            </a:pPr>
-            <a:r>
-              <a:rPr lang="en-US" sz="1400" dirty="0">
-                <a:solidFill>
-                  <a:srgbClr val="E8ECF2"/>
-                </a:solidFill>
-                <a:latin typeface="Calibri" pitchFamily="34" charset="0"/>
-                <a:ea typeface="Calibri" pitchFamily="34" charset="-122"/>
-                <a:cs typeface="Calibri" pitchFamily="34" charset="-120"/>
-              </a:rPr>
-              <a:t> = 0 mbulon (</a:t>
-            </a:r>
-            <a:pPr indent="0" marL="0">
-              <a:buNone/>
-            </a:pPr>
-            <a:r>
-              <a:rPr lang="en-US" sz="1400" i="1" dirty="0">
-                <a:solidFill>
-                  <a:srgbClr val="E8ECF2"/>
-                </a:solidFill>
-                <a:latin typeface="Calibri" pitchFamily="34" charset="0"/>
-                <a:ea typeface="Calibri" pitchFamily="34" charset="-122"/>
-                <a:cs typeface="Calibri" pitchFamily="34" charset="-120"/>
-              </a:rPr>
-              <a:t>n</a:t>
-            </a:r>
-            <a:pPr indent="0" marL="0">
-              <a:buNone/>
-            </a:pPr>
-            <a:r>
-              <a:rPr lang="en-US" sz="1400" dirty="0">
-                <a:solidFill>
-                  <a:srgbClr val="E8ECF2"/>
-                </a:solidFill>
-                <a:latin typeface="Calibri" pitchFamily="34" charset="0"/>
-                <a:ea typeface="Calibri" pitchFamily="34" charset="-122"/>
-                <a:cs typeface="Calibri" pitchFamily="34" charset="-120"/>
-              </a:rPr>
-              <a:t> − </a:t>
-            </a:r>
-            <a:pPr indent="0" marL="0">
-              <a:buNone/>
-            </a:pPr>
-            <a:r>
-              <a:rPr lang="en-US" sz="1400" i="1" dirty="0">
-                <a:solidFill>
-                  <a:srgbClr val="E8ECF2"/>
-                </a:solidFill>
-                <a:latin typeface="Calibri" pitchFamily="34" charset="0"/>
-                <a:ea typeface="Calibri" pitchFamily="34" charset="-122"/>
-                <a:cs typeface="Calibri" pitchFamily="34" charset="-120"/>
-              </a:rPr>
-              <a:t>w</a:t>
-            </a:r>
-            <a:pPr indent="0" marL="0">
-              <a:buNone/>
-            </a:pPr>
-            <a:r>
-              <a:rPr lang="en-US" sz="1400" dirty="0">
-                <a:solidFill>
-                  <a:srgbClr val="E8ECF2"/>
-                </a:solidFill>
-                <a:latin typeface="Calibri" pitchFamily="34" charset="0"/>
-                <a:ea typeface="Calibri" pitchFamily="34" charset="-122"/>
-                <a:cs typeface="Calibri" pitchFamily="34" charset="-120"/>
-              </a:rPr>
-              <a:t>)·</a:t>
-            </a:r>
-            <a:pPr indent="0" marL="0">
-              <a:buNone/>
-            </a:pPr>
-            <a:r>
-              <a:rPr lang="en-US" sz="1400" i="1" dirty="0">
-                <a:solidFill>
-                  <a:srgbClr val="E8ECF2"/>
-                </a:solidFill>
-                <a:latin typeface="Calibri" pitchFamily="34" charset="0"/>
-                <a:ea typeface="Calibri" pitchFamily="34" charset="-122"/>
-                <a:cs typeface="Calibri" pitchFamily="34" charset="-120"/>
-              </a:rPr>
-              <a:t>n</a:t>
-            </a:r>
-            <a:pPr indent="0" marL="0">
-              <a:buNone/>
-            </a:pPr>
-            <a:r>
-              <a:rPr lang="en-US" sz="1400" dirty="0">
-                <a:solidFill>
-                  <a:srgbClr val="E8ECF2"/>
-                </a:solidFill>
-                <a:latin typeface="Calibri" pitchFamily="34" charset="0"/>
-                <a:ea typeface="Calibri" pitchFamily="34" charset="-122"/>
-                <a:cs typeface="Calibri" pitchFamily="34" charset="-120"/>
-              </a:rPr>
-              <a:t> nga katrori </a:t>
-            </a:r>
-            <a:pPr indent="0" marL="0">
-              <a:buNone/>
-            </a:pPr>
-            <a:r>
-              <a:rPr lang="en-US" sz="1400" i="1" dirty="0">
-                <a:solidFill>
-                  <a:srgbClr val="E8ECF2"/>
-                </a:solidFill>
-                <a:latin typeface="Calibri" pitchFamily="34" charset="0"/>
-                <a:ea typeface="Calibri" pitchFamily="34" charset="-122"/>
-                <a:cs typeface="Calibri" pitchFamily="34" charset="-120"/>
-              </a:rPr>
-              <a:t>n</a:t>
-            </a:r>
-            <a:pPr indent="0" marL="0">
-              <a:buNone/>
-            </a:pPr>
-            <a:r>
-              <a:rPr lang="en-US" sz="1400" dirty="0">
-                <a:solidFill>
-                  <a:srgbClr val="E8ECF2"/>
-                </a:solidFill>
-                <a:latin typeface="Calibri" pitchFamily="34" charset="0"/>
-                <a:ea typeface="Calibri" pitchFamily="34" charset="-122"/>
-                <a:cs typeface="Calibri" pitchFamily="34" charset="-120"/>
-              </a:rPr>
-              <a:t> × </a:t>
-            </a:r>
-            <a:pPr indent="0" marL="0">
-              <a:buNone/>
-            </a:pPr>
-            <a:r>
-              <a:rPr lang="en-US" sz="1400" i="1" dirty="0">
-                <a:solidFill>
-                  <a:srgbClr val="E8ECF2"/>
-                </a:solidFill>
-                <a:latin typeface="Calibri" pitchFamily="34" charset="0"/>
-                <a:ea typeface="Calibri" pitchFamily="34" charset="-122"/>
-                <a:cs typeface="Calibri" pitchFamily="34" charset="-120"/>
-              </a:rPr>
-              <a:t>n</a:t>
-            </a:r>
-            <a:pPr indent="0" marL="0">
-              <a:buNone/>
-            </a:pPr>
-            <a:r>
-              <a:rPr lang="en-US" sz="1400" dirty="0">
-                <a:solidFill>
-                  <a:srgbClr val="E8ECF2"/>
-                </a:solidFill>
-                <a:latin typeface="Calibri" pitchFamily="34" charset="0"/>
-                <a:ea typeface="Calibri" pitchFamily="34" charset="-122"/>
-                <a:cs typeface="Calibri" pitchFamily="34" charset="-120"/>
-              </a:rPr>
-              <a:t>. Në small-graph pika </a:t>
-            </a:r>
-            <a:pPr indent="0" marL="0">
-              <a:buNone/>
-            </a:pPr>
-            <a:r>
-              <a:rPr lang="en-US" sz="1400" i="1" dirty="0">
-                <a:solidFill>
-                  <a:srgbClr val="E8ECF2"/>
-                </a:solidFill>
-                <a:latin typeface="Calibri" pitchFamily="34" charset="0"/>
-                <a:ea typeface="Calibri" pitchFamily="34" charset="-122"/>
-                <a:cs typeface="Calibri" pitchFamily="34" charset="-120"/>
-              </a:rPr>
-              <a:t>t</a:t>
-            </a:r>
-            <a:pPr indent="0" marL="0">
-              <a:buNone/>
-            </a:pPr>
-            <a:r>
-              <a:rPr lang="en-US" sz="1400" dirty="0">
-                <a:solidFill>
-                  <a:srgbClr val="E8ECF2"/>
-                </a:solidFill>
-                <a:latin typeface="Calibri" pitchFamily="34" charset="0"/>
-                <a:ea typeface="Calibri" pitchFamily="34" charset="-122"/>
-                <a:cs typeface="Calibri" pitchFamily="34" charset="-120"/>
-              </a:rPr>
-              <a:t> = 0 e ndërtimit, me gjerësi 20, mbart 99.99% të rezultatit të tij; në medium-graph, me gjerësi 277, mbart 97.7%.</a:t>
-            </a:r>
-            <a:endParaRPr lang="en-US" sz="1400" dirty="0"/>
+                <a:latin typeface="Century Schoolbook" pitchFamily="34" charset="0"/>
+                <a:ea typeface="Century Schoolbook" pitchFamily="34" charset="-122"/>
+                <a:cs typeface="Century Schoolbook" pitchFamily="34" charset="-120"/>
+              </a:rPr>
+              <a:t>k-opt i thjeshtë nuk transferohet</a:t>
+            </a:r>
+            <a:endParaRPr lang="en-US" sz="1800" dirty="0"/>
           </a:p>
         </p:txBody>
       </p:sp>
@@ -22958,8 +23045,8 @@
         </p:nvSpPr>
         <p:spPr>
           <a:xfrm>
-            <a:off x="640080" y="3182112"/>
-            <a:ext cx="5852160" cy="1280160"/>
+            <a:off x="640080" y="2240280"/>
+            <a:ext cx="5212080" cy="1828800"/>
           </a:xfrm>
           <a:prstGeom prst="rect">
             <a:avLst/>
@@ -22975,7 +23062,7 @@
               <a:buNone/>
             </a:pPr>
             <a:r>
-              <a:rPr lang="en-US" sz="1400" dirty="0">
+              <a:rPr lang="en-US" sz="1300" dirty="0">
                 <a:solidFill>
                   <a:srgbClr val="E8ECF2"/>
                 </a:solidFill>
@@ -22983,65 +23070,9 @@
                 <a:ea typeface="Calibri" pitchFamily="34" charset="-122"/>
                 <a:cs typeface="Calibri" pitchFamily="34" charset="-120"/>
               </a:rPr>
-              <a:t>Në large-graph asnjë pikë e vetme nuk mund të kalojë (</a:t>
-            </a:r>
-            <a:pPr indent="0" marL="0">
-              <a:buNone/>
-            </a:pPr>
-            <a:r>
-              <a:rPr lang="en-US" sz="1400" i="1" dirty="0">
-                <a:solidFill>
-                  <a:srgbClr val="E8ECF2"/>
-                </a:solidFill>
-                <a:latin typeface="Calibri" pitchFamily="34" charset="0"/>
-                <a:ea typeface="Calibri" pitchFamily="34" charset="-122"/>
-                <a:cs typeface="Calibri" pitchFamily="34" charset="-120"/>
-              </a:rPr>
-              <a:t>n</a:t>
-            </a:r>
-            <a:pPr indent="0" marL="0">
-              <a:buNone/>
-            </a:pPr>
-            <a:r>
-              <a:rPr lang="en-US" sz="1400" dirty="0">
-                <a:solidFill>
-                  <a:srgbClr val="E8ECF2"/>
-                </a:solidFill>
-                <a:latin typeface="Calibri" pitchFamily="34" charset="0"/>
-                <a:ea typeface="Calibri" pitchFamily="34" charset="-122"/>
-                <a:cs typeface="Calibri" pitchFamily="34" charset="-120"/>
-              </a:rPr>
-              <a:t> − 499)·</a:t>
-            </a:r>
-            <a:pPr indent="0" marL="0">
-              <a:buNone/>
-            </a:pPr>
-            <a:r>
-              <a:rPr lang="en-US" sz="1400" i="1" dirty="0">
-                <a:solidFill>
-                  <a:srgbClr val="E8ECF2"/>
-                </a:solidFill>
-                <a:latin typeface="Calibri" pitchFamily="34" charset="0"/>
-                <a:ea typeface="Calibri" pitchFamily="34" charset="-122"/>
-                <a:cs typeface="Calibri" pitchFamily="34" charset="-120"/>
-              </a:rPr>
-              <a:t>n</a:t>
-            </a:r>
-            <a:pPr indent="0" marL="0">
-              <a:buNone/>
-            </a:pPr>
-            <a:r>
-              <a:rPr lang="en-US" sz="1400" dirty="0">
-                <a:solidFill>
-                  <a:srgbClr val="E8ECF2"/>
-                </a:solidFill>
-                <a:latin typeface="Calibri" pitchFamily="34" charset="0"/>
-                <a:ea typeface="Calibri" pitchFamily="34" charset="-122"/>
-                <a:cs typeface="Calibri" pitchFamily="34" charset="-120"/>
-              </a:rPr>
-              <a:t>, 79.4% të katrorit, ndërsa më i miri i njohur arrin 93.3%: vetëm në familjen e dendur shkallarja e meriton vendin e vet.</a:t>
-            </a:r>
-            <a:endParaRPr lang="en-US" sz="1400" dirty="0"/>
+              <a:t>Në problemin e tregtarit shëtitës (TSP) 2-opt është i lirë sepse shkëmbimi i dy brinjëve e përditëson objektivin në kohë konstante. Këtu eliminimi i një kulmi i bashkon fqinjët e tij të mbetur në një klikë, prandaj një ndryshim shkakton efekt zinxhir: një lëvizje mbi një shtrirje prej L pozicionesh kushton O(L), sado pak brinjë të shkëmbejë.</a:t>
+            </a:r>
+            <a:endParaRPr lang="en-US" sz="1300" dirty="0"/>
           </a:p>
         </p:txBody>
       </p:sp>
@@ -23053,8 +23084,8 @@
         </p:nvSpPr>
         <p:spPr>
           <a:xfrm>
-            <a:off x="640080" y="4553712"/>
-            <a:ext cx="5852160" cy="1280160"/>
+            <a:off x="6400800" y="1810512"/>
+            <a:ext cx="5150815" cy="365760"/>
           </a:xfrm>
           <a:prstGeom prst="rect">
             <a:avLst/>
@@ -23070,458 +23101,30 @@
               <a:buNone/>
             </a:pPr>
             <a:r>
-              <a:rPr lang="en-US" sz="1400" dirty="0">
-                <a:solidFill>
-                  <a:srgbClr val="9AA6B6"/>
-                </a:solidFill>
-                <a:latin typeface="Calibri" pitchFamily="34" charset="0"/>
-                <a:ea typeface="Calibri" pitchFamily="34" charset="-122"/>
-                <a:cs typeface="Calibri" pitchFamily="34" charset="-120"/>
-              </a:rPr>
-              <a:t>Dhe problemi është i vështirë dy herë: zgjidh cilat </a:t>
-            </a:r>
-            <a:pPr indent="0" marL="0">
-              <a:buNone/>
-            </a:pPr>
-            <a:r>
-              <a:rPr lang="en-US" sz="1400" i="1" dirty="0">
-                <a:solidFill>
-                  <a:srgbClr val="9AA6B6"/>
-                </a:solidFill>
-                <a:latin typeface="Calibri" pitchFamily="34" charset="0"/>
-                <a:ea typeface="Calibri" pitchFamily="34" charset="-122"/>
-                <a:cs typeface="Calibri" pitchFamily="34" charset="-120"/>
-              </a:rPr>
-              <a:t>t</a:t>
-            </a:r>
-            <a:pPr indent="0" marL="0">
-              <a:buNone/>
-            </a:pPr>
-            <a:r>
-              <a:rPr lang="en-US" sz="1400" dirty="0">
-                <a:solidFill>
-                  <a:srgbClr val="9AA6B6"/>
-                </a:solidFill>
-                <a:latin typeface="Calibri" pitchFamily="34" charset="0"/>
-                <a:ea typeface="Calibri" pitchFamily="34" charset="-122"/>
-                <a:cs typeface="Calibri" pitchFamily="34" charset="-120"/>
-              </a:rPr>
-              <a:t> kulme të hiqen (rreth 10⁴⁰³ nënbashkësi për </a:t>
-            </a:r>
-            <a:pPr indent="0" marL="0">
-              <a:buNone/>
-            </a:pPr>
-            <a:r>
-              <a:rPr lang="en-US" sz="1400" i="1" dirty="0">
-                <a:solidFill>
-                  <a:srgbClr val="9AA6B6"/>
-                </a:solidFill>
-                <a:latin typeface="Calibri" pitchFamily="34" charset="0"/>
-                <a:ea typeface="Calibri" pitchFamily="34" charset="-122"/>
-                <a:cs typeface="Calibri" pitchFamily="34" charset="-120"/>
-              </a:rPr>
-              <a:t>n</a:t>
-            </a:r>
-            <a:pPr indent="0" marL="0">
-              <a:buNone/>
-            </a:pPr>
-            <a:r>
-              <a:rPr lang="en-US" sz="1400" dirty="0">
-                <a:solidFill>
-                  <a:srgbClr val="9AA6B6"/>
-                </a:solidFill>
-                <a:latin typeface="Calibri" pitchFamily="34" charset="0"/>
-                <a:ea typeface="Calibri" pitchFamily="34" charset="-122"/>
-                <a:cs typeface="Calibri" pitchFamily="34" charset="-120"/>
-              </a:rPr>
-              <a:t> = 1,357, </a:t>
-            </a:r>
-            <a:pPr indent="0" marL="0">
-              <a:buNone/>
-            </a:pPr>
-            <a:r>
-              <a:rPr lang="en-US" sz="1400" i="1" dirty="0">
-                <a:solidFill>
-                  <a:srgbClr val="9AA6B6"/>
-                </a:solidFill>
-                <a:latin typeface="Calibri" pitchFamily="34" charset="0"/>
-                <a:ea typeface="Calibri" pitchFamily="34" charset="-122"/>
-                <a:cs typeface="Calibri" pitchFamily="34" charset="-120"/>
-              </a:rPr>
-              <a:t>t</a:t>
-            </a:r>
-            <a:pPr indent="0" marL="0">
-              <a:buNone/>
-            </a:pPr>
-            <a:r>
-              <a:rPr lang="en-US" sz="1400" dirty="0">
-                <a:solidFill>
-                  <a:srgbClr val="9AA6B6"/>
-                </a:solidFill>
-                <a:latin typeface="Calibri" pitchFamily="34" charset="0"/>
-                <a:ea typeface="Calibri" pitchFamily="34" charset="-122"/>
-                <a:cs typeface="Calibri" pitchFamily="34" charset="-120"/>
-              </a:rPr>
-              <a:t> = 600), pastaj minimizo gjerësinë e asaj që mbetet, që është vetë gjerësia e pemës, NP-e vështirë (Arnborg, Corneil dhe Proskurowski, 1987).</a:t>
-            </a:r>
-            <a:endParaRPr lang="en-US" sz="1400" dirty="0"/>
-          </a:p>
-        </p:txBody>
-      </p:sp>
-      <p:sp>
-        <p:nvSpPr>
-          <p:cNvPr id="7" name="Shape 5"/>
-          <p:cNvSpPr/>
-          <p:nvPr/>
-        </p:nvSpPr>
-        <p:spPr>
-          <a:xfrm>
-            <a:off x="6949440" y="2148840"/>
-            <a:ext cx="2194560" cy="2194560"/>
-          </a:xfrm>
-          <a:prstGeom prst="rect">
-            <a:avLst/>
-          </a:prstGeom>
-          <a:ln w="12700">
-            <a:solidFill>
-              <a:srgbClr val="9AA6B6"/>
-            </a:solidFill>
-            <a:prstDash val="solid"/>
-          </a:ln>
-        </p:spPr>
-      </p:sp>
-      <p:sp>
-        <p:nvSpPr>
-          <p:cNvPr id="8" name="Shape 6"/>
-          <p:cNvSpPr/>
-          <p:nvPr/>
-        </p:nvSpPr>
-        <p:spPr>
-          <a:xfrm>
-            <a:off x="6981784" y="2148840"/>
-            <a:ext cx="2162216" cy="2194560"/>
-          </a:xfrm>
-          <a:prstGeom prst="rect">
-            <a:avLst/>
-          </a:prstGeom>
-          <a:solidFill>
-            <a:srgbClr val="3DDC97">
-              <a:alpha val="30000"/>
-            </a:srgbClr>
-          </a:solidFill>
-          <a:ln/>
-        </p:spPr>
-      </p:sp>
-      <p:sp>
-        <p:nvSpPr>
-          <p:cNvPr id="9" name="Text 7"/>
-          <p:cNvSpPr txBox="1"/>
-          <p:nvPr/>
-        </p:nvSpPr>
-        <p:spPr>
-          <a:xfrm>
-            <a:off x="6949440" y="4453128"/>
-            <a:ext cx="2194560" cy="256032"/>
-          </a:xfrm>
-          <a:prstGeom prst="rect">
-            <a:avLst/>
-          </a:prstGeom>
-          <a:noFill/>
-          <a:ln/>
-        </p:spPr>
-        <p:txBody>
-          <a:bodyPr wrap="square" lIns="0" tIns="0" rIns="0" bIns="0" rtlCol="0" anchor="t"/>
-          <a:lstStyle/>
-          <a:p>
-            <a:pPr algn="ctr" indent="0" marL="0">
-              <a:buNone/>
-            </a:pPr>
-            <a:r>
-              <a:rPr lang="en-US" sz="1300" b="1" dirty="0">
+              <a:rPr lang="en-US" sz="1800" dirty="0">
                 <a:solidFill>
                   <a:srgbClr val="E8ECF2"/>
-                </a:solidFill>
-                <a:latin typeface="Calibri" pitchFamily="34" charset="0"/>
-                <a:ea typeface="Calibri" pitchFamily="34" charset="-122"/>
-                <a:cs typeface="Calibri" pitchFamily="34" charset="-120"/>
-              </a:rPr>
-              <a:t>small-graph</a:t>
-            </a:r>
-            <a:endParaRPr lang="en-US" sz="1300" dirty="0"/>
-          </a:p>
-        </p:txBody>
-      </p:sp>
-      <p:sp>
-        <p:nvSpPr>
-          <p:cNvPr id="10" name="Text 8"/>
-          <p:cNvSpPr txBox="1"/>
-          <p:nvPr/>
-        </p:nvSpPr>
-        <p:spPr>
-          <a:xfrm>
-            <a:off x="6949440" y="3017520"/>
-            <a:ext cx="2194560" cy="457200"/>
-          </a:xfrm>
-          <a:prstGeom prst="rect">
-            <a:avLst/>
-          </a:prstGeom>
-          <a:noFill/>
-          <a:ln/>
-        </p:spPr>
-        <p:txBody>
-          <a:bodyPr wrap="square" lIns="0" tIns="0" rIns="0" bIns="0" rtlCol="0" anchor="t"/>
-          <a:lstStyle/>
-          <a:p>
-            <a:pPr algn="ctr" indent="0" marL="0">
-              <a:buNone/>
-            </a:pPr>
-            <a:r>
-              <a:rPr lang="en-US" sz="2400" dirty="0">
-                <a:solidFill>
-                  <a:srgbClr val="FFFFFF"/>
                 </a:solidFill>
                 <a:latin typeface="Century Schoolbook" pitchFamily="34" charset="0"/>
                 <a:ea typeface="Century Schoolbook" pitchFamily="34" charset="-122"/>
                 <a:cs typeface="Century Schoolbook" pitchFamily="34" charset="-120"/>
               </a:rPr>
-              <a:t>98.5%</a:t>
-            </a:r>
-            <a:endParaRPr lang="en-US" sz="2400" dirty="0"/>
+              <a:t>Një vlerësues delta, nga një fakt strukturor</a:t>
+            </a:r>
+            <a:endParaRPr lang="en-US" sz="1800" dirty="0"/>
           </a:p>
         </p:txBody>
       </p:sp>
       <p:sp>
         <p:nvSpPr>
-          <p:cNvPr id="11" name="Text 9"/>
+          <p:cNvPr id="7" name="Text 5"/>
           <p:cNvSpPr txBox="1"/>
           <p:nvPr/>
         </p:nvSpPr>
         <p:spPr>
           <a:xfrm>
-            <a:off x="6858000" y="4727448"/>
-            <a:ext cx="2377440" cy="219456"/>
-          </a:xfrm>
-          <a:prstGeom prst="rect">
-            <a:avLst/>
-          </a:prstGeom>
-          <a:noFill/>
-          <a:ln/>
-        </p:spPr>
-        <p:txBody>
-          <a:bodyPr wrap="square" lIns="0" tIns="0" rIns="0" bIns="0" rtlCol="0" anchor="t"/>
-          <a:lstStyle/>
-          <a:p>
-            <a:pPr algn="ctr" indent="0" marL="0">
-              <a:buNone/>
-            </a:pPr>
-            <a:r>
-              <a:rPr lang="en-US" sz="1050" dirty="0">
-                <a:solidFill>
-                  <a:srgbClr val="9AA6B6"/>
-                </a:solidFill>
-                <a:latin typeface="Calibri" pitchFamily="34" charset="0"/>
-                <a:ea typeface="Calibri" pitchFamily="34" charset="-122"/>
-                <a:cs typeface="Calibri" pitchFamily="34" charset="-120"/>
-              </a:rPr>
-              <a:t>w = 20 nga n = 1,357 · 99.99% e rezultatit</a:t>
-            </a:r>
-            <a:endParaRPr lang="en-US" sz="1050" dirty="0"/>
-          </a:p>
-        </p:txBody>
-      </p:sp>
-      <p:sp>
-        <p:nvSpPr>
-          <p:cNvPr id="12" name="Shape 10"/>
-          <p:cNvSpPr/>
-          <p:nvPr/>
-        </p:nvSpPr>
-        <p:spPr>
-          <a:xfrm>
-            <a:off x="9372600" y="2148840"/>
-            <a:ext cx="2194560" cy="2194560"/>
-          </a:xfrm>
-          <a:prstGeom prst="rect">
-            <a:avLst/>
-          </a:prstGeom>
-          <a:ln w="12700">
-            <a:solidFill>
-              <a:srgbClr val="9AA6B6"/>
-            </a:solidFill>
-            <a:prstDash val="solid"/>
-          </a:ln>
-        </p:spPr>
-      </p:sp>
-      <p:sp>
-        <p:nvSpPr>
-          <p:cNvPr id="13" name="Shape 11"/>
-          <p:cNvSpPr/>
-          <p:nvPr/>
-        </p:nvSpPr>
-        <p:spPr>
-          <a:xfrm>
-            <a:off x="9823995" y="2148840"/>
-            <a:ext cx="1743165" cy="2194560"/>
-          </a:xfrm>
-          <a:prstGeom prst="rect">
-            <a:avLst/>
-          </a:prstGeom>
-          <a:solidFill>
-            <a:srgbClr val="3DDC97">
-              <a:alpha val="30000"/>
-            </a:srgbClr>
-          </a:solidFill>
-          <a:ln/>
-        </p:spPr>
-      </p:sp>
-      <p:sp>
-        <p:nvSpPr>
-          <p:cNvPr id="14" name="Text 12"/>
-          <p:cNvSpPr txBox="1"/>
-          <p:nvPr/>
-        </p:nvSpPr>
-        <p:spPr>
-          <a:xfrm>
-            <a:off x="9372600" y="4453128"/>
-            <a:ext cx="2194560" cy="256032"/>
-          </a:xfrm>
-          <a:prstGeom prst="rect">
-            <a:avLst/>
-          </a:prstGeom>
-          <a:noFill/>
-          <a:ln/>
-        </p:spPr>
-        <p:txBody>
-          <a:bodyPr wrap="square" lIns="0" tIns="0" rIns="0" bIns="0" rtlCol="0" anchor="t"/>
-          <a:lstStyle/>
-          <a:p>
-            <a:pPr algn="ctr" indent="0" marL="0">
-              <a:buNone/>
-            </a:pPr>
-            <a:r>
-              <a:rPr lang="en-US" sz="1300" b="1" dirty="0">
-                <a:solidFill>
-                  <a:srgbClr val="E8ECF2"/>
-                </a:solidFill>
-                <a:latin typeface="Calibri" pitchFamily="34" charset="0"/>
-                <a:ea typeface="Calibri" pitchFamily="34" charset="-122"/>
-                <a:cs typeface="Calibri" pitchFamily="34" charset="-120"/>
-              </a:rPr>
-              <a:t>large-graph</a:t>
-            </a:r>
-            <a:endParaRPr lang="en-US" sz="1300" dirty="0"/>
-          </a:p>
-        </p:txBody>
-      </p:sp>
-      <p:sp>
-        <p:nvSpPr>
-          <p:cNvPr id="15" name="Text 13"/>
-          <p:cNvSpPr txBox="1"/>
-          <p:nvPr/>
-        </p:nvSpPr>
-        <p:spPr>
-          <a:xfrm>
-            <a:off x="9372600" y="3017520"/>
-            <a:ext cx="2194560" cy="457200"/>
-          </a:xfrm>
-          <a:prstGeom prst="rect">
-            <a:avLst/>
-          </a:prstGeom>
-          <a:noFill/>
-          <a:ln/>
-        </p:spPr>
-        <p:txBody>
-          <a:bodyPr wrap="square" lIns="0" tIns="0" rIns="0" bIns="0" rtlCol="0" anchor="t"/>
-          <a:lstStyle/>
-          <a:p>
-            <a:pPr algn="ctr" indent="0" marL="0">
-              <a:buNone/>
-            </a:pPr>
-            <a:r>
-              <a:rPr lang="en-US" sz="2400" dirty="0">
-                <a:solidFill>
-                  <a:srgbClr val="FFFFFF"/>
-                </a:solidFill>
-                <a:latin typeface="Century Schoolbook" pitchFamily="34" charset="0"/>
-                <a:ea typeface="Century Schoolbook" pitchFamily="34" charset="-122"/>
-                <a:cs typeface="Century Schoolbook" pitchFamily="34" charset="-120"/>
-              </a:rPr>
-              <a:t>79.4%</a:t>
-            </a:r>
-            <a:endParaRPr lang="en-US" sz="2400" dirty="0"/>
-          </a:p>
-        </p:txBody>
-      </p:sp>
-      <p:sp>
-        <p:nvSpPr>
-          <p:cNvPr id="16" name="Text 14"/>
-          <p:cNvSpPr txBox="1"/>
-          <p:nvPr/>
-        </p:nvSpPr>
-        <p:spPr>
-          <a:xfrm>
-            <a:off x="9281160" y="4727448"/>
-            <a:ext cx="2377440" cy="219456"/>
-          </a:xfrm>
-          <a:prstGeom prst="rect">
-            <a:avLst/>
-          </a:prstGeom>
-          <a:noFill/>
-          <a:ln/>
-        </p:spPr>
-        <p:txBody>
-          <a:bodyPr wrap="square" lIns="0" tIns="0" rIns="0" bIns="0" rtlCol="0" anchor="t"/>
-          <a:lstStyle/>
-          <a:p>
-            <a:pPr algn="ctr" indent="0" marL="0">
-              <a:buNone/>
-            </a:pPr>
-            <a:r>
-              <a:rPr lang="en-US" sz="1050" dirty="0">
-                <a:solidFill>
-                  <a:srgbClr val="9AA6B6"/>
-                </a:solidFill>
-                <a:latin typeface="Calibri" pitchFamily="34" charset="0"/>
-                <a:ea typeface="Calibri" pitchFamily="34" charset="-122"/>
-                <a:cs typeface="Calibri" pitchFamily="34" charset="-120"/>
-              </a:rPr>
-              <a:t>w ≥ 499 nga n = 2,426 · më i miri i njohur 93.3%</a:t>
-            </a:r>
-            <a:endParaRPr lang="en-US" sz="1050" dirty="0"/>
-          </a:p>
-        </p:txBody>
-      </p:sp>
-      <p:sp>
-        <p:nvSpPr>
-          <p:cNvPr id="17" name="Shape 15"/>
-          <p:cNvSpPr/>
-          <p:nvPr/>
-        </p:nvSpPr>
-        <p:spPr>
-          <a:xfrm>
-            <a:off x="6949440" y="5257800"/>
-            <a:ext cx="228600" cy="128016"/>
-          </a:xfrm>
-          <a:prstGeom prst="rect">
-            <a:avLst/>
-          </a:prstGeom>
-          <a:solidFill>
-            <a:srgbClr val="3DDC97">
-              <a:alpha val="30000"/>
-            </a:srgbClr>
-          </a:solidFill>
-          <a:ln/>
-        </p:spPr>
-      </p:sp>
-      <p:sp>
-        <p:nvSpPr>
-          <p:cNvPr id="18" name="Text 16"/>
-          <p:cNvSpPr txBox="1"/>
-          <p:nvPr/>
-        </p:nvSpPr>
-        <p:spPr>
-          <a:xfrm>
-            <a:off x="7251192" y="5202936"/>
-            <a:ext cx="2194560" cy="228600"/>
+            <a:off x="6400800" y="2240280"/>
+            <a:ext cx="5150815" cy="1280160"/>
           </a:xfrm>
           <a:prstGeom prst="rect">
             <a:avLst/>
@@ -23537,17 +23140,232 @@
               <a:buNone/>
             </a:pPr>
             <a:r>
-              <a:rPr lang="en-US" sz="1050" dirty="0">
-                <a:solidFill>
-                  <a:srgbClr val="9AA6B6"/>
+              <a:rPr lang="en-US" sz="1300" dirty="0">
+                <a:solidFill>
+                  <a:srgbClr val="E8ECF2"/>
                 </a:solidFill>
                 <a:latin typeface="Calibri" pitchFamily="34" charset="0"/>
                 <a:ea typeface="Calibri" pitchFamily="34" charset="-122"/>
                 <a:cs typeface="Calibri" pitchFamily="34" charset="-120"/>
               </a:rPr>
-              <a:t>një pikë në t = 0</a:t>
-            </a:r>
-            <a:endParaRPr lang="en-US" sz="1050" dirty="0"/>
+              <a:t>Torsoja mbi një bashkësi nuk varet nga rendi brenda bashkësisë, prandaj shkalla në një pozicion varet vetëm nga kulmi aty dhe nga bashkësia poshtë tij. Një lëvizje brenda një dritareje nuk mund të ndryshojë asgjë jashtë saj.</a:t>
+            </a:r>
+            <a:endParaRPr lang="en-US" sz="1300" dirty="0"/>
+          </a:p>
+        </p:txBody>
+      </p:sp>
+      <p:sp>
+        <p:nvSpPr>
+          <p:cNvPr id="8" name="Text 6"/>
+          <p:cNvSpPr txBox="1"/>
+          <p:nvPr/>
+        </p:nvSpPr>
+        <p:spPr>
+          <a:xfrm>
+            <a:off x="6400800" y="3611880"/>
+            <a:ext cx="2468880" cy="548640"/>
+          </a:xfrm>
+          <a:prstGeom prst="rect">
+            <a:avLst/>
+          </a:prstGeom>
+          <a:noFill/>
+          <a:ln/>
+        </p:spPr>
+        <p:txBody>
+          <a:bodyPr wrap="square" lIns="0" tIns="0" rIns="0" bIns="0" rtlCol="0" anchor="t"/>
+          <a:lstStyle/>
+          <a:p>
+            <a:pPr indent="0" marL="0">
+              <a:buNone/>
+            </a:pPr>
+            <a:r>
+              <a:rPr lang="en-US" sz="2600" dirty="0">
+                <a:solidFill>
+                  <a:srgbClr val="4DA3FF"/>
+                </a:solidFill>
+                <a:latin typeface="Century Schoolbook" pitchFamily="34" charset="0"/>
+                <a:ea typeface="Century Schoolbook" pitchFamily="34" charset="-122"/>
+                <a:cs typeface="Century Schoolbook" pitchFamily="34" charset="-120"/>
+              </a:rPr>
+              <a:t>i saktë</a:t>
+            </a:r>
+            <a:endParaRPr lang="en-US" sz="2600" dirty="0"/>
+          </a:p>
+        </p:txBody>
+      </p:sp>
+      <p:sp>
+        <p:nvSpPr>
+          <p:cNvPr id="9" name="Text 7"/>
+          <p:cNvSpPr txBox="1"/>
+          <p:nvPr/>
+        </p:nvSpPr>
+        <p:spPr>
+          <a:xfrm>
+            <a:off x="6400800" y="4160520"/>
+            <a:ext cx="2423160" cy="731520"/>
+          </a:xfrm>
+          <a:prstGeom prst="rect">
+            <a:avLst/>
+          </a:prstGeom>
+          <a:noFill/>
+          <a:ln/>
+        </p:spPr>
+        <p:txBody>
+          <a:bodyPr wrap="square" lIns="0" tIns="0" rIns="0" bIns="0" rtlCol="0" anchor="t"/>
+          <a:lstStyle/>
+          <a:p>
+            <a:pPr indent="0" marL="0">
+              <a:buNone/>
+            </a:pPr>
+            <a:r>
+              <a:rPr lang="en-US" sz="1150" dirty="0">
+                <a:solidFill>
+                  <a:srgbClr val="9AA6B6"/>
+                </a:solidFill>
+                <a:latin typeface="Calibri" pitchFamily="34" charset="0"/>
+                <a:ea typeface="Calibri" pitchFamily="34" charset="-122"/>
+                <a:cs typeface="Calibri" pitchFamily="34" charset="-120"/>
+              </a:rPr>
+              <a:t>shkallë identike në 600 kandidatë të zinxhirëzuar nga të 17 operatorët, në të dhjetë instancat</a:t>
+            </a:r>
+            <a:endParaRPr lang="en-US" sz="1150" dirty="0"/>
+          </a:p>
+        </p:txBody>
+      </p:sp>
+      <p:sp>
+        <p:nvSpPr>
+          <p:cNvPr id="10" name="Text 8"/>
+          <p:cNvSpPr txBox="1"/>
+          <p:nvPr/>
+        </p:nvSpPr>
+        <p:spPr>
+          <a:xfrm>
+            <a:off x="9006840" y="3611880"/>
+            <a:ext cx="2468880" cy="548640"/>
+          </a:xfrm>
+          <a:prstGeom prst="rect">
+            <a:avLst/>
+          </a:prstGeom>
+          <a:noFill/>
+          <a:ln/>
+        </p:spPr>
+        <p:txBody>
+          <a:bodyPr wrap="square" lIns="0" tIns="0" rIns="0" bIns="0" rtlCol="0" anchor="t"/>
+          <a:lstStyle/>
+          <a:p>
+            <a:pPr indent="0" marL="0">
+              <a:buNone/>
+            </a:pPr>
+            <a:r>
+              <a:rPr lang="en-US" sz="2600" dirty="0">
+                <a:solidFill>
+                  <a:srgbClr val="4DA3FF"/>
+                </a:solidFill>
+                <a:latin typeface="Century Schoolbook" pitchFamily="34" charset="0"/>
+                <a:ea typeface="Century Schoolbook" pitchFamily="34" charset="-122"/>
+                <a:cs typeface="Century Schoolbook" pitchFamily="34" charset="-120"/>
+              </a:rPr>
+              <a:t>1.81×</a:t>
+            </a:r>
+            <a:endParaRPr lang="en-US" sz="2600" dirty="0"/>
+          </a:p>
+        </p:txBody>
+      </p:sp>
+      <p:sp>
+        <p:nvSpPr>
+          <p:cNvPr id="11" name="Text 9"/>
+          <p:cNvSpPr txBox="1"/>
+          <p:nvPr/>
+        </p:nvSpPr>
+        <p:spPr>
+          <a:xfrm>
+            <a:off x="9006840" y="4160520"/>
+            <a:ext cx="2423160" cy="731520"/>
+          </a:xfrm>
+          <a:prstGeom prst="rect">
+            <a:avLst/>
+          </a:prstGeom>
+          <a:noFill/>
+          <a:ln/>
+        </p:spPr>
+        <p:txBody>
+          <a:bodyPr wrap="square" lIns="0" tIns="0" rIns="0" bIns="0" rtlCol="0" anchor="t"/>
+          <a:lstStyle/>
+          <a:p>
+            <a:pPr indent="0" marL="0">
+              <a:buNone/>
+            </a:pPr>
+            <a:r>
+              <a:rPr lang="en-US" sz="1150" dirty="0">
+                <a:solidFill>
+                  <a:srgbClr val="9AA6B6"/>
+                </a:solidFill>
+                <a:latin typeface="Calibri" pitchFamily="34" charset="0"/>
+                <a:ea typeface="Calibri" pitchFamily="34" charset="-122"/>
+                <a:cs typeface="Calibri" pitchFamily="34" charset="-120"/>
+              </a:rPr>
+              <a:t>më shumë kandidatë në të njëjtën kohë reale, mesatare gjeometrike mbi dhjetë instanca (nga 1.7× te të rrallat deri në 1.9× te të dendurat)</a:t>
+            </a:r>
+            <a:endParaRPr lang="en-US" sz="1150" dirty="0"/>
+          </a:p>
+        </p:txBody>
+      </p:sp>
+      <p:sp>
+        <p:nvSpPr>
+          <p:cNvPr id="12" name="Shape 10"/>
+          <p:cNvSpPr/>
+          <p:nvPr/>
+        </p:nvSpPr>
+        <p:spPr>
+          <a:xfrm>
+            <a:off x="640080" y="5074920"/>
+            <a:ext cx="10911535" cy="1051560"/>
+          </a:xfrm>
+          <a:prstGeom prst="rect">
+            <a:avLst/>
+          </a:prstGeom>
+          <a:solidFill>
+            <a:srgbClr val="131B28"/>
+          </a:solidFill>
+          <a:ln/>
+        </p:spPr>
+      </p:sp>
+      <p:sp>
+        <p:nvSpPr>
+          <p:cNvPr id="13" name="Text 11"/>
+          <p:cNvSpPr txBox="1"/>
+          <p:nvPr/>
+        </p:nvSpPr>
+        <p:spPr>
+          <a:xfrm>
+            <a:off x="914400" y="5193792"/>
+            <a:ext cx="10362895" cy="868680"/>
+          </a:xfrm>
+          <a:prstGeom prst="rect">
+            <a:avLst/>
+          </a:prstGeom>
+          <a:noFill/>
+          <a:ln/>
+        </p:spPr>
+        <p:txBody>
+          <a:bodyPr wrap="square" lIns="0" tIns="0" rIns="0" bIns="0" rtlCol="0" anchor="ctr"/>
+          <a:lstStyle/>
+          <a:p>
+            <a:pPr indent="0" marL="0">
+              <a:buNone/>
+            </a:pPr>
+            <a:r>
+              <a:rPr lang="en-US" sz="1300" dirty="0">
+                <a:solidFill>
+                  <a:srgbClr val="E8ECF2"/>
+                </a:solidFill>
+                <a:latin typeface="Calibri" pitchFamily="34" charset="0"/>
+                <a:ea typeface="Calibri" pitchFamily="34" charset="-122"/>
+                <a:cs typeface="Calibri" pitchFamily="34" charset="-120"/>
+              </a:rPr>
+              <a:t>Pse lëvizjet e pranuara thuajse nuk kanë rëndësi: çdo kandidat i vlerësuar dhuron tërë shkallaren e vet në një front të përbashkët. Në synth-7 të katër operatorët origjinalë nuk pranuan asgjë fare, dhe rezultatet e tyre prapë ndryshojnë me 1,841 HV.</a:t>
+            </a:r>
+            <a:endParaRPr lang="en-US" sz="1300" dirty="0"/>
           </a:p>
         </p:txBody>
       </p:sp>
@@ -24940,7 +24758,7 @@
 </file>
 
 <file path=ppt/slides/slide20.xml><?xml version="1.0" encoding="utf-8"?>
-<p:sld xmlns:a="http://schemas.openxmlformats.org/drawingml/2006/main" xmlns:r="http://schemas.openxmlformats.org/officeDocument/2006/relationships" xmlns:p="http://schemas.openxmlformats.org/presentationml/2006/main">
+<p:sld xmlns:a="http://schemas.openxmlformats.org/drawingml/2006/main" xmlns:r="http://schemas.openxmlformats.org/officeDocument/2006/relationships" xmlns:p="http://schemas.openxmlformats.org/presentationml/2006/main" show="0">
   <p:cSld name="Slide 20">
     <p:spTree>
       <p:nvGrpSpPr>
@@ -25032,541 +24850,15 @@
                 <a:ea typeface="Century Schoolbook" pitchFamily="34" charset="-122"/>
                 <a:cs typeface="Century Schoolbook" pitchFamily="34" charset="-120"/>
               </a:rPr>
-              <a:t>Dy gjetje për problemin, jo për kërkimin</a:t>
+              <a:t>Krahasimi i buxheteve, i plotë</a:t>
             </a:r>
             <a:endParaRPr lang="en-US" sz="2700" dirty="0"/>
           </a:p>
         </p:txBody>
       </p:sp>
-      <p:sp>
-        <p:nvSpPr>
-          <p:cNvPr id="4" name="Text 2"/>
-          <p:cNvSpPr txBox="1"/>
-          <p:nvPr/>
-        </p:nvSpPr>
-        <p:spPr>
-          <a:xfrm>
-            <a:off x="640080" y="1810512"/>
-            <a:ext cx="5212080" cy="365760"/>
-          </a:xfrm>
-          <a:prstGeom prst="rect">
-            <a:avLst/>
-          </a:prstGeom>
-          <a:noFill/>
-          <a:ln/>
-        </p:spPr>
-        <p:txBody>
-          <a:bodyPr wrap="square" lIns="0" tIns="0" rIns="0" bIns="0" rtlCol="0" anchor="t"/>
-          <a:lstStyle/>
-          <a:p>
-            <a:pPr indent="0" marL="0">
-              <a:buNone/>
-            </a:pPr>
-            <a:r>
-              <a:rPr lang="en-US" sz="1800" dirty="0">
-                <a:solidFill>
-                  <a:srgbClr val="E8ECF2"/>
-                </a:solidFill>
-                <a:latin typeface="Century Schoolbook" pitchFamily="34" charset="0"/>
-                <a:ea typeface="Century Schoolbook" pitchFamily="34" charset="-122"/>
-                <a:cs typeface="Century Schoolbook" pitchFamily="34" charset="-120"/>
-              </a:rPr>
-              <a:t>k-opt i thjeshtë nuk transferohet</a:t>
-            </a:r>
-            <a:endParaRPr lang="en-US" sz="1800" dirty="0"/>
-          </a:p>
-        </p:txBody>
-      </p:sp>
-      <p:sp>
-        <p:nvSpPr>
-          <p:cNvPr id="5" name="Text 3"/>
-          <p:cNvSpPr txBox="1"/>
-          <p:nvPr/>
-        </p:nvSpPr>
-        <p:spPr>
-          <a:xfrm>
-            <a:off x="640080" y="2240280"/>
-            <a:ext cx="5212080" cy="1828800"/>
-          </a:xfrm>
-          <a:prstGeom prst="rect">
-            <a:avLst/>
-          </a:prstGeom>
-          <a:noFill/>
-          <a:ln/>
-        </p:spPr>
-        <p:txBody>
-          <a:bodyPr wrap="square" lIns="0" tIns="0" rIns="0" bIns="0" rtlCol="0" anchor="t"/>
-          <a:lstStyle/>
-          <a:p>
-            <a:pPr indent="0" marL="0">
-              <a:buNone/>
-            </a:pPr>
-            <a:r>
-              <a:rPr lang="en-US" sz="1300" dirty="0">
-                <a:solidFill>
-                  <a:srgbClr val="E8ECF2"/>
-                </a:solidFill>
-                <a:latin typeface="Calibri" pitchFamily="34" charset="0"/>
-                <a:ea typeface="Calibri" pitchFamily="34" charset="-122"/>
-                <a:cs typeface="Calibri" pitchFamily="34" charset="-120"/>
-              </a:rPr>
-              <a:t>Në problemin e tregtarit shëtitës (TSP) 2-opt është i lirë sepse shkëmbimi i dy brinjëve e përditëson objektivin në kohë konstante. Këtu eliminimi i një kulmi i bashkon fqinjët e tij të mbetur në një klikë, prandaj një ndryshim shkakton efekt zinxhir: një lëvizje mbi një shtrirje prej L pozicionesh kushton O(L), sado pak brinjë të shkëmbejë.</a:t>
-            </a:r>
-            <a:endParaRPr lang="en-US" sz="1300" dirty="0"/>
-          </a:p>
-        </p:txBody>
-      </p:sp>
-      <p:sp>
-        <p:nvSpPr>
-          <p:cNvPr id="6" name="Text 4"/>
-          <p:cNvSpPr txBox="1"/>
-          <p:nvPr/>
-        </p:nvSpPr>
-        <p:spPr>
-          <a:xfrm>
-            <a:off x="6400800" y="1810512"/>
-            <a:ext cx="5150815" cy="365760"/>
-          </a:xfrm>
-          <a:prstGeom prst="rect">
-            <a:avLst/>
-          </a:prstGeom>
-          <a:noFill/>
-          <a:ln/>
-        </p:spPr>
-        <p:txBody>
-          <a:bodyPr wrap="square" lIns="0" tIns="0" rIns="0" bIns="0" rtlCol="0" anchor="t"/>
-          <a:lstStyle/>
-          <a:p>
-            <a:pPr indent="0" marL="0">
-              <a:buNone/>
-            </a:pPr>
-            <a:r>
-              <a:rPr lang="en-US" sz="1800" dirty="0">
-                <a:solidFill>
-                  <a:srgbClr val="E8ECF2"/>
-                </a:solidFill>
-                <a:latin typeface="Century Schoolbook" pitchFamily="34" charset="0"/>
-                <a:ea typeface="Century Schoolbook" pitchFamily="34" charset="-122"/>
-                <a:cs typeface="Century Schoolbook" pitchFamily="34" charset="-120"/>
-              </a:rPr>
-              <a:t>Një vlerësues delta, nga një fakt strukturor</a:t>
-            </a:r>
-            <a:endParaRPr lang="en-US" sz="1800" dirty="0"/>
-          </a:p>
-        </p:txBody>
-      </p:sp>
-      <p:sp>
-        <p:nvSpPr>
-          <p:cNvPr id="7" name="Text 5"/>
-          <p:cNvSpPr txBox="1"/>
-          <p:nvPr/>
-        </p:nvSpPr>
-        <p:spPr>
-          <a:xfrm>
-            <a:off x="6400800" y="2240280"/>
-            <a:ext cx="5150815" cy="1280160"/>
-          </a:xfrm>
-          <a:prstGeom prst="rect">
-            <a:avLst/>
-          </a:prstGeom>
-          <a:noFill/>
-          <a:ln/>
-        </p:spPr>
-        <p:txBody>
-          <a:bodyPr wrap="square" lIns="0" tIns="0" rIns="0" bIns="0" rtlCol="0" anchor="t"/>
-          <a:lstStyle/>
-          <a:p>
-            <a:pPr indent="0" marL="0">
-              <a:buNone/>
-            </a:pPr>
-            <a:r>
-              <a:rPr lang="en-US" sz="1300" dirty="0">
-                <a:solidFill>
-                  <a:srgbClr val="E8ECF2"/>
-                </a:solidFill>
-                <a:latin typeface="Calibri" pitchFamily="34" charset="0"/>
-                <a:ea typeface="Calibri" pitchFamily="34" charset="-122"/>
-                <a:cs typeface="Calibri" pitchFamily="34" charset="-120"/>
-              </a:rPr>
-              <a:t>Torsoja mbi një bashkësi nuk varet nga rendi brenda bashkësisë, prandaj shkalla në një pozicion varet vetëm nga kulmi aty dhe nga bashkësia poshtë tij. Një lëvizje brenda një dritareje nuk mund të ndryshojë asgjë jashtë saj.</a:t>
-            </a:r>
-            <a:endParaRPr lang="en-US" sz="1300" dirty="0"/>
-          </a:p>
-        </p:txBody>
-      </p:sp>
-      <p:sp>
-        <p:nvSpPr>
-          <p:cNvPr id="8" name="Text 6"/>
-          <p:cNvSpPr txBox="1"/>
-          <p:nvPr/>
-        </p:nvSpPr>
-        <p:spPr>
-          <a:xfrm>
-            <a:off x="6400800" y="3611880"/>
-            <a:ext cx="2468880" cy="548640"/>
-          </a:xfrm>
-          <a:prstGeom prst="rect">
-            <a:avLst/>
-          </a:prstGeom>
-          <a:noFill/>
-          <a:ln/>
-        </p:spPr>
-        <p:txBody>
-          <a:bodyPr wrap="square" lIns="0" tIns="0" rIns="0" bIns="0" rtlCol="0" anchor="t"/>
-          <a:lstStyle/>
-          <a:p>
-            <a:pPr indent="0" marL="0">
-              <a:buNone/>
-            </a:pPr>
-            <a:r>
-              <a:rPr lang="en-US" sz="2600" dirty="0">
-                <a:solidFill>
-                  <a:srgbClr val="4DA3FF"/>
-                </a:solidFill>
-                <a:latin typeface="Century Schoolbook" pitchFamily="34" charset="0"/>
-                <a:ea typeface="Century Schoolbook" pitchFamily="34" charset="-122"/>
-                <a:cs typeface="Century Schoolbook" pitchFamily="34" charset="-120"/>
-              </a:rPr>
-              <a:t>i saktë</a:t>
-            </a:r>
-            <a:endParaRPr lang="en-US" sz="2600" dirty="0"/>
-          </a:p>
-        </p:txBody>
-      </p:sp>
-      <p:sp>
-        <p:nvSpPr>
-          <p:cNvPr id="9" name="Text 7"/>
-          <p:cNvSpPr txBox="1"/>
-          <p:nvPr/>
-        </p:nvSpPr>
-        <p:spPr>
-          <a:xfrm>
-            <a:off x="6400800" y="4160520"/>
-            <a:ext cx="2423160" cy="731520"/>
-          </a:xfrm>
-          <a:prstGeom prst="rect">
-            <a:avLst/>
-          </a:prstGeom>
-          <a:noFill/>
-          <a:ln/>
-        </p:spPr>
-        <p:txBody>
-          <a:bodyPr wrap="square" lIns="0" tIns="0" rIns="0" bIns="0" rtlCol="0" anchor="t"/>
-          <a:lstStyle/>
-          <a:p>
-            <a:pPr indent="0" marL="0">
-              <a:buNone/>
-            </a:pPr>
-            <a:r>
-              <a:rPr lang="en-US" sz="1150" dirty="0">
-                <a:solidFill>
-                  <a:srgbClr val="9AA6B6"/>
-                </a:solidFill>
-                <a:latin typeface="Calibri" pitchFamily="34" charset="0"/>
-                <a:ea typeface="Calibri" pitchFamily="34" charset="-122"/>
-                <a:cs typeface="Calibri" pitchFamily="34" charset="-120"/>
-              </a:rPr>
-              <a:t>shkallë identike në 600 kandidatë të zinxhirëzuar nga të 17 operatorët, në të dhjetë instancat</a:t>
-            </a:r>
-            <a:endParaRPr lang="en-US" sz="1150" dirty="0"/>
-          </a:p>
-        </p:txBody>
-      </p:sp>
-      <p:sp>
-        <p:nvSpPr>
-          <p:cNvPr id="10" name="Text 8"/>
-          <p:cNvSpPr txBox="1"/>
-          <p:nvPr/>
-        </p:nvSpPr>
-        <p:spPr>
-          <a:xfrm>
-            <a:off x="9006840" y="3611880"/>
-            <a:ext cx="2468880" cy="548640"/>
-          </a:xfrm>
-          <a:prstGeom prst="rect">
-            <a:avLst/>
-          </a:prstGeom>
-          <a:noFill/>
-          <a:ln/>
-        </p:spPr>
-        <p:txBody>
-          <a:bodyPr wrap="square" lIns="0" tIns="0" rIns="0" bIns="0" rtlCol="0" anchor="t"/>
-          <a:lstStyle/>
-          <a:p>
-            <a:pPr indent="0" marL="0">
-              <a:buNone/>
-            </a:pPr>
-            <a:r>
-              <a:rPr lang="en-US" sz="2600" dirty="0">
-                <a:solidFill>
-                  <a:srgbClr val="4DA3FF"/>
-                </a:solidFill>
-                <a:latin typeface="Century Schoolbook" pitchFamily="34" charset="0"/>
-                <a:ea typeface="Century Schoolbook" pitchFamily="34" charset="-122"/>
-                <a:cs typeface="Century Schoolbook" pitchFamily="34" charset="-120"/>
-              </a:rPr>
-              <a:t>1.81×</a:t>
-            </a:r>
-            <a:endParaRPr lang="en-US" sz="2600" dirty="0"/>
-          </a:p>
-        </p:txBody>
-      </p:sp>
-      <p:sp>
-        <p:nvSpPr>
-          <p:cNvPr id="11" name="Text 9"/>
-          <p:cNvSpPr txBox="1"/>
-          <p:nvPr/>
-        </p:nvSpPr>
-        <p:spPr>
-          <a:xfrm>
-            <a:off x="9006840" y="4160520"/>
-            <a:ext cx="2423160" cy="731520"/>
-          </a:xfrm>
-          <a:prstGeom prst="rect">
-            <a:avLst/>
-          </a:prstGeom>
-          <a:noFill/>
-          <a:ln/>
-        </p:spPr>
-        <p:txBody>
-          <a:bodyPr wrap="square" lIns="0" tIns="0" rIns="0" bIns="0" rtlCol="0" anchor="t"/>
-          <a:lstStyle/>
-          <a:p>
-            <a:pPr indent="0" marL="0">
-              <a:buNone/>
-            </a:pPr>
-            <a:r>
-              <a:rPr lang="en-US" sz="1150" dirty="0">
-                <a:solidFill>
-                  <a:srgbClr val="9AA6B6"/>
-                </a:solidFill>
-                <a:latin typeface="Calibri" pitchFamily="34" charset="0"/>
-                <a:ea typeface="Calibri" pitchFamily="34" charset="-122"/>
-                <a:cs typeface="Calibri" pitchFamily="34" charset="-120"/>
-              </a:rPr>
-              <a:t>më shumë kandidatë në të njëjtën kohë reale, mesatare gjeometrike mbi dhjetë instanca (nga 1.7× te të rrallat deri në 1.9× te të dendurat)</a:t>
-            </a:r>
-            <a:endParaRPr lang="en-US" sz="1150" dirty="0"/>
-          </a:p>
-        </p:txBody>
-      </p:sp>
-      <p:sp>
-        <p:nvSpPr>
-          <p:cNvPr id="12" name="Shape 10"/>
-          <p:cNvSpPr/>
-          <p:nvPr/>
-        </p:nvSpPr>
-        <p:spPr>
-          <a:xfrm>
-            <a:off x="640080" y="5074920"/>
-            <a:ext cx="10911535" cy="1051560"/>
-          </a:xfrm>
-          <a:prstGeom prst="rect">
-            <a:avLst/>
-          </a:prstGeom>
-          <a:solidFill>
-            <a:srgbClr val="131B28"/>
-          </a:solidFill>
-          <a:ln/>
-        </p:spPr>
-      </p:sp>
-      <p:sp>
-        <p:nvSpPr>
-          <p:cNvPr id="13" name="Text 11"/>
-          <p:cNvSpPr txBox="1"/>
-          <p:nvPr/>
-        </p:nvSpPr>
-        <p:spPr>
-          <a:xfrm>
-            <a:off x="914400" y="5193792"/>
-            <a:ext cx="10362895" cy="868680"/>
-          </a:xfrm>
-          <a:prstGeom prst="rect">
-            <a:avLst/>
-          </a:prstGeom>
-          <a:noFill/>
-          <a:ln/>
-        </p:spPr>
-        <p:txBody>
-          <a:bodyPr wrap="square" lIns="0" tIns="0" rIns="0" bIns="0" rtlCol="0" anchor="ctr"/>
-          <a:lstStyle/>
-          <a:p>
-            <a:pPr indent="0" marL="0">
-              <a:buNone/>
-            </a:pPr>
-            <a:r>
-              <a:rPr lang="en-US" sz="1300" dirty="0">
-                <a:solidFill>
-                  <a:srgbClr val="E8ECF2"/>
-                </a:solidFill>
-                <a:latin typeface="Calibri" pitchFamily="34" charset="0"/>
-                <a:ea typeface="Calibri" pitchFamily="34" charset="-122"/>
-                <a:cs typeface="Calibri" pitchFamily="34" charset="-120"/>
-              </a:rPr>
-              <a:t>Pse lëvizjet e pranuara thuajse nuk kanë rëndësi: çdo kandidat i vlerësuar dhuron tërë shkallaren e vet në një front të përbashkët. Në synth-7 të katër operatorët origjinalë nuk pranuan asgjë fare, dhe rezultatet e tyre prapë ndryshojnë me 1,841 HV.</a:t>
-            </a:r>
-            <a:endParaRPr lang="en-US" sz="1300" dirty="0"/>
-          </a:p>
-        </p:txBody>
-      </p:sp>
-      <p:sp>
-        <p:nvSpPr>
-          <p:cNvPr id="25" name="Slide Number Placeholder 0"/>
-          <p:cNvSpPr>
-            <a:spLocks noGrp="1"/>
-          </p:cNvSpPr>
-          <p:nvPr>
-            <p:ph type="sldNum" sz="quarter" idx="4294967295"/>
-          </p:nvPr>
-        </p:nvSpPr>
-        <p:spPr>
-          <a:xfrm>
-            <a:off x="11002975" y="6446520"/>
-            <a:ext cx="548640" cy="219456"/>
-          </a:xfrm>
-          <a:prstGeom prst="rect">
-            <a:avLst/>
-          </a:prstGeom>
-          <a:extLst>
-            <a:ext uri="{C572A759-6A51-4108-AA02-DFA0A04FC94B}">
-              <ma14:wrappingTextBoxFlag xmlns:ma14="http://schemas.microsoft.com/office/mac/drawingml/2011/main" val="0"/>
-            </a:ext>
-          </a:extLst>
-        </p:spPr>
-        <p:txBody>
-          <a:bodyPr/>
-          <a:lstStyle>
-            <a:lvl1pPr>
-              <a:defRPr sz="1000">
-                <a:solidFill>
-                  <a:srgbClr val="7D8AA0"/>
-                </a:solidFill>
-                <a:latin typeface="Calibri"/>
-                <a:ea typeface="Calibri"/>
-                <a:cs typeface="Calibri"/>
-              </a:defRPr>
-            </a:lvl1pPr>
-          </a:lstStyle>
-          <a:p>
-            <a:pPr algn="r"/>
-            <a:fld id="{F7021451-1387-4CA6-816F-3879F97B5CBC}" type="slidenum">
-              <a:rPr b="0" lang="en-US"/>
-              <a:t>20</a:t>
-            </a:fld>
-            <a:endParaRPr lang="en-US"/>
-          </a:p>
-        </p:txBody>
-      </p:sp>
-    </p:spTree>
-  </p:cSld>
-  <p:clrMapOvr>
-    <a:masterClrMapping/>
-  </p:clrMapOvr>
-</p:sld>
-</file>
-
-<file path=ppt/slides/slide21.xml><?xml version="1.0" encoding="utf-8"?>
-<p:sld xmlns:a="http://schemas.openxmlformats.org/drawingml/2006/main" xmlns:r="http://schemas.openxmlformats.org/officeDocument/2006/relationships" xmlns:p="http://schemas.openxmlformats.org/presentationml/2006/main">
-  <p:cSld name="Slide 21">
-    <p:spTree>
-      <p:nvGrpSpPr>
-        <p:cNvPr id="1" name=""/>
-        <p:cNvGrpSpPr/>
-        <p:nvPr/>
-      </p:nvGrpSpPr>
-      <p:grpSpPr>
-        <a:xfrm>
-          <a:off x="0" y="0"/>
-          <a:ext cx="0" cy="0"/>
-          <a:chOff x="0" y="0"/>
-          <a:chExt cx="0" cy="0"/>
-        </a:xfrm>
-      </p:grpSpPr>
-      <p:sp>
-        <p:nvSpPr>
-          <p:cNvPr id="2" name="Text 1"/>
-          <p:cNvSpPr/>
-          <p:nvPr>
-            <p:ph idx="101" type="body" hasCustomPrompt="1"/>
-          </p:nvPr>
-        </p:nvSpPr>
-        <p:spPr>
-          <a:xfrm>
-            <a:off x="640080" y="402336"/>
-            <a:ext cx="10911535" cy="256032"/>
-          </a:xfrm>
-          <a:prstGeom prst="rect">
-            <a:avLst/>
-          </a:prstGeom>
-          <a:noFill/>
-          <a:ln/>
-        </p:spPr>
-        <p:txBody>
-          <a:bodyPr wrap="square" lIns="0" tIns="0" rIns="0" bIns="0" rtlCol="0" anchor="t"/>
-          <a:lstStyle/>
-          <a:p>
-            <a:pPr algn="l" indent="0" marL="0">
-              <a:buNone/>
-            </a:pPr>
-            <a:r>
-              <a:rPr lang="en-US" sz="1050" b="1" spc="180" kern="0" dirty="0">
-                <a:solidFill>
-                  <a:srgbClr val="9AA6B6"/>
-                </a:solidFill>
-                <a:latin typeface="Calibri" pitchFamily="34" charset="0"/>
-                <a:ea typeface="Calibri" pitchFamily="34" charset="-122"/>
-                <a:cs typeface="Calibri" pitchFamily="34" charset="-120"/>
-              </a:rPr>
-              <a:t>SHTOJCË</a:t>
-            </a:r>
-            <a:endParaRPr lang="en-US" sz="1050" dirty="0"/>
-          </a:p>
-        </p:txBody>
-      </p:sp>
-      <p:sp>
-        <p:nvSpPr>
-          <p:cNvPr id="3" name="Text 1"/>
-          <p:cNvSpPr/>
-          <p:nvPr>
-            <p:ph idx="102" type="title" hasCustomPrompt="1"/>
-          </p:nvPr>
-        </p:nvSpPr>
-        <p:spPr>
-          <a:xfrm>
-            <a:off x="640080" y="676656"/>
-            <a:ext cx="10911535" cy="868680"/>
-          </a:xfrm>
-          <a:prstGeom prst="rect">
-            <a:avLst/>
-          </a:prstGeom>
-          <a:noFill/>
-          <a:ln/>
-        </p:spPr>
-        <p:txBody>
-          <a:bodyPr wrap="square" lIns="0" tIns="0" rIns="0" bIns="0" rtlCol="0" anchor="t"/>
-          <a:lstStyle/>
-          <a:p>
-            <a:pPr algn="l" indent="0" marL="0">
-              <a:buNone/>
-            </a:pPr>
-            <a:r>
-              <a:rPr lang="en-US" sz="2700" dirty="0">
-                <a:solidFill>
-                  <a:srgbClr val="E8ECF2"/>
-                </a:solidFill>
-                <a:latin typeface="Century Schoolbook" pitchFamily="34" charset="0"/>
-                <a:ea typeface="Century Schoolbook" pitchFamily="34" charset="-122"/>
-                <a:cs typeface="Century Schoolbook" pitchFamily="34" charset="-120"/>
-              </a:rPr>
-              <a:t>Krahasimi i buxheteve, i plotë</a:t>
-            </a:r>
-            <a:endParaRPr lang="en-US" sz="2700" dirty="0"/>
-          </a:p>
-        </p:txBody>
-      </p:sp>
       <p:graphicFrame>
         <p:nvGraphicFramePr>
-          <p:cNvPr id="22" name="Table 0"/>
+          <p:cNvPr id="21" name="Table 0"/>
           <p:cNvGraphicFramePr>
             <a:graphicFrameLocks noGrp="1"/>
           </p:cNvGraphicFramePr>
@@ -27066,9 +26358,721 @@
             <a:pPr algn="r"/>
             <a:fld id="{F7021451-1387-4CA6-816F-3879F97B5CBC}" type="slidenum">
               <a:rPr b="0" lang="en-US"/>
-              <a:t>21</a:t>
+              <a:t>20</a:t>
             </a:fld>
             <a:endParaRPr lang="en-US"/>
+          </a:p>
+        </p:txBody>
+      </p:sp>
+    </p:spTree>
+  </p:cSld>
+  <p:clrMapOvr>
+    <a:masterClrMapping/>
+  </p:clrMapOvr>
+</p:sld>
+</file>
+
+<file path=ppt/slides/slide21.xml><?xml version="1.0" encoding="utf-8"?>
+<p:sld xmlns:a="http://schemas.openxmlformats.org/drawingml/2006/main" xmlns:r="http://schemas.openxmlformats.org/officeDocument/2006/relationships" xmlns:p="http://schemas.openxmlformats.org/presentationml/2006/main">
+  <p:cSld name="Slide 21">
+    <p:spTree>
+      <p:nvGrpSpPr>
+        <p:cNvPr id="1" name=""/>
+        <p:cNvGrpSpPr/>
+        <p:nvPr/>
+      </p:nvGrpSpPr>
+      <p:grpSpPr>
+        <a:xfrm>
+          <a:off x="0" y="0"/>
+          <a:ext cx="0" cy="0"/>
+          <a:chOff x="0" y="0"/>
+          <a:chExt cx="0" cy="0"/>
+        </a:xfrm>
+      </p:grpSpPr>
+      <p:pic>
+        <p:nvPicPr>
+          <p:cNvPr id="2" name="Image 0" descr="Universiteti i Prishtinës">    </p:cNvPr>
+          <p:cNvPicPr>
+            <a:picLocks noChangeAspect="1"/>
+          </p:cNvPicPr>
+          <p:nvPr/>
+        </p:nvPicPr>
+        <p:blipFill>
+          <a:blip r:embed="rId1"/>
+          <a:stretch>
+            <a:fillRect/>
+          </a:stretch>
+        </p:blipFill>
+        <p:spPr>
+          <a:xfrm>
+            <a:off x="640080" y="274320"/>
+            <a:ext cx="713232" cy="713232"/>
+          </a:xfrm>
+          <a:prstGeom prst="rect">
+            <a:avLst/>
+          </a:prstGeom>
+        </p:spPr>
+      </p:pic>
+      <p:sp>
+        <p:nvSpPr>
+          <p:cNvPr id="3" name="Text 0"/>
+          <p:cNvSpPr txBox="1"/>
+          <p:nvPr/>
+        </p:nvSpPr>
+        <p:spPr>
+          <a:xfrm>
+            <a:off x="640080" y="1143000"/>
+            <a:ext cx="5943600" cy="777240"/>
+          </a:xfrm>
+          <a:prstGeom prst="rect">
+            <a:avLst/>
+          </a:prstGeom>
+          <a:noFill/>
+          <a:ln/>
+        </p:spPr>
+        <p:txBody>
+          <a:bodyPr wrap="square" lIns="0" tIns="0" rIns="0" bIns="0" rtlCol="0" anchor="t"/>
+          <a:lstStyle/>
+          <a:p>
+            <a:pPr indent="0" marL="0">
+              <a:buNone/>
+            </a:pPr>
+            <a:r>
+              <a:rPr lang="en-US" sz="4400" dirty="0">
+                <a:solidFill>
+                  <a:srgbClr val="FFFFFF"/>
+                </a:solidFill>
+                <a:latin typeface="Century Schoolbook" pitchFamily="34" charset="0"/>
+                <a:ea typeface="Century Schoolbook" pitchFamily="34" charset="-122"/>
+                <a:cs typeface="Century Schoolbook" pitchFamily="34" charset="-120"/>
+              </a:rPr>
+              <a:t>Faleminderit</a:t>
+            </a:r>
+            <a:endParaRPr lang="en-US" sz="4400" dirty="0"/>
+          </a:p>
+        </p:txBody>
+      </p:sp>
+      <p:sp>
+        <p:nvSpPr>
+          <p:cNvPr id="4" name="Text 1"/>
+          <p:cNvSpPr txBox="1"/>
+          <p:nvPr/>
+        </p:nvSpPr>
+        <p:spPr>
+          <a:xfrm>
+            <a:off x="640080" y="1901952"/>
+            <a:ext cx="5943600" cy="548640"/>
+          </a:xfrm>
+          <a:prstGeom prst="rect">
+            <a:avLst/>
+          </a:prstGeom>
+          <a:noFill/>
+          <a:ln/>
+        </p:spPr>
+        <p:txBody>
+          <a:bodyPr wrap="square" lIns="0" tIns="0" rIns="0" bIns="0" rtlCol="0" anchor="t"/>
+          <a:lstStyle/>
+          <a:p>
+            <a:pPr indent="0" marL="0">
+              <a:buNone/>
+            </a:pPr>
+            <a:r>
+              <a:rPr lang="en-US" sz="2800" dirty="0">
+                <a:solidFill>
+                  <a:srgbClr val="3DDC97"/>
+                </a:solidFill>
+                <a:latin typeface="Century Schoolbook" pitchFamily="34" charset="0"/>
+                <a:ea typeface="Century Schoolbook" pitchFamily="34" charset="-122"/>
+                <a:cs typeface="Century Schoolbook" pitchFamily="34" charset="-120"/>
+              </a:rPr>
+              <a:t>Pyetje</a:t>
+            </a:r>
+            <a:endParaRPr lang="en-US" sz="2800" dirty="0"/>
+          </a:p>
+        </p:txBody>
+      </p:sp>
+      <p:sp>
+        <p:nvSpPr>
+          <p:cNvPr id="5" name="Text 2"/>
+          <p:cNvSpPr txBox="1"/>
+          <p:nvPr/>
+        </p:nvSpPr>
+        <p:spPr>
+          <a:xfrm>
+            <a:off x="640080" y="2743200"/>
+            <a:ext cx="5943600" cy="237744"/>
+          </a:xfrm>
+          <a:prstGeom prst="rect">
+            <a:avLst/>
+          </a:prstGeom>
+          <a:noFill/>
+          <a:ln/>
+        </p:spPr>
+        <p:txBody>
+          <a:bodyPr wrap="square" lIns="0" tIns="0" rIns="0" bIns="0" rtlCol="0" anchor="t"/>
+          <a:lstStyle/>
+          <a:p>
+            <a:pPr indent="0" marL="0">
+              <a:buNone/>
+            </a:pPr>
+            <a:r>
+              <a:rPr lang="en-US" sz="1050" b="1" spc="160" kern="0" dirty="0">
+                <a:solidFill>
+                  <a:srgbClr val="9AA6B6"/>
+                </a:solidFill>
+                <a:latin typeface="Calibri" pitchFamily="34" charset="0"/>
+                <a:ea typeface="Calibri" pitchFamily="34" charset="-122"/>
+                <a:cs typeface="Calibri" pitchFamily="34" charset="-120"/>
+              </a:rPr>
+              <a:t>SHIFRA PËR DISKUTIMIN</a:t>
+            </a:r>
+            <a:endParaRPr lang="en-US" sz="1050" dirty="0"/>
+          </a:p>
+        </p:txBody>
+      </p:sp>
+      <p:sp>
+        <p:nvSpPr>
+          <p:cNvPr id="6" name="Text 3"/>
+          <p:cNvSpPr txBox="1"/>
+          <p:nvPr/>
+        </p:nvSpPr>
+        <p:spPr>
+          <a:xfrm>
+            <a:off x="640080" y="3090672"/>
+            <a:ext cx="2926080" cy="365760"/>
+          </a:xfrm>
+          <a:prstGeom prst="rect">
+            <a:avLst/>
+          </a:prstGeom>
+          <a:noFill/>
+          <a:ln/>
+        </p:spPr>
+        <p:txBody>
+          <a:bodyPr wrap="square" lIns="0" tIns="0" rIns="0" bIns="0" rtlCol="0" anchor="t"/>
+          <a:lstStyle/>
+          <a:p>
+            <a:pPr indent="0" marL="0">
+              <a:buNone/>
+            </a:pPr>
+            <a:r>
+              <a:rPr lang="en-US" sz="1900" dirty="0">
+                <a:solidFill>
+                  <a:srgbClr val="FFFFFF"/>
+                </a:solidFill>
+                <a:latin typeface="Century Schoolbook" pitchFamily="34" charset="0"/>
+                <a:ea typeface="Century Schoolbook" pitchFamily="34" charset="-122"/>
+                <a:cs typeface="Century Schoolbook" pitchFamily="34" charset="-120"/>
+              </a:rPr>
+              <a:t>5 nga 10</a:t>
+            </a:r>
+            <a:endParaRPr lang="en-US" sz="1900" dirty="0"/>
+          </a:p>
+        </p:txBody>
+      </p:sp>
+      <p:sp>
+        <p:nvSpPr>
+          <p:cNvPr id="7" name="Text 4"/>
+          <p:cNvSpPr txBox="1"/>
+          <p:nvPr/>
+        </p:nvSpPr>
+        <p:spPr>
+          <a:xfrm>
+            <a:off x="640080" y="3438144"/>
+            <a:ext cx="2834640" cy="420624"/>
+          </a:xfrm>
+          <a:prstGeom prst="rect">
+            <a:avLst/>
+          </a:prstGeom>
+          <a:noFill/>
+          <a:ln/>
+        </p:spPr>
+        <p:txBody>
+          <a:bodyPr wrap="square" lIns="0" tIns="0" rIns="0" bIns="0" rtlCol="0" anchor="t"/>
+          <a:lstStyle/>
+          <a:p>
+            <a:pPr indent="0" marL="0">
+              <a:buNone/>
+            </a:pPr>
+            <a:r>
+              <a:rPr lang="en-US" sz="1050" dirty="0">
+                <a:solidFill>
+                  <a:srgbClr val="9AA6B6"/>
+                </a:solidFill>
+                <a:latin typeface="Calibri" pitchFamily="34" charset="0"/>
+                <a:ea typeface="Calibri" pitchFamily="34" charset="-122"/>
+                <a:cs typeface="Calibri" pitchFamily="34" charset="-120"/>
+              </a:rPr>
+              <a:t>rreshta që seed-at i vendosin</a:t>
+            </a:r>
+            <a:endParaRPr lang="en-US" sz="1050" dirty="0"/>
+          </a:p>
+        </p:txBody>
+      </p:sp>
+      <p:sp>
+        <p:nvSpPr>
+          <p:cNvPr id="8" name="Text 5"/>
+          <p:cNvSpPr txBox="1"/>
+          <p:nvPr/>
+        </p:nvSpPr>
+        <p:spPr>
+          <a:xfrm>
+            <a:off x="3703320" y="3090672"/>
+            <a:ext cx="2926080" cy="365760"/>
+          </a:xfrm>
+          <a:prstGeom prst="rect">
+            <a:avLst/>
+          </a:prstGeom>
+          <a:noFill/>
+          <a:ln/>
+        </p:spPr>
+        <p:txBody>
+          <a:bodyPr wrap="square" lIns="0" tIns="0" rIns="0" bIns="0" rtlCol="0" anchor="t"/>
+          <a:lstStyle/>
+          <a:p>
+            <a:pPr indent="0" marL="0">
+              <a:buNone/>
+            </a:pPr>
+            <a:r>
+              <a:rPr lang="en-US" sz="1900" dirty="0">
+                <a:solidFill>
+                  <a:srgbClr val="FFFFFF"/>
+                </a:solidFill>
+                <a:latin typeface="Century Schoolbook" pitchFamily="34" charset="0"/>
+                <a:ea typeface="Century Schoolbook" pitchFamily="34" charset="-122"/>
+                <a:cs typeface="Century Schoolbook" pitchFamily="34" charset="-120"/>
+              </a:rPr>
+              <a:t>15.9×</a:t>
+            </a:r>
+            <a:endParaRPr lang="en-US" sz="1900" dirty="0"/>
+          </a:p>
+        </p:txBody>
+      </p:sp>
+      <p:sp>
+        <p:nvSpPr>
+          <p:cNvPr id="9" name="Text 6"/>
+          <p:cNvSpPr txBox="1"/>
+          <p:nvPr/>
+        </p:nvSpPr>
+        <p:spPr>
+          <a:xfrm>
+            <a:off x="3703320" y="3438144"/>
+            <a:ext cx="2834640" cy="420624"/>
+          </a:xfrm>
+          <a:prstGeom prst="rect">
+            <a:avLst/>
+          </a:prstGeom>
+          <a:noFill/>
+          <a:ln/>
+        </p:spPr>
+        <p:txBody>
+          <a:bodyPr wrap="square" lIns="0" tIns="0" rIns="0" bIns="0" rtlCol="0" anchor="t"/>
+          <a:lstStyle/>
+          <a:p>
+            <a:pPr indent="0" marL="0">
+              <a:buNone/>
+            </a:pPr>
+            <a:r>
+              <a:rPr lang="en-US" sz="1050" dirty="0">
+                <a:solidFill>
+                  <a:srgbClr val="9AA6B6"/>
+                </a:solidFill>
+                <a:latin typeface="Calibri" pitchFamily="34" charset="0"/>
+                <a:ea typeface="Calibri" pitchFamily="34" charset="-122"/>
+                <a:cs typeface="Calibri" pitchFamily="34" charset="-120"/>
+              </a:rPr>
+              <a:t>ndërtimi kundër rimostrimit të kontrollit; variantet e kërkimit 0.4–2.0×</a:t>
+            </a:r>
+            <a:endParaRPr lang="en-US" sz="1050" dirty="0"/>
+          </a:p>
+        </p:txBody>
+      </p:sp>
+      <p:sp>
+        <p:nvSpPr>
+          <p:cNvPr id="10" name="Text 7"/>
+          <p:cNvSpPr txBox="1"/>
+          <p:nvPr/>
+        </p:nvSpPr>
+        <p:spPr>
+          <a:xfrm>
+            <a:off x="640080" y="3931920"/>
+            <a:ext cx="2926080" cy="365760"/>
+          </a:xfrm>
+          <a:prstGeom prst="rect">
+            <a:avLst/>
+          </a:prstGeom>
+          <a:noFill/>
+          <a:ln/>
+        </p:spPr>
+        <p:txBody>
+          <a:bodyPr wrap="square" lIns="0" tIns="0" rIns="0" bIns="0" rtlCol="0" anchor="t"/>
+          <a:lstStyle/>
+          <a:p>
+            <a:pPr indent="0" marL="0">
+              <a:buNone/>
+            </a:pPr>
+            <a:r>
+              <a:rPr lang="en-US" sz="1900" dirty="0">
+                <a:solidFill>
+                  <a:srgbClr val="FFFFFF"/>
+                </a:solidFill>
+                <a:latin typeface="Century Schoolbook" pitchFamily="34" charset="0"/>
+                <a:ea typeface="Century Schoolbook" pitchFamily="34" charset="-122"/>
+                <a:cs typeface="Century Schoolbook" pitchFamily="34" charset="-120"/>
+              </a:rPr>
+              <a:t>21,519 HV</a:t>
+            </a:r>
+            <a:endParaRPr lang="en-US" sz="1900" dirty="0"/>
+          </a:p>
+        </p:txBody>
+      </p:sp>
+      <p:sp>
+        <p:nvSpPr>
+          <p:cNvPr id="11" name="Text 8"/>
+          <p:cNvSpPr txBox="1"/>
+          <p:nvPr/>
+        </p:nvSpPr>
+        <p:spPr>
+          <a:xfrm>
+            <a:off x="640080" y="4279392"/>
+            <a:ext cx="2834640" cy="420624"/>
+          </a:xfrm>
+          <a:prstGeom prst="rect">
+            <a:avLst/>
+          </a:prstGeom>
+          <a:noFill/>
+          <a:ln/>
+        </p:spPr>
+        <p:txBody>
+          <a:bodyPr wrap="square" lIns="0" tIns="0" rIns="0" bIns="0" rtlCol="0" anchor="t"/>
+          <a:lstStyle/>
+          <a:p>
+            <a:pPr indent="0" marL="0">
+              <a:buNone/>
+            </a:pPr>
+            <a:r>
+              <a:rPr lang="en-US" sz="1050" dirty="0">
+                <a:solidFill>
+                  <a:srgbClr val="9AA6B6"/>
+                </a:solidFill>
+                <a:latin typeface="Calibri" pitchFamily="34" charset="0"/>
+                <a:ea typeface="Calibri" pitchFamily="34" charset="-122"/>
+                <a:cs typeface="Calibri" pitchFamily="34" charset="-120"/>
+              </a:rPr>
+              <a:t>zhvendosja mes sesioneve e totalit të dhjetë instancave (p ≈ 0.05)</a:t>
+            </a:r>
+            <a:endParaRPr lang="en-US" sz="1050" dirty="0"/>
+          </a:p>
+        </p:txBody>
+      </p:sp>
+      <p:sp>
+        <p:nvSpPr>
+          <p:cNvPr id="12" name="Text 9"/>
+          <p:cNvSpPr txBox="1"/>
+          <p:nvPr/>
+        </p:nvSpPr>
+        <p:spPr>
+          <a:xfrm>
+            <a:off x="3703320" y="3931920"/>
+            <a:ext cx="2926080" cy="365760"/>
+          </a:xfrm>
+          <a:prstGeom prst="rect">
+            <a:avLst/>
+          </a:prstGeom>
+          <a:noFill/>
+          <a:ln/>
+        </p:spPr>
+        <p:txBody>
+          <a:bodyPr wrap="square" lIns="0" tIns="0" rIns="0" bIns="0" rtlCol="0" anchor="t"/>
+          <a:lstStyle/>
+          <a:p>
+            <a:pPr indent="0" marL="0">
+              <a:buNone/>
+            </a:pPr>
+            <a:r>
+              <a:rPr lang="en-US" sz="1900" dirty="0">
+                <a:solidFill>
+                  <a:srgbClr val="FFFFFF"/>
+                </a:solidFill>
+                <a:latin typeface="Century Schoolbook" pitchFamily="34" charset="0"/>
+                <a:ea typeface="Century Schoolbook" pitchFamily="34" charset="-122"/>
+                <a:cs typeface="Century Schoolbook" pitchFamily="34" charset="-120"/>
+              </a:rPr>
+              <a:t>0.23%</a:t>
+            </a:r>
+            <a:endParaRPr lang="en-US" sz="1900" dirty="0"/>
+          </a:p>
+        </p:txBody>
+      </p:sp>
+      <p:sp>
+        <p:nvSpPr>
+          <p:cNvPr id="13" name="Text 10"/>
+          <p:cNvSpPr txBox="1"/>
+          <p:nvPr/>
+        </p:nvSpPr>
+        <p:spPr>
+          <a:xfrm>
+            <a:off x="3703320" y="4279392"/>
+            <a:ext cx="2834640" cy="420624"/>
+          </a:xfrm>
+          <a:prstGeom prst="rect">
+            <a:avLst/>
+          </a:prstGeom>
+          <a:noFill/>
+          <a:ln/>
+        </p:spPr>
+        <p:txBody>
+          <a:bodyPr wrap="square" lIns="0" tIns="0" rIns="0" bIns="0" rtlCol="0" anchor="t"/>
+          <a:lstStyle/>
+          <a:p>
+            <a:pPr indent="0" marL="0">
+              <a:buNone/>
+            </a:pPr>
+            <a:r>
+              <a:rPr lang="en-US" sz="1050" dirty="0">
+                <a:solidFill>
+                  <a:srgbClr val="9AA6B6"/>
+                </a:solidFill>
+                <a:latin typeface="Calibri" pitchFamily="34" charset="0"/>
+                <a:ea typeface="Calibri" pitchFamily="34" charset="-122"/>
+                <a:cs typeface="Calibri" pitchFamily="34" charset="-120"/>
+              </a:rPr>
+              <a:t>shkalla më e lartë e pranimit e matur kudo</a:t>
+            </a:r>
+            <a:endParaRPr lang="en-US" sz="1050" dirty="0"/>
+          </a:p>
+        </p:txBody>
+      </p:sp>
+      <p:sp>
+        <p:nvSpPr>
+          <p:cNvPr id="14" name="Text 11"/>
+          <p:cNvSpPr txBox="1"/>
+          <p:nvPr/>
+        </p:nvSpPr>
+        <p:spPr>
+          <a:xfrm>
+            <a:off x="640080" y="4773168"/>
+            <a:ext cx="2926080" cy="365760"/>
+          </a:xfrm>
+          <a:prstGeom prst="rect">
+            <a:avLst/>
+          </a:prstGeom>
+          <a:noFill/>
+          <a:ln/>
+        </p:spPr>
+        <p:txBody>
+          <a:bodyPr wrap="square" lIns="0" tIns="0" rIns="0" bIns="0" rtlCol="0" anchor="t"/>
+          <a:lstStyle/>
+          <a:p>
+            <a:pPr indent="0" marL="0">
+              <a:buNone/>
+            </a:pPr>
+            <a:r>
+              <a:rPr lang="en-US" sz="1900" dirty="0">
+                <a:solidFill>
+                  <a:srgbClr val="FFFFFF"/>
+                </a:solidFill>
+                <a:latin typeface="Century Schoolbook" pitchFamily="34" charset="0"/>
+                <a:ea typeface="Century Schoolbook" pitchFamily="34" charset="-122"/>
+                <a:cs typeface="Century Schoolbook" pitchFamily="34" charset="-120"/>
+              </a:rPr>
+              <a:t>+33,043 HV</a:t>
+            </a:r>
+            <a:endParaRPr lang="en-US" sz="1900" dirty="0"/>
+          </a:p>
+        </p:txBody>
+      </p:sp>
+      <p:sp>
+        <p:nvSpPr>
+          <p:cNvPr id="15" name="Text 12"/>
+          <p:cNvSpPr txBox="1"/>
+          <p:nvPr/>
+        </p:nvSpPr>
+        <p:spPr>
+          <a:xfrm>
+            <a:off x="640080" y="5120640"/>
+            <a:ext cx="2834640" cy="420624"/>
+          </a:xfrm>
+          <a:prstGeom prst="rect">
+            <a:avLst/>
+          </a:prstGeom>
+          <a:noFill/>
+          <a:ln/>
+        </p:spPr>
+        <p:txBody>
+          <a:bodyPr wrap="square" lIns="0" tIns="0" rIns="0" bIns="0" rtlCol="0" anchor="t"/>
+          <a:lstStyle/>
+          <a:p>
+            <a:pPr indent="0" marL="0">
+              <a:buNone/>
+            </a:pPr>
+            <a:r>
+              <a:rPr lang="en-US" sz="1050" dirty="0">
+                <a:solidFill>
+                  <a:srgbClr val="9AA6B6"/>
+                </a:solidFill>
+                <a:latin typeface="Calibri" pitchFamily="34" charset="0"/>
+                <a:ea typeface="Calibri" pitchFamily="34" charset="-122"/>
+                <a:cs typeface="Calibri" pitchFamily="34" charset="-120"/>
+              </a:rPr>
+              <a:t>çfarë i blen kërkimit dhjetëfishi i buxhetit, kundër një epërsie ≥ 269,607</a:t>
+            </a:r>
+            <a:endParaRPr lang="en-US" sz="1050" dirty="0"/>
+          </a:p>
+        </p:txBody>
+      </p:sp>
+      <p:sp>
+        <p:nvSpPr>
+          <p:cNvPr id="16" name="Text 13"/>
+          <p:cNvSpPr txBox="1"/>
+          <p:nvPr/>
+        </p:nvSpPr>
+        <p:spPr>
+          <a:xfrm>
+            <a:off x="3703320" y="4773168"/>
+            <a:ext cx="2926080" cy="365760"/>
+          </a:xfrm>
+          <a:prstGeom prst="rect">
+            <a:avLst/>
+          </a:prstGeom>
+          <a:noFill/>
+          <a:ln/>
+        </p:spPr>
+        <p:txBody>
+          <a:bodyPr wrap="square" lIns="0" tIns="0" rIns="0" bIns="0" rtlCol="0" anchor="t"/>
+          <a:lstStyle/>
+          <a:p>
+            <a:pPr indent="0" marL="0">
+              <a:buNone/>
+            </a:pPr>
+            <a:r>
+              <a:rPr lang="en-US" sz="1900" dirty="0">
+                <a:solidFill>
+                  <a:srgbClr val="FFFFFF"/>
+                </a:solidFill>
+                <a:latin typeface="Century Schoolbook" pitchFamily="34" charset="0"/>
+                <a:ea typeface="Century Schoolbook" pitchFamily="34" charset="-122"/>
+                <a:cs typeface="Century Schoolbook" pitchFamily="34" charset="-120"/>
+              </a:rPr>
+              <a:t>0.63%</a:t>
+            </a:r>
+            <a:endParaRPr lang="en-US" sz="1900" dirty="0"/>
+          </a:p>
+        </p:txBody>
+      </p:sp>
+      <p:sp>
+        <p:nvSpPr>
+          <p:cNvPr id="17" name="Text 14"/>
+          <p:cNvSpPr txBox="1"/>
+          <p:nvPr/>
+        </p:nvSpPr>
+        <p:spPr>
+          <a:xfrm>
+            <a:off x="3703320" y="5120640"/>
+            <a:ext cx="2834640" cy="420624"/>
+          </a:xfrm>
+          <a:prstGeom prst="rect">
+            <a:avLst/>
+          </a:prstGeom>
+          <a:noFill/>
+          <a:ln/>
+        </p:spPr>
+        <p:txBody>
+          <a:bodyPr wrap="square" lIns="0" tIns="0" rIns="0" bIns="0" rtlCol="0" anchor="t"/>
+          <a:lstStyle/>
+          <a:p>
+            <a:pPr indent="0" marL="0">
+              <a:buNone/>
+            </a:pPr>
+            <a:r>
+              <a:rPr lang="en-US" sz="1050" dirty="0">
+                <a:solidFill>
+                  <a:srgbClr val="9AA6B6"/>
+                </a:solidFill>
+                <a:latin typeface="Calibri" pitchFamily="34" charset="0"/>
+                <a:ea typeface="Calibri" pitchFamily="34" charset="-122"/>
+                <a:cs typeface="Calibri" pitchFamily="34" charset="-120"/>
+              </a:rPr>
+              <a:t>rezultati më i mirë i njohur në small-graph, nën një tavan të vërtetueshëm</a:t>
+            </a:r>
+            <a:endParaRPr lang="en-US" sz="1050" dirty="0"/>
+          </a:p>
+        </p:txBody>
+      </p:sp>
+      <p:sp>
+        <p:nvSpPr>
+          <p:cNvPr id="18" name="Text 15"/>
+          <p:cNvSpPr txBox="1"/>
+          <p:nvPr/>
+        </p:nvSpPr>
+        <p:spPr>
+          <a:xfrm>
+            <a:off x="640080" y="5833872"/>
+            <a:ext cx="6858000" cy="274320"/>
+          </a:xfrm>
+          <a:prstGeom prst="rect">
+            <a:avLst/>
+          </a:prstGeom>
+          <a:noFill/>
+          <a:ln/>
+        </p:spPr>
+        <p:txBody>
+          <a:bodyPr wrap="square" lIns="0" tIns="0" rIns="0" bIns="0" rtlCol="0" anchor="t"/>
+          <a:lstStyle/>
+          <a:p>
+            <a:pPr indent="0" marL="0">
+              <a:buNone/>
+            </a:pPr>
+            <a:r>
+              <a:rPr lang="en-US" sz="1300" dirty="0">
+                <a:solidFill>
+                  <a:srgbClr val="E8ECF2"/>
+                </a:solidFill>
+                <a:latin typeface="Calibri" pitchFamily="34" charset="0"/>
+                <a:ea typeface="Calibri" pitchFamily="34" charset="-122"/>
+                <a:cs typeface="Calibri" pitchFamily="34" charset="-120"/>
+              </a:rPr>
+              <a:t>Adrian Ymeri · adrian.ymeri@uni-pr.edu · Universiteti i Prishtinës</a:t>
+            </a:r>
+            <a:endParaRPr lang="en-US" sz="1300" dirty="0"/>
+          </a:p>
+        </p:txBody>
+      </p:sp>
+      <p:sp>
+        <p:nvSpPr>
+          <p:cNvPr id="19" name="Text 16"/>
+          <p:cNvSpPr txBox="1"/>
+          <p:nvPr/>
+        </p:nvSpPr>
+        <p:spPr>
+          <a:xfrm>
+            <a:off x="640080" y="6163056"/>
+            <a:ext cx="6858000" cy="237744"/>
+          </a:xfrm>
+          <a:prstGeom prst="rect">
+            <a:avLst/>
+          </a:prstGeom>
+          <a:noFill/>
+          <a:ln/>
+        </p:spPr>
+        <p:txBody>
+          <a:bodyPr wrap="square" lIns="0" tIns="0" rIns="0" bIns="0" rtlCol="0" anchor="t"/>
+          <a:lstStyle/>
+          <a:p>
+            <a:pPr indent="0" marL="0">
+              <a:buNone/>
+            </a:pPr>
+            <a:r>
+              <a:rPr lang="en-US" sz="1050" dirty="0">
+                <a:solidFill>
+                  <a:srgbClr val="7D8AA0"/>
+                </a:solidFill>
+                <a:latin typeface="Calibri" pitchFamily="34" charset="0"/>
+                <a:ea typeface="Calibri" pitchFamily="34" charset="-122"/>
+                <a:cs typeface="Calibri" pitchFamily="34" charset="-120"/>
+              </a:rPr>
+              <a:t>Kodi, CSV-të e papërpunuara dhe çdo figurë në këtë kumtesë rigjenerohen nga harness-i i studimit.</a:t>
+            </a:r>
+            <a:endParaRPr lang="en-US" sz="1050" dirty="0"/>
           </a:p>
         </p:txBody>
       </p:sp>
